--- a/0_wbs/도서검색웹_SB_2026_0805.pptx
+++ b/0_wbs/도서검색웹_SB_2026_0805.pptx
@@ -1189,7 +1189,19 @@
             </a:pPr>
             <a:r>
               <a:rPr lang="en-US" altLang="ko-KR" sz="600" dirty="0"/>
-              <a:t>Copyright © 2018 FREEMOA Co., ltd. All rights reserved.</a:t>
+              <a:t>Copyright © 2026</a:t>
+            </a:r>
+            <a:r>
+              <a:rPr lang="ko-KR" altLang="en-US" sz="600" dirty="0"/>
+              <a:t> </a:t>
+            </a:r>
+            <a:r>
+              <a:rPr lang="en-US" altLang="ko-KR" sz="600" dirty="0" err="1"/>
+              <a:t>GreenComputer</a:t>
+            </a:r>
+            <a:r>
+              <a:rPr lang="en-US" altLang="ko-KR" sz="600" dirty="0"/>
+              <a:t>, ltd. All rights reserved.</a:t>
             </a:r>
           </a:p>
         </p:txBody>
@@ -2423,7 +2435,15 @@
             </a:pPr>
             <a:r>
               <a:rPr lang="en-US" altLang="ko-KR" sz="600" dirty="0"/>
-              <a:t>Copyright © 2018 FREEMOA Co., ltd. All rights reserved.</a:t>
+              <a:t>Copyright © </a:t>
+            </a:r>
+            <a:r>
+              <a:rPr lang="en-US" altLang="ko-KR" sz="600" dirty="0" err="1"/>
+              <a:t>GreenComputer</a:t>
+            </a:r>
+            <a:r>
+              <a:rPr lang="en-US" altLang="ko-KR" sz="600" dirty="0"/>
+              <a:t>, ltd. All rights reserved.</a:t>
             </a:r>
           </a:p>
         </p:txBody>
@@ -4227,7 +4247,7 @@
           <p:nvPr userDrawn="1">
             <p:extLst>
               <p:ext uri="{D42A27DB-BD31-4B8C-83A1-F6EECF244321}">
-                <p14:modId xmlns:p14="http://schemas.microsoft.com/office/powerpoint/2010/main" val="2376527114"/>
+                <p14:modId xmlns:p14="http://schemas.microsoft.com/office/powerpoint/2010/main" val="3216263855"/>
               </p:ext>
             </p:extLst>
           </p:nvPr>
@@ -4452,19 +4472,6 @@
                     <a:p>
                       <a:pPr latinLnBrk="1"/>
                       <a:r>
-                        <a:rPr lang="ko-KR" altLang="en-US" sz="600" b="0" dirty="0" err="1">
-                          <a:solidFill>
-                            <a:schemeClr val="tx1">
-                              <a:lumMod val="75000"/>
-                              <a:lumOff val="25000"/>
-                            </a:schemeClr>
-                          </a:solidFill>
-                          <a:latin typeface="나눔고딕" panose="020D0604000000000000" pitchFamily="50" charset="-127"/>
-                          <a:ea typeface="나눔고딕" panose="020D0604000000000000" pitchFamily="50" charset="-127"/>
-                        </a:rPr>
-                        <a:t>프리모아</a:t>
-                      </a:r>
-                      <a:r>
                         <a:rPr lang="ko-KR" altLang="en-US" sz="600" b="0" dirty="0">
                           <a:solidFill>
                             <a:schemeClr val="tx1">
@@ -4475,7 +4482,7 @@
                           <a:latin typeface="나눔고딕" panose="020D0604000000000000" pitchFamily="50" charset="-127"/>
                           <a:ea typeface="나눔고딕" panose="020D0604000000000000" pitchFamily="50" charset="-127"/>
                         </a:rPr>
-                        <a:t> 기획서 양식</a:t>
+                        <a:t>도서검색 서비스 </a:t>
                       </a:r>
                     </a:p>
                   </a:txBody>
@@ -4614,7 +4621,7 @@
                     <a:p>
                       <a:pPr algn="l" latinLnBrk="1"/>
                       <a:r>
-                        <a:rPr lang="en-US" altLang="ko-KR" sz="600" b="0" dirty="0">
+                        <a:rPr lang="ko-KR" altLang="en-US" sz="600" b="0" dirty="0" err="1">
                           <a:solidFill>
                             <a:schemeClr val="tx1">
                               <a:lumMod val="75000"/>
@@ -4624,21 +4631,18 @@
                           <a:latin typeface="나눔고딕" panose="020D0604000000000000" pitchFamily="50" charset="-127"/>
                           <a:ea typeface="나눔고딕" panose="020D0604000000000000" pitchFamily="50" charset="-127"/>
                         </a:rPr>
-                        <a:t>O</a:t>
+                        <a:t>김라혜</a:t>
                       </a:r>
-                      <a:r>
-                        <a:rPr lang="ko-KR" altLang="en-US" sz="600" b="0" dirty="0">
-                          <a:solidFill>
-                            <a:schemeClr val="tx1">
-                              <a:lumMod val="75000"/>
-                              <a:lumOff val="25000"/>
-                            </a:schemeClr>
-                          </a:solidFill>
-                          <a:latin typeface="나눔고딕" panose="020D0604000000000000" pitchFamily="50" charset="-127"/>
-                          <a:ea typeface="나눔고딕" panose="020D0604000000000000" pitchFamily="50" charset="-127"/>
-                        </a:rPr>
-                        <a:t>과장</a:t>
-                      </a:r>
+                      <a:endParaRPr lang="ko-KR" altLang="en-US" sz="600" b="0" dirty="0">
+                        <a:solidFill>
+                          <a:schemeClr val="tx1">
+                            <a:lumMod val="75000"/>
+                            <a:lumOff val="25000"/>
+                          </a:schemeClr>
+                        </a:solidFill>
+                        <a:latin typeface="나눔고딕" panose="020D0604000000000000" pitchFamily="50" charset="-127"/>
+                        <a:ea typeface="나눔고딕" panose="020D0604000000000000" pitchFamily="50" charset="-127"/>
+                      </a:endParaRPr>
                     </a:p>
                   </a:txBody>
                   <a:tcPr marL="36000" marR="36000" marT="36000" marB="36000" anchor="ctr">
@@ -4932,7 +4936,7 @@
                           <a:latin typeface="나눔고딕" panose="020D0604000000000000" pitchFamily="50" charset="-127"/>
                           <a:ea typeface="나눔고딕" panose="020D0604000000000000" pitchFamily="50" charset="-127"/>
                         </a:rPr>
-                        <a:t>2020-01-01</a:t>
+                        <a:t>2026-08-18</a:t>
                       </a:r>
                     </a:p>
                   </a:txBody>
@@ -12397,14 +12401,14 @@
           <p:nvPr>
             <p:extLst>
               <p:ext uri="{D42A27DB-BD31-4B8C-83A1-F6EECF244321}">
-                <p14:modId xmlns:p14="http://schemas.microsoft.com/office/powerpoint/2010/main" val="2973992063"/>
+                <p14:modId xmlns:p14="http://schemas.microsoft.com/office/powerpoint/2010/main" val="1274650770"/>
               </p:ext>
             </p:extLst>
           </p:nvPr>
         </p:nvGraphicFramePr>
         <p:xfrm>
           <a:off x="275731" y="672900"/>
-          <a:ext cx="8592538" cy="4251061"/>
+          <a:ext cx="8592538" cy="4339268"/>
         </p:xfrm>
         <a:graphic>
           <a:graphicData uri="http://schemas.openxmlformats.org/drawingml/2006/table">
@@ -12660,6 +12664,16 @@
                         <a:defRPr/>
                       </a:pPr>
                       <a:r>
+                        <a:rPr lang="ko-KR" altLang="en-US" sz="800" dirty="0">
+                          <a:solidFill>
+                            <a:schemeClr val="tx1"/>
+                          </a:solidFill>
+                          <a:latin typeface="나눔고딕" panose="020D0604000000000000" pitchFamily="50" charset="-127"/>
+                          <a:ea typeface="나눔고딕" panose="020D0604000000000000" pitchFamily="50" charset="-127"/>
+                        </a:rPr>
+                        <a:t>교육 출판 및 도서 정보 제공 플랫폼 </a:t>
+                      </a:r>
+                      <a:r>
                         <a:rPr lang="en-US" altLang="ko-KR" sz="800" dirty="0">
                           <a:solidFill>
                             <a:schemeClr val="tx1"/>
@@ -12667,7 +12681,7 @@
                           <a:latin typeface="나눔고딕" panose="020D0604000000000000" pitchFamily="50" charset="-127"/>
                           <a:ea typeface="나눔고딕" panose="020D0604000000000000" pitchFamily="50" charset="-127"/>
                         </a:rPr>
-                        <a:t>IT </a:t>
+                        <a:t>‘</a:t>
                       </a:r>
                       <a:r>
                         <a:rPr lang="ko-KR" altLang="en-US" sz="800" dirty="0" err="1">
@@ -12677,7 +12691,7 @@
                           <a:latin typeface="나눔고딕" panose="020D0604000000000000" pitchFamily="50" charset="-127"/>
                           <a:ea typeface="나눔고딕" panose="020D0604000000000000" pitchFamily="50" charset="-127"/>
                         </a:rPr>
-                        <a:t>아웃소싱</a:t>
+                        <a:t>그린스터디북스</a:t>
                       </a:r>
                       <a:r>
                         <a:rPr lang="en-US" altLang="ko-KR" sz="800" dirty="0">
@@ -12687,7 +12701,7 @@
                           <a:latin typeface="나눔고딕" panose="020D0604000000000000" pitchFamily="50" charset="-127"/>
                           <a:ea typeface="나눔고딕" panose="020D0604000000000000" pitchFamily="50" charset="-127"/>
                         </a:rPr>
-                        <a:t>(</a:t>
+                        <a:t>＇</a:t>
                       </a:r>
                       <a:r>
                         <a:rPr lang="ko-KR" altLang="en-US" sz="800" dirty="0">
@@ -12697,27 +12711,7 @@
                           <a:latin typeface="나눔고딕" panose="020D0604000000000000" pitchFamily="50" charset="-127"/>
                           <a:ea typeface="나눔고딕" panose="020D0604000000000000" pitchFamily="50" charset="-127"/>
                         </a:rPr>
-                        <a:t>전문가 중개</a:t>
-                      </a:r>
-                      <a:r>
-                        <a:rPr lang="en-US" altLang="ko-KR" sz="800" dirty="0">
-                          <a:solidFill>
-                            <a:schemeClr val="tx1"/>
-                          </a:solidFill>
-                          <a:latin typeface="나눔고딕" panose="020D0604000000000000" pitchFamily="50" charset="-127"/>
-                          <a:ea typeface="나눔고딕" panose="020D0604000000000000" pitchFamily="50" charset="-127"/>
-                        </a:rPr>
-                        <a:t>)</a:t>
-                      </a:r>
-                      <a:r>
-                        <a:rPr lang="ko-KR" altLang="en-US" sz="800" dirty="0">
-                          <a:solidFill>
-                            <a:schemeClr val="tx1"/>
-                          </a:solidFill>
-                          <a:latin typeface="나눔고딕" panose="020D0604000000000000" pitchFamily="50" charset="-127"/>
-                          <a:ea typeface="나눔고딕" panose="020D0604000000000000" pitchFamily="50" charset="-127"/>
-                        </a:rPr>
-                        <a:t> 플랫폼</a:t>
+                        <a:t>웹사이트</a:t>
                       </a:r>
                       <a:endParaRPr lang="en-US" altLang="ko-KR" sz="800" dirty="0">
                         <a:solidFill>
@@ -12883,6 +12877,16 @@
                         <a:defRPr/>
                       </a:pPr>
                       <a:r>
+                        <a:rPr lang="ko-KR" altLang="en-US" sz="800" dirty="0">
+                          <a:solidFill>
+                            <a:schemeClr val="tx1"/>
+                          </a:solidFill>
+                          <a:latin typeface="나눔고딕" panose="020D0604000000000000" pitchFamily="50" charset="-127"/>
+                          <a:ea typeface="나눔고딕" panose="020D0604000000000000" pitchFamily="50" charset="-127"/>
+                        </a:rPr>
+                        <a:t>초</a:t>
+                      </a:r>
+                      <a:r>
                         <a:rPr lang="en-US" altLang="ko-KR" sz="800" dirty="0">
                           <a:solidFill>
                             <a:schemeClr val="tx1"/>
@@ -12890,17 +12894,7 @@
                           <a:latin typeface="나눔고딕" panose="020D0604000000000000" pitchFamily="50" charset="-127"/>
                           <a:ea typeface="나눔고딕" panose="020D0604000000000000" pitchFamily="50" charset="-127"/>
                         </a:rPr>
-                        <a:t>IT </a:t>
-                      </a:r>
-                      <a:r>
-                        <a:rPr lang="ko-KR" altLang="en-US" sz="800" dirty="0" err="1">
-                          <a:solidFill>
-                            <a:schemeClr val="tx1"/>
-                          </a:solidFill>
-                          <a:latin typeface="나눔고딕" panose="020D0604000000000000" pitchFamily="50" charset="-127"/>
-                          <a:ea typeface="나눔고딕" panose="020D0604000000000000" pitchFamily="50" charset="-127"/>
-                        </a:rPr>
-                        <a:t>아웃소싱</a:t>
+                        <a:t>/</a:t>
                       </a:r>
                       <a:r>
                         <a:rPr lang="ko-KR" altLang="en-US" sz="800" dirty="0">
@@ -12910,7 +12904,332 @@
                           <a:latin typeface="나눔고딕" panose="020D0604000000000000" pitchFamily="50" charset="-127"/>
                           <a:ea typeface="나눔고딕" panose="020D0604000000000000" pitchFamily="50" charset="-127"/>
                         </a:rPr>
-                        <a:t> 시장의 정보 비대칭을 해소하고 시장의 안전성 확보 및 강화가 필요함</a:t>
+                        <a:t>중</a:t>
+                      </a:r>
+                      <a:r>
+                        <a:rPr lang="en-US" altLang="ko-KR" sz="800" dirty="0">
+                          <a:solidFill>
+                            <a:schemeClr val="tx1"/>
+                          </a:solidFill>
+                          <a:latin typeface="나눔고딕" panose="020D0604000000000000" pitchFamily="50" charset="-127"/>
+                          <a:ea typeface="나눔고딕" panose="020D0604000000000000" pitchFamily="50" charset="-127"/>
+                        </a:rPr>
+                        <a:t>/</a:t>
+                      </a:r>
+                      <a:r>
+                        <a:rPr lang="ko-KR" altLang="en-US" sz="800" dirty="0">
+                          <a:solidFill>
+                            <a:schemeClr val="tx1"/>
+                          </a:solidFill>
+                          <a:latin typeface="나눔고딕" panose="020D0604000000000000" pitchFamily="50" charset="-127"/>
+                          <a:ea typeface="나눔고딕" panose="020D0604000000000000" pitchFamily="50" charset="-127"/>
+                        </a:rPr>
+                        <a:t>고등 교육 과정 및 단행본을 아우르는 자사 출판 도서의 효과적인 홍보와</a:t>
+                      </a:r>
+                      <a:r>
+                        <a:rPr lang="en-US" altLang="ko-KR" sz="800" dirty="0">
+                          <a:solidFill>
+                            <a:schemeClr val="tx1"/>
+                          </a:solidFill>
+                          <a:latin typeface="나눔고딕" panose="020D0604000000000000" pitchFamily="50" charset="-127"/>
+                          <a:ea typeface="나눔고딕" panose="020D0604000000000000" pitchFamily="50" charset="-127"/>
+                        </a:rPr>
+                        <a:t>, </a:t>
+                      </a:r>
+                      <a:r>
+                        <a:rPr lang="ko-KR" altLang="en-US" sz="800" dirty="0">
+                          <a:solidFill>
+                            <a:schemeClr val="tx1"/>
+                          </a:solidFill>
+                          <a:latin typeface="나눔고딕" panose="020D0604000000000000" pitchFamily="50" charset="-127"/>
+                          <a:ea typeface="나눔고딕" panose="020D0604000000000000" pitchFamily="50" charset="-127"/>
+                        </a:rPr>
+                        <a:t>학생 및 교사들의 학습</a:t>
+                      </a:r>
+                      <a:r>
+                        <a:rPr lang="en-US" altLang="ko-KR" sz="800" dirty="0">
+                          <a:solidFill>
+                            <a:schemeClr val="tx1"/>
+                          </a:solidFill>
+                          <a:latin typeface="나눔고딕" panose="020D0604000000000000" pitchFamily="50" charset="-127"/>
+                          <a:ea typeface="나눔고딕" panose="020D0604000000000000" pitchFamily="50" charset="-127"/>
+                        </a:rPr>
+                        <a:t>/</a:t>
+                      </a:r>
+                      <a:r>
+                        <a:rPr lang="ko-KR" altLang="en-US" sz="800" dirty="0">
+                          <a:solidFill>
+                            <a:schemeClr val="tx1"/>
+                          </a:solidFill>
+                          <a:latin typeface="나눔고딕" panose="020D0604000000000000" pitchFamily="50" charset="-127"/>
+                          <a:ea typeface="나눔고딕" panose="020D0604000000000000" pitchFamily="50" charset="-127"/>
+                        </a:rPr>
+                        <a:t>교육 지원 자료에 대한 접근성을 높일 수 있는 통합 플랫폼 필요</a:t>
+                      </a:r>
+                      <a:endParaRPr lang="en-US" altLang="ko-KR" sz="800" dirty="0">
+                        <a:solidFill>
+                          <a:schemeClr val="tx1"/>
+                        </a:solidFill>
+                        <a:latin typeface="나눔고딕" panose="020D0604000000000000" pitchFamily="50" charset="-127"/>
+                        <a:ea typeface="나눔고딕" panose="020D0604000000000000" pitchFamily="50" charset="-127"/>
+                      </a:endParaRPr>
+                    </a:p>
+                  </a:txBody>
+                  <a:tcPr marL="68352" marR="68352" marT="34176" marB="34176" anchor="ctr">
+                    <a:lnL w="3175" cap="flat" cmpd="sng" algn="ctr">
+                      <a:solidFill>
+                        <a:schemeClr val="bg1">
+                          <a:lumMod val="75000"/>
+                        </a:schemeClr>
+                      </a:solidFill>
+                      <a:prstDash val="solid"/>
+                      <a:round/>
+                      <a:headEnd type="none" w="med" len="med"/>
+                      <a:tailEnd type="none" w="med" len="med"/>
+                    </a:lnL>
+                    <a:lnR w="12700" cap="flat" cmpd="sng" algn="ctr">
+                      <a:noFill/>
+                      <a:prstDash val="solid"/>
+                      <a:round/>
+                      <a:headEnd type="none" w="med" len="med"/>
+                      <a:tailEnd type="none" w="med" len="med"/>
+                    </a:lnR>
+                    <a:lnT w="3175" cap="flat" cmpd="sng" algn="ctr">
+                      <a:solidFill>
+                        <a:schemeClr val="bg1">
+                          <a:lumMod val="75000"/>
+                        </a:schemeClr>
+                      </a:solidFill>
+                      <a:prstDash val="solid"/>
+                      <a:round/>
+                      <a:headEnd type="none" w="med" len="med"/>
+                      <a:tailEnd type="none" w="med" len="med"/>
+                    </a:lnT>
+                    <a:lnB w="3175" cap="flat" cmpd="sng" algn="ctr">
+                      <a:solidFill>
+                        <a:schemeClr val="bg1">
+                          <a:lumMod val="75000"/>
+                        </a:schemeClr>
+                      </a:solidFill>
+                      <a:prstDash val="solid"/>
+                      <a:round/>
+                      <a:headEnd type="none" w="med" len="med"/>
+                      <a:tailEnd type="none" w="med" len="med"/>
+                    </a:lnB>
+                    <a:lnTlToBr w="12700" cmpd="sng">
+                      <a:noFill/>
+                      <a:prstDash val="solid"/>
+                    </a:lnTlToBr>
+                    <a:lnBlToTr w="12700" cmpd="sng">
+                      <a:noFill/>
+                      <a:prstDash val="solid"/>
+                    </a:lnBlToTr>
+                    <a:noFill/>
+                  </a:tcPr>
+                </a:tc>
+                <a:extLst>
+                  <a:ext uri="{0D108BD9-81ED-4DB2-BD59-A6C34878D82A}">
+                    <a16:rowId xmlns:a16="http://schemas.microsoft.com/office/drawing/2014/main" val="10001"/>
+                  </a:ext>
+                </a:extLst>
+              </a:tr>
+              <a:tr h="650731">
+                <a:tc>
+                  <a:txBody>
+                    <a:bodyPr/>
+                    <a:lstStyle/>
+                    <a:p>
+                      <a:pPr algn="ctr" latinLnBrk="1"/>
+                      <a:r>
+                        <a:rPr lang="ko-KR" altLang="en-US" sz="800" b="1" dirty="0"/>
+                        <a:t>기획 목적</a:t>
+                      </a:r>
+                      <a:endParaRPr lang="en-US" altLang="ko-KR" sz="800" b="1" dirty="0"/>
+                    </a:p>
+                  </a:txBody>
+                  <a:tcPr marL="68352" marR="68352" marT="34176" marB="34176" anchor="ctr">
+                    <a:lnL w="3175" cap="flat" cmpd="sng" algn="ctr">
+                      <a:noFill/>
+                      <a:prstDash val="solid"/>
+                      <a:round/>
+                      <a:headEnd type="none" w="med" len="med"/>
+                      <a:tailEnd type="none" w="med" len="med"/>
+                    </a:lnL>
+                    <a:lnR w="3175" cap="flat" cmpd="sng" algn="ctr">
+                      <a:solidFill>
+                        <a:schemeClr val="bg1">
+                          <a:lumMod val="75000"/>
+                        </a:schemeClr>
+                      </a:solidFill>
+                      <a:prstDash val="solid"/>
+                      <a:round/>
+                      <a:headEnd type="none" w="med" len="med"/>
+                      <a:tailEnd type="none" w="med" len="med"/>
+                    </a:lnR>
+                    <a:lnT w="3175" cap="flat" cmpd="sng" algn="ctr">
+                      <a:solidFill>
+                        <a:schemeClr val="bg1">
+                          <a:lumMod val="75000"/>
+                        </a:schemeClr>
+                      </a:solidFill>
+                      <a:prstDash val="solid"/>
+                      <a:round/>
+                      <a:headEnd type="none" w="med" len="med"/>
+                      <a:tailEnd type="none" w="med" len="med"/>
+                    </a:lnT>
+                    <a:lnB w="3175" cap="flat" cmpd="sng" algn="ctr">
+                      <a:solidFill>
+                        <a:schemeClr val="bg1">
+                          <a:lumMod val="75000"/>
+                        </a:schemeClr>
+                      </a:solidFill>
+                      <a:prstDash val="solid"/>
+                      <a:round/>
+                      <a:headEnd type="none" w="med" len="med"/>
+                      <a:tailEnd type="none" w="med" len="med"/>
+                    </a:lnB>
+                    <a:lnTlToBr w="12700" cmpd="sng">
+                      <a:noFill/>
+                      <a:prstDash val="solid"/>
+                    </a:lnTlToBr>
+                    <a:lnBlToTr w="12700" cmpd="sng">
+                      <a:noFill/>
+                      <a:prstDash val="solid"/>
+                    </a:lnBlToTr>
+                    <a:noFill/>
+                  </a:tcPr>
+                </a:tc>
+                <a:tc>
+                  <a:txBody>
+                    <a:bodyPr/>
+                    <a:lstStyle/>
+                    <a:p>
+                      <a:pPr marL="171450" marR="0" indent="-171450" algn="just" defTabSz="914400" rtl="0" eaLnBrk="1" fontAlgn="auto" latinLnBrk="1" hangingPunct="1">
+                        <a:lnSpc>
+                          <a:spcPct val="130000"/>
+                        </a:lnSpc>
+                        <a:spcBef>
+                          <a:spcPts val="0"/>
+                        </a:spcBef>
+                        <a:spcAft>
+                          <a:spcPts val="0"/>
+                        </a:spcAft>
+                        <a:buClrTx/>
+                        <a:buSzTx/>
+                        <a:buFont typeface="Arial" panose="020B0604020202020204" pitchFamily="34" charset="0"/>
+                        <a:buChar char="•"/>
+                        <a:tabLst/>
+                        <a:defRPr/>
+                      </a:pPr>
+                      <a:r>
+                        <a:rPr lang="ko-KR" altLang="en-US" sz="800" dirty="0" err="1">
+                          <a:solidFill>
+                            <a:schemeClr val="tx1"/>
+                          </a:solidFill>
+                          <a:latin typeface="나눔고딕" panose="020D0604000000000000" pitchFamily="50" charset="-127"/>
+                          <a:ea typeface="나눔고딕" panose="020D0604000000000000" pitchFamily="50" charset="-127"/>
+                        </a:rPr>
+                        <a:t>대상별</a:t>
+                      </a:r>
+                      <a:r>
+                        <a:rPr lang="en-US" altLang="ko-KR" sz="800" dirty="0">
+                          <a:solidFill>
+                            <a:schemeClr val="tx1"/>
+                          </a:solidFill>
+                          <a:latin typeface="나눔고딕" panose="020D0604000000000000" pitchFamily="50" charset="-127"/>
+                          <a:ea typeface="나눔고딕" panose="020D0604000000000000" pitchFamily="50" charset="-127"/>
+                        </a:rPr>
+                        <a:t>(</a:t>
+                      </a:r>
+                      <a:r>
+                        <a:rPr lang="ko-KR" altLang="en-US" sz="800" dirty="0">
+                          <a:solidFill>
+                            <a:schemeClr val="tx1"/>
+                          </a:solidFill>
+                          <a:latin typeface="나눔고딕" panose="020D0604000000000000" pitchFamily="50" charset="-127"/>
+                          <a:ea typeface="나눔고딕" panose="020D0604000000000000" pitchFamily="50" charset="-127"/>
+                        </a:rPr>
+                        <a:t>초등</a:t>
+                      </a:r>
+                      <a:r>
+                        <a:rPr lang="en-US" altLang="ko-KR" sz="800" dirty="0">
+                          <a:solidFill>
+                            <a:schemeClr val="tx1"/>
+                          </a:solidFill>
+                          <a:latin typeface="나눔고딕" panose="020D0604000000000000" pitchFamily="50" charset="-127"/>
+                          <a:ea typeface="나눔고딕" panose="020D0604000000000000" pitchFamily="50" charset="-127"/>
+                        </a:rPr>
+                        <a:t>/</a:t>
+                      </a:r>
+                      <a:r>
+                        <a:rPr lang="ko-KR" altLang="en-US" sz="800" dirty="0">
+                          <a:solidFill>
+                            <a:schemeClr val="tx1"/>
+                          </a:solidFill>
+                          <a:latin typeface="나눔고딕" panose="020D0604000000000000" pitchFamily="50" charset="-127"/>
+                          <a:ea typeface="나눔고딕" panose="020D0604000000000000" pitchFamily="50" charset="-127"/>
+                        </a:rPr>
+                        <a:t>중등</a:t>
+                      </a:r>
+                      <a:r>
+                        <a:rPr lang="en-US" altLang="ko-KR" sz="800" dirty="0">
+                          <a:solidFill>
+                            <a:schemeClr val="tx1"/>
+                          </a:solidFill>
+                          <a:latin typeface="나눔고딕" panose="020D0604000000000000" pitchFamily="50" charset="-127"/>
+                          <a:ea typeface="나눔고딕" panose="020D0604000000000000" pitchFamily="50" charset="-127"/>
+                        </a:rPr>
+                        <a:t>/</a:t>
+                      </a:r>
+                      <a:r>
+                        <a:rPr lang="ko-KR" altLang="en-US" sz="800" dirty="0">
+                          <a:solidFill>
+                            <a:schemeClr val="tx1"/>
+                          </a:solidFill>
+                          <a:latin typeface="나눔고딕" panose="020D0604000000000000" pitchFamily="50" charset="-127"/>
+                          <a:ea typeface="나눔고딕" panose="020D0604000000000000" pitchFamily="50" charset="-127"/>
+                        </a:rPr>
+                        <a:t>고등</a:t>
+                      </a:r>
+                      <a:r>
+                        <a:rPr lang="en-US" altLang="ko-KR" sz="800" dirty="0">
+                          <a:solidFill>
+                            <a:schemeClr val="tx1"/>
+                          </a:solidFill>
+                          <a:latin typeface="나눔고딕" panose="020D0604000000000000" pitchFamily="50" charset="-127"/>
+                          <a:ea typeface="나눔고딕" panose="020D0604000000000000" pitchFamily="50" charset="-127"/>
+                        </a:rPr>
+                        <a:t>/</a:t>
+                      </a:r>
+                      <a:r>
+                        <a:rPr lang="ko-KR" altLang="en-US" sz="800" dirty="0">
+                          <a:solidFill>
+                            <a:schemeClr val="tx1"/>
+                          </a:solidFill>
+                          <a:latin typeface="나눔고딕" panose="020D0604000000000000" pitchFamily="50" charset="-127"/>
+                          <a:ea typeface="나눔고딕" panose="020D0604000000000000" pitchFamily="50" charset="-127"/>
+                        </a:rPr>
+                        <a:t>단행본 </a:t>
+                      </a:r>
+                      <a:r>
+                        <a:rPr lang="en-US" altLang="ko-KR" sz="800" dirty="0">
+                          <a:solidFill>
+                            <a:schemeClr val="tx1"/>
+                          </a:solidFill>
+                          <a:latin typeface="나눔고딕" panose="020D0604000000000000" pitchFamily="50" charset="-127"/>
+                          <a:ea typeface="나눔고딕" panose="020D0604000000000000" pitchFamily="50" charset="-127"/>
+                        </a:rPr>
+                        <a:t>) </a:t>
+                      </a:r>
+                      <a:r>
+                        <a:rPr lang="ko-KR" altLang="en-US" sz="800" dirty="0">
+                          <a:solidFill>
+                            <a:schemeClr val="tx1"/>
+                          </a:solidFill>
+                          <a:latin typeface="나눔고딕" panose="020D0604000000000000" pitchFamily="50" charset="-127"/>
+                          <a:ea typeface="나눔고딕" panose="020D0604000000000000" pitchFamily="50" charset="-127"/>
+                        </a:rPr>
+                        <a:t>직관적인 도서 탐색 환경 제공</a:t>
                       </a:r>
                       <a:endParaRPr lang="en-US" altLang="ko-KR" sz="800" dirty="0">
                         <a:solidFill>
@@ -12946,10 +13265,90 @@
                           <a:latin typeface="나눔고딕" panose="020D0604000000000000" pitchFamily="50" charset="-127"/>
                           <a:ea typeface="나눔고딕" panose="020D0604000000000000" pitchFamily="50" charset="-127"/>
                         </a:rPr>
-                        <a:t>보다 편하고 안정적인</a:t>
+                        <a:t>학습자 및 교수자를 위한 필수 부가 자료</a:t>
                       </a:r>
                       <a:r>
-                        <a:rPr lang="ko-KR" altLang="en-US" sz="800" baseline="0" dirty="0">
+                        <a:rPr lang="en-US" altLang="ko-KR" sz="800" dirty="0">
+                          <a:solidFill>
+                            <a:schemeClr val="tx1"/>
+                          </a:solidFill>
+                          <a:latin typeface="나눔고딕" panose="020D0604000000000000" pitchFamily="50" charset="-127"/>
+                          <a:ea typeface="나눔고딕" panose="020D0604000000000000" pitchFamily="50" charset="-127"/>
+                        </a:rPr>
+                        <a:t>(</a:t>
+                      </a:r>
+                      <a:r>
+                        <a:rPr lang="ko-KR" altLang="en-US" sz="800" dirty="0">
+                          <a:solidFill>
+                            <a:schemeClr val="tx1"/>
+                          </a:solidFill>
+                          <a:latin typeface="나눔고딕" panose="020D0604000000000000" pitchFamily="50" charset="-127"/>
+                          <a:ea typeface="나눔고딕" panose="020D0604000000000000" pitchFamily="50" charset="-127"/>
+                        </a:rPr>
+                        <a:t>해설</a:t>
+                      </a:r>
+                      <a:r>
+                        <a:rPr lang="en-US" altLang="ko-KR" sz="800" dirty="0">
+                          <a:solidFill>
+                            <a:schemeClr val="tx1"/>
+                          </a:solidFill>
+                          <a:latin typeface="나눔고딕" panose="020D0604000000000000" pitchFamily="50" charset="-127"/>
+                          <a:ea typeface="나눔고딕" panose="020D0604000000000000" pitchFamily="50" charset="-127"/>
+                        </a:rPr>
+                        <a:t>, </a:t>
+                      </a:r>
+                      <a:r>
+                        <a:rPr lang="ko-KR" altLang="en-US" sz="800" dirty="0">
+                          <a:solidFill>
+                            <a:schemeClr val="tx1"/>
+                          </a:solidFill>
+                          <a:latin typeface="나눔고딕" panose="020D0604000000000000" pitchFamily="50" charset="-127"/>
+                          <a:ea typeface="나눔고딕" panose="020D0604000000000000" pitchFamily="50" charset="-127"/>
+                        </a:rPr>
+                        <a:t>듣기자료</a:t>
+                      </a:r>
+                      <a:r>
+                        <a:rPr lang="en-US" altLang="ko-KR" sz="800" dirty="0">
+                          <a:solidFill>
+                            <a:schemeClr val="tx1"/>
+                          </a:solidFill>
+                          <a:latin typeface="나눔고딕" panose="020D0604000000000000" pitchFamily="50" charset="-127"/>
+                          <a:ea typeface="나눔고딕" panose="020D0604000000000000" pitchFamily="50" charset="-127"/>
+                        </a:rPr>
+                        <a:t>, </a:t>
+                      </a:r>
+                      <a:r>
+                        <a:rPr lang="ko-KR" altLang="en-US" sz="800" dirty="0">
+                          <a:solidFill>
+                            <a:schemeClr val="tx1"/>
+                          </a:solidFill>
+                          <a:latin typeface="나눔고딕" panose="020D0604000000000000" pitchFamily="50" charset="-127"/>
+                          <a:ea typeface="나눔고딕" panose="020D0604000000000000" pitchFamily="50" charset="-127"/>
+                        </a:rPr>
+                        <a:t>교사용 이북 등</a:t>
+                      </a:r>
+                      <a:r>
+                        <a:rPr lang="en-US" altLang="ko-KR" sz="800" dirty="0">
+                          <a:solidFill>
+                            <a:schemeClr val="tx1"/>
+                          </a:solidFill>
+                          <a:latin typeface="나눔고딕" panose="020D0604000000000000" pitchFamily="50" charset="-127"/>
+                          <a:ea typeface="나눔고딕" panose="020D0604000000000000" pitchFamily="50" charset="-127"/>
+                        </a:rPr>
+                        <a:t>)</a:t>
+                      </a:r>
+                      <a:r>
+                        <a:rPr lang="ko-KR" altLang="en-US" sz="800" dirty="0">
+                          <a:solidFill>
+                            <a:schemeClr val="tx1"/>
+                          </a:solidFill>
+                          <a:latin typeface="나눔고딕" panose="020D0604000000000000" pitchFamily="50" charset="-127"/>
+                          <a:ea typeface="나눔고딕" panose="020D0604000000000000" pitchFamily="50" charset="-127"/>
+                        </a:rPr>
+                        <a:t>의</a:t>
+                      </a:r>
+                      <a:r>
+                        <a:rPr lang="en-US" altLang="ko-KR" sz="800" dirty="0">
                           <a:solidFill>
                             <a:schemeClr val="tx1"/>
                           </a:solidFill>
@@ -12959,191 +13358,6 @@
                         <a:t> </a:t>
                       </a:r>
                       <a:r>
-                        <a:rPr lang="ko-KR" altLang="en-US" sz="800" baseline="0" dirty="0" err="1">
-                          <a:solidFill>
-                            <a:schemeClr val="tx1"/>
-                          </a:solidFill>
-                          <a:latin typeface="나눔고딕" panose="020D0604000000000000" pitchFamily="50" charset="-127"/>
-                          <a:ea typeface="나눔고딕" panose="020D0604000000000000" pitchFamily="50" charset="-127"/>
-                        </a:rPr>
-                        <a:t>아웃소싱</a:t>
-                      </a:r>
-                      <a:r>
-                        <a:rPr lang="ko-KR" altLang="en-US" sz="800" baseline="0" dirty="0">
-                          <a:solidFill>
-                            <a:schemeClr val="tx1"/>
-                          </a:solidFill>
-                          <a:latin typeface="나눔고딕" panose="020D0604000000000000" pitchFamily="50" charset="-127"/>
-                          <a:ea typeface="나눔고딕" panose="020D0604000000000000" pitchFamily="50" charset="-127"/>
-                        </a:rPr>
-                        <a:t> 환경에 기여</a:t>
-                      </a:r>
-                      <a:endParaRPr lang="en-US" altLang="ko-KR" sz="800" dirty="0">
-                        <a:solidFill>
-                          <a:schemeClr val="tx1"/>
-                        </a:solidFill>
-                        <a:latin typeface="나눔고딕" panose="020D0604000000000000" pitchFamily="50" charset="-127"/>
-                        <a:ea typeface="나눔고딕" panose="020D0604000000000000" pitchFamily="50" charset="-127"/>
-                      </a:endParaRPr>
-                    </a:p>
-                  </a:txBody>
-                  <a:tcPr marL="68352" marR="68352" marT="34176" marB="34176" anchor="ctr">
-                    <a:lnL w="3175" cap="flat" cmpd="sng" algn="ctr">
-                      <a:solidFill>
-                        <a:schemeClr val="bg1">
-                          <a:lumMod val="75000"/>
-                        </a:schemeClr>
-                      </a:solidFill>
-                      <a:prstDash val="solid"/>
-                      <a:round/>
-                      <a:headEnd type="none" w="med" len="med"/>
-                      <a:tailEnd type="none" w="med" len="med"/>
-                    </a:lnL>
-                    <a:lnR w="12700" cap="flat" cmpd="sng" algn="ctr">
-                      <a:noFill/>
-                      <a:prstDash val="solid"/>
-                      <a:round/>
-                      <a:headEnd type="none" w="med" len="med"/>
-                      <a:tailEnd type="none" w="med" len="med"/>
-                    </a:lnR>
-                    <a:lnT w="3175" cap="flat" cmpd="sng" algn="ctr">
-                      <a:solidFill>
-                        <a:schemeClr val="bg1">
-                          <a:lumMod val="75000"/>
-                        </a:schemeClr>
-                      </a:solidFill>
-                      <a:prstDash val="solid"/>
-                      <a:round/>
-                      <a:headEnd type="none" w="med" len="med"/>
-                      <a:tailEnd type="none" w="med" len="med"/>
-                    </a:lnT>
-                    <a:lnB w="3175" cap="flat" cmpd="sng" algn="ctr">
-                      <a:solidFill>
-                        <a:schemeClr val="bg1">
-                          <a:lumMod val="75000"/>
-                        </a:schemeClr>
-                      </a:solidFill>
-                      <a:prstDash val="solid"/>
-                      <a:round/>
-                      <a:headEnd type="none" w="med" len="med"/>
-                      <a:tailEnd type="none" w="med" len="med"/>
-                    </a:lnB>
-                    <a:lnTlToBr w="12700" cmpd="sng">
-                      <a:noFill/>
-                      <a:prstDash val="solid"/>
-                    </a:lnTlToBr>
-                    <a:lnBlToTr w="12700" cmpd="sng">
-                      <a:noFill/>
-                      <a:prstDash val="solid"/>
-                    </a:lnBlToTr>
-                    <a:noFill/>
-                  </a:tcPr>
-                </a:tc>
-                <a:extLst>
-                  <a:ext uri="{0D108BD9-81ED-4DB2-BD59-A6C34878D82A}">
-                    <a16:rowId xmlns:a16="http://schemas.microsoft.com/office/drawing/2014/main" val="10001"/>
-                  </a:ext>
-                </a:extLst>
-              </a:tr>
-              <a:tr h="650731">
-                <a:tc>
-                  <a:txBody>
-                    <a:bodyPr/>
-                    <a:lstStyle/>
-                    <a:p>
-                      <a:pPr algn="ctr" latinLnBrk="1"/>
-                      <a:r>
-                        <a:rPr lang="ko-KR" altLang="en-US" sz="800" b="1" dirty="0"/>
-                        <a:t>기획 목적</a:t>
-                      </a:r>
-                      <a:endParaRPr lang="en-US" altLang="ko-KR" sz="800" b="1" dirty="0"/>
-                    </a:p>
-                  </a:txBody>
-                  <a:tcPr marL="68352" marR="68352" marT="34176" marB="34176" anchor="ctr">
-                    <a:lnL w="3175" cap="flat" cmpd="sng" algn="ctr">
-                      <a:noFill/>
-                      <a:prstDash val="solid"/>
-                      <a:round/>
-                      <a:headEnd type="none" w="med" len="med"/>
-                      <a:tailEnd type="none" w="med" len="med"/>
-                    </a:lnL>
-                    <a:lnR w="3175" cap="flat" cmpd="sng" algn="ctr">
-                      <a:solidFill>
-                        <a:schemeClr val="bg1">
-                          <a:lumMod val="75000"/>
-                        </a:schemeClr>
-                      </a:solidFill>
-                      <a:prstDash val="solid"/>
-                      <a:round/>
-                      <a:headEnd type="none" w="med" len="med"/>
-                      <a:tailEnd type="none" w="med" len="med"/>
-                    </a:lnR>
-                    <a:lnT w="3175" cap="flat" cmpd="sng" algn="ctr">
-                      <a:solidFill>
-                        <a:schemeClr val="bg1">
-                          <a:lumMod val="75000"/>
-                        </a:schemeClr>
-                      </a:solidFill>
-                      <a:prstDash val="solid"/>
-                      <a:round/>
-                      <a:headEnd type="none" w="med" len="med"/>
-                      <a:tailEnd type="none" w="med" len="med"/>
-                    </a:lnT>
-                    <a:lnB w="3175" cap="flat" cmpd="sng" algn="ctr">
-                      <a:solidFill>
-                        <a:schemeClr val="bg1">
-                          <a:lumMod val="75000"/>
-                        </a:schemeClr>
-                      </a:solidFill>
-                      <a:prstDash val="solid"/>
-                      <a:round/>
-                      <a:headEnd type="none" w="med" len="med"/>
-                      <a:tailEnd type="none" w="med" len="med"/>
-                    </a:lnB>
-                    <a:lnTlToBr w="12700" cmpd="sng">
-                      <a:noFill/>
-                      <a:prstDash val="solid"/>
-                    </a:lnTlToBr>
-                    <a:lnBlToTr w="12700" cmpd="sng">
-                      <a:noFill/>
-                      <a:prstDash val="solid"/>
-                    </a:lnBlToTr>
-                    <a:noFill/>
-                  </a:tcPr>
-                </a:tc>
-                <a:tc>
-                  <a:txBody>
-                    <a:bodyPr/>
-                    <a:lstStyle/>
-                    <a:p>
-                      <a:pPr marL="171450" marR="0" indent="-171450" algn="just" defTabSz="914400" rtl="0" eaLnBrk="1" fontAlgn="auto" latinLnBrk="1" hangingPunct="1">
-                        <a:lnSpc>
-                          <a:spcPct val="130000"/>
-                        </a:lnSpc>
-                        <a:spcBef>
-                          <a:spcPts val="0"/>
-                        </a:spcBef>
-                        <a:spcAft>
-                          <a:spcPts val="0"/>
-                        </a:spcAft>
-                        <a:buClrTx/>
-                        <a:buSzTx/>
-                        <a:buFont typeface="Arial" panose="020B0604020202020204" pitchFamily="34" charset="0"/>
-                        <a:buChar char="•"/>
-                        <a:tabLst/>
-                        <a:defRPr/>
-                      </a:pPr>
-                      <a:r>
-                        <a:rPr lang="en-US" altLang="ko-KR" sz="800" dirty="0">
-                          <a:solidFill>
-                            <a:schemeClr val="tx1"/>
-                          </a:solidFill>
-                          <a:latin typeface="나눔고딕" panose="020D0604000000000000" pitchFamily="50" charset="-127"/>
-                          <a:ea typeface="나눔고딕" panose="020D0604000000000000" pitchFamily="50" charset="-127"/>
-                        </a:rPr>
-                        <a:t>IT </a:t>
-                      </a:r>
-                      <a:r>
                         <a:rPr lang="ko-KR" altLang="en-US" sz="800" dirty="0">
                           <a:solidFill>
                             <a:schemeClr val="tx1"/>
@@ -13151,27 +13365,7 @@
                           <a:latin typeface="나눔고딕" panose="020D0604000000000000" pitchFamily="50" charset="-127"/>
                           <a:ea typeface="나눔고딕" panose="020D0604000000000000" pitchFamily="50" charset="-127"/>
                         </a:rPr>
-                        <a:t>전문가에 대한 명확한 정보</a:t>
-                      </a:r>
-                      <a:r>
-                        <a:rPr lang="ko-KR" altLang="en-US" sz="800" baseline="0" dirty="0">
-                          <a:solidFill>
-                            <a:schemeClr val="tx1"/>
-                          </a:solidFill>
-                          <a:latin typeface="나눔고딕" panose="020D0604000000000000" pitchFamily="50" charset="-127"/>
-                          <a:ea typeface="나눔고딕" panose="020D0604000000000000" pitchFamily="50" charset="-127"/>
-                        </a:rPr>
-                        <a:t> 제공</a:t>
-                      </a:r>
-                      <a:r>
-                        <a:rPr lang="ko-KR" altLang="en-US" sz="800" dirty="0">
-                          <a:solidFill>
-                            <a:schemeClr val="tx1"/>
-                          </a:solidFill>
-                          <a:latin typeface="나눔고딕" panose="020D0604000000000000" pitchFamily="50" charset="-127"/>
-                          <a:ea typeface="나눔고딕" panose="020D0604000000000000" pitchFamily="50" charset="-127"/>
-                        </a:rPr>
-                        <a:t> </a:t>
+                        <a:t>원활한 제공</a:t>
                       </a:r>
                       <a:endParaRPr lang="en-US" altLang="ko-KR" sz="800" dirty="0">
                         <a:solidFill>
@@ -13207,43 +13401,7 @@
                           <a:latin typeface="나눔고딕" panose="020D0604000000000000" pitchFamily="50" charset="-127"/>
                           <a:ea typeface="나눔고딕" panose="020D0604000000000000" pitchFamily="50" charset="-127"/>
                         </a:rPr>
-                        <a:t>견적의 타당성 이해</a:t>
-                      </a:r>
-                      <a:endParaRPr lang="en-US" altLang="ko-KR" sz="800" dirty="0">
-                        <a:solidFill>
-                          <a:schemeClr val="tx1"/>
-                        </a:solidFill>
-                        <a:latin typeface="나눔고딕" panose="020D0604000000000000" pitchFamily="50" charset="-127"/>
-                        <a:ea typeface="나눔고딕" panose="020D0604000000000000" pitchFamily="50" charset="-127"/>
-                      </a:endParaRPr>
-                    </a:p>
-                    <a:p>
-                      <a:pPr marL="171450" marR="0" indent="-171450" algn="just" defTabSz="914400" rtl="0" eaLnBrk="1" fontAlgn="auto" latinLnBrk="1" hangingPunct="1">
-                        <a:lnSpc>
-                          <a:spcPct val="130000"/>
-                        </a:lnSpc>
-                        <a:spcBef>
-                          <a:spcPts val="0"/>
-                        </a:spcBef>
-                        <a:spcAft>
-                          <a:spcPts val="0"/>
-                        </a:spcAft>
-                        <a:buClrTx/>
-                        <a:buSzTx/>
-                        <a:buFont typeface="Arial" panose="020B0604020202020204" pitchFamily="34" charset="0"/>
-                        <a:buChar char="•"/>
-                        <a:tabLst/>
-                        <a:defRPr/>
-                      </a:pPr>
-                      <a:r>
-                        <a:rPr lang="ko-KR" altLang="en-US" sz="800" dirty="0">
-                          <a:solidFill>
-                            <a:schemeClr val="tx1"/>
-                          </a:solidFill>
-                          <a:latin typeface="나눔고딕" panose="020D0604000000000000" pitchFamily="50" charset="-127"/>
-                          <a:ea typeface="나눔고딕" panose="020D0604000000000000" pitchFamily="50" charset="-127"/>
-                        </a:rPr>
-                        <a:t>편리한 프로젝트 관리</a:t>
+                        <a:t>맞춤 큐레이션 및 커뮤니티 연동을 통한 고객 소통 강화</a:t>
                       </a:r>
                       <a:endParaRPr lang="en-US" altLang="ko-KR" sz="800" dirty="0">
                         <a:solidFill>
@@ -13407,6 +13565,16 @@
                         <a:buChar char="•"/>
                       </a:pPr>
                       <a:r>
+                        <a:rPr lang="ko-KR" altLang="en-US" sz="800" b="1" baseline="0" dirty="0">
+                          <a:solidFill>
+                            <a:schemeClr val="tx1"/>
+                          </a:solidFill>
+                          <a:latin typeface="나눔고딕" panose="020D0604000000000000" pitchFamily="50" charset="-127"/>
+                          <a:ea typeface="나눔고딕" panose="020D0604000000000000" pitchFamily="50" charset="-127"/>
+                        </a:rPr>
+                        <a:t>고객 편의성 증대</a:t>
+                      </a:r>
+                      <a:r>
                         <a:rPr lang="en-US" altLang="ko-KR" sz="800" baseline="0" dirty="0">
                           <a:solidFill>
                             <a:schemeClr val="tx1"/>
@@ -13414,17 +13582,7 @@
                           <a:latin typeface="나눔고딕" panose="020D0604000000000000" pitchFamily="50" charset="-127"/>
                           <a:ea typeface="나눔고딕" panose="020D0604000000000000" pitchFamily="50" charset="-127"/>
                         </a:rPr>
-                        <a:t>IT </a:t>
-                      </a:r>
-                      <a:r>
-                        <a:rPr lang="ko-KR" altLang="en-US" sz="800" baseline="0" dirty="0" err="1">
-                          <a:solidFill>
-                            <a:schemeClr val="tx1"/>
-                          </a:solidFill>
-                          <a:latin typeface="나눔고딕" panose="020D0604000000000000" pitchFamily="50" charset="-127"/>
-                          <a:ea typeface="나눔고딕" panose="020D0604000000000000" pitchFamily="50" charset="-127"/>
-                        </a:rPr>
-                        <a:t>아웃소싱</a:t>
+                        <a:t>: </a:t>
                       </a:r>
                       <a:r>
                         <a:rPr lang="ko-KR" altLang="en-US" sz="800" baseline="0" dirty="0">
@@ -13434,59 +13592,15 @@
                           <a:latin typeface="나눔고딕" panose="020D0604000000000000" pitchFamily="50" charset="-127"/>
                           <a:ea typeface="나눔고딕" panose="020D0604000000000000" pitchFamily="50" charset="-127"/>
                         </a:rPr>
-                        <a:t> </a:t>
+                        <a:t>검색 및 카테고리화를 통해 원하는 교재와 부가 자료를 빠르게 획득</a:t>
                       </a:r>
-                      <a:r>
-                        <a:rPr lang="ko-KR" altLang="en-US" sz="800" baseline="0" dirty="0" err="1">
-                          <a:solidFill>
-                            <a:schemeClr val="tx1"/>
-                          </a:solidFill>
-                          <a:latin typeface="나눔고딕" panose="020D0604000000000000" pitchFamily="50" charset="-127"/>
-                          <a:ea typeface="나눔고딕" panose="020D0604000000000000" pitchFamily="50" charset="-127"/>
-                        </a:rPr>
-                        <a:t>분쟁률</a:t>
-                      </a:r>
-                      <a:r>
-                        <a:rPr lang="ko-KR" altLang="en-US" sz="800" baseline="0" dirty="0">
-                          <a:solidFill>
-                            <a:schemeClr val="tx1"/>
-                          </a:solidFill>
-                          <a:latin typeface="나눔고딕" panose="020D0604000000000000" pitchFamily="50" charset="-127"/>
-                          <a:ea typeface="나눔고딕" panose="020D0604000000000000" pitchFamily="50" charset="-127"/>
-                        </a:rPr>
-                        <a:t>  축소 </a:t>
-                      </a:r>
-                      <a:r>
-                        <a:rPr lang="en-US" altLang="ko-KR" sz="800" baseline="0" dirty="0">
-                          <a:solidFill>
-                            <a:schemeClr val="tx1"/>
-                          </a:solidFill>
-                          <a:latin typeface="나눔고딕" panose="020D0604000000000000" pitchFamily="50" charset="-127"/>
-                          <a:ea typeface="나눔고딕" panose="020D0604000000000000" pitchFamily="50" charset="-127"/>
-                        </a:rPr>
-                        <a:t>90% </a:t>
-                      </a:r>
-                      <a:r>
-                        <a:rPr lang="en-US" altLang="ko-KR" sz="800" baseline="0" dirty="0">
-                          <a:solidFill>
-                            <a:schemeClr val="tx1"/>
-                          </a:solidFill>
-                          <a:latin typeface="나눔고딕" panose="020D0604000000000000" pitchFamily="50" charset="-127"/>
-                          <a:ea typeface="나눔고딕" panose="020D0604000000000000" pitchFamily="50" charset="-127"/>
-                          <a:sym typeface="Wingdings" panose="05000000000000000000" pitchFamily="2" charset="2"/>
-                        </a:rPr>
-                        <a:t> </a:t>
-                      </a:r>
-                      <a:r>
-                        <a:rPr lang="en-US" altLang="ko-KR" sz="800" baseline="0" dirty="0">
-                          <a:solidFill>
-                            <a:schemeClr val="tx1"/>
-                          </a:solidFill>
-                          <a:latin typeface="나눔고딕" panose="020D0604000000000000" pitchFamily="50" charset="-127"/>
-                          <a:ea typeface="나눔고딕" panose="020D0604000000000000" pitchFamily="50" charset="-127"/>
-                        </a:rPr>
-                        <a:t>2%</a:t>
-                      </a:r>
+                      <a:endParaRPr lang="en-US" altLang="ko-KR" sz="800" baseline="0" dirty="0">
+                        <a:solidFill>
+                          <a:schemeClr val="tx1"/>
+                        </a:solidFill>
+                        <a:latin typeface="나눔고딕" panose="020D0604000000000000" pitchFamily="50" charset="-127"/>
+                        <a:ea typeface="나눔고딕" panose="020D0604000000000000" pitchFamily="50" charset="-127"/>
+                      </a:endParaRPr>
                     </a:p>
                     <a:p>
                       <a:pPr marL="171450" indent="-171450" algn="just" latinLnBrk="1">
@@ -13497,14 +13611,14 @@
                         <a:buChar char="•"/>
                       </a:pPr>
                       <a:r>
-                        <a:rPr lang="ko-KR" altLang="en-US" sz="800" baseline="0" dirty="0">
+                        <a:rPr lang="ko-KR" altLang="en-US" sz="800" b="1" baseline="0" dirty="0">
                           <a:solidFill>
                             <a:schemeClr val="tx1"/>
                           </a:solidFill>
                           <a:latin typeface="나눔고딕" panose="020D0604000000000000" pitchFamily="50" charset="-127"/>
                           <a:ea typeface="나눔고딕" panose="020D0604000000000000" pitchFamily="50" charset="-127"/>
                         </a:rPr>
-                        <a:t>국내 </a:t>
+                        <a:t>브랜드 인지도 상승</a:t>
                       </a:r>
                       <a:r>
                         <a:rPr lang="en-US" altLang="ko-KR" sz="800" baseline="0" dirty="0">
@@ -13514,7 +13628,7 @@
                           <a:latin typeface="나눔고딕" panose="020D0604000000000000" pitchFamily="50" charset="-127"/>
                           <a:ea typeface="나눔고딕" panose="020D0604000000000000" pitchFamily="50" charset="-127"/>
                         </a:rPr>
-                        <a:t>IT</a:t>
+                        <a:t>: ‘</a:t>
                       </a:r>
                       <a:r>
                         <a:rPr lang="ko-KR" altLang="en-US" sz="800" baseline="0" dirty="0">
@@ -13524,17 +13638,17 @@
                           <a:latin typeface="나눔고딕" panose="020D0604000000000000" pitchFamily="50" charset="-127"/>
                           <a:ea typeface="나눔고딕" panose="020D0604000000000000" pitchFamily="50" charset="-127"/>
                         </a:rPr>
-                        <a:t> </a:t>
+                        <a:t>그린</a:t>
                       </a:r>
                       <a:r>
-                        <a:rPr lang="ko-KR" altLang="en-US" sz="800" baseline="0" dirty="0" err="1">
+                        <a:rPr lang="en-US" altLang="ko-KR" sz="800" baseline="0" dirty="0">
                           <a:solidFill>
                             <a:schemeClr val="tx1"/>
                           </a:solidFill>
                           <a:latin typeface="나눔고딕" panose="020D0604000000000000" pitchFamily="50" charset="-127"/>
                           <a:ea typeface="나눔고딕" panose="020D0604000000000000" pitchFamily="50" charset="-127"/>
                         </a:rPr>
-                        <a:t>아웃소싱</a:t>
+                        <a:t>pick’, </a:t>
                       </a:r>
                       <a:r>
                         <a:rPr lang="ko-KR" altLang="en-US" sz="800" baseline="0" dirty="0">
@@ -13544,7 +13658,7 @@
                           <a:latin typeface="나눔고딕" panose="020D0604000000000000" pitchFamily="50" charset="-127"/>
                           <a:ea typeface="나눔고딕" panose="020D0604000000000000" pitchFamily="50" charset="-127"/>
                         </a:rPr>
-                        <a:t> 시장 규모 성장 </a:t>
+                        <a:t>베스트 셀러</a:t>
                       </a:r>
                       <a:r>
                         <a:rPr lang="en-US" altLang="ko-KR" sz="800" baseline="0" dirty="0">
@@ -13554,7 +13668,7 @@
                           <a:latin typeface="나눔고딕" panose="020D0604000000000000" pitchFamily="50" charset="-127"/>
                           <a:ea typeface="나눔고딕" panose="020D0604000000000000" pitchFamily="50" charset="-127"/>
                         </a:rPr>
-                        <a:t>$$$</a:t>
+                        <a:t>, </a:t>
                       </a:r>
                       <a:r>
                         <a:rPr lang="ko-KR" altLang="en-US" sz="800" baseline="0" dirty="0">
@@ -13564,7 +13678,53 @@
                           <a:latin typeface="나눔고딕" panose="020D0604000000000000" pitchFamily="50" charset="-127"/>
                           <a:ea typeface="나눔고딕" panose="020D0604000000000000" pitchFamily="50" charset="-127"/>
                         </a:rPr>
-                        <a:t>억 </a:t>
+                        <a:t>유튜브 콘텐츠 연동을 통한 체류시간 증대 및 브랜드 친밀도 향상</a:t>
+                      </a:r>
+                      <a:endParaRPr lang="en-US" altLang="ko-KR" sz="800" baseline="0" dirty="0">
+                        <a:solidFill>
+                          <a:schemeClr val="tx1"/>
+                        </a:solidFill>
+                        <a:latin typeface="나눔고딕" panose="020D0604000000000000" pitchFamily="50" charset="-127"/>
+                        <a:ea typeface="나눔고딕" panose="020D0604000000000000" pitchFamily="50" charset="-127"/>
+                      </a:endParaRPr>
+                    </a:p>
+                    <a:p>
+                      <a:pPr marL="171450" indent="-171450" algn="just" latinLnBrk="1">
+                        <a:lnSpc>
+                          <a:spcPct val="130000"/>
+                        </a:lnSpc>
+                        <a:buFont typeface="Arial" panose="020B0604020202020204" pitchFamily="34" charset="0"/>
+                        <a:buChar char="•"/>
+                      </a:pPr>
+                      <a:r>
+                        <a:rPr lang="ko-KR" altLang="en-US" sz="800" b="1" baseline="0" dirty="0">
+                          <a:solidFill>
+                            <a:schemeClr val="tx1"/>
+                          </a:solidFill>
+                          <a:latin typeface="나눔고딕" panose="020D0604000000000000" pitchFamily="50" charset="-127"/>
+                          <a:ea typeface="나눔고딕" panose="020D0604000000000000" pitchFamily="50" charset="-127"/>
+                        </a:rPr>
+                        <a:t>교사</a:t>
+                      </a:r>
+                      <a:r>
+                        <a:rPr lang="en-US" altLang="ko-KR" sz="800" b="1" baseline="0" dirty="0">
+                          <a:solidFill>
+                            <a:schemeClr val="tx1"/>
+                          </a:solidFill>
+                          <a:latin typeface="나눔고딕" panose="020D0604000000000000" pitchFamily="50" charset="-127"/>
+                          <a:ea typeface="나눔고딕" panose="020D0604000000000000" pitchFamily="50" charset="-127"/>
+                        </a:rPr>
+                        <a:t>/</a:t>
+                      </a:r>
+                      <a:r>
+                        <a:rPr lang="ko-KR" altLang="en-US" sz="800" b="1" baseline="0" dirty="0">
+                          <a:solidFill>
+                            <a:schemeClr val="tx1"/>
+                          </a:solidFill>
+                          <a:latin typeface="나눔고딕" panose="020D0604000000000000" pitchFamily="50" charset="-127"/>
+                          <a:ea typeface="나눔고딕" panose="020D0604000000000000" pitchFamily="50" charset="-127"/>
+                        </a:rPr>
+                        <a:t>학원 고객 확보</a:t>
                       </a:r>
                       <a:r>
                         <a:rPr lang="en-US" altLang="ko-KR" sz="800" baseline="0" dirty="0">
@@ -13573,9 +13733,8 @@
                           </a:solidFill>
                           <a:latin typeface="나눔고딕" panose="020D0604000000000000" pitchFamily="50" charset="-127"/>
                           <a:ea typeface="나눔고딕" panose="020D0604000000000000" pitchFamily="50" charset="-127"/>
-                          <a:sym typeface="Wingdings" panose="05000000000000000000" pitchFamily="2" charset="2"/>
                         </a:rPr>
-                        <a:t> $</a:t>
+                        <a:t>: </a:t>
                       </a:r>
                       <a:r>
                         <a:rPr lang="ko-KR" altLang="en-US" sz="800" baseline="0" dirty="0">
@@ -13584,9 +13743,28 @@
                           </a:solidFill>
                           <a:latin typeface="나눔고딕" panose="020D0604000000000000" pitchFamily="50" charset="-127"/>
                           <a:ea typeface="나눔고딕" panose="020D0604000000000000" pitchFamily="50" charset="-127"/>
-                          <a:sym typeface="Wingdings" panose="05000000000000000000" pitchFamily="2" charset="2"/>
                         </a:rPr>
-                        <a:t>조</a:t>
+                        <a:t>전용 자료 제공 및 채택 이벤트를 통한 </a:t>
+                      </a:r>
+                      <a:r>
+                        <a:rPr lang="en-US" altLang="ko-KR" sz="800" baseline="0" dirty="0">
+                          <a:solidFill>
+                            <a:schemeClr val="tx1"/>
+                          </a:solidFill>
+                          <a:latin typeface="나눔고딕" panose="020D0604000000000000" pitchFamily="50" charset="-127"/>
+                          <a:ea typeface="나눔고딕" panose="020D0604000000000000" pitchFamily="50" charset="-127"/>
+                        </a:rPr>
+                        <a:t>B2B </a:t>
+                      </a:r>
+                      <a:r>
+                        <a:rPr lang="ko-KR" altLang="en-US" sz="800" baseline="0" dirty="0">
+                          <a:solidFill>
+                            <a:schemeClr val="tx1"/>
+                          </a:solidFill>
+                          <a:latin typeface="나눔고딕" panose="020D0604000000000000" pitchFamily="50" charset="-127"/>
+                          <a:ea typeface="나눔고딕" panose="020D0604000000000000" pitchFamily="50" charset="-127"/>
+                        </a:rPr>
+                        <a:t>충성 고객 확보</a:t>
                       </a:r>
                       <a:endParaRPr lang="en-US" altLang="ko-KR" sz="800" baseline="0" dirty="0">
                         <a:solidFill>
@@ -13733,6 +13911,26 @@
                         <a:buChar char="•"/>
                       </a:pPr>
                       <a:r>
+                        <a:rPr lang="ko-KR" altLang="en-US" sz="800" b="1" dirty="0">
+                          <a:solidFill>
+                            <a:schemeClr val="tx1"/>
+                          </a:solidFill>
+                          <a:latin typeface="나눔고딕" panose="020D0604000000000000" pitchFamily="50" charset="-127"/>
+                          <a:ea typeface="나눔고딕" panose="020D0604000000000000" pitchFamily="50" charset="-127"/>
+                        </a:rPr>
+                        <a:t>네비게이션 및 검색</a:t>
+                      </a:r>
+                      <a:r>
+                        <a:rPr lang="en-US" altLang="ko-KR" sz="800" b="1" dirty="0">
+                          <a:solidFill>
+                            <a:schemeClr val="tx1"/>
+                          </a:solidFill>
+                          <a:latin typeface="나눔고딕" panose="020D0604000000000000" pitchFamily="50" charset="-127"/>
+                          <a:ea typeface="나눔고딕" panose="020D0604000000000000" pitchFamily="50" charset="-127"/>
+                        </a:rPr>
+                        <a:t>: </a:t>
+                      </a:r>
+                      <a:r>
                         <a:rPr lang="ko-KR" altLang="en-US" sz="800" dirty="0">
                           <a:solidFill>
                             <a:schemeClr val="tx1"/>
@@ -13740,7 +13938,7 @@
                           <a:latin typeface="나눔고딕" panose="020D0604000000000000" pitchFamily="50" charset="-127"/>
                           <a:ea typeface="나눔고딕" panose="020D0604000000000000" pitchFamily="50" charset="-127"/>
                         </a:rPr>
-                        <a:t>개발자와 디자이너 등 </a:t>
+                        <a:t>초등</a:t>
                       </a:r>
                       <a:r>
                         <a:rPr lang="en-US" altLang="ko-KR" sz="800" dirty="0">
@@ -13750,7 +13948,7 @@
                           <a:latin typeface="나눔고딕" panose="020D0604000000000000" pitchFamily="50" charset="-127"/>
                           <a:ea typeface="나눔고딕" panose="020D0604000000000000" pitchFamily="50" charset="-127"/>
                         </a:rPr>
-                        <a:t>IT </a:t>
+                        <a:t>/</a:t>
                       </a:r>
                       <a:r>
                         <a:rPr lang="ko-KR" altLang="en-US" sz="800" dirty="0">
@@ -13760,17 +13958,17 @@
                           <a:latin typeface="나눔고딕" panose="020D0604000000000000" pitchFamily="50" charset="-127"/>
                           <a:ea typeface="나눔고딕" panose="020D0604000000000000" pitchFamily="50" charset="-127"/>
                         </a:rPr>
-                        <a:t>전문가 모집을 </a:t>
+                        <a:t>중등</a:t>
                       </a:r>
                       <a:r>
-                        <a:rPr lang="ko-KR" altLang="en-US" sz="800" dirty="0" err="1">
+                        <a:rPr lang="en-US" altLang="ko-KR" sz="800" dirty="0">
                           <a:solidFill>
                             <a:schemeClr val="tx1"/>
                           </a:solidFill>
                           <a:latin typeface="나눔고딕" panose="020D0604000000000000" pitchFamily="50" charset="-127"/>
                           <a:ea typeface="나눔고딕" panose="020D0604000000000000" pitchFamily="50" charset="-127"/>
                         </a:rPr>
-                        <a:t>역경매</a:t>
+                        <a:t>/</a:t>
                       </a:r>
                       <a:r>
                         <a:rPr lang="ko-KR" altLang="en-US" sz="800" dirty="0">
@@ -13780,7 +13978,27 @@
                           <a:latin typeface="나눔고딕" panose="020D0604000000000000" pitchFamily="50" charset="-127"/>
                           <a:ea typeface="나눔고딕" panose="020D0604000000000000" pitchFamily="50" charset="-127"/>
                         </a:rPr>
-                        <a:t> 형식으로 합리적 견적 제공</a:t>
+                        <a:t>고등</a:t>
+                      </a:r>
+                      <a:r>
+                        <a:rPr lang="en-US" altLang="ko-KR" sz="800" dirty="0">
+                          <a:solidFill>
+                            <a:schemeClr val="tx1"/>
+                          </a:solidFill>
+                          <a:latin typeface="나눔고딕" panose="020D0604000000000000" pitchFamily="50" charset="-127"/>
+                          <a:ea typeface="나눔고딕" panose="020D0604000000000000" pitchFamily="50" charset="-127"/>
+                        </a:rPr>
+                        <a:t>/</a:t>
+                      </a:r>
+                      <a:r>
+                        <a:rPr lang="ko-KR" altLang="en-US" sz="800" dirty="0">
+                          <a:solidFill>
+                            <a:schemeClr val="tx1"/>
+                          </a:solidFill>
+                          <a:latin typeface="나눔고딕" panose="020D0604000000000000" pitchFamily="50" charset="-127"/>
+                          <a:ea typeface="나눔고딕" panose="020D0604000000000000" pitchFamily="50" charset="-127"/>
+                        </a:rPr>
+                        <a:t>단행본 카테고리 탭 및 통합 검색 기능</a:t>
                       </a:r>
                       <a:endParaRPr lang="en-US" altLang="ko-KR" sz="800" dirty="0">
                         <a:solidFill>
@@ -13799,14 +14017,54 @@
                         <a:buChar char="•"/>
                       </a:pPr>
                       <a:r>
-                        <a:rPr lang="en-US" altLang="ko-KR" sz="800" dirty="0">
+                        <a:rPr lang="ko-KR" altLang="en-US" sz="800" b="1" dirty="0" err="1">
                           <a:solidFill>
                             <a:schemeClr val="tx1"/>
                           </a:solidFill>
                           <a:latin typeface="나눔고딕" panose="020D0604000000000000" pitchFamily="50" charset="-127"/>
                           <a:ea typeface="나눔고딕" panose="020D0604000000000000" pitchFamily="50" charset="-127"/>
                         </a:rPr>
-                        <a:t>3</a:t>
+                        <a:t>퀵</a:t>
+                      </a:r>
+                      <a:r>
+                        <a:rPr lang="ko-KR" altLang="en-US" sz="800" b="1" dirty="0">
+                          <a:solidFill>
+                            <a:schemeClr val="tx1"/>
+                          </a:solidFill>
+                          <a:latin typeface="나눔고딕" panose="020D0604000000000000" pitchFamily="50" charset="-127"/>
+                          <a:ea typeface="나눔고딕" panose="020D0604000000000000" pitchFamily="50" charset="-127"/>
+                        </a:rPr>
+                        <a:t> 메뉴</a:t>
+                      </a:r>
+                      <a:r>
+                        <a:rPr lang="en-US" altLang="ko-KR" sz="800" b="1" dirty="0">
+                          <a:solidFill>
+                            <a:schemeClr val="tx1"/>
+                          </a:solidFill>
+                          <a:latin typeface="나눔고딕" panose="020D0604000000000000" pitchFamily="50" charset="-127"/>
+                          <a:ea typeface="나눔고딕" panose="020D0604000000000000" pitchFamily="50" charset="-127"/>
+                        </a:rPr>
+                        <a:t>(</a:t>
+                      </a:r>
+                      <a:r>
+                        <a:rPr lang="ko-KR" altLang="en-US" sz="800" b="1" dirty="0">
+                          <a:solidFill>
+                            <a:schemeClr val="tx1"/>
+                          </a:solidFill>
+                          <a:latin typeface="나눔고딕" panose="020D0604000000000000" pitchFamily="50" charset="-127"/>
+                          <a:ea typeface="나눔고딕" panose="020D0604000000000000" pitchFamily="50" charset="-127"/>
+                        </a:rPr>
+                        <a:t>자료실</a:t>
+                      </a:r>
+                      <a:r>
+                        <a:rPr lang="en-US" altLang="ko-KR" sz="800" b="1" dirty="0">
+                          <a:solidFill>
+                            <a:schemeClr val="tx1"/>
+                          </a:solidFill>
+                          <a:latin typeface="나눔고딕" panose="020D0604000000000000" pitchFamily="50" charset="-127"/>
+                          <a:ea typeface="나눔고딕" panose="020D0604000000000000" pitchFamily="50" charset="-127"/>
+                        </a:rPr>
+                        <a:t>): </a:t>
                       </a:r>
                       <a:r>
                         <a:rPr lang="ko-KR" altLang="en-US" sz="800" dirty="0">
@@ -13816,7 +14074,266 @@
                           <a:latin typeface="나눔고딕" panose="020D0604000000000000" pitchFamily="50" charset="-127"/>
                           <a:ea typeface="나눔고딕" panose="020D0604000000000000" pitchFamily="50" charset="-127"/>
                         </a:rPr>
-                        <a:t>자 미팅 서비스 제공</a:t>
+                        <a:t>정답 및 해설</a:t>
+                      </a:r>
+                      <a:r>
+                        <a:rPr lang="en-US" altLang="ko-KR" sz="800" dirty="0">
+                          <a:solidFill>
+                            <a:schemeClr val="tx1"/>
+                          </a:solidFill>
+                          <a:latin typeface="나눔고딕" panose="020D0604000000000000" pitchFamily="50" charset="-127"/>
+                          <a:ea typeface="나눔고딕" panose="020D0604000000000000" pitchFamily="50" charset="-127"/>
+                        </a:rPr>
+                        <a:t>, </a:t>
+                      </a:r>
+                      <a:r>
+                        <a:rPr lang="ko-KR" altLang="en-US" sz="800" dirty="0">
+                          <a:solidFill>
+                            <a:schemeClr val="tx1"/>
+                          </a:solidFill>
+                          <a:latin typeface="나눔고딕" panose="020D0604000000000000" pitchFamily="50" charset="-127"/>
+                          <a:ea typeface="나눔고딕" panose="020D0604000000000000" pitchFamily="50" charset="-127"/>
+                        </a:rPr>
+                        <a:t>정오표</a:t>
+                      </a:r>
+                      <a:r>
+                        <a:rPr lang="en-US" altLang="ko-KR" sz="800" dirty="0">
+                          <a:solidFill>
+                            <a:schemeClr val="tx1"/>
+                          </a:solidFill>
+                          <a:latin typeface="나눔고딕" panose="020D0604000000000000" pitchFamily="50" charset="-127"/>
+                          <a:ea typeface="나눔고딕" panose="020D0604000000000000" pitchFamily="50" charset="-127"/>
+                        </a:rPr>
+                        <a:t>, </a:t>
+                      </a:r>
+                      <a:r>
+                        <a:rPr lang="ko-KR" altLang="en-US" sz="800" dirty="0">
+                          <a:solidFill>
+                            <a:schemeClr val="tx1"/>
+                          </a:solidFill>
+                          <a:latin typeface="나눔고딕" panose="020D0604000000000000" pitchFamily="50" charset="-127"/>
+                          <a:ea typeface="나눔고딕" panose="020D0604000000000000" pitchFamily="50" charset="-127"/>
+                        </a:rPr>
+                        <a:t>듣기자료</a:t>
+                      </a:r>
+                      <a:r>
+                        <a:rPr lang="en-US" altLang="ko-KR" sz="800" dirty="0">
+                          <a:solidFill>
+                            <a:schemeClr val="tx1"/>
+                          </a:solidFill>
+                          <a:latin typeface="나눔고딕" panose="020D0604000000000000" pitchFamily="50" charset="-127"/>
+                          <a:ea typeface="나눔고딕" panose="020D0604000000000000" pitchFamily="50" charset="-127"/>
+                        </a:rPr>
+                        <a:t>, </a:t>
+                      </a:r>
+                      <a:r>
+                        <a:rPr lang="ko-KR" altLang="en-US" sz="800" dirty="0">
+                          <a:solidFill>
+                            <a:schemeClr val="tx1"/>
+                          </a:solidFill>
+                          <a:latin typeface="나눔고딕" panose="020D0604000000000000" pitchFamily="50" charset="-127"/>
+                          <a:ea typeface="나눔고딕" panose="020D0604000000000000" pitchFamily="50" charset="-127"/>
+                        </a:rPr>
+                        <a:t>교사용자료</a:t>
+                      </a:r>
+                      <a:r>
+                        <a:rPr lang="en-US" altLang="ko-KR" sz="800" dirty="0">
+                          <a:solidFill>
+                            <a:schemeClr val="tx1"/>
+                          </a:solidFill>
+                          <a:latin typeface="나눔고딕" panose="020D0604000000000000" pitchFamily="50" charset="-127"/>
+                          <a:ea typeface="나눔고딕" panose="020D0604000000000000" pitchFamily="50" charset="-127"/>
+                        </a:rPr>
+                        <a:t>, </a:t>
+                      </a:r>
+                      <a:r>
+                        <a:rPr lang="ko-KR" altLang="en-US" sz="800" dirty="0">
+                          <a:solidFill>
+                            <a:schemeClr val="tx1"/>
+                          </a:solidFill>
+                          <a:latin typeface="나눔고딕" panose="020D0604000000000000" pitchFamily="50" charset="-127"/>
+                          <a:ea typeface="나눔고딕" panose="020D0604000000000000" pitchFamily="50" charset="-127"/>
+                        </a:rPr>
+                        <a:t>교사용 이북</a:t>
+                      </a:r>
+                      <a:r>
+                        <a:rPr lang="en-US" altLang="ko-KR" sz="800" dirty="0">
+                          <a:solidFill>
+                            <a:schemeClr val="tx1"/>
+                          </a:solidFill>
+                          <a:latin typeface="나눔고딕" panose="020D0604000000000000" pitchFamily="50" charset="-127"/>
+                          <a:ea typeface="나눔고딕" panose="020D0604000000000000" pitchFamily="50" charset="-127"/>
+                        </a:rPr>
+                        <a:t>, </a:t>
+                      </a:r>
+                      <a:r>
+                        <a:rPr lang="ko-KR" altLang="en-US" sz="800" dirty="0">
+                          <a:solidFill>
+                            <a:schemeClr val="tx1"/>
+                          </a:solidFill>
+                          <a:latin typeface="나눔고딕" panose="020D0604000000000000" pitchFamily="50" charset="-127"/>
+                          <a:ea typeface="나눔고딕" panose="020D0604000000000000" pitchFamily="50" charset="-127"/>
+                        </a:rPr>
+                        <a:t>총판 안내</a:t>
+                      </a:r>
+                      <a:r>
+                        <a:rPr lang="en-US" altLang="ko-KR" sz="800" dirty="0">
+                          <a:solidFill>
+                            <a:schemeClr val="tx1"/>
+                          </a:solidFill>
+                          <a:latin typeface="나눔고딕" panose="020D0604000000000000" pitchFamily="50" charset="-127"/>
+                          <a:ea typeface="나눔고딕" panose="020D0604000000000000" pitchFamily="50" charset="-127"/>
+                        </a:rPr>
+                        <a:t>, FAQ</a:t>
+                      </a:r>
+                    </a:p>
+                    <a:p>
+                      <a:pPr marL="171450" indent="-171450" algn="just" latinLnBrk="1">
+                        <a:lnSpc>
+                          <a:spcPct val="130000"/>
+                        </a:lnSpc>
+                        <a:buFont typeface="Arial" panose="020B0604020202020204" pitchFamily="34" charset="0"/>
+                        <a:buChar char="•"/>
+                      </a:pPr>
+                      <a:r>
+                        <a:rPr lang="ko-KR" altLang="en-US" sz="800" b="1" dirty="0">
+                          <a:solidFill>
+                            <a:schemeClr val="tx1"/>
+                          </a:solidFill>
+                          <a:latin typeface="나눔고딕" panose="020D0604000000000000" pitchFamily="50" charset="-127"/>
+                          <a:ea typeface="나눔고딕" panose="020D0604000000000000" pitchFamily="50" charset="-127"/>
+                        </a:rPr>
+                        <a:t>도서 큐레이션</a:t>
+                      </a:r>
+                      <a:r>
+                        <a:rPr lang="en-US" altLang="ko-KR" sz="800" b="1" dirty="0">
+                          <a:solidFill>
+                            <a:schemeClr val="tx1"/>
+                          </a:solidFill>
+                          <a:latin typeface="나눔고딕" panose="020D0604000000000000" pitchFamily="50" charset="-127"/>
+                          <a:ea typeface="나눔고딕" panose="020D0604000000000000" pitchFamily="50" charset="-127"/>
+                        </a:rPr>
+                        <a:t>: </a:t>
+                      </a:r>
+                      <a:r>
+                        <a:rPr lang="ko-KR" altLang="en-US" sz="800" dirty="0">
+                          <a:solidFill>
+                            <a:schemeClr val="tx1"/>
+                          </a:solidFill>
+                          <a:latin typeface="나눔고딕" panose="020D0604000000000000" pitchFamily="50" charset="-127"/>
+                          <a:ea typeface="나눔고딕" panose="020D0604000000000000" pitchFamily="50" charset="-127"/>
+                        </a:rPr>
+                        <a:t>해시태그 기반 맞춤 추천</a:t>
+                      </a:r>
+                      <a:r>
+                        <a:rPr lang="en-US" altLang="ko-KR" sz="800" dirty="0">
+                          <a:solidFill>
+                            <a:schemeClr val="tx1"/>
+                          </a:solidFill>
+                          <a:latin typeface="나눔고딕" panose="020D0604000000000000" pitchFamily="50" charset="-127"/>
+                          <a:ea typeface="나눔고딕" panose="020D0604000000000000" pitchFamily="50" charset="-127"/>
+                        </a:rPr>
+                        <a:t>: ‘</a:t>
+                      </a:r>
+                      <a:r>
+                        <a:rPr lang="ko-KR" altLang="en-US" sz="800" dirty="0">
+                          <a:solidFill>
+                            <a:schemeClr val="tx1"/>
+                          </a:solidFill>
+                          <a:latin typeface="나눔고딕" panose="020D0604000000000000" pitchFamily="50" charset="-127"/>
+                          <a:ea typeface="나눔고딕" panose="020D0604000000000000" pitchFamily="50" charset="-127"/>
+                        </a:rPr>
+                        <a:t>그린</a:t>
+                      </a:r>
+                      <a:r>
+                        <a:rPr lang="en-US" altLang="ko-KR" sz="800" dirty="0">
+                          <a:solidFill>
+                            <a:schemeClr val="tx1"/>
+                          </a:solidFill>
+                          <a:latin typeface="나눔고딕" panose="020D0604000000000000" pitchFamily="50" charset="-127"/>
+                          <a:ea typeface="나눔고딕" panose="020D0604000000000000" pitchFamily="50" charset="-127"/>
+                        </a:rPr>
+                        <a:t> pick’, </a:t>
+                      </a:r>
+                      <a:r>
+                        <a:rPr lang="ko-KR" altLang="en-US" sz="800" dirty="0" err="1">
+                          <a:solidFill>
+                            <a:schemeClr val="tx1"/>
+                          </a:solidFill>
+                          <a:latin typeface="나눔고딕" panose="020D0604000000000000" pitchFamily="50" charset="-127"/>
+                          <a:ea typeface="나눔고딕" panose="020D0604000000000000" pitchFamily="50" charset="-127"/>
+                        </a:rPr>
+                        <a:t>타겟별</a:t>
+                      </a:r>
+                      <a:r>
+                        <a:rPr lang="ko-KR" altLang="en-US" sz="800" dirty="0">
+                          <a:solidFill>
+                            <a:schemeClr val="tx1"/>
+                          </a:solidFill>
+                          <a:latin typeface="나눔고딕" panose="020D0604000000000000" pitchFamily="50" charset="-127"/>
+                          <a:ea typeface="나눔고딕" panose="020D0604000000000000" pitchFamily="50" charset="-127"/>
+                        </a:rPr>
+                        <a:t> </a:t>
+                      </a:r>
+                      <a:r>
+                        <a:rPr lang="en-US" altLang="ko-KR" sz="800" dirty="0">
+                          <a:solidFill>
+                            <a:schemeClr val="tx1"/>
+                          </a:solidFill>
+                          <a:latin typeface="나눔고딕" panose="020D0604000000000000" pitchFamily="50" charset="-127"/>
+                          <a:ea typeface="나눔고딕" panose="020D0604000000000000" pitchFamily="50" charset="-127"/>
+                        </a:rPr>
+                        <a:t>‘</a:t>
+                      </a:r>
+                      <a:r>
+                        <a:rPr lang="ko-KR" altLang="en-US" sz="800" dirty="0">
+                          <a:solidFill>
+                            <a:schemeClr val="tx1"/>
+                          </a:solidFill>
+                          <a:latin typeface="나눔고딕" panose="020D0604000000000000" pitchFamily="50" charset="-127"/>
+                          <a:ea typeface="나눔고딕" panose="020D0604000000000000" pitchFamily="50" charset="-127"/>
+                        </a:rPr>
+                        <a:t>베스트셀러</a:t>
+                      </a:r>
+                      <a:r>
+                        <a:rPr lang="en-US" altLang="ko-KR" sz="800" dirty="0">
+                          <a:solidFill>
+                            <a:schemeClr val="tx1"/>
+                          </a:solidFill>
+                          <a:latin typeface="나눔고딕" panose="020D0604000000000000" pitchFamily="50" charset="-127"/>
+                          <a:ea typeface="나눔고딕" panose="020D0604000000000000" pitchFamily="50" charset="-127"/>
+                        </a:rPr>
+                        <a:t>‘</a:t>
+                      </a:r>
+                      <a:r>
+                        <a:rPr lang="ko-KR" altLang="en-US" sz="800" dirty="0">
+                          <a:solidFill>
+                            <a:schemeClr val="tx1"/>
+                          </a:solidFill>
+                          <a:latin typeface="나눔고딕" panose="020D0604000000000000" pitchFamily="50" charset="-127"/>
+                          <a:ea typeface="나눔고딕" panose="020D0604000000000000" pitchFamily="50" charset="-127"/>
+                        </a:rPr>
+                        <a:t>랭킹</a:t>
+                      </a:r>
+                      <a:r>
+                        <a:rPr lang="en-US" altLang="ko-KR" sz="800" dirty="0">
+                          <a:solidFill>
+                            <a:schemeClr val="tx1"/>
+                          </a:solidFill>
+                          <a:latin typeface="나눔고딕" panose="020D0604000000000000" pitchFamily="50" charset="-127"/>
+                          <a:ea typeface="나눔고딕" panose="020D0604000000000000" pitchFamily="50" charset="-127"/>
+                        </a:rPr>
+                        <a:t> </a:t>
+                      </a:r>
+                      <a:r>
+                        <a:rPr lang="ko-KR" altLang="en-US" sz="800" dirty="0">
+                          <a:solidFill>
+                            <a:schemeClr val="tx1"/>
+                          </a:solidFill>
+                          <a:latin typeface="나눔고딕" panose="020D0604000000000000" pitchFamily="50" charset="-127"/>
+                          <a:ea typeface="나눔고딕" panose="020D0604000000000000" pitchFamily="50" charset="-127"/>
+                        </a:rPr>
+                        <a:t>제공</a:t>
                       </a:r>
                       <a:endParaRPr lang="en-US" altLang="ko-KR" sz="800" dirty="0">
                         <a:solidFill>
@@ -13835,40 +14352,44 @@
                         <a:buChar char="•"/>
                       </a:pPr>
                       <a:r>
-                        <a:rPr lang="ko-KR" altLang="en-US" sz="800" dirty="0">
+                        <a:rPr lang="ko-KR" altLang="en-US" sz="800" b="1" dirty="0">
                           <a:solidFill>
                             <a:schemeClr val="tx1"/>
                           </a:solidFill>
                           <a:latin typeface="나눔고딕" panose="020D0604000000000000" pitchFamily="50" charset="-127"/>
                           <a:ea typeface="나눔고딕" panose="020D0604000000000000" pitchFamily="50" charset="-127"/>
                         </a:rPr>
-                        <a:t>표준계약서 작성</a:t>
+                        <a:t>미디어 </a:t>
                       </a:r>
-                      <a:endParaRPr lang="en-US" altLang="ko-KR" sz="800" dirty="0">
-                        <a:solidFill>
-                          <a:schemeClr val="tx1"/>
-                        </a:solidFill>
-                        <a:latin typeface="나눔고딕" panose="020D0604000000000000" pitchFamily="50" charset="-127"/>
-                        <a:ea typeface="나눔고딕" panose="020D0604000000000000" pitchFamily="50" charset="-127"/>
-                      </a:endParaRPr>
-                    </a:p>
-                    <a:p>
-                      <a:pPr marL="171450" indent="-171450" algn="just" latinLnBrk="1">
-                        <a:lnSpc>
-                          <a:spcPct val="130000"/>
-                        </a:lnSpc>
-                        <a:buFont typeface="Arial" panose="020B0604020202020204" pitchFamily="34" charset="0"/>
-                        <a:buChar char="•"/>
-                      </a:pPr>
                       <a:r>
-                        <a:rPr lang="ko-KR" altLang="en-US" sz="800" dirty="0" err="1">
+                        <a:rPr lang="en-US" altLang="ko-KR" sz="800" b="1" dirty="0">
                           <a:solidFill>
                             <a:schemeClr val="tx1"/>
                           </a:solidFill>
                           <a:latin typeface="나눔고딕" panose="020D0604000000000000" pitchFamily="50" charset="-127"/>
                           <a:ea typeface="나눔고딕" panose="020D0604000000000000" pitchFamily="50" charset="-127"/>
                         </a:rPr>
-                        <a:t>에스크로</a:t>
+                        <a:t>&amp; </a:t>
+                      </a:r>
+                      <a:r>
+                        <a:rPr lang="ko-KR" altLang="en-US" sz="800" b="1" dirty="0">
+                          <a:solidFill>
+                            <a:schemeClr val="tx1"/>
+                          </a:solidFill>
+                          <a:latin typeface="나눔고딕" panose="020D0604000000000000" pitchFamily="50" charset="-127"/>
+                          <a:ea typeface="나눔고딕" panose="020D0604000000000000" pitchFamily="50" charset="-127"/>
+                        </a:rPr>
+                        <a:t>커뮤니티</a:t>
+                      </a:r>
+                      <a:r>
+                        <a:rPr lang="en-US" altLang="ko-KR" sz="800" b="1" dirty="0">
+                          <a:solidFill>
+                            <a:schemeClr val="tx1"/>
+                          </a:solidFill>
+                          <a:latin typeface="나눔고딕" panose="020D0604000000000000" pitchFamily="50" charset="-127"/>
+                          <a:ea typeface="나눔고딕" panose="020D0604000000000000" pitchFamily="50" charset="-127"/>
+                        </a:rPr>
+                        <a:t>: </a:t>
                       </a:r>
                       <a:r>
                         <a:rPr lang="ko-KR" altLang="en-US" sz="800" dirty="0">
@@ -13878,24 +14399,8 @@
                           <a:latin typeface="나눔고딕" panose="020D0604000000000000" pitchFamily="50" charset="-127"/>
                           <a:ea typeface="나눔고딕" panose="020D0604000000000000" pitchFamily="50" charset="-127"/>
                         </a:rPr>
-                        <a:t> 방식의  대금보호 시스템 제공</a:t>
+                        <a:t>유튜브 영상 갤러리</a:t>
                       </a:r>
-                      <a:endParaRPr lang="en-US" altLang="ko-KR" sz="800" dirty="0">
-                        <a:solidFill>
-                          <a:schemeClr val="tx1"/>
-                        </a:solidFill>
-                        <a:latin typeface="나눔고딕" panose="020D0604000000000000" pitchFamily="50" charset="-127"/>
-                        <a:ea typeface="나눔고딕" panose="020D0604000000000000" pitchFamily="50" charset="-127"/>
-                      </a:endParaRPr>
-                    </a:p>
-                    <a:p>
-                      <a:pPr marL="171450" indent="-171450" algn="just" latinLnBrk="1">
-                        <a:lnSpc>
-                          <a:spcPct val="130000"/>
-                        </a:lnSpc>
-                        <a:buFont typeface="Arial" panose="020B0604020202020204" pitchFamily="34" charset="0"/>
-                        <a:buChar char="•"/>
-                      </a:pPr>
                       <a:r>
                         <a:rPr lang="en-US" altLang="ko-KR" sz="800" dirty="0">
                           <a:solidFill>
@@ -13904,7 +14409,7 @@
                           <a:latin typeface="나눔고딕" panose="020D0604000000000000" pitchFamily="50" charset="-127"/>
                           <a:ea typeface="나눔고딕" panose="020D0604000000000000" pitchFamily="50" charset="-127"/>
                         </a:rPr>
-                        <a:t>IT</a:t>
+                        <a:t>(</a:t>
                       </a:r>
                       <a:r>
                         <a:rPr lang="ko-KR" altLang="en-US" sz="800" dirty="0" err="1">
@@ -13914,7 +14419,27 @@
                           <a:latin typeface="나눔고딕" panose="020D0604000000000000" pitchFamily="50" charset="-127"/>
                           <a:ea typeface="나눔고딕" panose="020D0604000000000000" pitchFamily="50" charset="-127"/>
                         </a:rPr>
-                        <a:t>아웃소싱</a:t>
+                        <a:t>한능검</a:t>
+                      </a:r>
+                      <a:r>
+                        <a:rPr lang="en-US" altLang="ko-KR" sz="800" dirty="0">
+                          <a:solidFill>
+                            <a:schemeClr val="tx1"/>
+                          </a:solidFill>
+                          <a:latin typeface="나눔고딕" panose="020D0604000000000000" pitchFamily="50" charset="-127"/>
+                          <a:ea typeface="나눔고딕" panose="020D0604000000000000" pitchFamily="50" charset="-127"/>
+                        </a:rPr>
+                        <a:t>, </a:t>
+                      </a:r>
+                      <a:r>
+                        <a:rPr lang="ko-KR" altLang="en-US" sz="800" dirty="0" err="1">
+                          <a:solidFill>
+                            <a:schemeClr val="tx1"/>
+                          </a:solidFill>
+                          <a:latin typeface="나눔고딕" panose="020D0604000000000000" pitchFamily="50" charset="-127"/>
+                          <a:ea typeface="나눔고딕" panose="020D0604000000000000" pitchFamily="50" charset="-127"/>
+                        </a:rPr>
+                        <a:t>집밥</a:t>
                       </a:r>
                       <a:r>
                         <a:rPr lang="ko-KR" altLang="en-US" sz="800" dirty="0">
@@ -13924,17 +14449,17 @@
                           <a:latin typeface="나눔고딕" panose="020D0604000000000000" pitchFamily="50" charset="-127"/>
                           <a:ea typeface="나눔고딕" panose="020D0604000000000000" pitchFamily="50" charset="-127"/>
                         </a:rPr>
-                        <a:t> </a:t>
+                        <a:t> 백과 등</a:t>
                       </a:r>
                       <a:r>
-                        <a:rPr lang="ko-KR" altLang="en-US" sz="800" dirty="0" err="1">
+                        <a:rPr lang="en-US" altLang="ko-KR" sz="800" dirty="0">
                           <a:solidFill>
                             <a:schemeClr val="tx1"/>
                           </a:solidFill>
                           <a:latin typeface="나눔고딕" panose="020D0604000000000000" pitchFamily="50" charset="-127"/>
                           <a:ea typeface="나눔고딕" panose="020D0604000000000000" pitchFamily="50" charset="-127"/>
                         </a:rPr>
-                        <a:t>협업툴</a:t>
+                        <a:t>), </a:t>
                       </a:r>
                       <a:r>
                         <a:rPr lang="ko-KR" altLang="en-US" sz="800" dirty="0">
@@ -13944,17 +14469,17 @@
                           <a:latin typeface="나눔고딕" panose="020D0604000000000000" pitchFamily="50" charset="-127"/>
                           <a:ea typeface="나눔고딕" panose="020D0604000000000000" pitchFamily="50" charset="-127"/>
                         </a:rPr>
-                        <a:t> </a:t>
+                        <a:t>진행 중인 이벤트 목록</a:t>
                       </a:r>
                       <a:r>
-                        <a:rPr lang="ko-KR" altLang="en-US" sz="800" dirty="0" err="1">
+                        <a:rPr lang="en-US" altLang="ko-KR" sz="800" dirty="0">
                           <a:solidFill>
                             <a:schemeClr val="tx1"/>
                           </a:solidFill>
                           <a:latin typeface="나눔고딕" panose="020D0604000000000000" pitchFamily="50" charset="-127"/>
                           <a:ea typeface="나눔고딕" panose="020D0604000000000000" pitchFamily="50" charset="-127"/>
                         </a:rPr>
-                        <a:t>프로젝트룸</a:t>
+                        <a:t>, </a:t>
                       </a:r>
                       <a:r>
                         <a:rPr lang="ko-KR" altLang="en-US" sz="800" dirty="0">
@@ -13964,24 +14489,18 @@
                           <a:latin typeface="나눔고딕" panose="020D0604000000000000" pitchFamily="50" charset="-127"/>
                           <a:ea typeface="나눔고딕" panose="020D0604000000000000" pitchFamily="50" charset="-127"/>
                         </a:rPr>
-                        <a:t> 제공</a:t>
+                        <a:t>공식 </a:t>
                       </a:r>
-                      <a:endParaRPr lang="en-US" altLang="ko-KR" sz="800" dirty="0">
-                        <a:solidFill>
-                          <a:schemeClr val="tx1"/>
-                        </a:solidFill>
-                        <a:latin typeface="나눔고딕" panose="020D0604000000000000" pitchFamily="50" charset="-127"/>
-                        <a:ea typeface="나눔고딕" panose="020D0604000000000000" pitchFamily="50" charset="-127"/>
-                      </a:endParaRPr>
-                    </a:p>
-                    <a:p>
-                      <a:pPr marL="171450" indent="-171450" algn="just" latinLnBrk="1">
-                        <a:lnSpc>
-                          <a:spcPct val="130000"/>
-                        </a:lnSpc>
-                        <a:buFont typeface="Arial" panose="020B0604020202020204" pitchFamily="34" charset="0"/>
-                        <a:buChar char="•"/>
-                      </a:pPr>
+                      <a:r>
+                        <a:rPr lang="en-US" altLang="ko-KR" sz="800" dirty="0">
+                          <a:solidFill>
+                            <a:schemeClr val="tx1"/>
+                          </a:solidFill>
+                          <a:latin typeface="나눔고딕" panose="020D0604000000000000" pitchFamily="50" charset="-127"/>
+                          <a:ea typeface="나눔고딕" panose="020D0604000000000000" pitchFamily="50" charset="-127"/>
+                        </a:rPr>
+                        <a:t>SNS(</a:t>
+                      </a:r>
                       <a:r>
                         <a:rPr lang="ko-KR" altLang="en-US" sz="800" dirty="0">
                           <a:solidFill>
@@ -13990,7 +14509,87 @@
                           <a:latin typeface="나눔고딕" panose="020D0604000000000000" pitchFamily="50" charset="-127"/>
                           <a:ea typeface="나눔고딕" panose="020D0604000000000000" pitchFamily="50" charset="-127"/>
                         </a:rPr>
-                        <a:t>하자보수보증보험 가입</a:t>
+                        <a:t>인스타그램</a:t>
+                      </a:r>
+                      <a:r>
+                        <a:rPr lang="en-US" altLang="ko-KR" sz="800" dirty="0">
+                          <a:solidFill>
+                            <a:schemeClr val="tx1"/>
+                          </a:solidFill>
+                          <a:latin typeface="나눔고딕" panose="020D0604000000000000" pitchFamily="50" charset="-127"/>
+                          <a:ea typeface="나눔고딕" panose="020D0604000000000000" pitchFamily="50" charset="-127"/>
+                        </a:rPr>
+                        <a:t>,</a:t>
+                      </a:r>
+                      <a:r>
+                        <a:rPr lang="ko-KR" altLang="en-US" sz="800" dirty="0">
+                          <a:solidFill>
+                            <a:schemeClr val="tx1"/>
+                          </a:solidFill>
+                          <a:latin typeface="나눔고딕" panose="020D0604000000000000" pitchFamily="50" charset="-127"/>
+                          <a:ea typeface="나눔고딕" panose="020D0604000000000000" pitchFamily="50" charset="-127"/>
+                        </a:rPr>
+                        <a:t>유튜브</a:t>
+                      </a:r>
+                      <a:r>
+                        <a:rPr lang="en-US" altLang="ko-KR" sz="800" dirty="0">
+                          <a:solidFill>
+                            <a:schemeClr val="tx1"/>
+                          </a:solidFill>
+                          <a:latin typeface="나눔고딕" panose="020D0604000000000000" pitchFamily="50" charset="-127"/>
+                          <a:ea typeface="나눔고딕" panose="020D0604000000000000" pitchFamily="50" charset="-127"/>
+                        </a:rPr>
+                        <a:t>,</a:t>
+                      </a:r>
+                      <a:r>
+                        <a:rPr lang="ko-KR" altLang="en-US" sz="800" dirty="0">
+                          <a:solidFill>
+                            <a:schemeClr val="tx1"/>
+                          </a:solidFill>
+                          <a:latin typeface="나눔고딕" panose="020D0604000000000000" pitchFamily="50" charset="-127"/>
+                          <a:ea typeface="나눔고딕" panose="020D0604000000000000" pitchFamily="50" charset="-127"/>
+                        </a:rPr>
+                        <a:t>블로그</a:t>
+                      </a:r>
+                      <a:r>
+                        <a:rPr lang="en-US" altLang="ko-KR" sz="800" dirty="0">
+                          <a:solidFill>
+                            <a:schemeClr val="tx1"/>
+                          </a:solidFill>
+                          <a:latin typeface="나눔고딕" panose="020D0604000000000000" pitchFamily="50" charset="-127"/>
+                          <a:ea typeface="나눔고딕" panose="020D0604000000000000" pitchFamily="50" charset="-127"/>
+                        </a:rPr>
+                        <a:t>/</a:t>
+                      </a:r>
+                      <a:r>
+                        <a:rPr lang="ko-KR" altLang="en-US" sz="800" dirty="0">
+                          <a:solidFill>
+                            <a:schemeClr val="tx1"/>
+                          </a:solidFill>
+                          <a:latin typeface="나눔고딕" panose="020D0604000000000000" pitchFamily="50" charset="-127"/>
+                          <a:ea typeface="나눔고딕" panose="020D0604000000000000" pitchFamily="50" charset="-127"/>
+                        </a:rPr>
+                        <a:t>까페</a:t>
+                      </a:r>
+                      <a:r>
+                        <a:rPr lang="en-US" altLang="ko-KR" sz="800" dirty="0">
+                          <a:solidFill>
+                            <a:schemeClr val="tx1"/>
+                          </a:solidFill>
+                          <a:latin typeface="나눔고딕" panose="020D0604000000000000" pitchFamily="50" charset="-127"/>
+                          <a:ea typeface="나눔고딕" panose="020D0604000000000000" pitchFamily="50" charset="-127"/>
+                        </a:rPr>
+                        <a:t>) </a:t>
+                      </a:r>
+                      <a:r>
+                        <a:rPr lang="ko-KR" altLang="en-US" sz="800" dirty="0">
+                          <a:solidFill>
+                            <a:schemeClr val="tx1"/>
+                          </a:solidFill>
+                          <a:latin typeface="나눔고딕" panose="020D0604000000000000" pitchFamily="50" charset="-127"/>
+                          <a:ea typeface="나눔고딕" panose="020D0604000000000000" pitchFamily="50" charset="-127"/>
+                        </a:rPr>
+                        <a:t>링크 연동 </a:t>
                       </a:r>
                       <a:endParaRPr lang="en-US" altLang="ko-KR" sz="800" dirty="0">
                         <a:solidFill>
@@ -14137,14 +14736,24 @@
                         <a:buChar char="•"/>
                       </a:pPr>
                       <a:r>
-                        <a:rPr lang="en-US" altLang="ko-KR" sz="800" dirty="0">
-                          <a:solidFill>
-                            <a:schemeClr val="tx1"/>
-                          </a:solidFill>
-                          <a:latin typeface="나눔고딕" panose="020D0604000000000000" pitchFamily="50" charset="-127"/>
-                          <a:ea typeface="나눔고딕" panose="020D0604000000000000" pitchFamily="50" charset="-127"/>
-                        </a:rPr>
-                        <a:t>IT </a:t>
+                        <a:rPr lang="ko-KR" altLang="en-US" sz="800" dirty="0"/>
+                        <a:t>초</a:t>
+                      </a:r>
+                      <a:r>
+                        <a:rPr lang="en-US" altLang="ko-KR" sz="800" dirty="0"/>
+                        <a:t>·</a:t>
+                      </a:r>
+                      <a:r>
+                        <a:rPr lang="ko-KR" altLang="en-US" sz="800" dirty="0"/>
+                        <a:t>중</a:t>
+                      </a:r>
+                      <a:r>
+                        <a:rPr lang="en-US" altLang="ko-KR" sz="800" dirty="0"/>
+                        <a:t>·</a:t>
+                      </a:r>
+                      <a:r>
+                        <a:rPr lang="ko-KR" altLang="en-US" sz="800" dirty="0"/>
+                        <a:t>고등학</a:t>
                       </a:r>
                       <a:r>
                         <a:rPr lang="ko-KR" altLang="en-US" sz="800" dirty="0">
@@ -14154,56 +14763,10 @@
                           <a:latin typeface="나눔고딕" panose="020D0604000000000000" pitchFamily="50" charset="-127"/>
                           <a:ea typeface="나눔고딕" panose="020D0604000000000000" pitchFamily="50" charset="-127"/>
                         </a:rPr>
-                        <a:t>외주를 맡길 수 있는 프로젝트를 가진 클라이언트</a:t>
+                        <a:t>생</a:t>
                       </a:r>
-                      <a:endParaRPr lang="en-US" altLang="ko-KR" sz="800" dirty="0">
-                        <a:solidFill>
-                          <a:schemeClr val="tx1"/>
-                        </a:solidFill>
-                        <a:latin typeface="나눔고딕" panose="020D0604000000000000" pitchFamily="50" charset="-127"/>
-                        <a:ea typeface="나눔고딕" panose="020D0604000000000000" pitchFamily="50" charset="-127"/>
-                      </a:endParaRPr>
-                    </a:p>
-                    <a:p>
-                      <a:pPr marL="171450" indent="-171450" algn="just" latinLnBrk="1">
-                        <a:lnSpc>
-                          <a:spcPct val="130000"/>
-                        </a:lnSpc>
-                        <a:buFont typeface="Arial" panose="020B0604020202020204" pitchFamily="34" charset="0"/>
-                        <a:buChar char="•"/>
-                      </a:pPr>
                       <a:r>
                         <a:rPr lang="en-US" altLang="ko-KR" sz="800" dirty="0">
-                          <a:solidFill>
-                            <a:schemeClr val="tx1"/>
-                          </a:solidFill>
-                          <a:latin typeface="나눔고딕" panose="020D0604000000000000" pitchFamily="50" charset="-127"/>
-                          <a:ea typeface="나눔고딕" panose="020D0604000000000000" pitchFamily="50" charset="-127"/>
-                        </a:rPr>
-                        <a:t>IT</a:t>
-                      </a:r>
-                      <a:r>
-                        <a:rPr lang="en-US" altLang="ko-KR" sz="800" baseline="0" dirty="0">
-                          <a:solidFill>
-                            <a:schemeClr val="tx1"/>
-                          </a:solidFill>
-                          <a:latin typeface="나눔고딕" panose="020D0604000000000000" pitchFamily="50" charset="-127"/>
-                          <a:ea typeface="나눔고딕" panose="020D0604000000000000" pitchFamily="50" charset="-127"/>
-                        </a:rPr>
-                        <a:t> </a:t>
-                      </a:r>
-                      <a:r>
-                        <a:rPr lang="ko-KR" altLang="en-US" sz="800" baseline="0" dirty="0">
-                          <a:solidFill>
-                            <a:schemeClr val="tx1"/>
-                          </a:solidFill>
-                          <a:latin typeface="나눔고딕" panose="020D0604000000000000" pitchFamily="50" charset="-127"/>
-                          <a:ea typeface="나눔고딕" panose="020D0604000000000000" pitchFamily="50" charset="-127"/>
-                        </a:rPr>
-                        <a:t>전문 개발자</a:t>
-                      </a:r>
-                      <a:r>
-                        <a:rPr lang="en-US" altLang="ko-KR" sz="800" baseline="0" dirty="0">
                           <a:solidFill>
                             <a:schemeClr val="tx1"/>
                           </a:solidFill>
@@ -14213,17 +14776,17 @@
                         <a:t>, </a:t>
                       </a:r>
                       <a:r>
-                        <a:rPr lang="ko-KR" altLang="en-US" sz="800" baseline="0" dirty="0">
+                        <a:rPr lang="ko-KR" altLang="en-US" sz="800" dirty="0">
                           <a:solidFill>
                             <a:schemeClr val="tx1"/>
                           </a:solidFill>
                           <a:latin typeface="나눔고딕" panose="020D0604000000000000" pitchFamily="50" charset="-127"/>
                           <a:ea typeface="나눔고딕" panose="020D0604000000000000" pitchFamily="50" charset="-127"/>
                         </a:rPr>
-                        <a:t>디자이너</a:t>
+                        <a:t>학부모</a:t>
                       </a:r>
                       <a:r>
-                        <a:rPr lang="en-US" altLang="ko-KR" sz="800" baseline="0" dirty="0">
+                        <a:rPr lang="en-US" altLang="ko-KR" sz="800" dirty="0">
                           <a:solidFill>
                             <a:schemeClr val="tx1"/>
                           </a:solidFill>
@@ -14233,22 +14796,65 @@
                         <a:t>, </a:t>
                       </a:r>
                       <a:r>
-                        <a:rPr lang="ko-KR" altLang="en-US" sz="800" baseline="0" dirty="0">
+                        <a:rPr lang="ko-KR" altLang="en-US" sz="800" dirty="0">
                           <a:solidFill>
                             <a:schemeClr val="tx1"/>
                           </a:solidFill>
                           <a:latin typeface="나눔고딕" panose="020D0604000000000000" pitchFamily="50" charset="-127"/>
                           <a:ea typeface="나눔고딕" panose="020D0604000000000000" pitchFamily="50" charset="-127"/>
                         </a:rPr>
-                        <a:t>기업</a:t>
+                        <a:t>학교 및 학원 교사 </a:t>
                       </a:r>
-                      <a:endParaRPr lang="en-US" altLang="ko-KR" sz="800" dirty="0">
-                        <a:solidFill>
-                          <a:schemeClr val="tx1"/>
-                        </a:solidFill>
-                        <a:latin typeface="나눔고딕" panose="020D0604000000000000" pitchFamily="50" charset="-127"/>
-                        <a:ea typeface="나눔고딕" panose="020D0604000000000000" pitchFamily="50" charset="-127"/>
-                      </a:endParaRPr>
+                      <a:r>
+                        <a:rPr lang="en-US" altLang="ko-KR" sz="800" dirty="0">
+                          <a:solidFill>
+                            <a:schemeClr val="tx1"/>
+                          </a:solidFill>
+                          <a:latin typeface="나눔고딕" panose="020D0604000000000000" pitchFamily="50" charset="-127"/>
+                          <a:ea typeface="나눔고딕" panose="020D0604000000000000" pitchFamily="50" charset="-127"/>
+                        </a:rPr>
+                        <a:t>, </a:t>
+                      </a:r>
+                      <a:r>
+                        <a:rPr lang="ko-KR" altLang="en-US" sz="800" dirty="0">
+                          <a:solidFill>
+                            <a:schemeClr val="tx1"/>
+                          </a:solidFill>
+                          <a:latin typeface="나눔고딕" panose="020D0604000000000000" pitchFamily="50" charset="-127"/>
+                          <a:ea typeface="나눔고딕" panose="020D0604000000000000" pitchFamily="50" charset="-127"/>
+                        </a:rPr>
+                        <a:t>일반 독자</a:t>
+                      </a:r>
+                      <a:r>
+                        <a:rPr lang="en-US" altLang="ko-KR" sz="800" dirty="0">
+                          <a:solidFill>
+                            <a:schemeClr val="tx1"/>
+                          </a:solidFill>
+                          <a:latin typeface="나눔고딕" panose="020D0604000000000000" pitchFamily="50" charset="-127"/>
+                          <a:ea typeface="나눔고딕" panose="020D0604000000000000" pitchFamily="50" charset="-127"/>
+                        </a:rPr>
+                        <a:t>(</a:t>
+                      </a:r>
+                      <a:r>
+                        <a:rPr lang="ko-KR" altLang="en-US" sz="800" dirty="0">
+                          <a:solidFill>
+                            <a:schemeClr val="tx1"/>
+                          </a:solidFill>
+                          <a:latin typeface="나눔고딕" panose="020D0604000000000000" pitchFamily="50" charset="-127"/>
+                          <a:ea typeface="나눔고딕" panose="020D0604000000000000" pitchFamily="50" charset="-127"/>
+                        </a:rPr>
+                        <a:t>단행본 구독자</a:t>
+                      </a:r>
+                      <a:r>
+                        <a:rPr lang="en-US" altLang="ko-KR" sz="800" dirty="0">
+                          <a:solidFill>
+                            <a:schemeClr val="tx1"/>
+                          </a:solidFill>
+                          <a:latin typeface="나눔고딕" panose="020D0604000000000000" pitchFamily="50" charset="-127"/>
+                          <a:ea typeface="나눔고딕" panose="020D0604000000000000" pitchFamily="50" charset="-127"/>
+                        </a:rPr>
+                        <a:t>)</a:t>
+                      </a:r>
                     </a:p>
                   </a:txBody>
                   <a:tcPr anchor="ctr">
@@ -14579,7 +15185,7 @@
                       <a:pPr algn="l" latinLnBrk="1"/>
                       <a:r>
                         <a:rPr lang="en-US" altLang="ko-KR" sz="800" dirty="0"/>
-                        <a:t>2013</a:t>
+                        <a:t>2026</a:t>
                       </a:r>
                       <a:r>
                         <a:rPr lang="ko-KR" altLang="en-US" sz="800" dirty="0"/>
@@ -14587,7 +15193,7 @@
                       </a:r>
                       <a:r>
                         <a:rPr lang="en-US" altLang="ko-KR" sz="800" dirty="0"/>
-                        <a:t>9</a:t>
+                        <a:t>8</a:t>
                       </a:r>
                       <a:r>
                         <a:rPr lang="ko-KR" altLang="en-US" sz="800" dirty="0"/>

--- a/0_wbs/도서검색웹_SB_2026_0805.pptx
+++ b/0_wbs/도서검색웹_SB_2026_0805.pptx
@@ -237,7 +237,7 @@
           <a:p>
             <a:fld id="{999972AA-FE3A-41E8-94D7-0A348C1614D1}" type="datetimeFigureOut">
               <a:rPr lang="ko-KR" altLang="en-US" smtClean="0"/>
-              <a:t>2026-08-05</a:t>
+              <a:t>2026-08-06</a:t>
             </a:fld>
             <a:endParaRPr lang="ko-KR" altLang="en-US"/>
           </a:p>
@@ -402,7 +402,7 @@
           <a:p>
             <a:fld id="{CB25E66B-2806-4CC0-B543-C1F698B8CB0C}" type="datetimeFigureOut">
               <a:rPr lang="ko-KR" altLang="en-US" smtClean="0"/>
-              <a:t>2026-08-05</a:t>
+              <a:t>2026-08-06</a:t>
             </a:fld>
             <a:endParaRPr lang="ko-KR" altLang="en-US"/>
           </a:p>
@@ -12401,7 +12401,7 @@
           <p:nvPr>
             <p:extLst>
               <p:ext uri="{D42A27DB-BD31-4B8C-83A1-F6EECF244321}">
-                <p14:modId xmlns:p14="http://schemas.microsoft.com/office/powerpoint/2010/main" val="1274650770"/>
+                <p14:modId xmlns:p14="http://schemas.microsoft.com/office/powerpoint/2010/main" val="2275993006"/>
               </p:ext>
             </p:extLst>
           </p:nvPr>
@@ -14993,17 +14993,47 @@
                         <a:buChar char="•"/>
                       </a:pPr>
                       <a:r>
-                        <a:rPr lang="en-US" altLang="ko-KR" sz="800" dirty="0">
+                        <a:rPr lang="ko-KR" altLang="en-US" sz="800" baseline="0" dirty="0">
                           <a:solidFill>
                             <a:schemeClr val="tx1"/>
                           </a:solidFill>
                           <a:latin typeface="나눔고딕" panose="020D0604000000000000" pitchFamily="50" charset="-127"/>
                           <a:ea typeface="나눔고딕" panose="020D0604000000000000" pitchFamily="50" charset="-127"/>
                         </a:rPr>
-                        <a:t>PC/</a:t>
+                        <a:t>반응형 웹사이트</a:t>
                       </a:r>
                       <a:r>
-                        <a:rPr lang="ko-KR" altLang="en-US" sz="800" dirty="0" err="1">
+                        <a:rPr lang="en-US" altLang="ko-KR" sz="800" baseline="0" dirty="0">
+                          <a:solidFill>
+                            <a:schemeClr val="tx1"/>
+                          </a:solidFill>
+                          <a:latin typeface="나눔고딕" panose="020D0604000000000000" pitchFamily="50" charset="-127"/>
+                          <a:ea typeface="나눔고딕" panose="020D0604000000000000" pitchFamily="50" charset="-127"/>
+                        </a:rPr>
+                        <a:t>( PC, </a:t>
+                      </a:r>
+                      <a:r>
+                        <a:rPr lang="ko-KR" altLang="en-US" sz="800" baseline="0" dirty="0">
+                          <a:solidFill>
+                            <a:schemeClr val="tx1"/>
+                          </a:solidFill>
+                          <a:latin typeface="나눔고딕" panose="020D0604000000000000" pitchFamily="50" charset="-127"/>
+                          <a:ea typeface="나눔고딕" panose="020D0604000000000000" pitchFamily="50" charset="-127"/>
+                        </a:rPr>
+                        <a:t>태블릿</a:t>
+                      </a:r>
+                      <a:r>
+                        <a:rPr lang="en-US" altLang="ko-KR" sz="800" baseline="0" dirty="0">
+                          <a:solidFill>
+                            <a:schemeClr val="tx1"/>
+                          </a:solidFill>
+                          <a:latin typeface="나눔고딕" panose="020D0604000000000000" pitchFamily="50" charset="-127"/>
+                          <a:ea typeface="나눔고딕" panose="020D0604000000000000" pitchFamily="50" charset="-127"/>
+                        </a:rPr>
+                        <a:t>, </a:t>
+                      </a:r>
+                      <a:r>
+                        <a:rPr lang="ko-KR" altLang="en-US" sz="800" baseline="0" dirty="0">
                           <a:solidFill>
                             <a:schemeClr val="tx1"/>
                           </a:solidFill>
@@ -15020,25 +15050,8 @@
                           <a:latin typeface="나눔고딕" panose="020D0604000000000000" pitchFamily="50" charset="-127"/>
                           <a:ea typeface="나눔고딕" panose="020D0604000000000000" pitchFamily="50" charset="-127"/>
                         </a:rPr>
-                        <a:t> </a:t>
+                        <a:t>)</a:t>
                       </a:r>
-                      <a:r>
-                        <a:rPr lang="ko-KR" altLang="en-US" sz="800" baseline="0" dirty="0">
-                          <a:solidFill>
-                            <a:schemeClr val="tx1"/>
-                          </a:solidFill>
-                          <a:latin typeface="나눔고딕" panose="020D0604000000000000" pitchFamily="50" charset="-127"/>
-                          <a:ea typeface="나눔고딕" panose="020D0604000000000000" pitchFamily="50" charset="-127"/>
-                        </a:rPr>
-                        <a:t>웹</a:t>
-                      </a:r>
-                      <a:endParaRPr lang="en-US" altLang="ko-KR" sz="800" baseline="0" dirty="0">
-                        <a:solidFill>
-                          <a:schemeClr val="tx1"/>
-                        </a:solidFill>
-                        <a:latin typeface="나눔고딕" panose="020D0604000000000000" pitchFamily="50" charset="-127"/>
-                        <a:ea typeface="나눔고딕" panose="020D0604000000000000" pitchFamily="50" charset="-127"/>
-                      </a:endParaRPr>
                     </a:p>
                   </a:txBody>
                   <a:tcPr anchor="ctr">
@@ -15184,21 +15197,42 @@
                     <a:p>
                       <a:pPr algn="l" latinLnBrk="1"/>
                       <a:r>
+                        <a:rPr lang="ko-KR" altLang="en-US" sz="800" dirty="0"/>
+                        <a:t>특이사항</a:t>
+                      </a:r>
+                      <a:r>
                         <a:rPr lang="en-US" altLang="ko-KR" sz="800" dirty="0"/>
-                        <a:t>2026</a:t>
+                        <a:t>: ‘</a:t>
                       </a:r>
                       <a:r>
                         <a:rPr lang="ko-KR" altLang="en-US" sz="800" dirty="0"/>
-                        <a:t>년 </a:t>
+                        <a:t>초등 수능 수학 </a:t>
                       </a:r>
                       <a:r>
                         <a:rPr lang="en-US" altLang="ko-KR" sz="800" dirty="0"/>
-                        <a:t>8</a:t>
+                        <a:t>KICK’, ‘</a:t>
+                      </a:r>
+                      <a:r>
+                        <a:rPr lang="ko-KR" altLang="en-US" sz="800" dirty="0" err="1"/>
+                        <a:t>뭔말</a:t>
+                      </a:r>
+                      <a:r>
+                        <a:rPr lang="en-US" altLang="ko-KR" sz="800" dirty="0"/>
+                        <a:t> </a:t>
                       </a:r>
                       <a:r>
                         <a:rPr lang="ko-KR" altLang="en-US" sz="800" dirty="0"/>
-                        <a:t>월</a:t>
+                        <a:t>과학 용어</a:t>
                       </a:r>
+                      <a:r>
+                        <a:rPr lang="en-US" altLang="ko-KR" sz="800" dirty="0"/>
+                        <a:t>＇</a:t>
+                      </a:r>
+                      <a:r>
+                        <a:rPr lang="ko-KR" altLang="en-US" sz="800"/>
+                        <a:t>등 핵심 도서 시리즈 중심의 마케팅 전개</a:t>
+                      </a:r>
+                      <a:endParaRPr lang="ko-KR" altLang="en-US" sz="800" dirty="0"/>
                     </a:p>
                   </a:txBody>
                   <a:tcPr marL="68352" marR="68352" marT="34176" marB="34176" anchor="ctr">

--- a/0_wbs/도서검색웹_SB_2026_0805.pptx
+++ b/0_wbs/도서검색웹_SB_2026_0805.pptx
@@ -15576,97 +15576,6 @@
       </p:grpSpPr>
       <p:sp>
         <p:nvSpPr>
-          <p:cNvPr id="56" name="평행 사변형 55">
-            <a:extLst>
-              <a:ext uri="{FF2B5EF4-FFF2-40B4-BE49-F238E27FC236}">
-                <a16:creationId xmlns:a16="http://schemas.microsoft.com/office/drawing/2014/main" id="{C0245C10-3468-47CC-8C09-D3624B80E46C}"/>
-              </a:ext>
-            </a:extLst>
-          </p:cNvPr>
-          <p:cNvSpPr/>
-          <p:nvPr/>
-        </p:nvSpPr>
-        <p:spPr>
-          <a:xfrm>
-            <a:off x="5104088" y="3201418"/>
-            <a:ext cx="1325434" cy="343130"/>
-          </a:xfrm>
-          <a:prstGeom prst="parallelogram">
-            <a:avLst/>
-          </a:prstGeom>
-          <a:solidFill>
-            <a:schemeClr val="bg1"/>
-          </a:solidFill>
-          <a:ln w="3175">
-            <a:solidFill>
-              <a:schemeClr val="tx1">
-                <a:lumMod val="50000"/>
-                <a:lumOff val="50000"/>
-              </a:schemeClr>
-            </a:solidFill>
-          </a:ln>
-        </p:spPr>
-        <p:style>
-          <a:lnRef idx="2">
-            <a:schemeClr val="accent1">
-              <a:shade val="50000"/>
-            </a:schemeClr>
-          </a:lnRef>
-          <a:fillRef idx="1">
-            <a:schemeClr val="accent1"/>
-          </a:fillRef>
-          <a:effectRef idx="0">
-            <a:schemeClr val="accent1"/>
-          </a:effectRef>
-          <a:fontRef idx="minor">
-            <a:schemeClr val="lt1"/>
-          </a:fontRef>
-        </p:style>
-        <p:txBody>
-          <a:bodyPr wrap="none" lIns="0" tIns="0" rIns="0" bIns="0" rtlCol="0" anchor="ctr">
-            <a:normAutofit/>
-          </a:bodyPr>
-          <a:lstStyle/>
-          <a:p>
-            <a:pPr algn="ctr"/>
-            <a:r>
-              <a:rPr lang="ko-KR" altLang="en-US" sz="750" dirty="0">
-                <a:solidFill>
-                  <a:srgbClr val="000000"/>
-                </a:solidFill>
-                <a:latin typeface="나눔고딕" panose="020D0604000000000000" pitchFamily="50" charset="-127"/>
-                <a:ea typeface="나눔고딕" panose="020D0604000000000000" pitchFamily="50" charset="-127"/>
-                <a:cs typeface="Segoe UI" panose="020B0502040204020203" pitchFamily="34" charset="0"/>
-              </a:rPr>
-              <a:t>아이디</a:t>
-            </a:r>
-            <a:r>
-              <a:rPr lang="en-US" altLang="ko-KR" sz="750" dirty="0">
-                <a:solidFill>
-                  <a:srgbClr val="000000"/>
-                </a:solidFill>
-                <a:latin typeface="나눔고딕" panose="020D0604000000000000" pitchFamily="50" charset="-127"/>
-                <a:ea typeface="나눔고딕" panose="020D0604000000000000" pitchFamily="50" charset="-127"/>
-                <a:cs typeface="Segoe UI" panose="020B0502040204020203" pitchFamily="34" charset="0"/>
-              </a:rPr>
-              <a:t>/</a:t>
-            </a:r>
-            <a:r>
-              <a:rPr lang="ko-KR" altLang="en-US" sz="750" dirty="0">
-                <a:solidFill>
-                  <a:srgbClr val="000000"/>
-                </a:solidFill>
-                <a:latin typeface="나눔고딕" panose="020D0604000000000000" pitchFamily="50" charset="-127"/>
-                <a:ea typeface="나눔고딕" panose="020D0604000000000000" pitchFamily="50" charset="-127"/>
-                <a:cs typeface="Segoe UI" panose="020B0502040204020203" pitchFamily="34" charset="0"/>
-              </a:rPr>
-              <a:t>비밀번호 입력</a:t>
-            </a:r>
-          </a:p>
-        </p:txBody>
-      </p:sp>
-      <p:sp>
-        <p:nvSpPr>
           <p:cNvPr id="57" name="TextBox 56">
             <a:extLst>
               <a:ext uri="{FF2B5EF4-FFF2-40B4-BE49-F238E27FC236}">
@@ -15699,7 +15608,7 @@
                 <a:latin typeface="나눔고딕" panose="020D0604000000000000" pitchFamily="50" charset="-127"/>
                 <a:ea typeface="나눔고딕" panose="020D0604000000000000" pitchFamily="50" charset="-127"/>
               </a:rPr>
-              <a:t>클라이언트 유저 플로우</a:t>
+              <a:t>책 상세 정보 조회 플로우</a:t>
             </a:r>
           </a:p>
         </p:txBody>
@@ -15840,7 +15749,7 @@
                 <a:ea typeface="나눔고딕" panose="020D0604000000000000" pitchFamily="50" charset="-127"/>
                 <a:cs typeface="Segoe UI" panose="020B0502040204020203" pitchFamily="34" charset="0"/>
               </a:rPr>
-              <a:t>프로젝트 등록</a:t>
+              <a:t>책 제목 검색</a:t>
             </a:r>
           </a:p>
         </p:txBody>
@@ -15859,8 +15768,8 @@
         </p:nvSpPr>
         <p:spPr>
           <a:xfrm>
-            <a:off x="735923" y="1989782"/>
-            <a:ext cx="1015830" cy="338554"/>
+            <a:off x="735923" y="2589572"/>
+            <a:ext cx="1015830" cy="390458"/>
           </a:xfrm>
           <a:prstGeom prst="flowChartDecision">
             <a:avLst/>
@@ -15910,7 +15819,7 @@
                 <a:ea typeface="나눔고딕" panose="020D0604000000000000" pitchFamily="50" charset="-127"/>
                 <a:cs typeface="Segoe UI" panose="020B0502040204020203" pitchFamily="34" charset="0"/>
               </a:rPr>
-              <a:t>계정이</a:t>
+              <a:t>결과에 책이 </a:t>
             </a:r>
             <a:endParaRPr lang="en-US" altLang="ko-KR" sz="750" dirty="0">
               <a:solidFill>
@@ -16032,7 +15941,7 @@
         </p:nvCxnSpPr>
         <p:spPr>
           <a:xfrm>
-            <a:off x="1827294" y="2159059"/>
+            <a:off x="1827294" y="2695810"/>
             <a:ext cx="261402" cy="0"/>
           </a:xfrm>
           <a:prstGeom prst="straightConnector1">
@@ -16075,7 +15984,7 @@
         </p:nvSpPr>
         <p:spPr>
           <a:xfrm>
-            <a:off x="2163068" y="1983422"/>
+            <a:off x="2163068" y="2518946"/>
             <a:ext cx="840506" cy="338554"/>
           </a:xfrm>
           <a:prstGeom prst="rect">
@@ -16125,68 +16034,10 @@
                 <a:ea typeface="나눔고딕" panose="020D0604000000000000" pitchFamily="50" charset="-127"/>
                 <a:cs typeface="Segoe UI" panose="020B0502040204020203" pitchFamily="34" charset="0"/>
               </a:rPr>
-              <a:t>회원가입</a:t>
+              <a:t>검색 결과 </a:t>
             </a:r>
-          </a:p>
-        </p:txBody>
-      </p:sp>
-      <p:sp>
-        <p:nvSpPr>
-          <p:cNvPr id="65" name="직사각형 64">
-            <a:extLst>
-              <a:ext uri="{FF2B5EF4-FFF2-40B4-BE49-F238E27FC236}">
-                <a16:creationId xmlns:a16="http://schemas.microsoft.com/office/drawing/2014/main" id="{32F5B678-F2CC-46B2-B2E4-700C73B56179}"/>
-              </a:ext>
-            </a:extLst>
-          </p:cNvPr>
-          <p:cNvSpPr/>
-          <p:nvPr/>
-        </p:nvSpPr>
-        <p:spPr>
-          <a:xfrm>
-            <a:off x="3315162" y="1983422"/>
-            <a:ext cx="967661" cy="338554"/>
-          </a:xfrm>
-          <a:prstGeom prst="rect">
-            <a:avLst/>
-          </a:prstGeom>
-          <a:solidFill>
-            <a:schemeClr val="bg1"/>
-          </a:solidFill>
-          <a:ln w="3175">
-            <a:solidFill>
-              <a:schemeClr val="tx1">
-                <a:lumMod val="50000"/>
-                <a:lumOff val="50000"/>
-              </a:schemeClr>
-            </a:solidFill>
-          </a:ln>
-        </p:spPr>
-        <p:style>
-          <a:lnRef idx="2">
-            <a:schemeClr val="accent1">
-              <a:shade val="50000"/>
-            </a:schemeClr>
-          </a:lnRef>
-          <a:fillRef idx="1">
-            <a:schemeClr val="accent1"/>
-          </a:fillRef>
-          <a:effectRef idx="0">
-            <a:schemeClr val="accent1"/>
-          </a:effectRef>
-          <a:fontRef idx="minor">
-            <a:schemeClr val="lt1"/>
-          </a:fontRef>
-        </p:style>
-        <p:txBody>
-          <a:bodyPr wrap="none" lIns="0" tIns="0" rIns="0" bIns="0" rtlCol="0" anchor="ctr">
-            <a:normAutofit/>
-          </a:bodyPr>
-          <a:lstStyle/>
-          <a:p>
-            <a:pPr algn="ctr"/>
             <a:r>
-              <a:rPr lang="ko-KR" altLang="en-US" sz="750" dirty="0">
+              <a:rPr lang="ko-KR" altLang="en-US" sz="750" dirty="0" err="1">
                 <a:solidFill>
                   <a:srgbClr val="000000"/>
                 </a:solidFill>
@@ -16194,59 +16045,19 @@
                 <a:ea typeface="나눔고딕" panose="020D0604000000000000" pitchFamily="50" charset="-127"/>
                 <a:cs typeface="Segoe UI" panose="020B0502040204020203" pitchFamily="34" charset="0"/>
               </a:rPr>
-              <a:t>회원가입 정보입력</a:t>
+              <a:t>메세지</a:t>
             </a:r>
+            <a:endParaRPr lang="ko-KR" altLang="en-US" sz="750" dirty="0">
+              <a:solidFill>
+                <a:srgbClr val="000000"/>
+              </a:solidFill>
+              <a:latin typeface="나눔고딕" panose="020D0604000000000000" pitchFamily="50" charset="-127"/>
+              <a:ea typeface="나눔고딕" panose="020D0604000000000000" pitchFamily="50" charset="-127"/>
+              <a:cs typeface="Segoe UI" panose="020B0502040204020203" pitchFamily="34" charset="0"/>
+            </a:endParaRPr>
           </a:p>
         </p:txBody>
       </p:sp>
-      <p:cxnSp>
-        <p:nvCxnSpPr>
-          <p:cNvPr id="66" name="직선 화살표 연결선 65">
-            <a:extLst>
-              <a:ext uri="{FF2B5EF4-FFF2-40B4-BE49-F238E27FC236}">
-                <a16:creationId xmlns:a16="http://schemas.microsoft.com/office/drawing/2014/main" id="{4AE10EF0-EFF4-4B57-BB93-C11870971DA4}"/>
-              </a:ext>
-            </a:extLst>
-          </p:cNvPr>
-          <p:cNvCxnSpPr>
-            <a:cxnSpLocks/>
-          </p:cNvCxnSpPr>
-          <p:nvPr/>
-        </p:nvCxnSpPr>
-        <p:spPr>
-          <a:xfrm>
-            <a:off x="3070066" y="2159059"/>
-            <a:ext cx="178604" cy="0"/>
-          </a:xfrm>
-          <a:prstGeom prst="straightConnector1">
-            <a:avLst/>
-          </a:prstGeom>
-          <a:ln>
-            <a:solidFill>
-              <a:schemeClr val="tx1">
-                <a:lumMod val="75000"/>
-                <a:lumOff val="25000"/>
-              </a:schemeClr>
-            </a:solidFill>
-            <a:headEnd w="sm" len="sm"/>
-            <a:tailEnd type="arrow" w="sm" len="sm"/>
-          </a:ln>
-        </p:spPr>
-        <p:style>
-          <a:lnRef idx="1">
-            <a:schemeClr val="accent1"/>
-          </a:lnRef>
-          <a:fillRef idx="0">
-            <a:schemeClr val="accent1"/>
-          </a:fillRef>
-          <a:effectRef idx="0">
-            <a:schemeClr val="accent1"/>
-          </a:effectRef>
-          <a:fontRef idx="minor">
-            <a:schemeClr val="tx1"/>
-          </a:fontRef>
-        </p:style>
-      </p:cxnSp>
       <p:sp>
         <p:nvSpPr>
           <p:cNvPr id="67" name="TextBox 66">
@@ -16261,7 +16072,7 @@
         </p:nvSpPr>
         <p:spPr>
           <a:xfrm>
-            <a:off x="1791286" y="1968033"/>
+            <a:off x="1791286" y="2504784"/>
             <a:ext cx="303288" cy="184666"/>
           </a:xfrm>
           <a:prstGeom prst="rect">
@@ -16309,7 +16120,7 @@
         </p:nvSpPr>
         <p:spPr>
           <a:xfrm>
-            <a:off x="1287157" y="2377042"/>
+            <a:off x="1287157" y="3104882"/>
             <a:ext cx="322524" cy="184666"/>
           </a:xfrm>
           <a:prstGeom prst="rect">
@@ -16359,7 +16170,7 @@
         </p:nvCxnSpPr>
         <p:spPr>
           <a:xfrm>
-            <a:off x="1242411" y="2391540"/>
+            <a:off x="1242411" y="3058236"/>
             <a:ext cx="2854" cy="159304"/>
           </a:xfrm>
           <a:prstGeom prst="straightConnector1">
@@ -16402,7 +16213,7 @@
         </p:nvSpPr>
         <p:spPr>
           <a:xfrm>
-            <a:off x="823585" y="2616194"/>
+            <a:off x="823585" y="3311034"/>
             <a:ext cx="840506" cy="338554"/>
           </a:xfrm>
           <a:prstGeom prst="rect">
@@ -16452,17 +16263,17 @@
                 <a:ea typeface="나눔고딕" panose="020D0604000000000000" pitchFamily="50" charset="-127"/>
                 <a:cs typeface="Segoe UI" panose="020B0502040204020203" pitchFamily="34" charset="0"/>
               </a:rPr>
-              <a:t>지원자 모집</a:t>
+              <a:t>책 클릭 </a:t>
             </a:r>
           </a:p>
         </p:txBody>
       </p:sp>
       <p:cxnSp>
         <p:nvCxnSpPr>
-          <p:cNvPr id="71" name="직선 화살표 연결선 70">
+          <p:cNvPr id="75" name="직선 화살표 연결선 74">
             <a:extLst>
               <a:ext uri="{FF2B5EF4-FFF2-40B4-BE49-F238E27FC236}">
-                <a16:creationId xmlns:a16="http://schemas.microsoft.com/office/drawing/2014/main" id="{C1253F8B-1C71-4B58-BF86-9D16259CD052}"/>
+                <a16:creationId xmlns:a16="http://schemas.microsoft.com/office/drawing/2014/main" id="{533E5E80-71B6-475A-8D64-B6453E05E45D}"/>
               </a:ext>
             </a:extLst>
           </p:cNvPr>
@@ -16473,8 +16284,8 @@
         </p:nvCxnSpPr>
         <p:spPr>
           <a:xfrm>
-            <a:off x="3819548" y="2377042"/>
-            <a:ext cx="2854" cy="159304"/>
+            <a:off x="1245265" y="3688564"/>
+            <a:ext cx="0" cy="249056"/>
           </a:xfrm>
           <a:prstGeom prst="straightConnector1">
             <a:avLst/>
@@ -16507,10 +16318,10 @@
       </p:cxnSp>
       <p:sp>
         <p:nvSpPr>
-          <p:cNvPr id="72" name="직사각형 71">
+          <p:cNvPr id="78" name="직사각형 77">
             <a:extLst>
               <a:ext uri="{FF2B5EF4-FFF2-40B4-BE49-F238E27FC236}">
-                <a16:creationId xmlns:a16="http://schemas.microsoft.com/office/drawing/2014/main" id="{16817555-B28A-435A-AE5D-375CAAD988F6}"/>
+                <a16:creationId xmlns:a16="http://schemas.microsoft.com/office/drawing/2014/main" id="{BD74F3AF-FEA8-4D6C-AB73-E6B431ED7C92}"/>
               </a:ext>
             </a:extLst>
           </p:cNvPr>
@@ -16519,8 +16330,8 @@
         </p:nvSpPr>
         <p:spPr>
           <a:xfrm>
-            <a:off x="3316307" y="2606212"/>
-            <a:ext cx="967661" cy="338554"/>
+            <a:off x="669078" y="3957724"/>
+            <a:ext cx="1148044" cy="756744"/>
           </a:xfrm>
           <a:prstGeom prst="rect">
             <a:avLst/>
@@ -16561,7 +16372,7 @@
           <a:p>
             <a:pPr algn="ctr"/>
             <a:r>
-              <a:rPr lang="ko-KR" altLang="en-US" sz="750" dirty="0">
+              <a:rPr lang="ko-KR" altLang="en-US" sz="750">
                 <a:solidFill>
                   <a:srgbClr val="000000"/>
                 </a:solidFill>
@@ -16569,413 +16380,16 @@
                 <a:ea typeface="나눔고딕" panose="020D0604000000000000" pitchFamily="50" charset="-127"/>
                 <a:cs typeface="Segoe UI" panose="020B0502040204020203" pitchFamily="34" charset="0"/>
               </a:rPr>
-              <a:t>가입완료</a:t>
+              <a:t>책 상세 페이지 노출</a:t>
             </a:r>
-          </a:p>
-        </p:txBody>
-      </p:sp>
-      <p:cxnSp>
-        <p:nvCxnSpPr>
-          <p:cNvPr id="73" name="직선 화살표 연결선 72">
-            <a:extLst>
-              <a:ext uri="{FF2B5EF4-FFF2-40B4-BE49-F238E27FC236}">
-                <a16:creationId xmlns:a16="http://schemas.microsoft.com/office/drawing/2014/main" id="{BADFF599-A2F1-4343-81F9-375953B67182}"/>
-              </a:ext>
-            </a:extLst>
-          </p:cNvPr>
-          <p:cNvCxnSpPr>
-            <a:cxnSpLocks/>
-          </p:cNvCxnSpPr>
-          <p:nvPr/>
-        </p:nvCxnSpPr>
-        <p:spPr>
-          <a:xfrm flipH="1">
-            <a:off x="1744497" y="2785471"/>
-            <a:ext cx="1496916" cy="0"/>
-          </a:xfrm>
-          <a:prstGeom prst="straightConnector1">
-            <a:avLst/>
-          </a:prstGeom>
-          <a:ln>
-            <a:solidFill>
-              <a:schemeClr val="tx1">
-                <a:lumMod val="75000"/>
-                <a:lumOff val="25000"/>
-              </a:schemeClr>
-            </a:solidFill>
-            <a:headEnd w="sm" len="sm"/>
-            <a:tailEnd type="arrow" w="sm" len="sm"/>
-          </a:ln>
-        </p:spPr>
-        <p:style>
-          <a:lnRef idx="1">
-            <a:schemeClr val="accent1"/>
-          </a:lnRef>
-          <a:fillRef idx="0">
-            <a:schemeClr val="accent1"/>
-          </a:fillRef>
-          <a:effectRef idx="0">
-            <a:schemeClr val="accent1"/>
-          </a:effectRef>
-          <a:fontRef idx="minor">
-            <a:schemeClr val="tx1"/>
-          </a:fontRef>
-        </p:style>
-      </p:cxnSp>
-      <p:sp>
-        <p:nvSpPr>
-          <p:cNvPr id="74" name="직사각형 73">
-            <a:extLst>
-              <a:ext uri="{FF2B5EF4-FFF2-40B4-BE49-F238E27FC236}">
-                <a16:creationId xmlns:a16="http://schemas.microsoft.com/office/drawing/2014/main" id="{8167ADC0-B21B-4B98-8893-32A4F42C8195}"/>
-              </a:ext>
-            </a:extLst>
-          </p:cNvPr>
-          <p:cNvSpPr/>
-          <p:nvPr/>
-        </p:nvSpPr>
-        <p:spPr>
-          <a:xfrm>
-            <a:off x="823585" y="3202934"/>
-            <a:ext cx="840506" cy="338554"/>
-          </a:xfrm>
-          <a:prstGeom prst="rect">
-            <a:avLst/>
-          </a:prstGeom>
-          <a:solidFill>
-            <a:schemeClr val="bg1"/>
-          </a:solidFill>
-          <a:ln w="3175">
-            <a:solidFill>
-              <a:schemeClr val="tx1">
-                <a:lumMod val="50000"/>
-                <a:lumOff val="50000"/>
-              </a:schemeClr>
-            </a:solidFill>
-          </a:ln>
-        </p:spPr>
-        <p:style>
-          <a:lnRef idx="2">
-            <a:schemeClr val="accent1">
-              <a:shade val="50000"/>
-            </a:schemeClr>
-          </a:lnRef>
-          <a:fillRef idx="1">
-            <a:schemeClr val="accent1"/>
-          </a:fillRef>
-          <a:effectRef idx="0">
-            <a:schemeClr val="accent1"/>
-          </a:effectRef>
-          <a:fontRef idx="minor">
-            <a:schemeClr val="lt1"/>
-          </a:fontRef>
-        </p:style>
-        <p:txBody>
-          <a:bodyPr wrap="none" lIns="0" tIns="0" rIns="0" bIns="0" rtlCol="0" anchor="ctr">
-            <a:normAutofit/>
-          </a:bodyPr>
-          <a:lstStyle/>
-          <a:p>
-            <a:pPr algn="ctr"/>
-            <a:r>
-              <a:rPr lang="ko-KR" altLang="en-US" sz="750" dirty="0">
-                <a:solidFill>
-                  <a:srgbClr val="000000"/>
-                </a:solidFill>
-                <a:latin typeface="나눔고딕" panose="020D0604000000000000" pitchFamily="50" charset="-127"/>
-                <a:ea typeface="나눔고딕" panose="020D0604000000000000" pitchFamily="50" charset="-127"/>
-                <a:cs typeface="Segoe UI" panose="020B0502040204020203" pitchFamily="34" charset="0"/>
-              </a:rPr>
-              <a:t>미팅신청</a:t>
-            </a:r>
-          </a:p>
-        </p:txBody>
-      </p:sp>
-      <p:cxnSp>
-        <p:nvCxnSpPr>
-          <p:cNvPr id="75" name="직선 화살표 연결선 74">
-            <a:extLst>
-              <a:ext uri="{FF2B5EF4-FFF2-40B4-BE49-F238E27FC236}">
-                <a16:creationId xmlns:a16="http://schemas.microsoft.com/office/drawing/2014/main" id="{533E5E80-71B6-475A-8D64-B6453E05E45D}"/>
-              </a:ext>
-            </a:extLst>
-          </p:cNvPr>
-          <p:cNvCxnSpPr>
-            <a:cxnSpLocks/>
-          </p:cNvCxnSpPr>
-          <p:nvPr/>
-        </p:nvCxnSpPr>
-        <p:spPr>
-          <a:xfrm>
-            <a:off x="1242411" y="3000301"/>
-            <a:ext cx="2854" cy="159304"/>
-          </a:xfrm>
-          <a:prstGeom prst="straightConnector1">
-            <a:avLst/>
-          </a:prstGeom>
-          <a:ln>
-            <a:solidFill>
-              <a:schemeClr val="tx1">
-                <a:lumMod val="75000"/>
-                <a:lumOff val="25000"/>
-              </a:schemeClr>
-            </a:solidFill>
-            <a:headEnd w="sm" len="sm"/>
-            <a:tailEnd type="arrow" w="sm" len="sm"/>
-          </a:ln>
-        </p:spPr>
-        <p:style>
-          <a:lnRef idx="1">
-            <a:schemeClr val="accent1"/>
-          </a:lnRef>
-          <a:fillRef idx="0">
-            <a:schemeClr val="accent1"/>
-          </a:fillRef>
-          <a:effectRef idx="0">
-            <a:schemeClr val="accent1"/>
-          </a:effectRef>
-          <a:fontRef idx="minor">
-            <a:schemeClr val="tx1"/>
-          </a:fontRef>
-        </p:style>
-      </p:cxnSp>
-      <p:cxnSp>
-        <p:nvCxnSpPr>
-          <p:cNvPr id="76" name="직선 화살표 연결선 75">
-            <a:extLst>
-              <a:ext uri="{FF2B5EF4-FFF2-40B4-BE49-F238E27FC236}">
-                <a16:creationId xmlns:a16="http://schemas.microsoft.com/office/drawing/2014/main" id="{28D2397D-465C-4CBB-8180-C8ABFAEECAA4}"/>
-              </a:ext>
-            </a:extLst>
-          </p:cNvPr>
-          <p:cNvCxnSpPr>
-            <a:cxnSpLocks/>
-          </p:cNvCxnSpPr>
-          <p:nvPr/>
-        </p:nvCxnSpPr>
-        <p:spPr>
-          <a:xfrm>
-            <a:off x="1242411" y="3579122"/>
-            <a:ext cx="2854" cy="159304"/>
-          </a:xfrm>
-          <a:prstGeom prst="straightConnector1">
-            <a:avLst/>
-          </a:prstGeom>
-          <a:ln>
-            <a:solidFill>
-              <a:schemeClr val="tx1">
-                <a:lumMod val="75000"/>
-                <a:lumOff val="25000"/>
-              </a:schemeClr>
-            </a:solidFill>
-            <a:headEnd w="sm" len="sm"/>
-            <a:tailEnd type="arrow" w="sm" len="sm"/>
-          </a:ln>
-        </p:spPr>
-        <p:style>
-          <a:lnRef idx="1">
-            <a:schemeClr val="accent1"/>
-          </a:lnRef>
-          <a:fillRef idx="0">
-            <a:schemeClr val="accent1"/>
-          </a:fillRef>
-          <a:effectRef idx="0">
-            <a:schemeClr val="accent1"/>
-          </a:effectRef>
-          <a:fontRef idx="minor">
-            <a:schemeClr val="tx1"/>
-          </a:fontRef>
-        </p:style>
-      </p:cxnSp>
-      <p:sp>
-        <p:nvSpPr>
-          <p:cNvPr id="77" name="사각형: 둥근 모서리 76">
-            <a:extLst>
-              <a:ext uri="{FF2B5EF4-FFF2-40B4-BE49-F238E27FC236}">
-                <a16:creationId xmlns:a16="http://schemas.microsoft.com/office/drawing/2014/main" id="{B93D3515-2B26-4526-938A-3EF31B6C7B6B}"/>
-              </a:ext>
-            </a:extLst>
-          </p:cNvPr>
-          <p:cNvSpPr/>
-          <p:nvPr/>
-        </p:nvSpPr>
-        <p:spPr>
-          <a:xfrm>
-            <a:off x="536559" y="3789674"/>
-            <a:ext cx="1421436" cy="338554"/>
-          </a:xfrm>
-          <a:prstGeom prst="flowChartDecision">
-            <a:avLst/>
-          </a:prstGeom>
-          <a:solidFill>
-            <a:schemeClr val="bg1"/>
-          </a:solidFill>
-          <a:ln w="3175">
-            <a:solidFill>
-              <a:schemeClr val="tx1">
-                <a:lumMod val="50000"/>
-                <a:lumOff val="50000"/>
-              </a:schemeClr>
-            </a:solidFill>
-          </a:ln>
-        </p:spPr>
-        <p:style>
-          <a:lnRef idx="2">
-            <a:schemeClr val="accent1">
-              <a:shade val="50000"/>
-            </a:schemeClr>
-          </a:lnRef>
-          <a:fillRef idx="1">
-            <a:schemeClr val="accent1"/>
-          </a:fillRef>
-          <a:effectRef idx="0">
-            <a:schemeClr val="accent1"/>
-          </a:effectRef>
-          <a:fontRef idx="minor">
-            <a:schemeClr val="lt1"/>
-          </a:fontRef>
-        </p:style>
-        <p:txBody>
-          <a:bodyPr wrap="none" rtlCol="0" anchor="ctr"/>
-          <a:lstStyle/>
-          <a:p>
-            <a:pPr algn="ctr"/>
-            <a:r>
-              <a:rPr lang="ko-KR" altLang="en-US" sz="750" dirty="0">
-                <a:solidFill>
-                  <a:schemeClr val="tx1">
-                    <a:lumMod val="95000"/>
-                    <a:lumOff val="5000"/>
-                  </a:schemeClr>
-                </a:solidFill>
-                <a:latin typeface="나눔고딕" panose="020D0604000000000000" pitchFamily="50" charset="-127"/>
-                <a:ea typeface="나눔고딕" panose="020D0604000000000000" pitchFamily="50" charset="-127"/>
-                <a:cs typeface="Segoe UI" panose="020B0502040204020203" pitchFamily="34" charset="0"/>
-              </a:rPr>
-              <a:t>계약대상을</a:t>
-            </a:r>
-            <a:endParaRPr lang="en-US" altLang="ko-KR" sz="750" dirty="0">
+            <a:endParaRPr lang="ko-KR" altLang="en-US" sz="750" dirty="0">
               <a:solidFill>
-                <a:schemeClr val="tx1">
-                  <a:lumMod val="95000"/>
-                  <a:lumOff val="5000"/>
-                </a:schemeClr>
+                <a:srgbClr val="000000"/>
               </a:solidFill>
               <a:latin typeface="나눔고딕" panose="020D0604000000000000" pitchFamily="50" charset="-127"/>
               <a:ea typeface="나눔고딕" panose="020D0604000000000000" pitchFamily="50" charset="-127"/>
               <a:cs typeface="Segoe UI" panose="020B0502040204020203" pitchFamily="34" charset="0"/>
             </a:endParaRPr>
-          </a:p>
-          <a:p>
-            <a:pPr algn="ctr"/>
-            <a:r>
-              <a:rPr lang="ko-KR" altLang="en-US" sz="750" dirty="0">
-                <a:solidFill>
-                  <a:schemeClr val="tx1">
-                    <a:lumMod val="95000"/>
-                    <a:lumOff val="5000"/>
-                  </a:schemeClr>
-                </a:solidFill>
-                <a:latin typeface="나눔고딕" panose="020D0604000000000000" pitchFamily="50" charset="-127"/>
-                <a:ea typeface="나눔고딕" panose="020D0604000000000000" pitchFamily="50" charset="-127"/>
-                <a:cs typeface="Segoe UI" panose="020B0502040204020203" pitchFamily="34" charset="0"/>
-              </a:rPr>
-              <a:t>선택하였습니까</a:t>
-            </a:r>
-            <a:r>
-              <a:rPr lang="en-US" altLang="ko-KR" sz="750" dirty="0">
-                <a:solidFill>
-                  <a:schemeClr val="tx1">
-                    <a:lumMod val="95000"/>
-                    <a:lumOff val="5000"/>
-                  </a:schemeClr>
-                </a:solidFill>
-                <a:latin typeface="나눔고딕" panose="020D0604000000000000" pitchFamily="50" charset="-127"/>
-                <a:ea typeface="나눔고딕" panose="020D0604000000000000" pitchFamily="50" charset="-127"/>
-                <a:cs typeface="Segoe UI" panose="020B0502040204020203" pitchFamily="34" charset="0"/>
-              </a:rPr>
-              <a:t>?</a:t>
-            </a:r>
-            <a:endParaRPr lang="ko-KR" altLang="en-US" sz="750" dirty="0">
-              <a:solidFill>
-                <a:schemeClr val="tx1">
-                  <a:lumMod val="95000"/>
-                  <a:lumOff val="5000"/>
-                </a:schemeClr>
-              </a:solidFill>
-              <a:latin typeface="나눔고딕" panose="020D0604000000000000" pitchFamily="50" charset="-127"/>
-              <a:ea typeface="나눔고딕" panose="020D0604000000000000" pitchFamily="50" charset="-127"/>
-              <a:cs typeface="Segoe UI" panose="020B0502040204020203" pitchFamily="34" charset="0"/>
-            </a:endParaRPr>
-          </a:p>
-        </p:txBody>
-      </p:sp>
-      <p:sp>
-        <p:nvSpPr>
-          <p:cNvPr id="78" name="직사각형 77">
-            <a:extLst>
-              <a:ext uri="{FF2B5EF4-FFF2-40B4-BE49-F238E27FC236}">
-                <a16:creationId xmlns:a16="http://schemas.microsoft.com/office/drawing/2014/main" id="{BD74F3AF-FEA8-4D6C-AB73-E6B431ED7C92}"/>
-              </a:ext>
-            </a:extLst>
-          </p:cNvPr>
-          <p:cNvSpPr/>
-          <p:nvPr/>
-        </p:nvSpPr>
-        <p:spPr>
-          <a:xfrm>
-            <a:off x="823585" y="4397748"/>
-            <a:ext cx="840506" cy="338554"/>
-          </a:xfrm>
-          <a:prstGeom prst="rect">
-            <a:avLst/>
-          </a:prstGeom>
-          <a:solidFill>
-            <a:schemeClr val="bg1"/>
-          </a:solidFill>
-          <a:ln w="3175">
-            <a:solidFill>
-              <a:schemeClr val="tx1">
-                <a:lumMod val="50000"/>
-                <a:lumOff val="50000"/>
-              </a:schemeClr>
-            </a:solidFill>
-          </a:ln>
-        </p:spPr>
-        <p:style>
-          <a:lnRef idx="2">
-            <a:schemeClr val="accent1">
-              <a:shade val="50000"/>
-            </a:schemeClr>
-          </a:lnRef>
-          <a:fillRef idx="1">
-            <a:schemeClr val="accent1"/>
-          </a:fillRef>
-          <a:effectRef idx="0">
-            <a:schemeClr val="accent1"/>
-          </a:effectRef>
-          <a:fontRef idx="minor">
-            <a:schemeClr val="lt1"/>
-          </a:fontRef>
-        </p:style>
-        <p:txBody>
-          <a:bodyPr wrap="none" lIns="0" tIns="0" rIns="0" bIns="0" rtlCol="0" anchor="ctr">
-            <a:normAutofit/>
-          </a:bodyPr>
-          <a:lstStyle/>
-          <a:p>
-            <a:pPr algn="ctr"/>
-            <a:r>
-              <a:rPr lang="ko-KR" altLang="en-US" sz="750" dirty="0">
-                <a:solidFill>
-                  <a:srgbClr val="000000"/>
-                </a:solidFill>
-                <a:latin typeface="나눔고딕" panose="020D0604000000000000" pitchFamily="50" charset="-127"/>
-                <a:ea typeface="나눔고딕" panose="020D0604000000000000" pitchFamily="50" charset="-127"/>
-                <a:cs typeface="Segoe UI" panose="020B0502040204020203" pitchFamily="34" charset="0"/>
-              </a:rPr>
-              <a:t>계약서 날인</a:t>
-            </a:r>
           </a:p>
         </p:txBody>
       </p:sp>
@@ -17112,12 +16526,12 @@
         </p:nvCxnSpPr>
         <p:spPr>
           <a:xfrm rot="10800000">
-            <a:off x="444564" y="2763669"/>
-            <a:ext cx="12700" cy="1217083"/>
+            <a:off x="2005200" y="1430729"/>
+            <a:ext cx="1885610" cy="135542"/>
           </a:xfrm>
           <a:prstGeom prst="bentConnector3">
             <a:avLst>
-              <a:gd name="adj1" fmla="val 1390976"/>
+              <a:gd name="adj1" fmla="val 50000"/>
             </a:avLst>
           </a:prstGeom>
           <a:ln>
@@ -17204,7 +16618,7 @@
         </p:nvSpPr>
         <p:spPr>
           <a:xfrm>
-            <a:off x="1287157" y="4162802"/>
+            <a:off x="1287157" y="3721596"/>
             <a:ext cx="322524" cy="184666"/>
           </a:xfrm>
           <a:prstGeom prst="rect">
@@ -17238,51 +16652,6 @@
           </a:p>
         </p:txBody>
       </p:sp>
-      <p:cxnSp>
-        <p:nvCxnSpPr>
-          <p:cNvPr id="84" name="직선 화살표 연결선 83">
-            <a:extLst>
-              <a:ext uri="{FF2B5EF4-FFF2-40B4-BE49-F238E27FC236}">
-                <a16:creationId xmlns:a16="http://schemas.microsoft.com/office/drawing/2014/main" id="{360231A5-AA22-49C6-B887-72E670AB7586}"/>
-              </a:ext>
-            </a:extLst>
-          </p:cNvPr>
-          <p:cNvCxnSpPr>
-            <a:cxnSpLocks/>
-          </p:cNvCxnSpPr>
-          <p:nvPr/>
-        </p:nvCxnSpPr>
-        <p:spPr>
-          <a:xfrm>
-            <a:off x="1242411" y="4177300"/>
-            <a:ext cx="2854" cy="159304"/>
-          </a:xfrm>
-          <a:prstGeom prst="straightConnector1">
-            <a:avLst/>
-          </a:prstGeom>
-          <a:ln>
-            <a:solidFill>
-              <a:srgbClr val="0078D7"/>
-            </a:solidFill>
-            <a:headEnd w="sm" len="sm"/>
-            <a:tailEnd type="arrow" w="sm" len="sm"/>
-          </a:ln>
-        </p:spPr>
-        <p:style>
-          <a:lnRef idx="1">
-            <a:schemeClr val="accent1"/>
-          </a:lnRef>
-          <a:fillRef idx="0">
-            <a:schemeClr val="accent1"/>
-          </a:fillRef>
-          <a:effectRef idx="0">
-            <a:schemeClr val="accent1"/>
-          </a:effectRef>
-          <a:fontRef idx="minor">
-            <a:schemeClr val="tx1"/>
-          </a:fontRef>
-        </p:style>
-      </p:cxnSp>
       <p:sp>
         <p:nvSpPr>
           <p:cNvPr id="85" name="모서리가 둥근 직사각형 84">
@@ -17297,7 +16666,7 @@
         </p:nvSpPr>
         <p:spPr>
           <a:xfrm>
-            <a:off x="5338182" y="721536"/>
+            <a:off x="5185946" y="745956"/>
             <a:ext cx="849068" cy="338400"/>
           </a:xfrm>
           <a:prstGeom prst="roundRect">
@@ -17369,7 +16738,7 @@
         </p:nvSpPr>
         <p:spPr>
           <a:xfrm>
-            <a:off x="5198059" y="1396994"/>
+            <a:off x="5053279" y="1396994"/>
             <a:ext cx="1137876" cy="338554"/>
           </a:xfrm>
           <a:prstGeom prst="rect">
@@ -17411,17 +16780,6 @@
           <a:p>
             <a:pPr algn="ctr"/>
             <a:r>
-              <a:rPr lang="ko-KR" altLang="en-US" sz="750" dirty="0" err="1">
-                <a:solidFill>
-                  <a:srgbClr val="000000"/>
-                </a:solidFill>
-                <a:latin typeface="나눔고딕" panose="020D0604000000000000" pitchFamily="50" charset="-127"/>
-                <a:ea typeface="나눔고딕" panose="020D0604000000000000" pitchFamily="50" charset="-127"/>
-                <a:cs typeface="Segoe UI" panose="020B0502040204020203" pitchFamily="34" charset="0"/>
-              </a:rPr>
-              <a:t>프리모아</a:t>
-            </a:r>
-            <a:r>
               <a:rPr lang="ko-KR" altLang="en-US" sz="750" dirty="0">
                 <a:solidFill>
                   <a:srgbClr val="000000"/>
@@ -17430,7 +16788,7 @@
                 <a:ea typeface="나눔고딕" panose="020D0604000000000000" pitchFamily="50" charset="-127"/>
                 <a:cs typeface="Segoe UI" panose="020B0502040204020203" pitchFamily="34" charset="0"/>
               </a:rPr>
-              <a:t> 웹사이트접속</a:t>
+              <a:t>책 상세 페이지 진입</a:t>
             </a:r>
           </a:p>
         </p:txBody>
@@ -17449,8 +16807,748 @@
         </p:nvSpPr>
         <p:spPr>
           <a:xfrm>
-            <a:off x="5259082" y="1989782"/>
+            <a:off x="5113602" y="2004892"/>
             <a:ext cx="1015830" cy="338554"/>
+          </a:xfrm>
+          <a:prstGeom prst="flowChartDecision">
+            <a:avLst/>
+          </a:prstGeom>
+          <a:solidFill>
+            <a:schemeClr val="bg1"/>
+          </a:solidFill>
+          <a:ln w="3175">
+            <a:solidFill>
+              <a:schemeClr val="tx1">
+                <a:lumMod val="50000"/>
+                <a:lumOff val="50000"/>
+              </a:schemeClr>
+            </a:solidFill>
+          </a:ln>
+        </p:spPr>
+        <p:style>
+          <a:lnRef idx="2">
+            <a:schemeClr val="accent1">
+              <a:shade val="50000"/>
+            </a:schemeClr>
+          </a:lnRef>
+          <a:fillRef idx="1">
+            <a:schemeClr val="accent1"/>
+          </a:fillRef>
+          <a:effectRef idx="0">
+            <a:schemeClr val="accent1"/>
+          </a:effectRef>
+          <a:fontRef idx="minor">
+            <a:schemeClr val="lt1"/>
+          </a:fontRef>
+        </p:style>
+        <p:txBody>
+          <a:bodyPr wrap="none" rtlCol="0" anchor="ctr"/>
+          <a:lstStyle/>
+          <a:p>
+            <a:pPr algn="ctr"/>
+            <a:r>
+              <a:rPr lang="ko-KR" altLang="en-US" sz="750" dirty="0">
+                <a:solidFill>
+                  <a:schemeClr val="tx1">
+                    <a:lumMod val="95000"/>
+                    <a:lumOff val="5000"/>
+                  </a:schemeClr>
+                </a:solidFill>
+                <a:latin typeface="나눔고딕" panose="020D0604000000000000" pitchFamily="50" charset="-127"/>
+                <a:ea typeface="나눔고딕" panose="020D0604000000000000" pitchFamily="50" charset="-127"/>
+                <a:cs typeface="Segoe UI" panose="020B0502040204020203" pitchFamily="34" charset="0"/>
+              </a:rPr>
+              <a:t>재고가 있습니까</a:t>
+            </a:r>
+            <a:r>
+              <a:rPr lang="en-US" altLang="ko-KR" sz="750" dirty="0">
+                <a:solidFill>
+                  <a:schemeClr val="tx1">
+                    <a:lumMod val="95000"/>
+                    <a:lumOff val="5000"/>
+                  </a:schemeClr>
+                </a:solidFill>
+                <a:latin typeface="나눔고딕" panose="020D0604000000000000" pitchFamily="50" charset="-127"/>
+                <a:ea typeface="나눔고딕" panose="020D0604000000000000" pitchFamily="50" charset="-127"/>
+                <a:cs typeface="Segoe UI" panose="020B0502040204020203" pitchFamily="34" charset="0"/>
+              </a:rPr>
+              <a:t>?</a:t>
+            </a:r>
+            <a:endParaRPr lang="ko-KR" altLang="en-US" sz="750" dirty="0">
+              <a:solidFill>
+                <a:schemeClr val="tx1">
+                  <a:lumMod val="95000"/>
+                  <a:lumOff val="5000"/>
+                </a:schemeClr>
+              </a:solidFill>
+              <a:latin typeface="나눔고딕" panose="020D0604000000000000" pitchFamily="50" charset="-127"/>
+              <a:ea typeface="나눔고딕" panose="020D0604000000000000" pitchFamily="50" charset="-127"/>
+              <a:cs typeface="Segoe UI" panose="020B0502040204020203" pitchFamily="34" charset="0"/>
+            </a:endParaRPr>
+          </a:p>
+        </p:txBody>
+      </p:sp>
+      <p:cxnSp>
+        <p:nvCxnSpPr>
+          <p:cNvPr id="89" name="직선 화살표 연결선 88">
+            <a:extLst>
+              <a:ext uri="{FF2B5EF4-FFF2-40B4-BE49-F238E27FC236}">
+                <a16:creationId xmlns:a16="http://schemas.microsoft.com/office/drawing/2014/main" id="{A3D0C245-3E1C-432B-B180-05D0E8EF92B5}"/>
+              </a:ext>
+            </a:extLst>
+          </p:cNvPr>
+          <p:cNvCxnSpPr>
+            <a:cxnSpLocks/>
+          </p:cNvCxnSpPr>
+          <p:nvPr/>
+        </p:nvCxnSpPr>
+        <p:spPr>
+          <a:xfrm>
+            <a:off x="5620790" y="1773182"/>
+            <a:ext cx="2854" cy="159304"/>
+          </a:xfrm>
+          <a:prstGeom prst="straightConnector1">
+            <a:avLst/>
+          </a:prstGeom>
+          <a:ln>
+            <a:solidFill>
+              <a:schemeClr val="tx1">
+                <a:lumMod val="75000"/>
+                <a:lumOff val="25000"/>
+              </a:schemeClr>
+            </a:solidFill>
+            <a:headEnd w="sm" len="sm"/>
+            <a:tailEnd type="arrow" w="sm" len="sm"/>
+          </a:ln>
+        </p:spPr>
+        <p:style>
+          <a:lnRef idx="1">
+            <a:schemeClr val="accent1"/>
+          </a:lnRef>
+          <a:fillRef idx="0">
+            <a:schemeClr val="accent1"/>
+          </a:fillRef>
+          <a:effectRef idx="0">
+            <a:schemeClr val="accent1"/>
+          </a:effectRef>
+          <a:fontRef idx="minor">
+            <a:schemeClr val="tx1"/>
+          </a:fontRef>
+        </p:style>
+      </p:cxnSp>
+      <p:cxnSp>
+        <p:nvCxnSpPr>
+          <p:cNvPr id="90" name="직선 화살표 연결선 89">
+            <a:extLst>
+              <a:ext uri="{FF2B5EF4-FFF2-40B4-BE49-F238E27FC236}">
+                <a16:creationId xmlns:a16="http://schemas.microsoft.com/office/drawing/2014/main" id="{9D09828B-6410-4B49-975A-1E4F8F322258}"/>
+              </a:ext>
+            </a:extLst>
+          </p:cNvPr>
+          <p:cNvCxnSpPr>
+            <a:cxnSpLocks/>
+          </p:cNvCxnSpPr>
+          <p:nvPr/>
+        </p:nvCxnSpPr>
+        <p:spPr>
+          <a:xfrm>
+            <a:off x="6205673" y="2159059"/>
+            <a:ext cx="261402" cy="0"/>
+          </a:xfrm>
+          <a:prstGeom prst="straightConnector1">
+            <a:avLst/>
+          </a:prstGeom>
+          <a:ln>
+            <a:solidFill>
+              <a:srgbClr val="FF0000"/>
+            </a:solidFill>
+            <a:headEnd w="sm" len="sm"/>
+            <a:tailEnd type="arrow" w="sm" len="sm"/>
+          </a:ln>
+        </p:spPr>
+        <p:style>
+          <a:lnRef idx="1">
+            <a:schemeClr val="accent1"/>
+          </a:lnRef>
+          <a:fillRef idx="0">
+            <a:schemeClr val="accent1"/>
+          </a:fillRef>
+          <a:effectRef idx="0">
+            <a:schemeClr val="accent1"/>
+          </a:effectRef>
+          <a:fontRef idx="minor">
+            <a:schemeClr val="tx1"/>
+          </a:fontRef>
+        </p:style>
+      </p:cxnSp>
+      <p:sp>
+        <p:nvSpPr>
+          <p:cNvPr id="92" name="직사각형 91">
+            <a:extLst>
+              <a:ext uri="{FF2B5EF4-FFF2-40B4-BE49-F238E27FC236}">
+                <a16:creationId xmlns:a16="http://schemas.microsoft.com/office/drawing/2014/main" id="{F0A341A0-5E89-461A-B7DE-58F26DF8B530}"/>
+              </a:ext>
+            </a:extLst>
+          </p:cNvPr>
+          <p:cNvSpPr/>
+          <p:nvPr/>
+        </p:nvSpPr>
+        <p:spPr>
+          <a:xfrm>
+            <a:off x="7788252" y="1298645"/>
+            <a:ext cx="1059988" cy="338554"/>
+          </a:xfrm>
+          <a:prstGeom prst="rect">
+            <a:avLst/>
+          </a:prstGeom>
+          <a:solidFill>
+            <a:schemeClr val="bg1"/>
+          </a:solidFill>
+          <a:ln w="3175">
+            <a:solidFill>
+              <a:schemeClr val="tx1">
+                <a:lumMod val="50000"/>
+                <a:lumOff val="50000"/>
+              </a:schemeClr>
+            </a:solidFill>
+          </a:ln>
+        </p:spPr>
+        <p:style>
+          <a:lnRef idx="2">
+            <a:schemeClr val="accent1">
+              <a:shade val="50000"/>
+            </a:schemeClr>
+          </a:lnRef>
+          <a:fillRef idx="1">
+            <a:schemeClr val="accent1"/>
+          </a:fillRef>
+          <a:effectRef idx="0">
+            <a:schemeClr val="accent1"/>
+          </a:effectRef>
+          <a:fontRef idx="minor">
+            <a:schemeClr val="lt1"/>
+          </a:fontRef>
+        </p:style>
+        <p:txBody>
+          <a:bodyPr wrap="none" lIns="0" tIns="0" rIns="0" bIns="0" rtlCol="0" anchor="ctr">
+            <a:normAutofit/>
+          </a:bodyPr>
+          <a:lstStyle/>
+          <a:p>
+            <a:pPr algn="ctr"/>
+            <a:r>
+              <a:rPr lang="ko-KR" altLang="en-US" sz="750" dirty="0">
+                <a:solidFill>
+                  <a:srgbClr val="000000"/>
+                </a:solidFill>
+                <a:latin typeface="나눔고딕" panose="020D0604000000000000" pitchFamily="50" charset="-127"/>
+                <a:ea typeface="나눔고딕" panose="020D0604000000000000" pitchFamily="50" charset="-127"/>
+                <a:cs typeface="Segoe UI" panose="020B0502040204020203" pitchFamily="34" charset="0"/>
+              </a:rPr>
+              <a:t>회원가입 양식 노출</a:t>
+            </a:r>
+          </a:p>
+        </p:txBody>
+      </p:sp>
+      <p:cxnSp>
+        <p:nvCxnSpPr>
+          <p:cNvPr id="93" name="직선 화살표 연결선 92">
+            <a:extLst>
+              <a:ext uri="{FF2B5EF4-FFF2-40B4-BE49-F238E27FC236}">
+                <a16:creationId xmlns:a16="http://schemas.microsoft.com/office/drawing/2014/main" id="{88C5D7D0-C7D1-4535-9D94-B521F467159D}"/>
+              </a:ext>
+            </a:extLst>
+          </p:cNvPr>
+          <p:cNvCxnSpPr>
+            <a:cxnSpLocks/>
+          </p:cNvCxnSpPr>
+          <p:nvPr/>
+        </p:nvCxnSpPr>
+        <p:spPr>
+          <a:xfrm>
+            <a:off x="7731968" y="3721596"/>
+            <a:ext cx="178604" cy="0"/>
+          </a:xfrm>
+          <a:prstGeom prst="straightConnector1">
+            <a:avLst/>
+          </a:prstGeom>
+          <a:ln>
+            <a:solidFill>
+              <a:schemeClr val="tx1">
+                <a:lumMod val="75000"/>
+                <a:lumOff val="25000"/>
+              </a:schemeClr>
+            </a:solidFill>
+            <a:headEnd w="sm" len="sm"/>
+            <a:tailEnd type="arrow" w="sm" len="sm"/>
+          </a:ln>
+        </p:spPr>
+        <p:style>
+          <a:lnRef idx="1">
+            <a:schemeClr val="accent1"/>
+          </a:lnRef>
+          <a:fillRef idx="0">
+            <a:schemeClr val="accent1"/>
+          </a:fillRef>
+          <a:effectRef idx="0">
+            <a:schemeClr val="accent1"/>
+          </a:effectRef>
+          <a:fontRef idx="minor">
+            <a:schemeClr val="tx1"/>
+          </a:fontRef>
+        </p:style>
+      </p:cxnSp>
+      <p:sp>
+        <p:nvSpPr>
+          <p:cNvPr id="94" name="TextBox 93">
+            <a:extLst>
+              <a:ext uri="{FF2B5EF4-FFF2-40B4-BE49-F238E27FC236}">
+                <a16:creationId xmlns:a16="http://schemas.microsoft.com/office/drawing/2014/main" id="{5F361EB6-C4C7-4890-80D3-32920BD1A110}"/>
+              </a:ext>
+            </a:extLst>
+          </p:cNvPr>
+          <p:cNvSpPr txBox="1"/>
+          <p:nvPr/>
+        </p:nvSpPr>
+        <p:spPr>
+          <a:xfrm>
+            <a:off x="6169665" y="1968033"/>
+            <a:ext cx="303288" cy="184666"/>
+          </a:xfrm>
+          <a:prstGeom prst="rect">
+            <a:avLst/>
+          </a:prstGeom>
+          <a:noFill/>
+        </p:spPr>
+        <p:txBody>
+          <a:bodyPr wrap="none" rtlCol="0">
+            <a:spAutoFit/>
+          </a:bodyPr>
+          <a:lstStyle/>
+          <a:p>
+            <a:r>
+              <a:rPr lang="en-US" altLang="ko-KR" sz="600" b="1" dirty="0">
+                <a:solidFill>
+                  <a:srgbClr val="FF0000"/>
+                </a:solidFill>
+                <a:latin typeface="나눔고딕" panose="020D0604000000000000" pitchFamily="50" charset="-127"/>
+                <a:ea typeface="나눔고딕" panose="020D0604000000000000" pitchFamily="50" charset="-127"/>
+              </a:rPr>
+              <a:t>NO</a:t>
+            </a:r>
+            <a:endParaRPr lang="ko-KR" altLang="en-US" sz="600" b="1" dirty="0">
+              <a:solidFill>
+                <a:srgbClr val="FF0000"/>
+              </a:solidFill>
+              <a:latin typeface="나눔고딕" panose="020D0604000000000000" pitchFamily="50" charset="-127"/>
+              <a:ea typeface="나눔고딕" panose="020D0604000000000000" pitchFamily="50" charset="-127"/>
+            </a:endParaRPr>
+          </a:p>
+        </p:txBody>
+      </p:sp>
+      <p:sp>
+        <p:nvSpPr>
+          <p:cNvPr id="95" name="TextBox 94">
+            <a:extLst>
+              <a:ext uri="{FF2B5EF4-FFF2-40B4-BE49-F238E27FC236}">
+                <a16:creationId xmlns:a16="http://schemas.microsoft.com/office/drawing/2014/main" id="{689A4301-0E27-40A9-9B2E-ED3B8A767A2F}"/>
+              </a:ext>
+            </a:extLst>
+          </p:cNvPr>
+          <p:cNvSpPr txBox="1"/>
+          <p:nvPr/>
+        </p:nvSpPr>
+        <p:spPr>
+          <a:xfrm>
+            <a:off x="5665536" y="2377042"/>
+            <a:ext cx="322524" cy="184666"/>
+          </a:xfrm>
+          <a:prstGeom prst="rect">
+            <a:avLst/>
+          </a:prstGeom>
+          <a:noFill/>
+        </p:spPr>
+        <p:txBody>
+          <a:bodyPr wrap="none" rtlCol="0">
+            <a:spAutoFit/>
+          </a:bodyPr>
+          <a:lstStyle/>
+          <a:p>
+            <a:r>
+              <a:rPr lang="en-US" altLang="ko-KR" sz="600" b="1" dirty="0">
+                <a:solidFill>
+                  <a:srgbClr val="0078D7"/>
+                </a:solidFill>
+                <a:latin typeface="나눔고딕" panose="020D0604000000000000" pitchFamily="50" charset="-127"/>
+                <a:ea typeface="나눔고딕" panose="020D0604000000000000" pitchFamily="50" charset="-127"/>
+              </a:rPr>
+              <a:t>YES</a:t>
+            </a:r>
+            <a:endParaRPr lang="ko-KR" altLang="en-US" sz="600" b="1" dirty="0">
+              <a:solidFill>
+                <a:srgbClr val="0078D7"/>
+              </a:solidFill>
+              <a:latin typeface="나눔고딕" panose="020D0604000000000000" pitchFamily="50" charset="-127"/>
+              <a:ea typeface="나눔고딕" panose="020D0604000000000000" pitchFamily="50" charset="-127"/>
+            </a:endParaRPr>
+          </a:p>
+        </p:txBody>
+      </p:sp>
+      <p:cxnSp>
+        <p:nvCxnSpPr>
+          <p:cNvPr id="96" name="직선 화살표 연결선 95">
+            <a:extLst>
+              <a:ext uri="{FF2B5EF4-FFF2-40B4-BE49-F238E27FC236}">
+                <a16:creationId xmlns:a16="http://schemas.microsoft.com/office/drawing/2014/main" id="{B94AFE8D-FA9D-4568-8D06-3E02FBB79BC5}"/>
+              </a:ext>
+            </a:extLst>
+          </p:cNvPr>
+          <p:cNvCxnSpPr>
+            <a:cxnSpLocks/>
+          </p:cNvCxnSpPr>
+          <p:nvPr/>
+        </p:nvCxnSpPr>
+        <p:spPr>
+          <a:xfrm>
+            <a:off x="5620790" y="2391540"/>
+            <a:ext cx="2854" cy="159304"/>
+          </a:xfrm>
+          <a:prstGeom prst="straightConnector1">
+            <a:avLst/>
+          </a:prstGeom>
+          <a:ln>
+            <a:solidFill>
+              <a:srgbClr val="0078D7"/>
+            </a:solidFill>
+            <a:headEnd w="sm" len="sm"/>
+            <a:tailEnd type="arrow" w="sm" len="sm"/>
+          </a:ln>
+        </p:spPr>
+        <p:style>
+          <a:lnRef idx="1">
+            <a:schemeClr val="accent1"/>
+          </a:lnRef>
+          <a:fillRef idx="0">
+            <a:schemeClr val="accent1"/>
+          </a:fillRef>
+          <a:effectRef idx="0">
+            <a:schemeClr val="accent1"/>
+          </a:effectRef>
+          <a:fontRef idx="minor">
+            <a:schemeClr val="tx1"/>
+          </a:fontRef>
+        </p:style>
+      </p:cxnSp>
+      <p:sp>
+        <p:nvSpPr>
+          <p:cNvPr id="97" name="직사각형 96">
+            <a:extLst>
+              <a:ext uri="{FF2B5EF4-FFF2-40B4-BE49-F238E27FC236}">
+                <a16:creationId xmlns:a16="http://schemas.microsoft.com/office/drawing/2014/main" id="{59C6B0BE-0DF4-4F39-8223-38DF9B4ADFB5}"/>
+              </a:ext>
+            </a:extLst>
+          </p:cNvPr>
+          <p:cNvSpPr/>
+          <p:nvPr/>
+        </p:nvSpPr>
+        <p:spPr>
+          <a:xfrm>
+            <a:off x="5053279" y="2616193"/>
+            <a:ext cx="1158805" cy="568871"/>
+          </a:xfrm>
+          <a:prstGeom prst="rect">
+            <a:avLst/>
+          </a:prstGeom>
+          <a:solidFill>
+            <a:schemeClr val="bg1"/>
+          </a:solidFill>
+          <a:ln w="3175">
+            <a:solidFill>
+              <a:schemeClr val="tx1">
+                <a:lumMod val="50000"/>
+                <a:lumOff val="50000"/>
+              </a:schemeClr>
+            </a:solidFill>
+          </a:ln>
+        </p:spPr>
+        <p:style>
+          <a:lnRef idx="2">
+            <a:schemeClr val="accent1">
+              <a:shade val="50000"/>
+            </a:schemeClr>
+          </a:lnRef>
+          <a:fillRef idx="1">
+            <a:schemeClr val="accent1"/>
+          </a:fillRef>
+          <a:effectRef idx="0">
+            <a:schemeClr val="accent1"/>
+          </a:effectRef>
+          <a:fontRef idx="minor">
+            <a:schemeClr val="lt1"/>
+          </a:fontRef>
+        </p:style>
+        <p:txBody>
+          <a:bodyPr wrap="none" lIns="0" tIns="0" rIns="0" bIns="0" rtlCol="0" anchor="ctr">
+            <a:normAutofit/>
+          </a:bodyPr>
+          <a:lstStyle/>
+          <a:p>
+            <a:pPr algn="ctr"/>
+            <a:r>
+              <a:rPr lang="ko-KR" altLang="en-US" sz="750">
+                <a:solidFill>
+                  <a:srgbClr val="000000"/>
+                </a:solidFill>
+                <a:latin typeface="나눔고딕" panose="020D0604000000000000" pitchFamily="50" charset="-127"/>
+                <a:ea typeface="나눔고딕" panose="020D0604000000000000" pitchFamily="50" charset="-127"/>
+                <a:cs typeface="Segoe UI" panose="020B0502040204020203" pitchFamily="34" charset="0"/>
+              </a:rPr>
+              <a:t>장바구니 담기 버튼 클릭</a:t>
+            </a:r>
+            <a:endParaRPr lang="ko-KR" altLang="en-US" sz="750" dirty="0">
+              <a:solidFill>
+                <a:srgbClr val="000000"/>
+              </a:solidFill>
+              <a:latin typeface="나눔고딕" panose="020D0604000000000000" pitchFamily="50" charset="-127"/>
+              <a:ea typeface="나눔고딕" panose="020D0604000000000000" pitchFamily="50" charset="-127"/>
+              <a:cs typeface="Segoe UI" panose="020B0502040204020203" pitchFamily="34" charset="0"/>
+            </a:endParaRPr>
+          </a:p>
+        </p:txBody>
+      </p:sp>
+      <p:sp>
+        <p:nvSpPr>
+          <p:cNvPr id="99" name="직사각형 98">
+            <a:extLst>
+              <a:ext uri="{FF2B5EF4-FFF2-40B4-BE49-F238E27FC236}">
+                <a16:creationId xmlns:a16="http://schemas.microsoft.com/office/drawing/2014/main" id="{7A8B0EAE-A922-43A6-8E61-270FA74A1BBD}"/>
+              </a:ext>
+            </a:extLst>
+          </p:cNvPr>
+          <p:cNvSpPr/>
+          <p:nvPr/>
+        </p:nvSpPr>
+        <p:spPr>
+          <a:xfrm>
+            <a:off x="7451556" y="4009628"/>
+            <a:ext cx="967661" cy="338554"/>
+          </a:xfrm>
+          <a:prstGeom prst="rect">
+            <a:avLst/>
+          </a:prstGeom>
+          <a:solidFill>
+            <a:schemeClr val="bg1"/>
+          </a:solidFill>
+          <a:ln w="3175">
+            <a:solidFill>
+              <a:schemeClr val="tx1">
+                <a:lumMod val="50000"/>
+                <a:lumOff val="50000"/>
+              </a:schemeClr>
+            </a:solidFill>
+          </a:ln>
+        </p:spPr>
+        <p:style>
+          <a:lnRef idx="2">
+            <a:schemeClr val="accent1">
+              <a:shade val="50000"/>
+            </a:schemeClr>
+          </a:lnRef>
+          <a:fillRef idx="1">
+            <a:schemeClr val="accent1"/>
+          </a:fillRef>
+          <a:effectRef idx="0">
+            <a:schemeClr val="accent1"/>
+          </a:effectRef>
+          <a:fontRef idx="minor">
+            <a:schemeClr val="lt1"/>
+          </a:fontRef>
+        </p:style>
+        <p:txBody>
+          <a:bodyPr wrap="none" lIns="0" tIns="0" rIns="0" bIns="0" rtlCol="0" anchor="ctr">
+            <a:normAutofit/>
+          </a:bodyPr>
+          <a:lstStyle/>
+          <a:p>
+            <a:pPr algn="ctr"/>
+            <a:r>
+              <a:rPr lang="ko-KR" altLang="en-US" sz="750" dirty="0">
+                <a:solidFill>
+                  <a:srgbClr val="000000"/>
+                </a:solidFill>
+                <a:latin typeface="나눔고딕" panose="020D0604000000000000" pitchFamily="50" charset="-127"/>
+                <a:ea typeface="나눔고딕" panose="020D0604000000000000" pitchFamily="50" charset="-127"/>
+                <a:cs typeface="Segoe UI" panose="020B0502040204020203" pitchFamily="34" charset="0"/>
+              </a:rPr>
+              <a:t>본인 인증 진행</a:t>
+            </a:r>
+            <a:endParaRPr lang="en-US" altLang="ko-KR" sz="750" dirty="0">
+              <a:solidFill>
+                <a:srgbClr val="000000"/>
+              </a:solidFill>
+              <a:latin typeface="나눔고딕" panose="020D0604000000000000" pitchFamily="50" charset="-127"/>
+              <a:ea typeface="나눔고딕" panose="020D0604000000000000" pitchFamily="50" charset="-127"/>
+              <a:cs typeface="Segoe UI" panose="020B0502040204020203" pitchFamily="34" charset="0"/>
+            </a:endParaRPr>
+          </a:p>
+          <a:p>
+            <a:pPr algn="ctr"/>
+            <a:r>
+              <a:rPr lang="en-US" altLang="ko-KR" sz="750" dirty="0">
+                <a:solidFill>
+                  <a:srgbClr val="000000"/>
+                </a:solidFill>
+                <a:latin typeface="나눔고딕" panose="020D0604000000000000" pitchFamily="50" charset="-127"/>
+                <a:ea typeface="나눔고딕" panose="020D0604000000000000" pitchFamily="50" charset="-127"/>
+                <a:cs typeface="Segoe UI" panose="020B0502040204020203" pitchFamily="34" charset="0"/>
+              </a:rPr>
+              <a:t>(SMS </a:t>
+            </a:r>
+            <a:r>
+              <a:rPr lang="ko-KR" altLang="en-US" sz="750" dirty="0">
+                <a:solidFill>
+                  <a:srgbClr val="000000"/>
+                </a:solidFill>
+                <a:latin typeface="나눔고딕" panose="020D0604000000000000" pitchFamily="50" charset="-127"/>
+                <a:ea typeface="나눔고딕" panose="020D0604000000000000" pitchFamily="50" charset="-127"/>
+                <a:cs typeface="Segoe UI" panose="020B0502040204020203" pitchFamily="34" charset="0"/>
+              </a:rPr>
+              <a:t>이메일</a:t>
+            </a:r>
+            <a:r>
+              <a:rPr lang="en-US" altLang="ko-KR" sz="750" dirty="0">
+                <a:solidFill>
+                  <a:srgbClr val="000000"/>
+                </a:solidFill>
+                <a:latin typeface="나눔고딕" panose="020D0604000000000000" pitchFamily="50" charset="-127"/>
+                <a:ea typeface="나눔고딕" panose="020D0604000000000000" pitchFamily="50" charset="-127"/>
+                <a:cs typeface="Segoe UI" panose="020B0502040204020203" pitchFamily="34" charset="0"/>
+              </a:rPr>
+              <a:t>)</a:t>
+            </a:r>
+            <a:endParaRPr lang="ko-KR" altLang="en-US" sz="750" dirty="0">
+              <a:solidFill>
+                <a:srgbClr val="000000"/>
+              </a:solidFill>
+              <a:latin typeface="나눔고딕" panose="020D0604000000000000" pitchFamily="50" charset="-127"/>
+              <a:ea typeface="나눔고딕" panose="020D0604000000000000" pitchFamily="50" charset="-127"/>
+              <a:cs typeface="Segoe UI" panose="020B0502040204020203" pitchFamily="34" charset="0"/>
+            </a:endParaRPr>
+          </a:p>
+        </p:txBody>
+      </p:sp>
+      <p:cxnSp>
+        <p:nvCxnSpPr>
+          <p:cNvPr id="100" name="직선 화살표 연결선 99">
+            <a:extLst>
+              <a:ext uri="{FF2B5EF4-FFF2-40B4-BE49-F238E27FC236}">
+                <a16:creationId xmlns:a16="http://schemas.microsoft.com/office/drawing/2014/main" id="{6170BAEC-C5EE-4511-9E46-74AA6FA301B1}"/>
+              </a:ext>
+            </a:extLst>
+          </p:cNvPr>
+          <p:cNvCxnSpPr>
+            <a:cxnSpLocks/>
+          </p:cNvCxnSpPr>
+          <p:nvPr/>
+        </p:nvCxnSpPr>
+        <p:spPr>
+          <a:xfrm flipH="1" flipV="1">
+            <a:off x="7066043" y="908578"/>
+            <a:ext cx="9909" cy="1023908"/>
+          </a:xfrm>
+          <a:prstGeom prst="straightConnector1">
+            <a:avLst/>
+          </a:prstGeom>
+          <a:ln w="9525">
+            <a:solidFill>
+              <a:schemeClr val="tx1">
+                <a:lumMod val="75000"/>
+                <a:lumOff val="25000"/>
+              </a:schemeClr>
+            </a:solidFill>
+            <a:headEnd w="sm" len="sm"/>
+            <a:tailEnd type="arrow" w="sm" len="sm"/>
+          </a:ln>
+        </p:spPr>
+        <p:style>
+          <a:lnRef idx="1">
+            <a:schemeClr val="accent1"/>
+          </a:lnRef>
+          <a:fillRef idx="0">
+            <a:schemeClr val="accent1"/>
+          </a:fillRef>
+          <a:effectRef idx="0">
+            <a:schemeClr val="accent1"/>
+          </a:effectRef>
+          <a:fontRef idx="minor">
+            <a:schemeClr val="tx1"/>
+          </a:fontRef>
+        </p:style>
+      </p:cxnSp>
+      <p:cxnSp>
+        <p:nvCxnSpPr>
+          <p:cNvPr id="101" name="직선 화살표 연결선 100">
+            <a:extLst>
+              <a:ext uri="{FF2B5EF4-FFF2-40B4-BE49-F238E27FC236}">
+                <a16:creationId xmlns:a16="http://schemas.microsoft.com/office/drawing/2014/main" id="{4A9733C0-A759-4CA7-A5DE-98AAFF7B3D69}"/>
+              </a:ext>
+            </a:extLst>
+          </p:cNvPr>
+          <p:cNvCxnSpPr>
+            <a:cxnSpLocks/>
+          </p:cNvCxnSpPr>
+          <p:nvPr/>
+        </p:nvCxnSpPr>
+        <p:spPr>
+          <a:xfrm>
+            <a:off x="5620790" y="3217492"/>
+            <a:ext cx="2853" cy="246399"/>
+          </a:xfrm>
+          <a:prstGeom prst="straightConnector1">
+            <a:avLst/>
+          </a:prstGeom>
+          <a:ln>
+            <a:solidFill>
+              <a:schemeClr val="tx1">
+                <a:lumMod val="75000"/>
+                <a:lumOff val="25000"/>
+              </a:schemeClr>
+            </a:solidFill>
+            <a:headEnd w="sm" len="sm"/>
+            <a:tailEnd type="arrow" w="sm" len="sm"/>
+          </a:ln>
+        </p:spPr>
+        <p:style>
+          <a:lnRef idx="1">
+            <a:schemeClr val="accent1"/>
+          </a:lnRef>
+          <a:fillRef idx="0">
+            <a:schemeClr val="accent1"/>
+          </a:fillRef>
+          <a:effectRef idx="0">
+            <a:schemeClr val="accent1"/>
+          </a:effectRef>
+          <a:fontRef idx="minor">
+            <a:schemeClr val="tx1"/>
+          </a:fontRef>
+        </p:style>
+      </p:cxnSp>
+      <p:sp>
+        <p:nvSpPr>
+          <p:cNvPr id="103" name="사각형: 둥근 모서리 102">
+            <a:extLst>
+              <a:ext uri="{FF2B5EF4-FFF2-40B4-BE49-F238E27FC236}">
+                <a16:creationId xmlns:a16="http://schemas.microsoft.com/office/drawing/2014/main" id="{CD6BC275-567E-4FF6-B8F8-9854F4D76E8A}"/>
+              </a:ext>
+            </a:extLst>
+          </p:cNvPr>
+          <p:cNvSpPr/>
+          <p:nvPr/>
+        </p:nvSpPr>
+        <p:spPr>
+          <a:xfrm>
+            <a:off x="4882617" y="3505572"/>
+            <a:ext cx="1479200" cy="486031"/>
           </a:xfrm>
           <a:prstGeom prst="flowChartDecision">
             <a:avLst/>
@@ -17530,105 +17628,12 @@
           </a:p>
         </p:txBody>
       </p:sp>
-      <p:cxnSp>
-        <p:nvCxnSpPr>
-          <p:cNvPr id="89" name="직선 화살표 연결선 88">
+      <p:sp>
+        <p:nvSpPr>
+          <p:cNvPr id="104" name="직사각형 103">
             <a:extLst>
               <a:ext uri="{FF2B5EF4-FFF2-40B4-BE49-F238E27FC236}">
-                <a16:creationId xmlns:a16="http://schemas.microsoft.com/office/drawing/2014/main" id="{A3D0C245-3E1C-432B-B180-05D0E8EF92B5}"/>
-              </a:ext>
-            </a:extLst>
-          </p:cNvPr>
-          <p:cNvCxnSpPr>
-            <a:cxnSpLocks/>
-          </p:cNvCxnSpPr>
-          <p:nvPr/>
-        </p:nvCxnSpPr>
-        <p:spPr>
-          <a:xfrm>
-            <a:off x="5765570" y="1773182"/>
-            <a:ext cx="2854" cy="159304"/>
-          </a:xfrm>
-          <a:prstGeom prst="straightConnector1">
-            <a:avLst/>
-          </a:prstGeom>
-          <a:ln>
-            <a:solidFill>
-              <a:schemeClr val="tx1">
-                <a:lumMod val="75000"/>
-                <a:lumOff val="25000"/>
-              </a:schemeClr>
-            </a:solidFill>
-            <a:headEnd w="sm" len="sm"/>
-            <a:tailEnd type="arrow" w="sm" len="sm"/>
-          </a:ln>
-        </p:spPr>
-        <p:style>
-          <a:lnRef idx="1">
-            <a:schemeClr val="accent1"/>
-          </a:lnRef>
-          <a:fillRef idx="0">
-            <a:schemeClr val="accent1"/>
-          </a:fillRef>
-          <a:effectRef idx="0">
-            <a:schemeClr val="accent1"/>
-          </a:effectRef>
-          <a:fontRef idx="minor">
-            <a:schemeClr val="tx1"/>
-          </a:fontRef>
-        </p:style>
-      </p:cxnSp>
-      <p:cxnSp>
-        <p:nvCxnSpPr>
-          <p:cNvPr id="90" name="직선 화살표 연결선 89">
-            <a:extLst>
-              <a:ext uri="{FF2B5EF4-FFF2-40B4-BE49-F238E27FC236}">
-                <a16:creationId xmlns:a16="http://schemas.microsoft.com/office/drawing/2014/main" id="{9D09828B-6410-4B49-975A-1E4F8F322258}"/>
-              </a:ext>
-            </a:extLst>
-          </p:cNvPr>
-          <p:cNvCxnSpPr>
-            <a:cxnSpLocks/>
-          </p:cNvCxnSpPr>
-          <p:nvPr/>
-        </p:nvCxnSpPr>
-        <p:spPr>
-          <a:xfrm>
-            <a:off x="6350453" y="2159059"/>
-            <a:ext cx="261402" cy="0"/>
-          </a:xfrm>
-          <a:prstGeom prst="straightConnector1">
-            <a:avLst/>
-          </a:prstGeom>
-          <a:ln>
-            <a:solidFill>
-              <a:srgbClr val="FF0000"/>
-            </a:solidFill>
-            <a:headEnd w="sm" len="sm"/>
-            <a:tailEnd type="arrow" w="sm" len="sm"/>
-          </a:ln>
-        </p:spPr>
-        <p:style>
-          <a:lnRef idx="1">
-            <a:schemeClr val="accent1"/>
-          </a:lnRef>
-          <a:fillRef idx="0">
-            <a:schemeClr val="accent1"/>
-          </a:fillRef>
-          <a:effectRef idx="0">
-            <a:schemeClr val="accent1"/>
-          </a:effectRef>
-          <a:fontRef idx="minor">
-            <a:schemeClr val="tx1"/>
-          </a:fontRef>
-        </p:style>
-      </p:cxnSp>
-      <p:sp>
-        <p:nvSpPr>
-          <p:cNvPr id="91" name="직사각형 90">
-            <a:extLst>
-              <a:ext uri="{FF2B5EF4-FFF2-40B4-BE49-F238E27FC236}">
-                <a16:creationId xmlns:a16="http://schemas.microsoft.com/office/drawing/2014/main" id="{9D1FA220-2AC7-488E-92FD-AAB727F9E0F0}"/>
+                <a16:creationId xmlns:a16="http://schemas.microsoft.com/office/drawing/2014/main" id="{8BA99EDD-6CEE-4FD7-84D8-BDDA7EB73F96}"/>
               </a:ext>
             </a:extLst>
           </p:cNvPr>
@@ -17637,8 +17642,8 @@
         </p:nvSpPr>
         <p:spPr>
           <a:xfrm>
-            <a:off x="6686227" y="1983422"/>
-            <a:ext cx="840506" cy="338554"/>
+            <a:off x="5201964" y="4210493"/>
+            <a:ext cx="840506" cy="567370"/>
           </a:xfrm>
           <a:prstGeom prst="rect">
             <a:avLst/>
@@ -17687,790 +17692,7 @@
                 <a:ea typeface="나눔고딕" panose="020D0604000000000000" pitchFamily="50" charset="-127"/>
                 <a:cs typeface="Segoe UI" panose="020B0502040204020203" pitchFamily="34" charset="0"/>
               </a:rPr>
-              <a:t>회원가입</a:t>
-            </a:r>
-          </a:p>
-        </p:txBody>
-      </p:sp>
-      <p:sp>
-        <p:nvSpPr>
-          <p:cNvPr id="92" name="직사각형 91">
-            <a:extLst>
-              <a:ext uri="{FF2B5EF4-FFF2-40B4-BE49-F238E27FC236}">
-                <a16:creationId xmlns:a16="http://schemas.microsoft.com/office/drawing/2014/main" id="{F0A341A0-5E89-461A-B7DE-58F26DF8B530}"/>
-              </a:ext>
-            </a:extLst>
-          </p:cNvPr>
-          <p:cNvSpPr/>
-          <p:nvPr/>
-        </p:nvSpPr>
-        <p:spPr>
-          <a:xfrm>
-            <a:off x="7838321" y="1983422"/>
-            <a:ext cx="967661" cy="338554"/>
-          </a:xfrm>
-          <a:prstGeom prst="rect">
-            <a:avLst/>
-          </a:prstGeom>
-          <a:solidFill>
-            <a:schemeClr val="bg1"/>
-          </a:solidFill>
-          <a:ln w="3175">
-            <a:solidFill>
-              <a:schemeClr val="tx1">
-                <a:lumMod val="50000"/>
-                <a:lumOff val="50000"/>
-              </a:schemeClr>
-            </a:solidFill>
-          </a:ln>
-        </p:spPr>
-        <p:style>
-          <a:lnRef idx="2">
-            <a:schemeClr val="accent1">
-              <a:shade val="50000"/>
-            </a:schemeClr>
-          </a:lnRef>
-          <a:fillRef idx="1">
-            <a:schemeClr val="accent1"/>
-          </a:fillRef>
-          <a:effectRef idx="0">
-            <a:schemeClr val="accent1"/>
-          </a:effectRef>
-          <a:fontRef idx="minor">
-            <a:schemeClr val="lt1"/>
-          </a:fontRef>
-        </p:style>
-        <p:txBody>
-          <a:bodyPr wrap="none" lIns="0" tIns="0" rIns="0" bIns="0" rtlCol="0" anchor="ctr">
-            <a:normAutofit/>
-          </a:bodyPr>
-          <a:lstStyle/>
-          <a:p>
-            <a:pPr algn="ctr"/>
-            <a:r>
-              <a:rPr lang="ko-KR" altLang="en-US" sz="750" dirty="0">
-                <a:solidFill>
-                  <a:srgbClr val="000000"/>
-                </a:solidFill>
-                <a:latin typeface="나눔고딕" panose="020D0604000000000000" pitchFamily="50" charset="-127"/>
-                <a:ea typeface="나눔고딕" panose="020D0604000000000000" pitchFamily="50" charset="-127"/>
-                <a:cs typeface="Segoe UI" panose="020B0502040204020203" pitchFamily="34" charset="0"/>
-              </a:rPr>
-              <a:t>회원가입 정보입력</a:t>
-            </a:r>
-          </a:p>
-        </p:txBody>
-      </p:sp>
-      <p:cxnSp>
-        <p:nvCxnSpPr>
-          <p:cNvPr id="93" name="직선 화살표 연결선 92">
-            <a:extLst>
-              <a:ext uri="{FF2B5EF4-FFF2-40B4-BE49-F238E27FC236}">
-                <a16:creationId xmlns:a16="http://schemas.microsoft.com/office/drawing/2014/main" id="{88C5D7D0-C7D1-4535-9D94-B521F467159D}"/>
-              </a:ext>
-            </a:extLst>
-          </p:cNvPr>
-          <p:cNvCxnSpPr>
-            <a:cxnSpLocks/>
-          </p:cNvCxnSpPr>
-          <p:nvPr/>
-        </p:nvCxnSpPr>
-        <p:spPr>
-          <a:xfrm>
-            <a:off x="7593225" y="2159059"/>
-            <a:ext cx="178604" cy="0"/>
-          </a:xfrm>
-          <a:prstGeom prst="straightConnector1">
-            <a:avLst/>
-          </a:prstGeom>
-          <a:ln>
-            <a:solidFill>
-              <a:schemeClr val="tx1">
-                <a:lumMod val="75000"/>
-                <a:lumOff val="25000"/>
-              </a:schemeClr>
-            </a:solidFill>
-            <a:headEnd w="sm" len="sm"/>
-            <a:tailEnd type="arrow" w="sm" len="sm"/>
-          </a:ln>
-        </p:spPr>
-        <p:style>
-          <a:lnRef idx="1">
-            <a:schemeClr val="accent1"/>
-          </a:lnRef>
-          <a:fillRef idx="0">
-            <a:schemeClr val="accent1"/>
-          </a:fillRef>
-          <a:effectRef idx="0">
-            <a:schemeClr val="accent1"/>
-          </a:effectRef>
-          <a:fontRef idx="minor">
-            <a:schemeClr val="tx1"/>
-          </a:fontRef>
-        </p:style>
-      </p:cxnSp>
-      <p:sp>
-        <p:nvSpPr>
-          <p:cNvPr id="94" name="TextBox 93">
-            <a:extLst>
-              <a:ext uri="{FF2B5EF4-FFF2-40B4-BE49-F238E27FC236}">
-                <a16:creationId xmlns:a16="http://schemas.microsoft.com/office/drawing/2014/main" id="{5F361EB6-C4C7-4890-80D3-32920BD1A110}"/>
-              </a:ext>
-            </a:extLst>
-          </p:cNvPr>
-          <p:cNvSpPr txBox="1"/>
-          <p:nvPr/>
-        </p:nvSpPr>
-        <p:spPr>
-          <a:xfrm>
-            <a:off x="6314445" y="1968033"/>
-            <a:ext cx="303288" cy="184666"/>
-          </a:xfrm>
-          <a:prstGeom prst="rect">
-            <a:avLst/>
-          </a:prstGeom>
-          <a:noFill/>
-        </p:spPr>
-        <p:txBody>
-          <a:bodyPr wrap="none" rtlCol="0">
-            <a:spAutoFit/>
-          </a:bodyPr>
-          <a:lstStyle/>
-          <a:p>
-            <a:r>
-              <a:rPr lang="en-US" altLang="ko-KR" sz="600" b="1" dirty="0">
-                <a:solidFill>
-                  <a:srgbClr val="FF0000"/>
-                </a:solidFill>
-                <a:latin typeface="나눔고딕" panose="020D0604000000000000" pitchFamily="50" charset="-127"/>
-                <a:ea typeface="나눔고딕" panose="020D0604000000000000" pitchFamily="50" charset="-127"/>
-              </a:rPr>
-              <a:t>NO</a:t>
-            </a:r>
-            <a:endParaRPr lang="ko-KR" altLang="en-US" sz="600" b="1" dirty="0">
-              <a:solidFill>
-                <a:srgbClr val="FF0000"/>
-              </a:solidFill>
-              <a:latin typeface="나눔고딕" panose="020D0604000000000000" pitchFamily="50" charset="-127"/>
-              <a:ea typeface="나눔고딕" panose="020D0604000000000000" pitchFamily="50" charset="-127"/>
-            </a:endParaRPr>
-          </a:p>
-        </p:txBody>
-      </p:sp>
-      <p:sp>
-        <p:nvSpPr>
-          <p:cNvPr id="95" name="TextBox 94">
-            <a:extLst>
-              <a:ext uri="{FF2B5EF4-FFF2-40B4-BE49-F238E27FC236}">
-                <a16:creationId xmlns:a16="http://schemas.microsoft.com/office/drawing/2014/main" id="{689A4301-0E27-40A9-9B2E-ED3B8A767A2F}"/>
-              </a:ext>
-            </a:extLst>
-          </p:cNvPr>
-          <p:cNvSpPr txBox="1"/>
-          <p:nvPr/>
-        </p:nvSpPr>
-        <p:spPr>
-          <a:xfrm>
-            <a:off x="5810316" y="2377042"/>
-            <a:ext cx="322524" cy="184666"/>
-          </a:xfrm>
-          <a:prstGeom prst="rect">
-            <a:avLst/>
-          </a:prstGeom>
-          <a:noFill/>
-        </p:spPr>
-        <p:txBody>
-          <a:bodyPr wrap="none" rtlCol="0">
-            <a:spAutoFit/>
-          </a:bodyPr>
-          <a:lstStyle/>
-          <a:p>
-            <a:r>
-              <a:rPr lang="en-US" altLang="ko-KR" sz="600" b="1" dirty="0">
-                <a:solidFill>
-                  <a:srgbClr val="0078D7"/>
-                </a:solidFill>
-                <a:latin typeface="나눔고딕" panose="020D0604000000000000" pitchFamily="50" charset="-127"/>
-                <a:ea typeface="나눔고딕" panose="020D0604000000000000" pitchFamily="50" charset="-127"/>
-              </a:rPr>
-              <a:t>YES</a:t>
-            </a:r>
-            <a:endParaRPr lang="ko-KR" altLang="en-US" sz="600" b="1" dirty="0">
-              <a:solidFill>
-                <a:srgbClr val="0078D7"/>
-              </a:solidFill>
-              <a:latin typeface="나눔고딕" panose="020D0604000000000000" pitchFamily="50" charset="-127"/>
-              <a:ea typeface="나눔고딕" panose="020D0604000000000000" pitchFamily="50" charset="-127"/>
-            </a:endParaRPr>
-          </a:p>
-        </p:txBody>
-      </p:sp>
-      <p:cxnSp>
-        <p:nvCxnSpPr>
-          <p:cNvPr id="96" name="직선 화살표 연결선 95">
-            <a:extLst>
-              <a:ext uri="{FF2B5EF4-FFF2-40B4-BE49-F238E27FC236}">
-                <a16:creationId xmlns:a16="http://schemas.microsoft.com/office/drawing/2014/main" id="{B94AFE8D-FA9D-4568-8D06-3E02FBB79BC5}"/>
-              </a:ext>
-            </a:extLst>
-          </p:cNvPr>
-          <p:cNvCxnSpPr>
-            <a:cxnSpLocks/>
-          </p:cNvCxnSpPr>
-          <p:nvPr/>
-        </p:nvCxnSpPr>
-        <p:spPr>
-          <a:xfrm>
-            <a:off x="5765570" y="2391540"/>
-            <a:ext cx="2854" cy="159304"/>
-          </a:xfrm>
-          <a:prstGeom prst="straightConnector1">
-            <a:avLst/>
-          </a:prstGeom>
-          <a:ln>
-            <a:solidFill>
-              <a:srgbClr val="0078D7"/>
-            </a:solidFill>
-            <a:headEnd w="sm" len="sm"/>
-            <a:tailEnd type="arrow" w="sm" len="sm"/>
-          </a:ln>
-        </p:spPr>
-        <p:style>
-          <a:lnRef idx="1">
-            <a:schemeClr val="accent1"/>
-          </a:lnRef>
-          <a:fillRef idx="0">
-            <a:schemeClr val="accent1"/>
-          </a:fillRef>
-          <a:effectRef idx="0">
-            <a:schemeClr val="accent1"/>
-          </a:effectRef>
-          <a:fontRef idx="minor">
-            <a:schemeClr val="tx1"/>
-          </a:fontRef>
-        </p:style>
-      </p:cxnSp>
-      <p:sp>
-        <p:nvSpPr>
-          <p:cNvPr id="97" name="직사각형 96">
-            <a:extLst>
-              <a:ext uri="{FF2B5EF4-FFF2-40B4-BE49-F238E27FC236}">
-                <a16:creationId xmlns:a16="http://schemas.microsoft.com/office/drawing/2014/main" id="{59C6B0BE-0DF4-4F39-8223-38DF9B4ADFB5}"/>
-              </a:ext>
-            </a:extLst>
-          </p:cNvPr>
-          <p:cNvSpPr/>
-          <p:nvPr/>
-        </p:nvSpPr>
-        <p:spPr>
-          <a:xfrm>
-            <a:off x="5346744" y="2616194"/>
-            <a:ext cx="840506" cy="338554"/>
-          </a:xfrm>
-          <a:prstGeom prst="rect">
-            <a:avLst/>
-          </a:prstGeom>
-          <a:solidFill>
-            <a:schemeClr val="bg1"/>
-          </a:solidFill>
-          <a:ln w="3175">
-            <a:solidFill>
-              <a:schemeClr val="tx1">
-                <a:lumMod val="50000"/>
-                <a:lumOff val="50000"/>
-              </a:schemeClr>
-            </a:solidFill>
-          </a:ln>
-        </p:spPr>
-        <p:style>
-          <a:lnRef idx="2">
-            <a:schemeClr val="accent1">
-              <a:shade val="50000"/>
-            </a:schemeClr>
-          </a:lnRef>
-          <a:fillRef idx="1">
-            <a:schemeClr val="accent1"/>
-          </a:fillRef>
-          <a:effectRef idx="0">
-            <a:schemeClr val="accent1"/>
-          </a:effectRef>
-          <a:fontRef idx="minor">
-            <a:schemeClr val="lt1"/>
-          </a:fontRef>
-        </p:style>
-        <p:txBody>
-          <a:bodyPr wrap="none" lIns="0" tIns="0" rIns="0" bIns="0" rtlCol="0" anchor="ctr">
-            <a:normAutofit/>
-          </a:bodyPr>
-          <a:lstStyle/>
-          <a:p>
-            <a:pPr algn="ctr"/>
-            <a:r>
-              <a:rPr lang="ko-KR" altLang="en-US" sz="750" dirty="0">
-                <a:solidFill>
-                  <a:srgbClr val="000000"/>
-                </a:solidFill>
-                <a:latin typeface="나눔고딕" panose="020D0604000000000000" pitchFamily="50" charset="-127"/>
-                <a:ea typeface="나눔고딕" panose="020D0604000000000000" pitchFamily="50" charset="-127"/>
-                <a:cs typeface="Segoe UI" panose="020B0502040204020203" pitchFamily="34" charset="0"/>
-              </a:rPr>
-              <a:t>로그인</a:t>
-            </a:r>
-          </a:p>
-        </p:txBody>
-      </p:sp>
-      <p:cxnSp>
-        <p:nvCxnSpPr>
-          <p:cNvPr id="98" name="직선 화살표 연결선 97">
-            <a:extLst>
-              <a:ext uri="{FF2B5EF4-FFF2-40B4-BE49-F238E27FC236}">
-                <a16:creationId xmlns:a16="http://schemas.microsoft.com/office/drawing/2014/main" id="{283D2AEF-3863-4DF2-B232-0C9F93DCFD37}"/>
-              </a:ext>
-            </a:extLst>
-          </p:cNvPr>
-          <p:cNvCxnSpPr>
-            <a:cxnSpLocks/>
-          </p:cNvCxnSpPr>
-          <p:nvPr/>
-        </p:nvCxnSpPr>
-        <p:spPr>
-          <a:xfrm>
-            <a:off x="8342707" y="2550844"/>
-            <a:ext cx="0" cy="1603710"/>
-          </a:xfrm>
-          <a:prstGeom prst="straightConnector1">
-            <a:avLst/>
-          </a:prstGeom>
-          <a:ln>
-            <a:solidFill>
-              <a:schemeClr val="tx1">
-                <a:lumMod val="75000"/>
-                <a:lumOff val="25000"/>
-              </a:schemeClr>
-            </a:solidFill>
-            <a:headEnd w="sm" len="sm"/>
-            <a:tailEnd type="arrow" w="sm" len="sm"/>
-          </a:ln>
-        </p:spPr>
-        <p:style>
-          <a:lnRef idx="1">
-            <a:schemeClr val="accent1"/>
-          </a:lnRef>
-          <a:fillRef idx="0">
-            <a:schemeClr val="accent1"/>
-          </a:fillRef>
-          <a:effectRef idx="0">
-            <a:schemeClr val="accent1"/>
-          </a:effectRef>
-          <a:fontRef idx="minor">
-            <a:schemeClr val="tx1"/>
-          </a:fontRef>
-        </p:style>
-      </p:cxnSp>
-      <p:sp>
-        <p:nvSpPr>
-          <p:cNvPr id="99" name="직사각형 98">
-            <a:extLst>
-              <a:ext uri="{FF2B5EF4-FFF2-40B4-BE49-F238E27FC236}">
-                <a16:creationId xmlns:a16="http://schemas.microsoft.com/office/drawing/2014/main" id="{7A8B0EAE-A922-43A6-8E61-270FA74A1BBD}"/>
-              </a:ext>
-            </a:extLst>
-          </p:cNvPr>
-          <p:cNvSpPr/>
-          <p:nvPr/>
-        </p:nvSpPr>
-        <p:spPr>
-          <a:xfrm>
-            <a:off x="7839466" y="4394562"/>
-            <a:ext cx="967661" cy="338554"/>
-          </a:xfrm>
-          <a:prstGeom prst="rect">
-            <a:avLst/>
-          </a:prstGeom>
-          <a:solidFill>
-            <a:schemeClr val="bg1"/>
-          </a:solidFill>
-          <a:ln w="3175">
-            <a:solidFill>
-              <a:schemeClr val="tx1">
-                <a:lumMod val="50000"/>
-                <a:lumOff val="50000"/>
-              </a:schemeClr>
-            </a:solidFill>
-          </a:ln>
-        </p:spPr>
-        <p:style>
-          <a:lnRef idx="2">
-            <a:schemeClr val="accent1">
-              <a:shade val="50000"/>
-            </a:schemeClr>
-          </a:lnRef>
-          <a:fillRef idx="1">
-            <a:schemeClr val="accent1"/>
-          </a:fillRef>
-          <a:effectRef idx="0">
-            <a:schemeClr val="accent1"/>
-          </a:effectRef>
-          <a:fontRef idx="minor">
-            <a:schemeClr val="lt1"/>
-          </a:fontRef>
-        </p:style>
-        <p:txBody>
-          <a:bodyPr wrap="none" lIns="0" tIns="0" rIns="0" bIns="0" rtlCol="0" anchor="ctr">
-            <a:normAutofit/>
-          </a:bodyPr>
-          <a:lstStyle/>
-          <a:p>
-            <a:pPr algn="ctr"/>
-            <a:r>
-              <a:rPr lang="ko-KR" altLang="en-US" sz="750" dirty="0">
-                <a:solidFill>
-                  <a:srgbClr val="000000"/>
-                </a:solidFill>
-                <a:latin typeface="나눔고딕" panose="020D0604000000000000" pitchFamily="50" charset="-127"/>
-                <a:ea typeface="나눔고딕" panose="020D0604000000000000" pitchFamily="50" charset="-127"/>
-                <a:cs typeface="Segoe UI" panose="020B0502040204020203" pitchFamily="34" charset="0"/>
-              </a:rPr>
-              <a:t>가입완료</a:t>
-            </a:r>
-          </a:p>
-        </p:txBody>
-      </p:sp>
-      <p:cxnSp>
-        <p:nvCxnSpPr>
-          <p:cNvPr id="100" name="직선 화살표 연결선 99">
-            <a:extLst>
-              <a:ext uri="{FF2B5EF4-FFF2-40B4-BE49-F238E27FC236}">
-                <a16:creationId xmlns:a16="http://schemas.microsoft.com/office/drawing/2014/main" id="{6170BAEC-C5EE-4511-9E46-74AA6FA301B1}"/>
-              </a:ext>
-            </a:extLst>
-          </p:cNvPr>
-          <p:cNvCxnSpPr>
-            <a:cxnSpLocks/>
-          </p:cNvCxnSpPr>
-          <p:nvPr/>
-        </p:nvCxnSpPr>
-        <p:spPr>
-          <a:xfrm flipH="1">
-            <a:off x="6335935" y="4573821"/>
-            <a:ext cx="1325569" cy="0"/>
-          </a:xfrm>
-          <a:prstGeom prst="straightConnector1">
-            <a:avLst/>
-          </a:prstGeom>
-          <a:ln>
-            <a:solidFill>
-              <a:schemeClr val="tx1">
-                <a:lumMod val="75000"/>
-                <a:lumOff val="25000"/>
-              </a:schemeClr>
-            </a:solidFill>
-            <a:headEnd w="sm" len="sm"/>
-            <a:tailEnd type="arrow" w="sm" len="sm"/>
-          </a:ln>
-        </p:spPr>
-        <p:style>
-          <a:lnRef idx="1">
-            <a:schemeClr val="accent1"/>
-          </a:lnRef>
-          <a:fillRef idx="0">
-            <a:schemeClr val="accent1"/>
-          </a:fillRef>
-          <a:effectRef idx="0">
-            <a:schemeClr val="accent1"/>
-          </a:effectRef>
-          <a:fontRef idx="minor">
-            <a:schemeClr val="tx1"/>
-          </a:fontRef>
-        </p:style>
-      </p:cxnSp>
-      <p:cxnSp>
-        <p:nvCxnSpPr>
-          <p:cNvPr id="101" name="직선 화살표 연결선 100">
-            <a:extLst>
-              <a:ext uri="{FF2B5EF4-FFF2-40B4-BE49-F238E27FC236}">
-                <a16:creationId xmlns:a16="http://schemas.microsoft.com/office/drawing/2014/main" id="{4A9733C0-A759-4CA7-A5DE-98AAFF7B3D69}"/>
-              </a:ext>
-            </a:extLst>
-          </p:cNvPr>
-          <p:cNvCxnSpPr>
-            <a:cxnSpLocks/>
-          </p:cNvCxnSpPr>
-          <p:nvPr/>
-        </p:nvCxnSpPr>
-        <p:spPr>
-          <a:xfrm>
-            <a:off x="5765570" y="3000301"/>
-            <a:ext cx="2854" cy="159304"/>
-          </a:xfrm>
-          <a:prstGeom prst="straightConnector1">
-            <a:avLst/>
-          </a:prstGeom>
-          <a:ln>
-            <a:solidFill>
-              <a:schemeClr val="tx1">
-                <a:lumMod val="75000"/>
-                <a:lumOff val="25000"/>
-              </a:schemeClr>
-            </a:solidFill>
-            <a:headEnd w="sm" len="sm"/>
-            <a:tailEnd type="arrow" w="sm" len="sm"/>
-          </a:ln>
-        </p:spPr>
-        <p:style>
-          <a:lnRef idx="1">
-            <a:schemeClr val="accent1"/>
-          </a:lnRef>
-          <a:fillRef idx="0">
-            <a:schemeClr val="accent1"/>
-          </a:fillRef>
-          <a:effectRef idx="0">
-            <a:schemeClr val="accent1"/>
-          </a:effectRef>
-          <a:fontRef idx="minor">
-            <a:schemeClr val="tx1"/>
-          </a:fontRef>
-        </p:style>
-      </p:cxnSp>
-      <p:cxnSp>
-        <p:nvCxnSpPr>
-          <p:cNvPr id="102" name="직선 화살표 연결선 101">
-            <a:extLst>
-              <a:ext uri="{FF2B5EF4-FFF2-40B4-BE49-F238E27FC236}">
-                <a16:creationId xmlns:a16="http://schemas.microsoft.com/office/drawing/2014/main" id="{D3453D9A-E108-45ED-9350-8142703E610A}"/>
-              </a:ext>
-            </a:extLst>
-          </p:cNvPr>
-          <p:cNvCxnSpPr>
-            <a:cxnSpLocks/>
-          </p:cNvCxnSpPr>
-          <p:nvPr/>
-        </p:nvCxnSpPr>
-        <p:spPr>
-          <a:xfrm>
-            <a:off x="5765570" y="3579122"/>
-            <a:ext cx="2854" cy="159304"/>
-          </a:xfrm>
-          <a:prstGeom prst="straightConnector1">
-            <a:avLst/>
-          </a:prstGeom>
-          <a:ln>
-            <a:solidFill>
-              <a:schemeClr val="tx1">
-                <a:lumMod val="75000"/>
-                <a:lumOff val="25000"/>
-              </a:schemeClr>
-            </a:solidFill>
-            <a:headEnd w="sm" len="sm"/>
-            <a:tailEnd type="arrow" w="sm" len="sm"/>
-          </a:ln>
-        </p:spPr>
-        <p:style>
-          <a:lnRef idx="1">
-            <a:schemeClr val="accent1"/>
-          </a:lnRef>
-          <a:fillRef idx="0">
-            <a:schemeClr val="accent1"/>
-          </a:fillRef>
-          <a:effectRef idx="0">
-            <a:schemeClr val="accent1"/>
-          </a:effectRef>
-          <a:fontRef idx="minor">
-            <a:schemeClr val="tx1"/>
-          </a:fontRef>
-        </p:style>
-      </p:cxnSp>
-      <p:sp>
-        <p:nvSpPr>
-          <p:cNvPr id="103" name="사각형: 둥근 모서리 102">
-            <a:extLst>
-              <a:ext uri="{FF2B5EF4-FFF2-40B4-BE49-F238E27FC236}">
-                <a16:creationId xmlns:a16="http://schemas.microsoft.com/office/drawing/2014/main" id="{CD6BC275-567E-4FF6-B8F8-9854F4D76E8A}"/>
-              </a:ext>
-            </a:extLst>
-          </p:cNvPr>
-          <p:cNvSpPr/>
-          <p:nvPr/>
-        </p:nvSpPr>
-        <p:spPr>
-          <a:xfrm>
-            <a:off x="5027397" y="3789674"/>
-            <a:ext cx="1479200" cy="338554"/>
-          </a:xfrm>
-          <a:prstGeom prst="flowChartDecision">
-            <a:avLst/>
-          </a:prstGeom>
-          <a:solidFill>
-            <a:schemeClr val="bg1"/>
-          </a:solidFill>
-          <a:ln w="3175">
-            <a:solidFill>
-              <a:schemeClr val="tx1">
-                <a:lumMod val="50000"/>
-                <a:lumOff val="50000"/>
-              </a:schemeClr>
-            </a:solidFill>
-          </a:ln>
-        </p:spPr>
-        <p:style>
-          <a:lnRef idx="2">
-            <a:schemeClr val="accent1">
-              <a:shade val="50000"/>
-            </a:schemeClr>
-          </a:lnRef>
-          <a:fillRef idx="1">
-            <a:schemeClr val="accent1"/>
-          </a:fillRef>
-          <a:effectRef idx="0">
-            <a:schemeClr val="accent1"/>
-          </a:effectRef>
-          <a:fontRef idx="minor">
-            <a:schemeClr val="lt1"/>
-          </a:fontRef>
-        </p:style>
-        <p:txBody>
-          <a:bodyPr wrap="none" rtlCol="0" anchor="ctr"/>
-          <a:lstStyle/>
-          <a:p>
-            <a:pPr algn="ctr"/>
-            <a:r>
-              <a:rPr lang="ko-KR" altLang="en-US" sz="750" dirty="0">
-                <a:solidFill>
-                  <a:schemeClr val="tx1">
-                    <a:lumMod val="95000"/>
-                    <a:lumOff val="5000"/>
-                  </a:schemeClr>
-                </a:solidFill>
-                <a:latin typeface="나눔고딕" panose="020D0604000000000000" pitchFamily="50" charset="-127"/>
-                <a:ea typeface="나눔고딕" panose="020D0604000000000000" pitchFamily="50" charset="-127"/>
-                <a:cs typeface="Segoe UI" panose="020B0502040204020203" pitchFamily="34" charset="0"/>
-              </a:rPr>
-              <a:t>아이디</a:t>
-            </a:r>
-            <a:r>
-              <a:rPr lang="en-US" altLang="ko-KR" sz="750" dirty="0">
-                <a:solidFill>
-                  <a:schemeClr val="tx1">
-                    <a:lumMod val="95000"/>
-                    <a:lumOff val="5000"/>
-                  </a:schemeClr>
-                </a:solidFill>
-                <a:latin typeface="나눔고딕" panose="020D0604000000000000" pitchFamily="50" charset="-127"/>
-                <a:ea typeface="나눔고딕" panose="020D0604000000000000" pitchFamily="50" charset="-127"/>
-                <a:cs typeface="Segoe UI" panose="020B0502040204020203" pitchFamily="34" charset="0"/>
-              </a:rPr>
-              <a:t>/</a:t>
-            </a:r>
-            <a:r>
-              <a:rPr lang="ko-KR" altLang="en-US" sz="750" dirty="0">
-                <a:solidFill>
-                  <a:schemeClr val="tx1">
-                    <a:lumMod val="95000"/>
-                    <a:lumOff val="5000"/>
-                  </a:schemeClr>
-                </a:solidFill>
-                <a:latin typeface="나눔고딕" panose="020D0604000000000000" pitchFamily="50" charset="-127"/>
-                <a:ea typeface="나눔고딕" panose="020D0604000000000000" pitchFamily="50" charset="-127"/>
-                <a:cs typeface="Segoe UI" panose="020B0502040204020203" pitchFamily="34" charset="0"/>
-              </a:rPr>
-              <a:t>비밀번호</a:t>
-            </a:r>
-            <a:endParaRPr lang="en-US" altLang="ko-KR" sz="750" dirty="0">
-              <a:solidFill>
-                <a:schemeClr val="tx1">
-                  <a:lumMod val="95000"/>
-                  <a:lumOff val="5000"/>
-                </a:schemeClr>
-              </a:solidFill>
-              <a:latin typeface="나눔고딕" panose="020D0604000000000000" pitchFamily="50" charset="-127"/>
-              <a:ea typeface="나눔고딕" panose="020D0604000000000000" pitchFamily="50" charset="-127"/>
-              <a:cs typeface="Segoe UI" panose="020B0502040204020203" pitchFamily="34" charset="0"/>
-            </a:endParaRPr>
-          </a:p>
-          <a:p>
-            <a:pPr algn="ctr"/>
-            <a:r>
-              <a:rPr lang="ko-KR" altLang="en-US" sz="750" dirty="0">
-                <a:solidFill>
-                  <a:schemeClr val="tx1">
-                    <a:lumMod val="95000"/>
-                    <a:lumOff val="5000"/>
-                  </a:schemeClr>
-                </a:solidFill>
-                <a:latin typeface="나눔고딕" panose="020D0604000000000000" pitchFamily="50" charset="-127"/>
-                <a:ea typeface="나눔고딕" panose="020D0604000000000000" pitchFamily="50" charset="-127"/>
-                <a:cs typeface="Segoe UI" panose="020B0502040204020203" pitchFamily="34" charset="0"/>
-              </a:rPr>
-              <a:t>확인</a:t>
-            </a:r>
-          </a:p>
-        </p:txBody>
-      </p:sp>
-      <p:sp>
-        <p:nvSpPr>
-          <p:cNvPr id="104" name="직사각형 103">
-            <a:extLst>
-              <a:ext uri="{FF2B5EF4-FFF2-40B4-BE49-F238E27FC236}">
-                <a16:creationId xmlns:a16="http://schemas.microsoft.com/office/drawing/2014/main" id="{8BA99EDD-6CEE-4FD7-84D8-BDDA7EB73F96}"/>
-              </a:ext>
-            </a:extLst>
-          </p:cNvPr>
-          <p:cNvSpPr/>
-          <p:nvPr/>
-        </p:nvSpPr>
-        <p:spPr>
-          <a:xfrm>
-            <a:off x="5346744" y="4397748"/>
-            <a:ext cx="840506" cy="338554"/>
-          </a:xfrm>
-          <a:prstGeom prst="rect">
-            <a:avLst/>
-          </a:prstGeom>
-          <a:solidFill>
-            <a:schemeClr val="bg1"/>
-          </a:solidFill>
-          <a:ln w="3175">
-            <a:solidFill>
-              <a:schemeClr val="tx1">
-                <a:lumMod val="50000"/>
-                <a:lumOff val="50000"/>
-              </a:schemeClr>
-            </a:solidFill>
-          </a:ln>
-        </p:spPr>
-        <p:style>
-          <a:lnRef idx="2">
-            <a:schemeClr val="accent1">
-              <a:shade val="50000"/>
-            </a:schemeClr>
-          </a:lnRef>
-          <a:fillRef idx="1">
-            <a:schemeClr val="accent1"/>
-          </a:fillRef>
-          <a:effectRef idx="0">
-            <a:schemeClr val="accent1"/>
-          </a:effectRef>
-          <a:fontRef idx="minor">
-            <a:schemeClr val="lt1"/>
-          </a:fontRef>
-        </p:style>
-        <p:txBody>
-          <a:bodyPr wrap="none" lIns="0" tIns="0" rIns="0" bIns="0" rtlCol="0" anchor="ctr">
-            <a:normAutofit/>
-          </a:bodyPr>
-          <a:lstStyle/>
-          <a:p>
-            <a:pPr algn="ctr"/>
-            <a:r>
-              <a:rPr lang="ko-KR" altLang="en-US" sz="750" dirty="0">
-                <a:solidFill>
-                  <a:srgbClr val="000000"/>
-                </a:solidFill>
-                <a:latin typeface="나눔고딕" panose="020D0604000000000000" pitchFamily="50" charset="-127"/>
-                <a:ea typeface="나눔고딕" panose="020D0604000000000000" pitchFamily="50" charset="-127"/>
-                <a:cs typeface="Segoe UI" panose="020B0502040204020203" pitchFamily="34" charset="0"/>
-              </a:rPr>
-              <a:t>마이페이지 노출</a:t>
+              <a:t>장바구니에 담기</a:t>
             </a:r>
           </a:p>
         </p:txBody>
@@ -18489,7 +17711,7 @@
         </p:nvSpPr>
         <p:spPr>
           <a:xfrm>
-            <a:off x="5346744" y="4986118"/>
+            <a:off x="5194508" y="5090501"/>
             <a:ext cx="840506" cy="338400"/>
           </a:xfrm>
           <a:prstGeom prst="roundRect">
@@ -18563,8 +17785,8 @@
         </p:nvCxnSpPr>
         <p:spPr>
           <a:xfrm>
-            <a:off x="5759541" y="4800113"/>
-            <a:ext cx="0" cy="144404"/>
+            <a:off x="5614761" y="4791455"/>
+            <a:ext cx="0" cy="192201"/>
           </a:xfrm>
           <a:prstGeom prst="straightConnector1">
             <a:avLst/>
@@ -18608,12 +17830,12 @@
         </p:nvCxnSpPr>
         <p:spPr>
           <a:xfrm rot="10800000">
-            <a:off x="6493897" y="2763669"/>
-            <a:ext cx="12700" cy="1217083"/>
+            <a:off x="3476933" y="2663996"/>
+            <a:ext cx="455771" cy="307103"/>
           </a:xfrm>
           <a:prstGeom prst="bentConnector3">
             <a:avLst>
-              <a:gd name="adj1" fmla="val -5629024"/>
+              <a:gd name="adj1" fmla="val 50000"/>
             </a:avLst>
           </a:prstGeom>
           <a:ln>
@@ -18640,54 +17862,6 @@
       </p:cxnSp>
       <p:sp>
         <p:nvSpPr>
-          <p:cNvPr id="108" name="TextBox 107">
-            <a:extLst>
-              <a:ext uri="{FF2B5EF4-FFF2-40B4-BE49-F238E27FC236}">
-                <a16:creationId xmlns:a16="http://schemas.microsoft.com/office/drawing/2014/main" id="{7937069A-B501-4877-AEAF-AA0C6C565FEF}"/>
-              </a:ext>
-            </a:extLst>
-          </p:cNvPr>
-          <p:cNvSpPr txBox="1"/>
-          <p:nvPr/>
-        </p:nvSpPr>
-        <p:spPr>
-          <a:xfrm>
-            <a:off x="6705707" y="3773058"/>
-            <a:ext cx="303288" cy="184666"/>
-          </a:xfrm>
-          <a:prstGeom prst="rect">
-            <a:avLst/>
-          </a:prstGeom>
-          <a:noFill/>
-        </p:spPr>
-        <p:txBody>
-          <a:bodyPr wrap="none" rtlCol="0">
-            <a:spAutoFit/>
-          </a:bodyPr>
-          <a:lstStyle/>
-          <a:p>
-            <a:r>
-              <a:rPr lang="en-US" altLang="ko-KR" sz="600" b="1" dirty="0">
-                <a:solidFill>
-                  <a:srgbClr val="FF0000"/>
-                </a:solidFill>
-                <a:latin typeface="나눔고딕" panose="020D0604000000000000" pitchFamily="50" charset="-127"/>
-                <a:ea typeface="나눔고딕" panose="020D0604000000000000" pitchFamily="50" charset="-127"/>
-              </a:rPr>
-              <a:t>NO</a:t>
-            </a:r>
-            <a:endParaRPr lang="ko-KR" altLang="en-US" sz="600" b="1" dirty="0">
-              <a:solidFill>
-                <a:srgbClr val="FF0000"/>
-              </a:solidFill>
-              <a:latin typeface="나눔고딕" panose="020D0604000000000000" pitchFamily="50" charset="-127"/>
-              <a:ea typeface="나눔고딕" panose="020D0604000000000000" pitchFamily="50" charset="-127"/>
-            </a:endParaRPr>
-          </a:p>
-        </p:txBody>
-      </p:sp>
-      <p:sp>
-        <p:nvSpPr>
           <p:cNvPr id="109" name="TextBox 108">
             <a:extLst>
               <a:ext uri="{FF2B5EF4-FFF2-40B4-BE49-F238E27FC236}">
@@ -18700,7 +17874,7 @@
         </p:nvSpPr>
         <p:spPr>
           <a:xfrm>
-            <a:off x="5810316" y="4162802"/>
+            <a:off x="5665536" y="3968978"/>
             <a:ext cx="322524" cy="184666"/>
           </a:xfrm>
           <a:prstGeom prst="rect">
@@ -18750,8 +17924,8 @@
         </p:nvCxnSpPr>
         <p:spPr>
           <a:xfrm>
-            <a:off x="5765570" y="4177300"/>
-            <a:ext cx="2854" cy="159304"/>
+            <a:off x="5620790" y="4001663"/>
+            <a:ext cx="2854" cy="175234"/>
           </a:xfrm>
           <a:prstGeom prst="straightConnector1">
             <a:avLst/>
@@ -18781,10 +17955,195 @@
       </p:cxnSp>
       <p:sp>
         <p:nvSpPr>
-          <p:cNvPr id="111" name="직사각형 110">
+          <p:cNvPr id="112" name="TextBox 111">
             <a:extLst>
               <a:ext uri="{FF2B5EF4-FFF2-40B4-BE49-F238E27FC236}">
-                <a16:creationId xmlns:a16="http://schemas.microsoft.com/office/drawing/2014/main" id="{0A813FC0-47D4-4F8D-A11C-E349DECF8FA2}"/>
+                <a16:creationId xmlns:a16="http://schemas.microsoft.com/office/drawing/2014/main" id="{64B9737C-AF4C-4715-8F58-75FD2FA96A04}"/>
+              </a:ext>
+            </a:extLst>
+          </p:cNvPr>
+          <p:cNvSpPr txBox="1"/>
+          <p:nvPr/>
+        </p:nvSpPr>
+        <p:spPr>
+          <a:xfrm>
+            <a:off x="4572000" y="350428"/>
+            <a:ext cx="4563693" cy="307777"/>
+          </a:xfrm>
+          <a:prstGeom prst="rect">
+            <a:avLst/>
+          </a:prstGeom>
+          <a:noFill/>
+        </p:spPr>
+        <p:txBody>
+          <a:bodyPr wrap="square" rtlCol="0">
+            <a:spAutoFit/>
+          </a:bodyPr>
+          <a:lstStyle/>
+          <a:p>
+            <a:pPr algn="ctr"/>
+            <a:r>
+              <a:rPr lang="ko-KR" altLang="en-US" sz="1400">
+                <a:latin typeface="나눔고딕" panose="020D0604000000000000" pitchFamily="50" charset="-127"/>
+                <a:ea typeface="나눔고딕" panose="020D0604000000000000" pitchFamily="50" charset="-127"/>
+              </a:rPr>
+              <a:t>장바구니 추가 </a:t>
+            </a:r>
+            <a:r>
+              <a:rPr lang="ko-KR" altLang="en-US" sz="1400" dirty="0">
+                <a:latin typeface="나눔고딕" panose="020D0604000000000000" pitchFamily="50" charset="-127"/>
+                <a:ea typeface="나눔고딕" panose="020D0604000000000000" pitchFamily="50" charset="-127"/>
+              </a:rPr>
+              <a:t>프로세스</a:t>
+            </a:r>
+          </a:p>
+        </p:txBody>
+      </p:sp>
+      <p:cxnSp>
+        <p:nvCxnSpPr>
+          <p:cNvPr id="113" name="직선 연결선 112">
+            <a:extLst>
+              <a:ext uri="{FF2B5EF4-FFF2-40B4-BE49-F238E27FC236}">
+                <a16:creationId xmlns:a16="http://schemas.microsoft.com/office/drawing/2014/main" id="{32B5AF49-B377-4AD8-BC34-873DED121F0A}"/>
+              </a:ext>
+            </a:extLst>
+          </p:cNvPr>
+          <p:cNvCxnSpPr/>
+          <p:nvPr/>
+        </p:nvCxnSpPr>
+        <p:spPr>
+          <a:xfrm>
+            <a:off x="4580308" y="195278"/>
+            <a:ext cx="0" cy="5519722"/>
+          </a:xfrm>
+          <a:prstGeom prst="line">
+            <a:avLst/>
+          </a:prstGeom>
+          <a:ln>
+            <a:solidFill>
+              <a:schemeClr val="bg1">
+                <a:lumMod val="85000"/>
+              </a:schemeClr>
+            </a:solidFill>
+          </a:ln>
+        </p:spPr>
+        <p:style>
+          <a:lnRef idx="1">
+            <a:schemeClr val="accent1"/>
+          </a:lnRef>
+          <a:fillRef idx="0">
+            <a:schemeClr val="accent1"/>
+          </a:fillRef>
+          <a:effectRef idx="0">
+            <a:schemeClr val="accent1"/>
+          </a:effectRef>
+          <a:fontRef idx="minor">
+            <a:schemeClr val="tx1"/>
+          </a:fontRef>
+        </p:style>
+      </p:cxnSp>
+      <p:cxnSp>
+        <p:nvCxnSpPr>
+          <p:cNvPr id="118" name="직선 화살표 연결선 117">
+            <a:extLst>
+              <a:ext uri="{FF2B5EF4-FFF2-40B4-BE49-F238E27FC236}">
+                <a16:creationId xmlns:a16="http://schemas.microsoft.com/office/drawing/2014/main" id="{5B0FD2A9-4D22-4387-957E-D0A08A936493}"/>
+              </a:ext>
+            </a:extLst>
+          </p:cNvPr>
+          <p:cNvCxnSpPr>
+            <a:cxnSpLocks/>
+          </p:cNvCxnSpPr>
+          <p:nvPr/>
+        </p:nvCxnSpPr>
+        <p:spPr>
+          <a:xfrm>
+            <a:off x="1242411" y="1163482"/>
+            <a:ext cx="2854" cy="159304"/>
+          </a:xfrm>
+          <a:prstGeom prst="straightConnector1">
+            <a:avLst/>
+          </a:prstGeom>
+          <a:ln>
+            <a:solidFill>
+              <a:schemeClr val="tx1">
+                <a:lumMod val="75000"/>
+                <a:lumOff val="25000"/>
+              </a:schemeClr>
+            </a:solidFill>
+            <a:headEnd w="sm" len="sm"/>
+            <a:tailEnd type="arrow" w="sm" len="sm"/>
+          </a:ln>
+        </p:spPr>
+        <p:style>
+          <a:lnRef idx="1">
+            <a:schemeClr val="accent1"/>
+          </a:lnRef>
+          <a:fillRef idx="0">
+            <a:schemeClr val="accent1"/>
+          </a:fillRef>
+          <a:effectRef idx="0">
+            <a:schemeClr val="accent1"/>
+          </a:effectRef>
+          <a:fontRef idx="minor">
+            <a:schemeClr val="tx1"/>
+          </a:fontRef>
+        </p:style>
+      </p:cxnSp>
+      <p:cxnSp>
+        <p:nvCxnSpPr>
+          <p:cNvPr id="119" name="직선 화살표 연결선 118">
+            <a:extLst>
+              <a:ext uri="{FF2B5EF4-FFF2-40B4-BE49-F238E27FC236}">
+                <a16:creationId xmlns:a16="http://schemas.microsoft.com/office/drawing/2014/main" id="{5B0FD2A9-4D22-4387-957E-D0A08A936493}"/>
+              </a:ext>
+            </a:extLst>
+          </p:cNvPr>
+          <p:cNvCxnSpPr>
+            <a:cxnSpLocks/>
+          </p:cNvCxnSpPr>
+          <p:nvPr/>
+        </p:nvCxnSpPr>
+        <p:spPr>
+          <a:xfrm>
+            <a:off x="5604919" y="1163482"/>
+            <a:ext cx="2854" cy="159304"/>
+          </a:xfrm>
+          <a:prstGeom prst="straightConnector1">
+            <a:avLst/>
+          </a:prstGeom>
+          <a:ln>
+            <a:solidFill>
+              <a:schemeClr val="tx1">
+                <a:lumMod val="75000"/>
+                <a:lumOff val="25000"/>
+              </a:schemeClr>
+            </a:solidFill>
+            <a:headEnd w="sm" len="sm"/>
+            <a:tailEnd type="arrow" w="sm" len="sm"/>
+          </a:ln>
+        </p:spPr>
+        <p:style>
+          <a:lnRef idx="1">
+            <a:schemeClr val="accent1"/>
+          </a:lnRef>
+          <a:fillRef idx="0">
+            <a:schemeClr val="accent1"/>
+          </a:fillRef>
+          <a:effectRef idx="0">
+            <a:schemeClr val="accent1"/>
+          </a:effectRef>
+          <a:fontRef idx="minor">
+            <a:schemeClr val="tx1"/>
+          </a:fontRef>
+        </p:style>
+      </p:cxnSp>
+      <p:sp>
+        <p:nvSpPr>
+          <p:cNvPr id="87" name="직사각형 86">
+            <a:extLst>
+              <a:ext uri="{FF2B5EF4-FFF2-40B4-BE49-F238E27FC236}">
+                <a16:creationId xmlns:a16="http://schemas.microsoft.com/office/drawing/2014/main" id="{5D524E63-A953-4FD7-BE6D-41445B4DED7A}"/>
               </a:ext>
             </a:extLst>
           </p:cNvPr>
@@ -18793,8 +18152,355 @@
         </p:nvSpPr>
         <p:spPr>
           <a:xfrm>
-            <a:off x="6681920" y="3181972"/>
-            <a:ext cx="1098099" cy="338554"/>
+            <a:off x="827584" y="2014890"/>
+            <a:ext cx="840506" cy="338554"/>
+          </a:xfrm>
+          <a:prstGeom prst="rect">
+            <a:avLst/>
+          </a:prstGeom>
+          <a:solidFill>
+            <a:schemeClr val="bg1"/>
+          </a:solidFill>
+          <a:ln w="3175">
+            <a:solidFill>
+              <a:schemeClr val="tx1">
+                <a:lumMod val="50000"/>
+                <a:lumOff val="50000"/>
+              </a:schemeClr>
+            </a:solidFill>
+          </a:ln>
+        </p:spPr>
+        <p:style>
+          <a:lnRef idx="2">
+            <a:schemeClr val="accent1">
+              <a:shade val="50000"/>
+            </a:schemeClr>
+          </a:lnRef>
+          <a:fillRef idx="1">
+            <a:schemeClr val="accent1"/>
+          </a:fillRef>
+          <a:effectRef idx="0">
+            <a:schemeClr val="accent1"/>
+          </a:effectRef>
+          <a:fontRef idx="minor">
+            <a:schemeClr val="lt1"/>
+          </a:fontRef>
+        </p:style>
+        <p:txBody>
+          <a:bodyPr wrap="none" lIns="0" tIns="0" rIns="0" bIns="0" rtlCol="0" anchor="ctr">
+            <a:normAutofit/>
+          </a:bodyPr>
+          <a:lstStyle/>
+          <a:p>
+            <a:pPr algn="ctr"/>
+            <a:r>
+              <a:rPr lang="ko-KR" altLang="en-US" sz="750" dirty="0">
+                <a:solidFill>
+                  <a:srgbClr val="000000"/>
+                </a:solidFill>
+                <a:latin typeface="나눔고딕" panose="020D0604000000000000" pitchFamily="50" charset="-127"/>
+                <a:ea typeface="나눔고딕" panose="020D0604000000000000" pitchFamily="50" charset="-127"/>
+                <a:cs typeface="Segoe UI" panose="020B0502040204020203" pitchFamily="34" charset="0"/>
+              </a:rPr>
+              <a:t>검색 결과 노출</a:t>
+            </a:r>
+          </a:p>
+        </p:txBody>
+      </p:sp>
+      <p:cxnSp>
+        <p:nvCxnSpPr>
+          <p:cNvPr id="114" name="직선 화살표 연결선 113">
+            <a:extLst>
+              <a:ext uri="{FF2B5EF4-FFF2-40B4-BE49-F238E27FC236}">
+                <a16:creationId xmlns:a16="http://schemas.microsoft.com/office/drawing/2014/main" id="{2BD90CB9-C303-4E32-AA5F-4D0AF779878E}"/>
+              </a:ext>
+            </a:extLst>
+          </p:cNvPr>
+          <p:cNvCxnSpPr>
+            <a:cxnSpLocks/>
+          </p:cNvCxnSpPr>
+          <p:nvPr/>
+        </p:nvCxnSpPr>
+        <p:spPr>
+          <a:xfrm>
+            <a:off x="1256778" y="2410164"/>
+            <a:ext cx="2854" cy="159304"/>
+          </a:xfrm>
+          <a:prstGeom prst="straightConnector1">
+            <a:avLst/>
+          </a:prstGeom>
+          <a:ln>
+            <a:solidFill>
+              <a:schemeClr val="tx1">
+                <a:lumMod val="75000"/>
+                <a:lumOff val="25000"/>
+              </a:schemeClr>
+            </a:solidFill>
+            <a:headEnd w="sm" len="sm"/>
+            <a:tailEnd type="arrow" w="sm" len="sm"/>
+          </a:ln>
+        </p:spPr>
+        <p:style>
+          <a:lnRef idx="1">
+            <a:schemeClr val="accent1"/>
+          </a:lnRef>
+          <a:fillRef idx="0">
+            <a:schemeClr val="accent1"/>
+          </a:fillRef>
+          <a:effectRef idx="0">
+            <a:schemeClr val="accent1"/>
+          </a:effectRef>
+          <a:fontRef idx="minor">
+            <a:schemeClr val="tx1"/>
+          </a:fontRef>
+        </p:style>
+      </p:cxnSp>
+      <p:cxnSp>
+        <p:nvCxnSpPr>
+          <p:cNvPr id="115" name="꺾인 연결선 51">
+            <a:extLst>
+              <a:ext uri="{FF2B5EF4-FFF2-40B4-BE49-F238E27FC236}">
+                <a16:creationId xmlns:a16="http://schemas.microsoft.com/office/drawing/2014/main" id="{98C801B2-643D-4809-BE1A-99DFB3519FEA}"/>
+              </a:ext>
+            </a:extLst>
+          </p:cNvPr>
+          <p:cNvCxnSpPr>
+            <a:cxnSpLocks/>
+          </p:cNvCxnSpPr>
+          <p:nvPr/>
+        </p:nvCxnSpPr>
+        <p:spPr>
+          <a:xfrm rot="10800000">
+            <a:off x="6078219" y="4559747"/>
+            <a:ext cx="1589361" cy="674016"/>
+          </a:xfrm>
+          <a:prstGeom prst="bentConnector3">
+            <a:avLst>
+              <a:gd name="adj1" fmla="val 50000"/>
+            </a:avLst>
+          </a:prstGeom>
+          <a:ln>
+            <a:solidFill>
+              <a:srgbClr val="FF0000"/>
+            </a:solidFill>
+            <a:tailEnd type="arrow" w="sm" len="sm"/>
+          </a:ln>
+        </p:spPr>
+        <p:style>
+          <a:lnRef idx="1">
+            <a:schemeClr val="accent1"/>
+          </a:lnRef>
+          <a:fillRef idx="0">
+            <a:schemeClr val="accent1"/>
+          </a:fillRef>
+          <a:effectRef idx="0">
+            <a:schemeClr val="accent1"/>
+          </a:effectRef>
+          <a:fontRef idx="minor">
+            <a:schemeClr val="tx1"/>
+          </a:fontRef>
+        </p:style>
+      </p:cxnSp>
+      <p:sp>
+        <p:nvSpPr>
+          <p:cNvPr id="116" name="직사각형 115">
+            <a:extLst>
+              <a:ext uri="{FF2B5EF4-FFF2-40B4-BE49-F238E27FC236}">
+                <a16:creationId xmlns:a16="http://schemas.microsoft.com/office/drawing/2014/main" id="{1F79F96E-7B65-4E68-AA0D-C13FDBE9D2D1}"/>
+              </a:ext>
+            </a:extLst>
+          </p:cNvPr>
+          <p:cNvSpPr/>
+          <p:nvPr/>
+        </p:nvSpPr>
+        <p:spPr>
+          <a:xfrm>
+            <a:off x="6674708" y="3552319"/>
+            <a:ext cx="991831" cy="338554"/>
+          </a:xfrm>
+          <a:prstGeom prst="rect">
+            <a:avLst/>
+          </a:prstGeom>
+          <a:solidFill>
+            <a:schemeClr val="bg1"/>
+          </a:solidFill>
+          <a:ln w="3175">
+            <a:solidFill>
+              <a:schemeClr val="tx1">
+                <a:lumMod val="50000"/>
+                <a:lumOff val="50000"/>
+              </a:schemeClr>
+            </a:solidFill>
+          </a:ln>
+        </p:spPr>
+        <p:style>
+          <a:lnRef idx="2">
+            <a:schemeClr val="accent1">
+              <a:shade val="50000"/>
+            </a:schemeClr>
+          </a:lnRef>
+          <a:fillRef idx="1">
+            <a:schemeClr val="accent1"/>
+          </a:fillRef>
+          <a:effectRef idx="0">
+            <a:schemeClr val="accent1"/>
+          </a:effectRef>
+          <a:fontRef idx="minor">
+            <a:schemeClr val="lt1"/>
+          </a:fontRef>
+        </p:style>
+        <p:txBody>
+          <a:bodyPr wrap="none" lIns="0" tIns="0" rIns="0" bIns="0" rtlCol="0" anchor="ctr">
+            <a:normAutofit/>
+          </a:bodyPr>
+          <a:lstStyle/>
+          <a:p>
+            <a:pPr algn="ctr"/>
+            <a:r>
+              <a:rPr lang="ko-KR" altLang="en-US" sz="750" dirty="0">
+                <a:solidFill>
+                  <a:srgbClr val="000000"/>
+                </a:solidFill>
+                <a:latin typeface="나눔고딕" panose="020D0604000000000000" pitchFamily="50" charset="-127"/>
+                <a:ea typeface="나눔고딕" panose="020D0604000000000000" pitchFamily="50" charset="-127"/>
+                <a:cs typeface="Segoe UI" panose="020B0502040204020203" pitchFamily="34" charset="0"/>
+              </a:rPr>
+              <a:t>로그인</a:t>
+            </a:r>
+            <a:r>
+              <a:rPr lang="en-US" altLang="ko-KR" sz="750" dirty="0">
+                <a:solidFill>
+                  <a:srgbClr val="000000"/>
+                </a:solidFill>
+                <a:latin typeface="나눔고딕" panose="020D0604000000000000" pitchFamily="50" charset="-127"/>
+                <a:ea typeface="나눔고딕" panose="020D0604000000000000" pitchFamily="50" charset="-127"/>
+                <a:cs typeface="Segoe UI" panose="020B0502040204020203" pitchFamily="34" charset="0"/>
+              </a:rPr>
+              <a:t>/</a:t>
+            </a:r>
+            <a:r>
+              <a:rPr lang="ko-KR" altLang="en-US" sz="750" dirty="0">
+                <a:solidFill>
+                  <a:srgbClr val="000000"/>
+                </a:solidFill>
+                <a:latin typeface="나눔고딕" panose="020D0604000000000000" pitchFamily="50" charset="-127"/>
+                <a:ea typeface="나눔고딕" panose="020D0604000000000000" pitchFamily="50" charset="-127"/>
+                <a:cs typeface="Segoe UI" panose="020B0502040204020203" pitchFamily="34" charset="0"/>
+              </a:rPr>
+              <a:t>회원가입 선택</a:t>
+            </a:r>
+          </a:p>
+        </p:txBody>
+      </p:sp>
+      <p:cxnSp>
+        <p:nvCxnSpPr>
+          <p:cNvPr id="117" name="직선 화살표 연결선 116">
+            <a:extLst>
+              <a:ext uri="{FF2B5EF4-FFF2-40B4-BE49-F238E27FC236}">
+                <a16:creationId xmlns:a16="http://schemas.microsoft.com/office/drawing/2014/main" id="{4A608F30-4B0A-4751-8F6E-F6453B087D46}"/>
+              </a:ext>
+            </a:extLst>
+          </p:cNvPr>
+          <p:cNvCxnSpPr>
+            <a:cxnSpLocks/>
+          </p:cNvCxnSpPr>
+          <p:nvPr/>
+        </p:nvCxnSpPr>
+        <p:spPr>
+          <a:xfrm>
+            <a:off x="6392188" y="3768606"/>
+            <a:ext cx="261402" cy="0"/>
+          </a:xfrm>
+          <a:prstGeom prst="straightConnector1">
+            <a:avLst/>
+          </a:prstGeom>
+          <a:ln>
+            <a:solidFill>
+              <a:srgbClr val="FF0000"/>
+            </a:solidFill>
+            <a:headEnd w="sm" len="sm"/>
+            <a:tailEnd type="arrow" w="sm" len="sm"/>
+          </a:ln>
+        </p:spPr>
+        <p:style>
+          <a:lnRef idx="1">
+            <a:schemeClr val="accent1"/>
+          </a:lnRef>
+          <a:fillRef idx="0">
+            <a:schemeClr val="accent1"/>
+          </a:fillRef>
+          <a:effectRef idx="0">
+            <a:schemeClr val="accent1"/>
+          </a:effectRef>
+          <a:fontRef idx="minor">
+            <a:schemeClr val="tx1"/>
+          </a:fontRef>
+        </p:style>
+      </p:cxnSp>
+      <p:sp>
+        <p:nvSpPr>
+          <p:cNvPr id="120" name="TextBox 119">
+            <a:extLst>
+              <a:ext uri="{FF2B5EF4-FFF2-40B4-BE49-F238E27FC236}">
+                <a16:creationId xmlns:a16="http://schemas.microsoft.com/office/drawing/2014/main" id="{84B62EAE-1DB9-4693-AF4D-11F73AB569D2}"/>
+              </a:ext>
+            </a:extLst>
+          </p:cNvPr>
+          <p:cNvSpPr txBox="1"/>
+          <p:nvPr/>
+        </p:nvSpPr>
+        <p:spPr>
+          <a:xfrm>
+            <a:off x="6356180" y="3577580"/>
+            <a:ext cx="303288" cy="184666"/>
+          </a:xfrm>
+          <a:prstGeom prst="rect">
+            <a:avLst/>
+          </a:prstGeom>
+          <a:noFill/>
+        </p:spPr>
+        <p:txBody>
+          <a:bodyPr wrap="none" rtlCol="0">
+            <a:spAutoFit/>
+          </a:bodyPr>
+          <a:lstStyle/>
+          <a:p>
+            <a:r>
+              <a:rPr lang="en-US" altLang="ko-KR" sz="600" b="1" dirty="0">
+                <a:solidFill>
+                  <a:srgbClr val="FF0000"/>
+                </a:solidFill>
+                <a:latin typeface="나눔고딕" panose="020D0604000000000000" pitchFamily="50" charset="-127"/>
+                <a:ea typeface="나눔고딕" panose="020D0604000000000000" pitchFamily="50" charset="-127"/>
+              </a:rPr>
+              <a:t>NO</a:t>
+            </a:r>
+            <a:endParaRPr lang="ko-KR" altLang="en-US" sz="600" b="1" dirty="0">
+              <a:solidFill>
+                <a:srgbClr val="FF0000"/>
+              </a:solidFill>
+              <a:latin typeface="나눔고딕" panose="020D0604000000000000" pitchFamily="50" charset="-127"/>
+              <a:ea typeface="나눔고딕" panose="020D0604000000000000" pitchFamily="50" charset="-127"/>
+            </a:endParaRPr>
+          </a:p>
+        </p:txBody>
+      </p:sp>
+      <p:sp>
+        <p:nvSpPr>
+          <p:cNvPr id="121" name="직사각형 120">
+            <a:extLst>
+              <a:ext uri="{FF2B5EF4-FFF2-40B4-BE49-F238E27FC236}">
+                <a16:creationId xmlns:a16="http://schemas.microsoft.com/office/drawing/2014/main" id="{06ED9E63-D342-4D1E-8224-20DB6EDF3E02}"/>
+              </a:ext>
+            </a:extLst>
+          </p:cNvPr>
+          <p:cNvSpPr/>
+          <p:nvPr/>
+        </p:nvSpPr>
+        <p:spPr>
+          <a:xfrm>
+            <a:off x="6620352" y="2963392"/>
+            <a:ext cx="1046188" cy="338554"/>
           </a:xfrm>
           <a:prstGeom prst="rect">
             <a:avLst/>
@@ -18914,10 +18620,472 @@
       </p:sp>
       <p:sp>
         <p:nvSpPr>
-          <p:cNvPr id="112" name="TextBox 111">
+          <p:cNvPr id="122" name="모서리가 둥근 직사각형 104">
             <a:extLst>
               <a:ext uri="{FF2B5EF4-FFF2-40B4-BE49-F238E27FC236}">
-                <a16:creationId xmlns:a16="http://schemas.microsoft.com/office/drawing/2014/main" id="{64B9737C-AF4C-4715-8F58-75FD2FA96A04}"/>
+                <a16:creationId xmlns:a16="http://schemas.microsoft.com/office/drawing/2014/main" id="{0EA024F8-4549-49D7-9F99-C541691F7FAC}"/>
+              </a:ext>
+            </a:extLst>
+          </p:cNvPr>
+          <p:cNvSpPr/>
+          <p:nvPr/>
+        </p:nvSpPr>
+        <p:spPr>
+          <a:xfrm>
+            <a:off x="6678996" y="2494795"/>
+            <a:ext cx="840506" cy="338400"/>
+          </a:xfrm>
+          <a:prstGeom prst="roundRect">
+            <a:avLst>
+              <a:gd name="adj" fmla="val 50000"/>
+            </a:avLst>
+          </a:prstGeom>
+          <a:solidFill>
+            <a:srgbClr val="FFF2E9"/>
+          </a:solidFill>
+          <a:ln w="6350">
+            <a:noFill/>
+          </a:ln>
+        </p:spPr>
+        <p:style>
+          <a:lnRef idx="2">
+            <a:schemeClr val="accent1">
+              <a:shade val="50000"/>
+            </a:schemeClr>
+          </a:lnRef>
+          <a:fillRef idx="1">
+            <a:schemeClr val="accent1"/>
+          </a:fillRef>
+          <a:effectRef idx="0">
+            <a:schemeClr val="accent1"/>
+          </a:effectRef>
+          <a:fontRef idx="minor">
+            <a:schemeClr val="lt1"/>
+          </a:fontRef>
+        </p:style>
+        <p:txBody>
+          <a:bodyPr wrap="none" rtlCol="0" anchor="ctr"/>
+          <a:lstStyle/>
+          <a:p>
+            <a:pPr algn="ctr"/>
+            <a:r>
+              <a:rPr lang="ko-KR" altLang="en-US" sz="800" dirty="0">
+                <a:solidFill>
+                  <a:srgbClr val="000000"/>
+                </a:solidFill>
+                <a:latin typeface="나눔고딕" panose="020D0604000000000000" pitchFamily="50" charset="-127"/>
+                <a:ea typeface="나눔고딕" panose="020D0604000000000000" pitchFamily="50" charset="-127"/>
+                <a:cs typeface="Segoe UI" panose="020B0502040204020203" pitchFamily="34" charset="0"/>
+              </a:rPr>
+              <a:t>완료</a:t>
+            </a:r>
+            <a:endParaRPr lang="ko-KR" altLang="en-US" sz="1000" dirty="0">
+              <a:solidFill>
+                <a:srgbClr val="000000"/>
+              </a:solidFill>
+              <a:latin typeface="나눔고딕" panose="020D0604000000000000" pitchFamily="50" charset="-127"/>
+              <a:ea typeface="나눔고딕" panose="020D0604000000000000" pitchFamily="50" charset="-127"/>
+              <a:cs typeface="Segoe UI" panose="020B0502040204020203" pitchFamily="34" charset="0"/>
+            </a:endParaRPr>
+          </a:p>
+        </p:txBody>
+      </p:sp>
+      <p:sp>
+        <p:nvSpPr>
+          <p:cNvPr id="123" name="모서리가 둥근 직사각형 104">
+            <a:extLst>
+              <a:ext uri="{FF2B5EF4-FFF2-40B4-BE49-F238E27FC236}">
+                <a16:creationId xmlns:a16="http://schemas.microsoft.com/office/drawing/2014/main" id="{E117A3A4-F409-4769-BCE5-EFF79EB2140D}"/>
+              </a:ext>
+            </a:extLst>
+          </p:cNvPr>
+          <p:cNvSpPr/>
+          <p:nvPr/>
+        </p:nvSpPr>
+        <p:spPr>
+          <a:xfrm>
+            <a:off x="7610948" y="5109847"/>
+            <a:ext cx="840506" cy="338400"/>
+          </a:xfrm>
+          <a:prstGeom prst="roundRect">
+            <a:avLst>
+              <a:gd name="adj" fmla="val 50000"/>
+            </a:avLst>
+          </a:prstGeom>
+          <a:solidFill>
+            <a:srgbClr val="FFF2E9"/>
+          </a:solidFill>
+          <a:ln w="6350">
+            <a:noFill/>
+          </a:ln>
+        </p:spPr>
+        <p:style>
+          <a:lnRef idx="2">
+            <a:schemeClr val="accent1">
+              <a:shade val="50000"/>
+            </a:schemeClr>
+          </a:lnRef>
+          <a:fillRef idx="1">
+            <a:schemeClr val="accent1"/>
+          </a:fillRef>
+          <a:effectRef idx="0">
+            <a:schemeClr val="accent1"/>
+          </a:effectRef>
+          <a:fontRef idx="minor">
+            <a:schemeClr val="lt1"/>
+          </a:fontRef>
+        </p:style>
+        <p:txBody>
+          <a:bodyPr wrap="none" rtlCol="0" anchor="ctr"/>
+          <a:lstStyle/>
+          <a:p>
+            <a:pPr algn="ctr"/>
+            <a:r>
+              <a:rPr lang="ko-KR" altLang="en-US" sz="800" dirty="0">
+                <a:solidFill>
+                  <a:srgbClr val="000000"/>
+                </a:solidFill>
+                <a:latin typeface="나눔고딕" panose="020D0604000000000000" pitchFamily="50" charset="-127"/>
+                <a:ea typeface="나눔고딕" panose="020D0604000000000000" pitchFamily="50" charset="-127"/>
+                <a:cs typeface="Segoe UI" panose="020B0502040204020203" pitchFamily="34" charset="0"/>
+              </a:rPr>
+              <a:t>회원가입완료</a:t>
+            </a:r>
+          </a:p>
+        </p:txBody>
+      </p:sp>
+      <p:sp>
+        <p:nvSpPr>
+          <p:cNvPr id="124" name="사각형: 둥근 모서리 60">
+            <a:extLst>
+              <a:ext uri="{FF2B5EF4-FFF2-40B4-BE49-F238E27FC236}">
+                <a16:creationId xmlns:a16="http://schemas.microsoft.com/office/drawing/2014/main" id="{6D517BE5-5820-4FA7-AA30-0798F23B821A}"/>
+              </a:ext>
+            </a:extLst>
+          </p:cNvPr>
+          <p:cNvSpPr/>
+          <p:nvPr/>
+        </p:nvSpPr>
+        <p:spPr>
+          <a:xfrm>
+            <a:off x="7411504" y="4503420"/>
+            <a:ext cx="1015830" cy="405323"/>
+          </a:xfrm>
+          <a:prstGeom prst="flowChartDecision">
+            <a:avLst/>
+          </a:prstGeom>
+          <a:solidFill>
+            <a:schemeClr val="bg1"/>
+          </a:solidFill>
+          <a:ln w="3175">
+            <a:solidFill>
+              <a:schemeClr val="tx1">
+                <a:lumMod val="50000"/>
+                <a:lumOff val="50000"/>
+              </a:schemeClr>
+            </a:solidFill>
+          </a:ln>
+        </p:spPr>
+        <p:style>
+          <a:lnRef idx="2">
+            <a:schemeClr val="accent1">
+              <a:shade val="50000"/>
+            </a:schemeClr>
+          </a:lnRef>
+          <a:fillRef idx="1">
+            <a:schemeClr val="accent1"/>
+          </a:fillRef>
+          <a:effectRef idx="0">
+            <a:schemeClr val="accent1"/>
+          </a:effectRef>
+          <a:fontRef idx="minor">
+            <a:schemeClr val="lt1"/>
+          </a:fontRef>
+        </p:style>
+        <p:txBody>
+          <a:bodyPr wrap="none" rtlCol="0" anchor="ctr"/>
+          <a:lstStyle/>
+          <a:p>
+            <a:pPr algn="ctr"/>
+            <a:r>
+              <a:rPr lang="ko-KR" altLang="en-US" sz="750" dirty="0">
+                <a:solidFill>
+                  <a:schemeClr val="tx1">
+                    <a:lumMod val="95000"/>
+                    <a:lumOff val="5000"/>
+                  </a:schemeClr>
+                </a:solidFill>
+                <a:latin typeface="나눔고딕" panose="020D0604000000000000" pitchFamily="50" charset="-127"/>
+                <a:ea typeface="나눔고딕" panose="020D0604000000000000" pitchFamily="50" charset="-127"/>
+                <a:cs typeface="Segoe UI" panose="020B0502040204020203" pitchFamily="34" charset="0"/>
+              </a:rPr>
+              <a:t>본인인증 성공</a:t>
+            </a:r>
+            <a:r>
+              <a:rPr lang="en-US" altLang="ko-KR" sz="750" dirty="0">
+                <a:solidFill>
+                  <a:schemeClr val="tx1">
+                    <a:lumMod val="95000"/>
+                    <a:lumOff val="5000"/>
+                  </a:schemeClr>
+                </a:solidFill>
+                <a:latin typeface="나눔고딕" panose="020D0604000000000000" pitchFamily="50" charset="-127"/>
+                <a:ea typeface="나눔고딕" panose="020D0604000000000000" pitchFamily="50" charset="-127"/>
+                <a:cs typeface="Segoe UI" panose="020B0502040204020203" pitchFamily="34" charset="0"/>
+              </a:rPr>
+              <a:t>?</a:t>
+            </a:r>
+            <a:endParaRPr lang="ko-KR" altLang="en-US" sz="750" dirty="0">
+              <a:solidFill>
+                <a:schemeClr val="tx1">
+                  <a:lumMod val="95000"/>
+                  <a:lumOff val="5000"/>
+                </a:schemeClr>
+              </a:solidFill>
+              <a:latin typeface="나눔고딕" panose="020D0604000000000000" pitchFamily="50" charset="-127"/>
+              <a:ea typeface="나눔고딕" panose="020D0604000000000000" pitchFamily="50" charset="-127"/>
+              <a:cs typeface="Segoe UI" panose="020B0502040204020203" pitchFamily="34" charset="0"/>
+            </a:endParaRPr>
+          </a:p>
+        </p:txBody>
+      </p:sp>
+      <p:sp>
+        <p:nvSpPr>
+          <p:cNvPr id="125" name="직사각형 124">
+            <a:extLst>
+              <a:ext uri="{FF2B5EF4-FFF2-40B4-BE49-F238E27FC236}">
+                <a16:creationId xmlns:a16="http://schemas.microsoft.com/office/drawing/2014/main" id="{E6B7CE6F-87EE-4B8D-9EEB-D2FB61A83886}"/>
+              </a:ext>
+            </a:extLst>
+          </p:cNvPr>
+          <p:cNvSpPr/>
+          <p:nvPr/>
+        </p:nvSpPr>
+        <p:spPr>
+          <a:xfrm>
+            <a:off x="7906719" y="3544435"/>
+            <a:ext cx="825822" cy="338554"/>
+          </a:xfrm>
+          <a:prstGeom prst="rect">
+            <a:avLst/>
+          </a:prstGeom>
+          <a:solidFill>
+            <a:schemeClr val="bg1"/>
+          </a:solidFill>
+          <a:ln w="9525" cap="rnd">
+            <a:solidFill>
+              <a:srgbClr val="FF0000"/>
+            </a:solidFill>
+            <a:prstDash val="sysDash"/>
+          </a:ln>
+        </p:spPr>
+        <p:style>
+          <a:lnRef idx="2">
+            <a:schemeClr val="accent1">
+              <a:shade val="50000"/>
+            </a:schemeClr>
+          </a:lnRef>
+          <a:fillRef idx="1">
+            <a:schemeClr val="accent1"/>
+          </a:fillRef>
+          <a:effectRef idx="0">
+            <a:schemeClr val="accent1"/>
+          </a:effectRef>
+          <a:fontRef idx="minor">
+            <a:schemeClr val="lt1"/>
+          </a:fontRef>
+        </p:style>
+        <p:txBody>
+          <a:bodyPr wrap="none" lIns="0" tIns="0" rIns="0" bIns="0" rtlCol="0" anchor="ctr">
+            <a:normAutofit/>
+          </a:bodyPr>
+          <a:lstStyle/>
+          <a:p>
+            <a:pPr algn="ctr"/>
+            <a:r>
+              <a:rPr lang="ko-KR" altLang="en-US" sz="750" dirty="0">
+                <a:solidFill>
+                  <a:srgbClr val="000000"/>
+                </a:solidFill>
+                <a:latin typeface="나눔고딕" panose="020D0604000000000000" pitchFamily="50" charset="-127"/>
+                <a:ea typeface="나눔고딕" panose="020D0604000000000000" pitchFamily="50" charset="-127"/>
+                <a:cs typeface="Segoe UI" panose="020B0502040204020203" pitchFamily="34" charset="0"/>
+              </a:rPr>
+              <a:t>필수 정보를 </a:t>
+            </a:r>
+            <a:endParaRPr lang="en-US" altLang="ko-KR" sz="750" dirty="0">
+              <a:solidFill>
+                <a:srgbClr val="000000"/>
+              </a:solidFill>
+              <a:latin typeface="나눔고딕" panose="020D0604000000000000" pitchFamily="50" charset="-127"/>
+              <a:ea typeface="나눔고딕" panose="020D0604000000000000" pitchFamily="50" charset="-127"/>
+              <a:cs typeface="Segoe UI" panose="020B0502040204020203" pitchFamily="34" charset="0"/>
+            </a:endParaRPr>
+          </a:p>
+          <a:p>
+            <a:pPr algn="ctr"/>
+            <a:r>
+              <a:rPr lang="ko-KR" altLang="en-US" sz="750" dirty="0">
+                <a:solidFill>
+                  <a:srgbClr val="000000"/>
+                </a:solidFill>
+                <a:latin typeface="나눔고딕" panose="020D0604000000000000" pitchFamily="50" charset="-127"/>
+                <a:ea typeface="나눔고딕" panose="020D0604000000000000" pitchFamily="50" charset="-127"/>
+                <a:cs typeface="Segoe UI" panose="020B0502040204020203" pitchFamily="34" charset="0"/>
+              </a:rPr>
+              <a:t>입력하세요 </a:t>
+            </a:r>
+            <a:r>
+              <a:rPr lang="ko-KR" altLang="en-US" sz="750" dirty="0" err="1">
+                <a:solidFill>
+                  <a:srgbClr val="FF0000"/>
+                </a:solidFill>
+                <a:latin typeface="나눔고딕" panose="020D0604000000000000" pitchFamily="50" charset="-127"/>
+                <a:ea typeface="나눔고딕" panose="020D0604000000000000" pitchFamily="50" charset="-127"/>
+                <a:cs typeface="Segoe UI" panose="020B0502040204020203" pitchFamily="34" charset="0"/>
+              </a:rPr>
+              <a:t>얼럿</a:t>
+            </a:r>
+            <a:endParaRPr lang="ko-KR" altLang="en-US" sz="750" dirty="0">
+              <a:solidFill>
+                <a:srgbClr val="FF0000"/>
+              </a:solidFill>
+              <a:latin typeface="나눔고딕" panose="020D0604000000000000" pitchFamily="50" charset="-127"/>
+              <a:ea typeface="나눔고딕" panose="020D0604000000000000" pitchFamily="50" charset="-127"/>
+              <a:cs typeface="Segoe UI" panose="020B0502040204020203" pitchFamily="34" charset="0"/>
+            </a:endParaRPr>
+          </a:p>
+        </p:txBody>
+      </p:sp>
+      <p:sp>
+        <p:nvSpPr>
+          <p:cNvPr id="126" name="사각형: 둥근 모서리 60">
+            <a:extLst>
+              <a:ext uri="{FF2B5EF4-FFF2-40B4-BE49-F238E27FC236}">
+                <a16:creationId xmlns:a16="http://schemas.microsoft.com/office/drawing/2014/main" id="{9C717DB8-082D-4248-9FA1-17D421B49F8E}"/>
+              </a:ext>
+            </a:extLst>
+          </p:cNvPr>
+          <p:cNvSpPr/>
+          <p:nvPr/>
+        </p:nvSpPr>
+        <p:spPr>
+          <a:xfrm>
+            <a:off x="7861180" y="2971098"/>
+            <a:ext cx="958527" cy="390458"/>
+          </a:xfrm>
+          <a:prstGeom prst="flowChartDecision">
+            <a:avLst/>
+          </a:prstGeom>
+          <a:solidFill>
+            <a:schemeClr val="bg1"/>
+          </a:solidFill>
+          <a:ln w="3175">
+            <a:solidFill>
+              <a:schemeClr val="tx1">
+                <a:lumMod val="50000"/>
+                <a:lumOff val="50000"/>
+              </a:schemeClr>
+            </a:solidFill>
+          </a:ln>
+        </p:spPr>
+        <p:style>
+          <a:lnRef idx="2">
+            <a:schemeClr val="accent1">
+              <a:shade val="50000"/>
+            </a:schemeClr>
+          </a:lnRef>
+          <a:fillRef idx="1">
+            <a:schemeClr val="accent1"/>
+          </a:fillRef>
+          <a:effectRef idx="0">
+            <a:schemeClr val="accent1"/>
+          </a:effectRef>
+          <a:fontRef idx="minor">
+            <a:schemeClr val="lt1"/>
+          </a:fontRef>
+        </p:style>
+        <p:txBody>
+          <a:bodyPr wrap="none" rtlCol="0" anchor="ctr"/>
+          <a:lstStyle/>
+          <a:p>
+            <a:pPr algn="ctr"/>
+            <a:r>
+              <a:rPr lang="ko-KR" altLang="en-US" sz="750" dirty="0">
+                <a:solidFill>
+                  <a:schemeClr val="tx1">
+                    <a:lumMod val="95000"/>
+                    <a:lumOff val="5000"/>
+                  </a:schemeClr>
+                </a:solidFill>
+                <a:latin typeface="나눔고딕" panose="020D0604000000000000" pitchFamily="50" charset="-127"/>
+                <a:ea typeface="나눔고딕" panose="020D0604000000000000" pitchFamily="50" charset="-127"/>
+                <a:cs typeface="Segoe UI" panose="020B0502040204020203" pitchFamily="34" charset="0"/>
+              </a:rPr>
+              <a:t>필수 정보</a:t>
+            </a:r>
+            <a:endParaRPr lang="en-US" altLang="ko-KR" sz="750" dirty="0">
+              <a:solidFill>
+                <a:schemeClr val="tx1">
+                  <a:lumMod val="95000"/>
+                  <a:lumOff val="5000"/>
+                </a:schemeClr>
+              </a:solidFill>
+              <a:latin typeface="나눔고딕" panose="020D0604000000000000" pitchFamily="50" charset="-127"/>
+              <a:ea typeface="나눔고딕" panose="020D0604000000000000" pitchFamily="50" charset="-127"/>
+              <a:cs typeface="Segoe UI" panose="020B0502040204020203" pitchFamily="34" charset="0"/>
+            </a:endParaRPr>
+          </a:p>
+          <a:p>
+            <a:pPr algn="ctr"/>
+            <a:r>
+              <a:rPr lang="ko-KR" altLang="en-US" sz="750" dirty="0">
+                <a:solidFill>
+                  <a:schemeClr val="tx1">
+                    <a:lumMod val="95000"/>
+                    <a:lumOff val="5000"/>
+                  </a:schemeClr>
+                </a:solidFill>
+                <a:latin typeface="나눔고딕" panose="020D0604000000000000" pitchFamily="50" charset="-127"/>
+                <a:ea typeface="나눔고딕" panose="020D0604000000000000" pitchFamily="50" charset="-127"/>
+                <a:cs typeface="Segoe UI" panose="020B0502040204020203" pitchFamily="34" charset="0"/>
+              </a:rPr>
+              <a:t>입력 완료</a:t>
+            </a:r>
+            <a:r>
+              <a:rPr lang="en-US" altLang="ko-KR" sz="750" dirty="0">
+                <a:solidFill>
+                  <a:schemeClr val="tx1">
+                    <a:lumMod val="95000"/>
+                    <a:lumOff val="5000"/>
+                  </a:schemeClr>
+                </a:solidFill>
+                <a:latin typeface="나눔고딕" panose="020D0604000000000000" pitchFamily="50" charset="-127"/>
+                <a:ea typeface="나눔고딕" panose="020D0604000000000000" pitchFamily="50" charset="-127"/>
+                <a:cs typeface="Segoe UI" panose="020B0502040204020203" pitchFamily="34" charset="0"/>
+              </a:rPr>
+              <a:t>?</a:t>
+            </a:r>
+            <a:endParaRPr lang="ko-KR" altLang="en-US" sz="750" dirty="0">
+              <a:solidFill>
+                <a:schemeClr val="tx1">
+                  <a:lumMod val="95000"/>
+                  <a:lumOff val="5000"/>
+                </a:schemeClr>
+              </a:solidFill>
+              <a:latin typeface="나눔고딕" panose="020D0604000000000000" pitchFamily="50" charset="-127"/>
+              <a:ea typeface="나눔고딕" panose="020D0604000000000000" pitchFamily="50" charset="-127"/>
+              <a:cs typeface="Segoe UI" panose="020B0502040204020203" pitchFamily="34" charset="0"/>
+            </a:endParaRPr>
+          </a:p>
+        </p:txBody>
+      </p:sp>
+      <p:sp>
+        <p:nvSpPr>
+          <p:cNvPr id="127" name="TextBox 126">
+            <a:extLst>
+              <a:ext uri="{FF2B5EF4-FFF2-40B4-BE49-F238E27FC236}">
+                <a16:creationId xmlns:a16="http://schemas.microsoft.com/office/drawing/2014/main" id="{559700E3-C420-4DAE-AC12-E40ADB0007FA}"/>
               </a:ext>
             </a:extLst>
           </p:cNvPr>
@@ -18926,8 +19094,8 @@
         </p:nvSpPr>
         <p:spPr>
           <a:xfrm>
-            <a:off x="4572000" y="350428"/>
-            <a:ext cx="4563693" cy="307777"/>
+            <a:off x="7902272" y="4905082"/>
+            <a:ext cx="322524" cy="184666"/>
           </a:xfrm>
           <a:prstGeom prst="rect">
             <a:avLst/>
@@ -18935,48 +19103,59 @@
           <a:noFill/>
         </p:spPr>
         <p:txBody>
-          <a:bodyPr wrap="square" rtlCol="0">
+          <a:bodyPr wrap="none" rtlCol="0">
             <a:spAutoFit/>
           </a:bodyPr>
           <a:lstStyle/>
           <a:p>
-            <a:pPr algn="ctr"/>
             <a:r>
-              <a:rPr lang="ko-KR" altLang="en-US" sz="1400" dirty="0">
+              <a:rPr lang="en-US" altLang="ko-KR" sz="600" b="1" dirty="0">
+                <a:solidFill>
+                  <a:srgbClr val="0078D7"/>
+                </a:solidFill>
                 <a:latin typeface="나눔고딕" panose="020D0604000000000000" pitchFamily="50" charset="-127"/>
                 <a:ea typeface="나눔고딕" panose="020D0604000000000000" pitchFamily="50" charset="-127"/>
               </a:rPr>
-              <a:t>로그인 프로세스</a:t>
+              <a:t>YES</a:t>
             </a:r>
+            <a:endParaRPr lang="ko-KR" altLang="en-US" sz="600" b="1" dirty="0">
+              <a:solidFill>
+                <a:srgbClr val="0078D7"/>
+              </a:solidFill>
+              <a:latin typeface="나눔고딕" panose="020D0604000000000000" pitchFamily="50" charset="-127"/>
+              <a:ea typeface="나눔고딕" panose="020D0604000000000000" pitchFamily="50" charset="-127"/>
+            </a:endParaRPr>
           </a:p>
         </p:txBody>
       </p:sp>
       <p:cxnSp>
         <p:nvCxnSpPr>
-          <p:cNvPr id="113" name="직선 연결선 112">
+          <p:cNvPr id="128" name="직선 화살표 연결선 127">
             <a:extLst>
               <a:ext uri="{FF2B5EF4-FFF2-40B4-BE49-F238E27FC236}">
-                <a16:creationId xmlns:a16="http://schemas.microsoft.com/office/drawing/2014/main" id="{32B5AF49-B377-4AD8-BC34-873DED121F0A}"/>
+                <a16:creationId xmlns:a16="http://schemas.microsoft.com/office/drawing/2014/main" id="{2FB92D1D-AA85-4916-BE42-58D5842D62E6}"/>
               </a:ext>
             </a:extLst>
           </p:cNvPr>
-          <p:cNvCxnSpPr/>
+          <p:cNvCxnSpPr>
+            <a:cxnSpLocks/>
+          </p:cNvCxnSpPr>
           <p:nvPr/>
         </p:nvCxnSpPr>
         <p:spPr>
           <a:xfrm>
-            <a:off x="4580308" y="195278"/>
-            <a:ext cx="0" cy="5519722"/>
+            <a:off x="7914084" y="4911824"/>
+            <a:ext cx="2854" cy="144822"/>
           </a:xfrm>
-          <a:prstGeom prst="line">
+          <a:prstGeom prst="straightConnector1">
             <a:avLst/>
           </a:prstGeom>
           <a:ln>
             <a:solidFill>
-              <a:schemeClr val="bg1">
-                <a:lumMod val="85000"/>
-              </a:schemeClr>
+              <a:srgbClr val="0078D7"/>
             </a:solidFill>
+            <a:headEnd w="sm" len="sm"/>
+            <a:tailEnd type="arrow" w="sm" len="sm"/>
           </a:ln>
         </p:spPr>
         <p:style>
@@ -18994,12 +19173,335 @@
           </a:fontRef>
         </p:style>
       </p:cxnSp>
+      <p:sp>
+        <p:nvSpPr>
+          <p:cNvPr id="129" name="직사각형 128">
+            <a:extLst>
+              <a:ext uri="{FF2B5EF4-FFF2-40B4-BE49-F238E27FC236}">
+                <a16:creationId xmlns:a16="http://schemas.microsoft.com/office/drawing/2014/main" id="{645A86E8-CF64-423B-B290-8D91DE80E34E}"/>
+              </a:ext>
+            </a:extLst>
+          </p:cNvPr>
+          <p:cNvSpPr/>
+          <p:nvPr/>
+        </p:nvSpPr>
+        <p:spPr>
+          <a:xfrm>
+            <a:off x="7861181" y="2474600"/>
+            <a:ext cx="914937" cy="338554"/>
+          </a:xfrm>
+          <a:prstGeom prst="rect">
+            <a:avLst/>
+          </a:prstGeom>
+          <a:solidFill>
+            <a:schemeClr val="bg1"/>
+          </a:solidFill>
+          <a:ln w="3175">
+            <a:solidFill>
+              <a:schemeClr val="tx1">
+                <a:lumMod val="50000"/>
+                <a:lumOff val="50000"/>
+              </a:schemeClr>
+            </a:solidFill>
+          </a:ln>
+        </p:spPr>
+        <p:style>
+          <a:lnRef idx="2">
+            <a:schemeClr val="accent1">
+              <a:shade val="50000"/>
+            </a:schemeClr>
+          </a:lnRef>
+          <a:fillRef idx="1">
+            <a:schemeClr val="accent1"/>
+          </a:fillRef>
+          <a:effectRef idx="0">
+            <a:schemeClr val="accent1"/>
+          </a:effectRef>
+          <a:fontRef idx="minor">
+            <a:schemeClr val="lt1"/>
+          </a:fontRef>
+        </p:style>
+        <p:txBody>
+          <a:bodyPr wrap="none" lIns="0" tIns="0" rIns="0" bIns="0" rtlCol="0" anchor="ctr">
+            <a:normAutofit/>
+          </a:bodyPr>
+          <a:lstStyle/>
+          <a:p>
+            <a:pPr algn="ctr"/>
+            <a:r>
+              <a:rPr lang="ko-KR" altLang="en-US" sz="750" dirty="0">
+                <a:solidFill>
+                  <a:srgbClr val="000000"/>
+                </a:solidFill>
+                <a:latin typeface="나눔고딕" panose="020D0604000000000000" pitchFamily="50" charset="-127"/>
+                <a:ea typeface="나눔고딕" panose="020D0604000000000000" pitchFamily="50" charset="-127"/>
+                <a:cs typeface="Segoe UI" panose="020B0502040204020203" pitchFamily="34" charset="0"/>
+              </a:rPr>
+              <a:t>아이디 중복 확인</a:t>
+            </a:r>
+            <a:endParaRPr lang="en-US" altLang="ko-KR" sz="750" dirty="0">
+              <a:solidFill>
+                <a:srgbClr val="000000"/>
+              </a:solidFill>
+              <a:latin typeface="나눔고딕" panose="020D0604000000000000" pitchFamily="50" charset="-127"/>
+              <a:ea typeface="나눔고딕" panose="020D0604000000000000" pitchFamily="50" charset="-127"/>
+              <a:cs typeface="Segoe UI" panose="020B0502040204020203" pitchFamily="34" charset="0"/>
+            </a:endParaRPr>
+          </a:p>
+          <a:p>
+            <a:pPr algn="ctr"/>
+            <a:r>
+              <a:rPr lang="ko-KR" altLang="en-US" sz="750" dirty="0">
+                <a:solidFill>
+                  <a:srgbClr val="000000"/>
+                </a:solidFill>
+                <a:latin typeface="나눔고딕" panose="020D0604000000000000" pitchFamily="50" charset="-127"/>
+                <a:ea typeface="나눔고딕" panose="020D0604000000000000" pitchFamily="50" charset="-127"/>
+                <a:cs typeface="Segoe UI" panose="020B0502040204020203" pitchFamily="34" charset="0"/>
+              </a:rPr>
+              <a:t>체크</a:t>
+            </a:r>
+          </a:p>
+        </p:txBody>
+      </p:sp>
+      <p:sp>
+        <p:nvSpPr>
+          <p:cNvPr id="130" name="모서리가 둥근 직사각형 104">
+            <a:extLst>
+              <a:ext uri="{FF2B5EF4-FFF2-40B4-BE49-F238E27FC236}">
+                <a16:creationId xmlns:a16="http://schemas.microsoft.com/office/drawing/2014/main" id="{8FF5D88B-0288-45A5-B7B2-8B91E52FB7D9}"/>
+              </a:ext>
+            </a:extLst>
+          </p:cNvPr>
+          <p:cNvSpPr/>
+          <p:nvPr/>
+        </p:nvSpPr>
+        <p:spPr>
+          <a:xfrm>
+            <a:off x="7878263" y="718900"/>
+            <a:ext cx="840506" cy="338400"/>
+          </a:xfrm>
+          <a:prstGeom prst="roundRect">
+            <a:avLst>
+              <a:gd name="adj" fmla="val 50000"/>
+            </a:avLst>
+          </a:prstGeom>
+          <a:solidFill>
+            <a:srgbClr val="FFF2E9"/>
+          </a:solidFill>
+          <a:ln w="6350">
+            <a:noFill/>
+          </a:ln>
+        </p:spPr>
+        <p:style>
+          <a:lnRef idx="2">
+            <a:schemeClr val="accent1">
+              <a:shade val="50000"/>
+            </a:schemeClr>
+          </a:lnRef>
+          <a:fillRef idx="1">
+            <a:schemeClr val="accent1"/>
+          </a:fillRef>
+          <a:effectRef idx="0">
+            <a:schemeClr val="accent1"/>
+          </a:effectRef>
+          <a:fontRef idx="minor">
+            <a:schemeClr val="lt1"/>
+          </a:fontRef>
+        </p:style>
+        <p:txBody>
+          <a:bodyPr wrap="none" rtlCol="0" anchor="ctr"/>
+          <a:lstStyle/>
+          <a:p>
+            <a:pPr algn="ctr"/>
+            <a:r>
+              <a:rPr lang="ko-KR" altLang="en-US" sz="800" dirty="0">
+                <a:solidFill>
+                  <a:srgbClr val="000000"/>
+                </a:solidFill>
+                <a:latin typeface="나눔고딕" panose="020D0604000000000000" pitchFamily="50" charset="-127"/>
+                <a:ea typeface="나눔고딕" panose="020D0604000000000000" pitchFamily="50" charset="-127"/>
+                <a:cs typeface="Segoe UI" panose="020B0502040204020203" pitchFamily="34" charset="0"/>
+              </a:rPr>
+              <a:t>로그인 양식 노출</a:t>
+            </a:r>
+          </a:p>
+        </p:txBody>
+      </p:sp>
+      <p:sp>
+        <p:nvSpPr>
+          <p:cNvPr id="131" name="직사각형 130">
+            <a:extLst>
+              <a:ext uri="{FF2B5EF4-FFF2-40B4-BE49-F238E27FC236}">
+                <a16:creationId xmlns:a16="http://schemas.microsoft.com/office/drawing/2014/main" id="{FF5AA647-487A-436D-8DDD-4CCD8C485968}"/>
+              </a:ext>
+            </a:extLst>
+          </p:cNvPr>
+          <p:cNvSpPr/>
+          <p:nvPr/>
+        </p:nvSpPr>
+        <p:spPr>
+          <a:xfrm>
+            <a:off x="7811596" y="1780803"/>
+            <a:ext cx="1024905" cy="503156"/>
+          </a:xfrm>
+          <a:prstGeom prst="rect">
+            <a:avLst/>
+          </a:prstGeom>
+          <a:solidFill>
+            <a:schemeClr val="bg1"/>
+          </a:solidFill>
+          <a:ln w="3175">
+            <a:solidFill>
+              <a:schemeClr val="tx1">
+                <a:lumMod val="50000"/>
+                <a:lumOff val="50000"/>
+              </a:schemeClr>
+            </a:solidFill>
+          </a:ln>
+        </p:spPr>
+        <p:style>
+          <a:lnRef idx="2">
+            <a:schemeClr val="accent1">
+              <a:shade val="50000"/>
+            </a:schemeClr>
+          </a:lnRef>
+          <a:fillRef idx="1">
+            <a:schemeClr val="accent1"/>
+          </a:fillRef>
+          <a:effectRef idx="0">
+            <a:schemeClr val="accent1"/>
+          </a:effectRef>
+          <a:fontRef idx="minor">
+            <a:schemeClr val="lt1"/>
+          </a:fontRef>
+        </p:style>
+        <p:txBody>
+          <a:bodyPr wrap="none" lIns="0" tIns="0" rIns="0" bIns="0" rtlCol="0" anchor="ctr">
+            <a:normAutofit/>
+          </a:bodyPr>
+          <a:lstStyle/>
+          <a:p>
+            <a:pPr algn="ctr"/>
+            <a:r>
+              <a:rPr lang="ko-KR" altLang="en-US" sz="750" dirty="0">
+                <a:solidFill>
+                  <a:srgbClr val="000000"/>
+                </a:solidFill>
+                <a:latin typeface="나눔고딕" panose="020D0604000000000000" pitchFamily="50" charset="-127"/>
+                <a:ea typeface="나눔고딕" panose="020D0604000000000000" pitchFamily="50" charset="-127"/>
+                <a:cs typeface="Segoe UI" panose="020B0502040204020203" pitchFamily="34" charset="0"/>
+              </a:rPr>
+              <a:t>정보입력</a:t>
+            </a:r>
+            <a:endParaRPr lang="en-US" altLang="ko-KR" sz="750" dirty="0">
+              <a:solidFill>
+                <a:srgbClr val="000000"/>
+              </a:solidFill>
+              <a:latin typeface="나눔고딕" panose="020D0604000000000000" pitchFamily="50" charset="-127"/>
+              <a:ea typeface="나눔고딕" panose="020D0604000000000000" pitchFamily="50" charset="-127"/>
+              <a:cs typeface="Segoe UI" panose="020B0502040204020203" pitchFamily="34" charset="0"/>
+            </a:endParaRPr>
+          </a:p>
+          <a:p>
+            <a:pPr algn="ctr"/>
+            <a:r>
+              <a:rPr lang="en-US" altLang="ko-KR" sz="750" dirty="0">
+                <a:solidFill>
+                  <a:srgbClr val="000000"/>
+                </a:solidFill>
+                <a:latin typeface="나눔고딕" panose="020D0604000000000000" pitchFamily="50" charset="-127"/>
+                <a:ea typeface="나눔고딕" panose="020D0604000000000000" pitchFamily="50" charset="-127"/>
+                <a:cs typeface="Segoe UI" panose="020B0502040204020203" pitchFamily="34" charset="0"/>
+              </a:rPr>
+              <a:t>(</a:t>
+            </a:r>
+            <a:r>
+              <a:rPr lang="ko-KR" altLang="en-US" sz="750" dirty="0">
+                <a:solidFill>
+                  <a:srgbClr val="000000"/>
+                </a:solidFill>
+                <a:latin typeface="나눔고딕" panose="020D0604000000000000" pitchFamily="50" charset="-127"/>
+                <a:ea typeface="나눔고딕" panose="020D0604000000000000" pitchFamily="50" charset="-127"/>
+                <a:cs typeface="Segoe UI" panose="020B0502040204020203" pitchFamily="34" charset="0"/>
+              </a:rPr>
+              <a:t>아이디</a:t>
+            </a:r>
+            <a:r>
+              <a:rPr lang="en-US" altLang="ko-KR" sz="750" dirty="0">
+                <a:solidFill>
+                  <a:srgbClr val="000000"/>
+                </a:solidFill>
+                <a:latin typeface="나눔고딕" panose="020D0604000000000000" pitchFamily="50" charset="-127"/>
+                <a:ea typeface="나눔고딕" panose="020D0604000000000000" pitchFamily="50" charset="-127"/>
+                <a:cs typeface="Segoe UI" panose="020B0502040204020203" pitchFamily="34" charset="0"/>
+              </a:rPr>
+              <a:t>, </a:t>
+            </a:r>
+            <a:r>
+              <a:rPr lang="ko-KR" altLang="en-US" sz="750" dirty="0">
+                <a:solidFill>
+                  <a:srgbClr val="000000"/>
+                </a:solidFill>
+                <a:latin typeface="나눔고딕" panose="020D0604000000000000" pitchFamily="50" charset="-127"/>
+                <a:ea typeface="나눔고딕" panose="020D0604000000000000" pitchFamily="50" charset="-127"/>
+                <a:cs typeface="Segoe UI" panose="020B0502040204020203" pitchFamily="34" charset="0"/>
+              </a:rPr>
+              <a:t>비밀번호</a:t>
+            </a:r>
+            <a:r>
+              <a:rPr lang="en-US" altLang="ko-KR" sz="750" dirty="0">
+                <a:solidFill>
+                  <a:srgbClr val="000000"/>
+                </a:solidFill>
+                <a:latin typeface="나눔고딕" panose="020D0604000000000000" pitchFamily="50" charset="-127"/>
+                <a:ea typeface="나눔고딕" panose="020D0604000000000000" pitchFamily="50" charset="-127"/>
+                <a:cs typeface="Segoe UI" panose="020B0502040204020203" pitchFamily="34" charset="0"/>
+              </a:rPr>
+              <a:t>,</a:t>
+            </a:r>
+          </a:p>
+          <a:p>
+            <a:pPr algn="ctr"/>
+            <a:r>
+              <a:rPr lang="ko-KR" altLang="en-US" sz="750" dirty="0">
+                <a:solidFill>
+                  <a:srgbClr val="000000"/>
+                </a:solidFill>
+                <a:latin typeface="나눔고딕" panose="020D0604000000000000" pitchFamily="50" charset="-127"/>
+                <a:ea typeface="나눔고딕" panose="020D0604000000000000" pitchFamily="50" charset="-127"/>
+                <a:cs typeface="Segoe UI" panose="020B0502040204020203" pitchFamily="34" charset="0"/>
+              </a:rPr>
+              <a:t>이름 등</a:t>
+            </a:r>
+            <a:r>
+              <a:rPr lang="en-US" altLang="ko-KR" sz="750" dirty="0">
+                <a:solidFill>
+                  <a:srgbClr val="000000"/>
+                </a:solidFill>
+                <a:latin typeface="나눔고딕" panose="020D0604000000000000" pitchFamily="50" charset="-127"/>
+                <a:ea typeface="나눔고딕" panose="020D0604000000000000" pitchFamily="50" charset="-127"/>
+                <a:cs typeface="Segoe UI" panose="020B0502040204020203" pitchFamily="34" charset="0"/>
+              </a:rPr>
+              <a:t>)</a:t>
+            </a:r>
+            <a:endParaRPr lang="ko-KR" altLang="en-US" sz="750" dirty="0">
+              <a:solidFill>
+                <a:srgbClr val="000000"/>
+              </a:solidFill>
+              <a:latin typeface="나눔고딕" panose="020D0604000000000000" pitchFamily="50" charset="-127"/>
+              <a:ea typeface="나눔고딕" panose="020D0604000000000000" pitchFamily="50" charset="-127"/>
+              <a:cs typeface="Segoe UI" panose="020B0502040204020203" pitchFamily="34" charset="0"/>
+            </a:endParaRPr>
+          </a:p>
+        </p:txBody>
+      </p:sp>
       <p:cxnSp>
         <p:nvCxnSpPr>
-          <p:cNvPr id="118" name="직선 화살표 연결선 117">
+          <p:cNvPr id="132" name="직선 화살표 연결선 131">
             <a:extLst>
               <a:ext uri="{FF2B5EF4-FFF2-40B4-BE49-F238E27FC236}">
-                <a16:creationId xmlns:a16="http://schemas.microsoft.com/office/drawing/2014/main" id="{5B0FD2A9-4D22-4387-957E-D0A08A936493}"/>
+                <a16:creationId xmlns:a16="http://schemas.microsoft.com/office/drawing/2014/main" id="{0655824D-1A15-4E84-903E-DC4029DE47EC}"/>
               </a:ext>
             </a:extLst>
           </p:cNvPr>
@@ -19010,8 +19512,8 @@
         </p:nvCxnSpPr>
         <p:spPr>
           <a:xfrm>
-            <a:off x="1242411" y="1163482"/>
-            <a:ext cx="2854" cy="159304"/>
+            <a:off x="8312199" y="1633364"/>
+            <a:ext cx="3453" cy="159304"/>
           </a:xfrm>
           <a:prstGeom prst="straightConnector1">
             <a:avLst/>
@@ -19044,10 +19546,10 @@
       </p:cxnSp>
       <p:cxnSp>
         <p:nvCxnSpPr>
-          <p:cNvPr id="119" name="직선 화살표 연결선 118">
+          <p:cNvPr id="133" name="직선 화살표 연결선 132">
             <a:extLst>
               <a:ext uri="{FF2B5EF4-FFF2-40B4-BE49-F238E27FC236}">
-                <a16:creationId xmlns:a16="http://schemas.microsoft.com/office/drawing/2014/main" id="{5B0FD2A9-4D22-4387-957E-D0A08A936493}"/>
+                <a16:creationId xmlns:a16="http://schemas.microsoft.com/office/drawing/2014/main" id="{5C737D50-1D16-445E-8640-6089C9491D8A}"/>
               </a:ext>
             </a:extLst>
           </p:cNvPr>
@@ -19058,8 +19560,669 @@
         </p:nvCxnSpPr>
         <p:spPr>
           <a:xfrm>
-            <a:off x="5749699" y="1163482"/>
+            <a:off x="8315652" y="2296676"/>
+            <a:ext cx="3453" cy="159304"/>
+          </a:xfrm>
+          <a:prstGeom prst="straightConnector1">
+            <a:avLst/>
+          </a:prstGeom>
+          <a:ln>
+            <a:solidFill>
+              <a:schemeClr val="tx1">
+                <a:lumMod val="75000"/>
+                <a:lumOff val="25000"/>
+              </a:schemeClr>
+            </a:solidFill>
+            <a:headEnd w="sm" len="sm"/>
+            <a:tailEnd type="arrow" w="sm" len="sm"/>
+          </a:ln>
+        </p:spPr>
+        <p:style>
+          <a:lnRef idx="1">
+            <a:schemeClr val="accent1"/>
+          </a:lnRef>
+          <a:fillRef idx="0">
+            <a:schemeClr val="accent1"/>
+          </a:fillRef>
+          <a:effectRef idx="0">
+            <a:schemeClr val="accent1"/>
+          </a:effectRef>
+          <a:fontRef idx="minor">
+            <a:schemeClr val="tx1"/>
+          </a:fontRef>
+        </p:style>
+      </p:cxnSp>
+      <p:cxnSp>
+        <p:nvCxnSpPr>
+          <p:cNvPr id="134" name="직선 화살표 연결선 133">
+            <a:extLst>
+              <a:ext uri="{FF2B5EF4-FFF2-40B4-BE49-F238E27FC236}">
+                <a16:creationId xmlns:a16="http://schemas.microsoft.com/office/drawing/2014/main" id="{A00AA454-3404-49C9-889F-533559C3D472}"/>
+              </a:ext>
+            </a:extLst>
+          </p:cNvPr>
+          <p:cNvCxnSpPr>
+            <a:cxnSpLocks/>
+          </p:cNvCxnSpPr>
+          <p:nvPr/>
+        </p:nvCxnSpPr>
+        <p:spPr>
+          <a:xfrm>
+            <a:off x="8315652" y="2822780"/>
+            <a:ext cx="3453" cy="159304"/>
+          </a:xfrm>
+          <a:prstGeom prst="straightConnector1">
+            <a:avLst/>
+          </a:prstGeom>
+          <a:ln>
+            <a:solidFill>
+              <a:schemeClr val="tx1">
+                <a:lumMod val="75000"/>
+                <a:lumOff val="25000"/>
+              </a:schemeClr>
+            </a:solidFill>
+            <a:headEnd w="sm" len="sm"/>
+            <a:tailEnd type="arrow" w="sm" len="sm"/>
+          </a:ln>
+        </p:spPr>
+        <p:style>
+          <a:lnRef idx="1">
+            <a:schemeClr val="accent1"/>
+          </a:lnRef>
+          <a:fillRef idx="0">
+            <a:schemeClr val="accent1"/>
+          </a:fillRef>
+          <a:effectRef idx="0">
+            <a:schemeClr val="accent1"/>
+          </a:effectRef>
+          <a:fontRef idx="minor">
+            <a:schemeClr val="tx1"/>
+          </a:fontRef>
+        </p:style>
+      </p:cxnSp>
+      <p:sp>
+        <p:nvSpPr>
+          <p:cNvPr id="135" name="TextBox 134">
+            <a:extLst>
+              <a:ext uri="{FF2B5EF4-FFF2-40B4-BE49-F238E27FC236}">
+                <a16:creationId xmlns:a16="http://schemas.microsoft.com/office/drawing/2014/main" id="{4A0A67A8-5ACD-4818-96F0-9F4E41C4B4FD}"/>
+              </a:ext>
+            </a:extLst>
+          </p:cNvPr>
+          <p:cNvSpPr txBox="1"/>
+          <p:nvPr/>
+        </p:nvSpPr>
+        <p:spPr>
+          <a:xfrm>
+            <a:off x="8345548" y="3361556"/>
+            <a:ext cx="322524" cy="184666"/>
+          </a:xfrm>
+          <a:prstGeom prst="rect">
+            <a:avLst/>
+          </a:prstGeom>
+          <a:noFill/>
+        </p:spPr>
+        <p:txBody>
+          <a:bodyPr wrap="none" rtlCol="0">
+            <a:spAutoFit/>
+          </a:bodyPr>
+          <a:lstStyle/>
+          <a:p>
+            <a:r>
+              <a:rPr lang="en-US" altLang="ko-KR" sz="600" b="1" dirty="0">
+                <a:solidFill>
+                  <a:srgbClr val="0078D7"/>
+                </a:solidFill>
+                <a:latin typeface="나눔고딕" panose="020D0604000000000000" pitchFamily="50" charset="-127"/>
+                <a:ea typeface="나눔고딕" panose="020D0604000000000000" pitchFamily="50" charset="-127"/>
+              </a:rPr>
+              <a:t>YES</a:t>
+            </a:r>
+            <a:endParaRPr lang="ko-KR" altLang="en-US" sz="600" b="1" dirty="0">
+              <a:solidFill>
+                <a:srgbClr val="0078D7"/>
+              </a:solidFill>
+              <a:latin typeface="나눔고딕" panose="020D0604000000000000" pitchFamily="50" charset="-127"/>
+              <a:ea typeface="나눔고딕" panose="020D0604000000000000" pitchFamily="50" charset="-127"/>
+            </a:endParaRPr>
+          </a:p>
+        </p:txBody>
+      </p:sp>
+      <p:cxnSp>
+        <p:nvCxnSpPr>
+          <p:cNvPr id="136" name="직선 화살표 연결선 135">
+            <a:extLst>
+              <a:ext uri="{FF2B5EF4-FFF2-40B4-BE49-F238E27FC236}">
+                <a16:creationId xmlns:a16="http://schemas.microsoft.com/office/drawing/2014/main" id="{E146021F-D115-4513-ADBB-FAD4165A6982}"/>
+              </a:ext>
+            </a:extLst>
+          </p:cNvPr>
+          <p:cNvCxnSpPr>
+            <a:cxnSpLocks/>
+          </p:cNvCxnSpPr>
+          <p:nvPr/>
+        </p:nvCxnSpPr>
+        <p:spPr>
+          <a:xfrm>
+            <a:off x="8308422" y="3386966"/>
             <a:ext cx="2854" cy="159304"/>
+          </a:xfrm>
+          <a:prstGeom prst="straightConnector1">
+            <a:avLst/>
+          </a:prstGeom>
+          <a:ln>
+            <a:solidFill>
+              <a:srgbClr val="0078D7"/>
+            </a:solidFill>
+            <a:headEnd w="sm" len="sm"/>
+            <a:tailEnd type="arrow" w="sm" len="sm"/>
+          </a:ln>
+        </p:spPr>
+        <p:style>
+          <a:lnRef idx="1">
+            <a:schemeClr val="accent1"/>
+          </a:lnRef>
+          <a:fillRef idx="0">
+            <a:schemeClr val="accent1"/>
+          </a:fillRef>
+          <a:effectRef idx="0">
+            <a:schemeClr val="accent1"/>
+          </a:effectRef>
+          <a:fontRef idx="minor">
+            <a:schemeClr val="tx1"/>
+          </a:fontRef>
+        </p:style>
+      </p:cxnSp>
+      <p:cxnSp>
+        <p:nvCxnSpPr>
+          <p:cNvPr id="137" name="직선 화살표 연결선 136">
+            <a:extLst>
+              <a:ext uri="{FF2B5EF4-FFF2-40B4-BE49-F238E27FC236}">
+                <a16:creationId xmlns:a16="http://schemas.microsoft.com/office/drawing/2014/main" id="{F6729F82-C4B0-4CB3-8541-0DE1575B1D00}"/>
+              </a:ext>
+            </a:extLst>
+          </p:cNvPr>
+          <p:cNvCxnSpPr>
+            <a:cxnSpLocks/>
+          </p:cNvCxnSpPr>
+          <p:nvPr/>
+        </p:nvCxnSpPr>
+        <p:spPr>
+          <a:xfrm>
+            <a:off x="7815049" y="3715494"/>
+            <a:ext cx="0" cy="294134"/>
+          </a:xfrm>
+          <a:prstGeom prst="straightConnector1">
+            <a:avLst/>
+          </a:prstGeom>
+          <a:ln>
+            <a:solidFill>
+              <a:schemeClr val="tx1">
+                <a:lumMod val="75000"/>
+                <a:lumOff val="25000"/>
+              </a:schemeClr>
+            </a:solidFill>
+            <a:headEnd w="sm" len="sm"/>
+            <a:tailEnd type="arrow" w="sm" len="sm"/>
+          </a:ln>
+        </p:spPr>
+        <p:style>
+          <a:lnRef idx="1">
+            <a:schemeClr val="accent1"/>
+          </a:lnRef>
+          <a:fillRef idx="0">
+            <a:schemeClr val="accent1"/>
+          </a:fillRef>
+          <a:effectRef idx="0">
+            <a:schemeClr val="accent1"/>
+          </a:effectRef>
+          <a:fontRef idx="minor">
+            <a:schemeClr val="tx1"/>
+          </a:fontRef>
+        </p:style>
+      </p:cxnSp>
+      <p:cxnSp>
+        <p:nvCxnSpPr>
+          <p:cNvPr id="138" name="직선 화살표 연결선 137">
+            <a:extLst>
+              <a:ext uri="{FF2B5EF4-FFF2-40B4-BE49-F238E27FC236}">
+                <a16:creationId xmlns:a16="http://schemas.microsoft.com/office/drawing/2014/main" id="{223B6717-BE5C-4A44-AA00-9858AED1C0B2}"/>
+              </a:ext>
+            </a:extLst>
+          </p:cNvPr>
+          <p:cNvCxnSpPr>
+            <a:cxnSpLocks/>
+          </p:cNvCxnSpPr>
+          <p:nvPr/>
+        </p:nvCxnSpPr>
+        <p:spPr>
+          <a:xfrm>
+            <a:off x="7883604" y="4361621"/>
+            <a:ext cx="3453" cy="144822"/>
+          </a:xfrm>
+          <a:prstGeom prst="straightConnector1">
+            <a:avLst/>
+          </a:prstGeom>
+          <a:ln>
+            <a:solidFill>
+              <a:schemeClr val="tx1">
+                <a:lumMod val="75000"/>
+                <a:lumOff val="25000"/>
+              </a:schemeClr>
+            </a:solidFill>
+            <a:headEnd w="sm" len="sm"/>
+            <a:tailEnd type="arrow" w="sm" len="sm"/>
+          </a:ln>
+        </p:spPr>
+        <p:style>
+          <a:lnRef idx="1">
+            <a:schemeClr val="accent1"/>
+          </a:lnRef>
+          <a:fillRef idx="0">
+            <a:schemeClr val="accent1"/>
+          </a:fillRef>
+          <a:effectRef idx="0">
+            <a:schemeClr val="accent1"/>
+          </a:effectRef>
+          <a:fontRef idx="minor">
+            <a:schemeClr val="tx1"/>
+          </a:fontRef>
+        </p:style>
+      </p:cxnSp>
+      <p:cxnSp>
+        <p:nvCxnSpPr>
+          <p:cNvPr id="139" name="직선 화살표 연결선 138">
+            <a:extLst>
+              <a:ext uri="{FF2B5EF4-FFF2-40B4-BE49-F238E27FC236}">
+                <a16:creationId xmlns:a16="http://schemas.microsoft.com/office/drawing/2014/main" id="{91EA718A-240D-427F-807F-252040AF9174}"/>
+              </a:ext>
+            </a:extLst>
+          </p:cNvPr>
+          <p:cNvCxnSpPr>
+            <a:cxnSpLocks/>
+          </p:cNvCxnSpPr>
+          <p:nvPr/>
+        </p:nvCxnSpPr>
+        <p:spPr>
+          <a:xfrm flipH="1">
+            <a:off x="7686646" y="3143862"/>
+            <a:ext cx="162310" cy="0"/>
+          </a:xfrm>
+          <a:prstGeom prst="straightConnector1">
+            <a:avLst/>
+          </a:prstGeom>
+          <a:ln>
+            <a:solidFill>
+              <a:srgbClr val="FF0000"/>
+            </a:solidFill>
+            <a:headEnd w="sm" len="sm"/>
+            <a:tailEnd type="arrow" w="sm" len="sm"/>
+          </a:ln>
+        </p:spPr>
+        <p:style>
+          <a:lnRef idx="1">
+            <a:schemeClr val="accent1"/>
+          </a:lnRef>
+          <a:fillRef idx="0">
+            <a:schemeClr val="accent1"/>
+          </a:fillRef>
+          <a:effectRef idx="0">
+            <a:schemeClr val="accent1"/>
+          </a:effectRef>
+          <a:fontRef idx="minor">
+            <a:schemeClr val="tx1"/>
+          </a:fontRef>
+        </p:style>
+      </p:cxnSp>
+      <p:sp>
+        <p:nvSpPr>
+          <p:cNvPr id="142" name="TextBox 141">
+            <a:extLst>
+              <a:ext uri="{FF2B5EF4-FFF2-40B4-BE49-F238E27FC236}">
+                <a16:creationId xmlns:a16="http://schemas.microsoft.com/office/drawing/2014/main" id="{CBD45D81-4F0E-4F82-BE64-80E71692095E}"/>
+              </a:ext>
+            </a:extLst>
+          </p:cNvPr>
+          <p:cNvSpPr txBox="1"/>
+          <p:nvPr/>
+        </p:nvSpPr>
+        <p:spPr>
+          <a:xfrm>
+            <a:off x="7667580" y="2960866"/>
+            <a:ext cx="303288" cy="184666"/>
+          </a:xfrm>
+          <a:prstGeom prst="rect">
+            <a:avLst/>
+          </a:prstGeom>
+          <a:noFill/>
+        </p:spPr>
+        <p:txBody>
+          <a:bodyPr wrap="none" rtlCol="0">
+            <a:spAutoFit/>
+          </a:bodyPr>
+          <a:lstStyle/>
+          <a:p>
+            <a:r>
+              <a:rPr lang="en-US" altLang="ko-KR" sz="600" b="1" dirty="0">
+                <a:solidFill>
+                  <a:srgbClr val="FF0000"/>
+                </a:solidFill>
+                <a:latin typeface="나눔고딕" panose="020D0604000000000000" pitchFamily="50" charset="-127"/>
+                <a:ea typeface="나눔고딕" panose="020D0604000000000000" pitchFamily="50" charset="-127"/>
+              </a:rPr>
+              <a:t>NO</a:t>
+            </a:r>
+            <a:endParaRPr lang="ko-KR" altLang="en-US" sz="600" b="1" dirty="0">
+              <a:solidFill>
+                <a:srgbClr val="FF0000"/>
+              </a:solidFill>
+              <a:latin typeface="나눔고딕" panose="020D0604000000000000" pitchFamily="50" charset="-127"/>
+              <a:ea typeface="나눔고딕" panose="020D0604000000000000" pitchFamily="50" charset="-127"/>
+            </a:endParaRPr>
+          </a:p>
+        </p:txBody>
+      </p:sp>
+      <p:cxnSp>
+        <p:nvCxnSpPr>
+          <p:cNvPr id="143" name="직선 화살표 연결선 142">
+            <a:extLst>
+              <a:ext uri="{FF2B5EF4-FFF2-40B4-BE49-F238E27FC236}">
+                <a16:creationId xmlns:a16="http://schemas.microsoft.com/office/drawing/2014/main" id="{484A5D49-07D7-45A2-A514-08AA1B823B6B}"/>
+              </a:ext>
+            </a:extLst>
+          </p:cNvPr>
+          <p:cNvCxnSpPr>
+            <a:cxnSpLocks/>
+          </p:cNvCxnSpPr>
+          <p:nvPr/>
+        </p:nvCxnSpPr>
+        <p:spPr>
+          <a:xfrm rot="5400000" flipH="1">
+            <a:off x="4202813" y="2866647"/>
+            <a:ext cx="162310" cy="0"/>
+          </a:xfrm>
+          <a:prstGeom prst="straightConnector1">
+            <a:avLst/>
+          </a:prstGeom>
+          <a:ln>
+            <a:solidFill>
+              <a:srgbClr val="FF0000"/>
+            </a:solidFill>
+            <a:headEnd w="sm" len="sm"/>
+            <a:tailEnd type="arrow" w="sm" len="sm"/>
+          </a:ln>
+        </p:spPr>
+        <p:style>
+          <a:lnRef idx="1">
+            <a:schemeClr val="accent1"/>
+          </a:lnRef>
+          <a:fillRef idx="0">
+            <a:schemeClr val="accent1"/>
+          </a:fillRef>
+          <a:effectRef idx="0">
+            <a:schemeClr val="accent1"/>
+          </a:effectRef>
+          <a:fontRef idx="minor">
+            <a:schemeClr val="tx1"/>
+          </a:fontRef>
+        </p:style>
+      </p:cxnSp>
+      <p:sp>
+        <p:nvSpPr>
+          <p:cNvPr id="144" name="TextBox 143">
+            <a:extLst>
+              <a:ext uri="{FF2B5EF4-FFF2-40B4-BE49-F238E27FC236}">
+                <a16:creationId xmlns:a16="http://schemas.microsoft.com/office/drawing/2014/main" id="{03969666-D64E-4BF4-9020-7A6A6753F7C6}"/>
+              </a:ext>
+            </a:extLst>
+          </p:cNvPr>
+          <p:cNvSpPr txBox="1"/>
+          <p:nvPr/>
+        </p:nvSpPr>
+        <p:spPr>
+          <a:xfrm>
+            <a:off x="8353168" y="1057300"/>
+            <a:ext cx="322524" cy="184666"/>
+          </a:xfrm>
+          <a:prstGeom prst="rect">
+            <a:avLst/>
+          </a:prstGeom>
+          <a:noFill/>
+        </p:spPr>
+        <p:txBody>
+          <a:bodyPr wrap="none" rtlCol="0">
+            <a:spAutoFit/>
+          </a:bodyPr>
+          <a:lstStyle/>
+          <a:p>
+            <a:r>
+              <a:rPr lang="en-US" altLang="ko-KR" sz="600" b="1" dirty="0">
+                <a:solidFill>
+                  <a:srgbClr val="0078D7"/>
+                </a:solidFill>
+                <a:latin typeface="나눔고딕" panose="020D0604000000000000" pitchFamily="50" charset="-127"/>
+                <a:ea typeface="나눔고딕" panose="020D0604000000000000" pitchFamily="50" charset="-127"/>
+              </a:rPr>
+              <a:t>YES</a:t>
+            </a:r>
+            <a:endParaRPr lang="ko-KR" altLang="en-US" sz="600" b="1" dirty="0">
+              <a:solidFill>
+                <a:srgbClr val="0078D7"/>
+              </a:solidFill>
+              <a:latin typeface="나눔고딕" panose="020D0604000000000000" pitchFamily="50" charset="-127"/>
+              <a:ea typeface="나눔고딕" panose="020D0604000000000000" pitchFamily="50" charset="-127"/>
+            </a:endParaRPr>
+          </a:p>
+        </p:txBody>
+      </p:sp>
+      <p:cxnSp>
+        <p:nvCxnSpPr>
+          <p:cNvPr id="145" name="직선 화살표 연결선 144">
+            <a:extLst>
+              <a:ext uri="{FF2B5EF4-FFF2-40B4-BE49-F238E27FC236}">
+                <a16:creationId xmlns:a16="http://schemas.microsoft.com/office/drawing/2014/main" id="{97538B48-9B25-433E-AE40-54D4E606EB35}"/>
+              </a:ext>
+            </a:extLst>
+          </p:cNvPr>
+          <p:cNvCxnSpPr>
+            <a:cxnSpLocks/>
+          </p:cNvCxnSpPr>
+          <p:nvPr/>
+        </p:nvCxnSpPr>
+        <p:spPr>
+          <a:xfrm>
+            <a:off x="8308422" y="1071798"/>
+            <a:ext cx="2854" cy="159304"/>
+          </a:xfrm>
+          <a:prstGeom prst="straightConnector1">
+            <a:avLst/>
+          </a:prstGeom>
+          <a:ln>
+            <a:solidFill>
+              <a:srgbClr val="0078D7"/>
+            </a:solidFill>
+            <a:headEnd w="sm" len="sm"/>
+            <a:tailEnd type="arrow" w="sm" len="sm"/>
+          </a:ln>
+        </p:spPr>
+        <p:style>
+          <a:lnRef idx="1">
+            <a:schemeClr val="accent1"/>
+          </a:lnRef>
+          <a:fillRef idx="0">
+            <a:schemeClr val="accent1"/>
+          </a:fillRef>
+          <a:effectRef idx="0">
+            <a:schemeClr val="accent1"/>
+          </a:effectRef>
+          <a:fontRef idx="minor">
+            <a:schemeClr val="tx1"/>
+          </a:fontRef>
+        </p:style>
+      </p:cxnSp>
+      <p:sp>
+        <p:nvSpPr>
+          <p:cNvPr id="146" name="직사각형 145">
+            <a:extLst>
+              <a:ext uri="{FF2B5EF4-FFF2-40B4-BE49-F238E27FC236}">
+                <a16:creationId xmlns:a16="http://schemas.microsoft.com/office/drawing/2014/main" id="{B4AD3167-1C6F-40E7-9B02-F93725D8C440}"/>
+              </a:ext>
+            </a:extLst>
+          </p:cNvPr>
+          <p:cNvSpPr/>
+          <p:nvPr/>
+        </p:nvSpPr>
+        <p:spPr>
+          <a:xfrm>
+            <a:off x="6561002" y="1981279"/>
+            <a:ext cx="994191" cy="369566"/>
+          </a:xfrm>
+          <a:prstGeom prst="rect">
+            <a:avLst/>
+          </a:prstGeom>
+          <a:solidFill>
+            <a:schemeClr val="bg1"/>
+          </a:solidFill>
+          <a:ln w="9525" cap="rnd">
+            <a:solidFill>
+              <a:srgbClr val="FF0000"/>
+            </a:solidFill>
+            <a:prstDash val="sysDash"/>
+          </a:ln>
+        </p:spPr>
+        <p:style>
+          <a:lnRef idx="2">
+            <a:schemeClr val="accent1">
+              <a:shade val="50000"/>
+            </a:schemeClr>
+          </a:lnRef>
+          <a:fillRef idx="1">
+            <a:schemeClr val="accent1"/>
+          </a:fillRef>
+          <a:effectRef idx="0">
+            <a:schemeClr val="accent1"/>
+          </a:effectRef>
+          <a:fontRef idx="minor">
+            <a:schemeClr val="lt1"/>
+          </a:fontRef>
+        </p:style>
+        <p:txBody>
+          <a:bodyPr wrap="none" lIns="0" tIns="0" rIns="0" bIns="0" rtlCol="0" anchor="ctr">
+            <a:normAutofit/>
+          </a:bodyPr>
+          <a:lstStyle/>
+          <a:p>
+            <a:pPr algn="ctr"/>
+            <a:r>
+              <a:rPr lang="ko-KR" altLang="en-US" sz="750" dirty="0" err="1">
+                <a:solidFill>
+                  <a:srgbClr val="000000"/>
+                </a:solidFill>
+                <a:latin typeface="나눔고딕" panose="020D0604000000000000" pitchFamily="50" charset="-127"/>
+                <a:ea typeface="나눔고딕" panose="020D0604000000000000" pitchFamily="50" charset="-127"/>
+                <a:cs typeface="Segoe UI" panose="020B0502040204020203" pitchFamily="34" charset="0"/>
+              </a:rPr>
+              <a:t>품절알림</a:t>
+            </a:r>
+            <a:r>
+              <a:rPr lang="en-US" altLang="ko-KR" sz="750" dirty="0">
+                <a:solidFill>
+                  <a:srgbClr val="000000"/>
+                </a:solidFill>
+                <a:latin typeface="나눔고딕" panose="020D0604000000000000" pitchFamily="50" charset="-127"/>
+                <a:ea typeface="나눔고딕" panose="020D0604000000000000" pitchFamily="50" charset="-127"/>
+                <a:cs typeface="Segoe UI" panose="020B0502040204020203" pitchFamily="34" charset="0"/>
+              </a:rPr>
+              <a:t>’ </a:t>
+            </a:r>
+            <a:r>
+              <a:rPr lang="ko-KR" altLang="en-US" sz="750" dirty="0" err="1">
+                <a:solidFill>
+                  <a:srgbClr val="000000"/>
+                </a:solidFill>
+                <a:latin typeface="나눔고딕" panose="020D0604000000000000" pitchFamily="50" charset="-127"/>
+                <a:ea typeface="나눔고딕" panose="020D0604000000000000" pitchFamily="50" charset="-127"/>
+                <a:cs typeface="Segoe UI" panose="020B0502040204020203" pitchFamily="34" charset="0"/>
+              </a:rPr>
+              <a:t>메세지</a:t>
+            </a:r>
+            <a:endParaRPr lang="ko-KR" altLang="en-US" sz="750" dirty="0">
+              <a:solidFill>
+                <a:srgbClr val="FF0000"/>
+              </a:solidFill>
+              <a:latin typeface="나눔고딕" panose="020D0604000000000000" pitchFamily="50" charset="-127"/>
+              <a:ea typeface="나눔고딕" panose="020D0604000000000000" pitchFamily="50" charset="-127"/>
+              <a:cs typeface="Segoe UI" panose="020B0502040204020203" pitchFamily="34" charset="0"/>
+            </a:endParaRPr>
+          </a:p>
+        </p:txBody>
+      </p:sp>
+      <p:cxnSp>
+        <p:nvCxnSpPr>
+          <p:cNvPr id="148" name="직선 화살표 연결선 147">
+            <a:extLst>
+              <a:ext uri="{FF2B5EF4-FFF2-40B4-BE49-F238E27FC236}">
+                <a16:creationId xmlns:a16="http://schemas.microsoft.com/office/drawing/2014/main" id="{715A1321-4E33-46BD-BDAD-83F9CDB11644}"/>
+              </a:ext>
+            </a:extLst>
+          </p:cNvPr>
+          <p:cNvCxnSpPr>
+            <a:cxnSpLocks/>
+          </p:cNvCxnSpPr>
+          <p:nvPr/>
+        </p:nvCxnSpPr>
+        <p:spPr>
+          <a:xfrm>
+            <a:off x="7089427" y="2361094"/>
+            <a:ext cx="2853" cy="152995"/>
+          </a:xfrm>
+          <a:prstGeom prst="straightConnector1">
+            <a:avLst/>
+          </a:prstGeom>
+          <a:ln>
+            <a:solidFill>
+              <a:schemeClr val="tx1">
+                <a:lumMod val="75000"/>
+                <a:lumOff val="25000"/>
+              </a:schemeClr>
+            </a:solidFill>
+            <a:headEnd w="sm" len="sm"/>
+            <a:tailEnd type="arrow" w="sm" len="sm"/>
+          </a:ln>
+        </p:spPr>
+        <p:style>
+          <a:lnRef idx="1">
+            <a:schemeClr val="accent1"/>
+          </a:lnRef>
+          <a:fillRef idx="0">
+            <a:schemeClr val="accent1"/>
+          </a:fillRef>
+          <a:effectRef idx="0">
+            <a:schemeClr val="accent1"/>
+          </a:effectRef>
+          <a:fontRef idx="minor">
+            <a:schemeClr val="tx1"/>
+          </a:fontRef>
+        </p:style>
+      </p:cxnSp>
+      <p:cxnSp>
+        <p:nvCxnSpPr>
+          <p:cNvPr id="149" name="직선 화살표 연결선 148">
+            <a:extLst>
+              <a:ext uri="{FF2B5EF4-FFF2-40B4-BE49-F238E27FC236}">
+                <a16:creationId xmlns:a16="http://schemas.microsoft.com/office/drawing/2014/main" id="{1E474169-F6F2-4569-8AFF-552BA87A289D}"/>
+              </a:ext>
+            </a:extLst>
+          </p:cNvPr>
+          <p:cNvCxnSpPr>
+            <a:cxnSpLocks/>
+          </p:cNvCxnSpPr>
+          <p:nvPr/>
+        </p:nvCxnSpPr>
+        <p:spPr>
+          <a:xfrm flipV="1">
+            <a:off x="7092280" y="2874566"/>
+            <a:ext cx="2853" cy="703014"/>
           </a:xfrm>
           <a:prstGeom prst="straightConnector1">
             <a:avLst/>

--- a/0_wbs/도서검색웹_SB_2026_0805.pptx
+++ b/0_wbs/도서검색웹_SB_2026_0805.pptx
@@ -6,10 +6,10 @@
     <p:sldMasterId id="2147483673" r:id="rId2"/>
   </p:sldMasterIdLst>
   <p:notesMasterIdLst>
-    <p:notesMasterId r:id="rId9"/>
+    <p:notesMasterId r:id="rId10"/>
   </p:notesMasterIdLst>
   <p:handoutMasterIdLst>
-    <p:handoutMasterId r:id="rId10"/>
+    <p:handoutMasterId r:id="rId11"/>
   </p:handoutMasterIdLst>
   <p:sldIdLst>
     <p:sldId id="398" r:id="rId3"/>
@@ -17,7 +17,8 @@
     <p:sldId id="403" r:id="rId5"/>
     <p:sldId id="404" r:id="rId6"/>
     <p:sldId id="412" r:id="rId7"/>
-    <p:sldId id="406" r:id="rId8"/>
+    <p:sldId id="413" r:id="rId8"/>
+    <p:sldId id="406" r:id="rId9"/>
   </p:sldIdLst>
   <p:sldSz cx="9144000" cy="5715000" type="screen16x10"/>
   <p:notesSz cx="6735763" cy="9866313"/>
@@ -237,7 +238,7 @@
           <a:p>
             <a:fld id="{999972AA-FE3A-41E8-94D7-0A348C1614D1}" type="datetimeFigureOut">
               <a:rPr lang="ko-KR" altLang="en-US" smtClean="0"/>
-              <a:t>2026-08-06</a:t>
+              <a:t>2026-08-10</a:t>
             </a:fld>
             <a:endParaRPr lang="ko-KR" altLang="en-US"/>
           </a:p>
@@ -402,7 +403,7 @@
           <a:p>
             <a:fld id="{CB25E66B-2806-4CC0-B543-C1F698B8CB0C}" type="datetimeFigureOut">
               <a:rPr lang="ko-KR" altLang="en-US" smtClean="0"/>
-              <a:t>2026-08-06</a:t>
+              <a:t>2026-08-10</a:t>
             </a:fld>
             <a:endParaRPr lang="ko-KR" altLang="en-US"/>
           </a:p>
@@ -902,7 +903,7 @@
           <a:p>
             <a:fld id="{AC76DB6A-589F-43F9-84B6-ACD2F062FABB}" type="slidenum">
               <a:rPr lang="ko-KR" altLang="en-US" smtClean="0"/>
-              <a:t>6</a:t>
+              <a:t>7</a:t>
             </a:fld>
             <a:endParaRPr lang="ko-KR" altLang="en-US"/>
           </a:p>
@@ -26873,6 +26874,3299 @@
       </p:grpSpPr>
       <p:graphicFrame>
         <p:nvGraphicFramePr>
+          <p:cNvPr id="58" name="표 57"/>
+          <p:cNvGraphicFramePr>
+            <a:graphicFrameLocks noGrp="1"/>
+          </p:cNvGraphicFramePr>
+          <p:nvPr/>
+        </p:nvGraphicFramePr>
+        <p:xfrm>
+          <a:off x="6979021" y="0"/>
+          <a:ext cx="2164979" cy="2707042"/>
+        </p:xfrm>
+        <a:graphic>
+          <a:graphicData uri="http://schemas.openxmlformats.org/drawingml/2006/table">
+            <a:tbl>
+              <a:tblPr firstRow="1" bandRow="1">
+                <a:tableStyleId>{5C22544A-7EE6-4342-B048-85BDC9FD1C3A}</a:tableStyleId>
+              </a:tblPr>
+              <a:tblGrid>
+                <a:gridCol w="241973">
+                  <a:extLst>
+                    <a:ext uri="{9D8B030D-6E8A-4147-A177-3AD203B41FA5}">
+                      <a16:colId xmlns:a16="http://schemas.microsoft.com/office/drawing/2014/main" val="20000"/>
+                    </a:ext>
+                  </a:extLst>
+                </a:gridCol>
+                <a:gridCol w="1923006">
+                  <a:extLst>
+                    <a:ext uri="{9D8B030D-6E8A-4147-A177-3AD203B41FA5}">
+                      <a16:colId xmlns:a16="http://schemas.microsoft.com/office/drawing/2014/main" val="20001"/>
+                    </a:ext>
+                  </a:extLst>
+                </a:gridCol>
+              </a:tblGrid>
+              <a:tr h="193204">
+                <a:tc gridSpan="2">
+                  <a:txBody>
+                    <a:bodyPr/>
+                    <a:lstStyle/>
+                    <a:p>
+                      <a:pPr algn="ctr" latinLnBrk="1">
+                        <a:lnSpc>
+                          <a:spcPct val="150000"/>
+                        </a:lnSpc>
+                      </a:pPr>
+                      <a:r>
+                        <a:rPr lang="en-US" altLang="ko-KR" sz="600" b="0" dirty="0">
+                          <a:solidFill>
+                            <a:schemeClr val="tx1">
+                              <a:lumMod val="50000"/>
+                              <a:lumOff val="50000"/>
+                            </a:schemeClr>
+                          </a:solidFill>
+                          <a:latin typeface="나눔고딕" panose="020D0604000000000000" pitchFamily="50" charset="-127"/>
+                          <a:ea typeface="나눔고딕" panose="020D0604000000000000" pitchFamily="50" charset="-127"/>
+                        </a:rPr>
+                        <a:t>DEVELOP</a:t>
+                      </a:r>
+                      <a:r>
+                        <a:rPr lang="en-US" altLang="ko-KR" sz="600" b="0" baseline="0" dirty="0">
+                          <a:solidFill>
+                            <a:schemeClr val="tx1">
+                              <a:lumMod val="50000"/>
+                              <a:lumOff val="50000"/>
+                            </a:schemeClr>
+                          </a:solidFill>
+                          <a:latin typeface="나눔고딕" panose="020D0604000000000000" pitchFamily="50" charset="-127"/>
+                          <a:ea typeface="나눔고딕" panose="020D0604000000000000" pitchFamily="50" charset="-127"/>
+                        </a:rPr>
+                        <a:t> Description</a:t>
+                      </a:r>
+                      <a:endParaRPr lang="ko-KR" altLang="en-US" sz="600" b="0" dirty="0">
+                        <a:solidFill>
+                          <a:schemeClr val="tx1">
+                            <a:lumMod val="50000"/>
+                            <a:lumOff val="50000"/>
+                          </a:schemeClr>
+                        </a:solidFill>
+                        <a:latin typeface="나눔고딕" panose="020D0604000000000000" pitchFamily="50" charset="-127"/>
+                        <a:ea typeface="나눔고딕" panose="020D0604000000000000" pitchFamily="50" charset="-127"/>
+                      </a:endParaRPr>
+                    </a:p>
+                  </a:txBody>
+                  <a:tcPr marT="0" marB="0" anchor="ctr">
+                    <a:lnL w="3175" cap="flat" cmpd="sng" algn="ctr">
+                      <a:noFill/>
+                      <a:prstDash val="solid"/>
+                      <a:round/>
+                      <a:headEnd type="none" w="med" len="med"/>
+                      <a:tailEnd type="none" w="med" len="med"/>
+                    </a:lnL>
+                    <a:lnR w="3175" cap="flat" cmpd="sng" algn="ctr">
+                      <a:noFill/>
+                      <a:prstDash val="solid"/>
+                      <a:round/>
+                      <a:headEnd type="none" w="med" len="med"/>
+                      <a:tailEnd type="none" w="med" len="med"/>
+                    </a:lnR>
+                    <a:lnT w="3175" cap="flat" cmpd="sng" algn="ctr">
+                      <a:noFill/>
+                      <a:prstDash val="solid"/>
+                      <a:round/>
+                      <a:headEnd type="none" w="med" len="med"/>
+                      <a:tailEnd type="none" w="med" len="med"/>
+                    </a:lnT>
+                    <a:lnB w="3175" cap="flat" cmpd="sng" algn="ctr">
+                      <a:solidFill>
+                        <a:schemeClr val="bg1">
+                          <a:lumMod val="75000"/>
+                        </a:schemeClr>
+                      </a:solidFill>
+                      <a:prstDash val="solid"/>
+                      <a:round/>
+                      <a:headEnd type="none" w="med" len="med"/>
+                      <a:tailEnd type="none" w="med" len="med"/>
+                    </a:lnB>
+                    <a:lnTlToBr w="12700" cmpd="sng">
+                      <a:noFill/>
+                      <a:prstDash val="solid"/>
+                    </a:lnTlToBr>
+                    <a:lnBlToTr w="12700" cmpd="sng">
+                      <a:noFill/>
+                      <a:prstDash val="solid"/>
+                    </a:lnBlToTr>
+                    <a:solidFill>
+                      <a:schemeClr val="bg1">
+                        <a:lumMod val="95000"/>
+                      </a:schemeClr>
+                    </a:solidFill>
+                  </a:tcPr>
+                </a:tc>
+                <a:tc hMerge="1">
+                  <a:txBody>
+                    <a:bodyPr/>
+                    <a:lstStyle/>
+                    <a:p>
+                      <a:pPr latinLnBrk="1">
+                        <a:lnSpc>
+                          <a:spcPct val="150000"/>
+                        </a:lnSpc>
+                      </a:pPr>
+                      <a:endParaRPr lang="ko-KR" altLang="en-US" sz="700" b="0" dirty="0">
+                        <a:solidFill>
+                          <a:schemeClr val="tx1">
+                            <a:lumMod val="50000"/>
+                            <a:lumOff val="50000"/>
+                          </a:schemeClr>
+                        </a:solidFill>
+                        <a:latin typeface="나눔고딕" panose="020D0604000000000000" pitchFamily="50" charset="-127"/>
+                        <a:ea typeface="나눔고딕" panose="020D0604000000000000" pitchFamily="50" charset="-127"/>
+                      </a:endParaRPr>
+                    </a:p>
+                  </a:txBody>
+                  <a:tcPr anchor="ctr">
+                    <a:lnL w="3175" cap="flat" cmpd="sng" algn="ctr">
+                      <a:solidFill>
+                        <a:schemeClr val="bg1">
+                          <a:lumMod val="50000"/>
+                        </a:schemeClr>
+                      </a:solidFill>
+                      <a:prstDash val="solid"/>
+                      <a:round/>
+                      <a:headEnd type="none" w="med" len="med"/>
+                      <a:tailEnd type="none" w="med" len="med"/>
+                    </a:lnL>
+                    <a:lnR w="3175" cap="flat" cmpd="sng" algn="ctr">
+                      <a:solidFill>
+                        <a:schemeClr val="bg1">
+                          <a:lumMod val="50000"/>
+                        </a:schemeClr>
+                      </a:solidFill>
+                      <a:prstDash val="solid"/>
+                      <a:round/>
+                      <a:headEnd type="none" w="med" len="med"/>
+                      <a:tailEnd type="none" w="med" len="med"/>
+                    </a:lnR>
+                    <a:lnT w="3175" cap="flat" cmpd="sng" algn="ctr">
+                      <a:solidFill>
+                        <a:schemeClr val="bg1">
+                          <a:lumMod val="50000"/>
+                        </a:schemeClr>
+                      </a:solidFill>
+                      <a:prstDash val="solid"/>
+                      <a:round/>
+                      <a:headEnd type="none" w="med" len="med"/>
+                      <a:tailEnd type="none" w="med" len="med"/>
+                    </a:lnT>
+                    <a:lnB w="3175" cap="flat" cmpd="sng" algn="ctr">
+                      <a:solidFill>
+                        <a:schemeClr val="bg1">
+                          <a:lumMod val="50000"/>
+                        </a:schemeClr>
+                      </a:solidFill>
+                      <a:prstDash val="solid"/>
+                      <a:round/>
+                      <a:headEnd type="none" w="med" len="med"/>
+                      <a:tailEnd type="none" w="med" len="med"/>
+                    </a:lnB>
+                    <a:lnTlToBr w="12700" cmpd="sng">
+                      <a:noFill/>
+                      <a:prstDash val="solid"/>
+                    </a:lnTlToBr>
+                    <a:lnBlToTr w="12700" cmpd="sng">
+                      <a:noFill/>
+                      <a:prstDash val="solid"/>
+                    </a:lnBlToTr>
+                    <a:solidFill>
+                      <a:srgbClr val="C7A1E3"/>
+                    </a:solidFill>
+                  </a:tcPr>
+                </a:tc>
+                <a:extLst>
+                  <a:ext uri="{0D108BD9-81ED-4DB2-BD59-A6C34878D82A}">
+                    <a16:rowId xmlns:a16="http://schemas.microsoft.com/office/drawing/2014/main" val="10000"/>
+                  </a:ext>
+                </a:extLst>
+              </a:tr>
+              <a:tr h="391795">
+                <a:tc>
+                  <a:txBody>
+                    <a:bodyPr/>
+                    <a:lstStyle/>
+                    <a:p>
+                      <a:pPr algn="ctr" latinLnBrk="1">
+                        <a:lnSpc>
+                          <a:spcPct val="150000"/>
+                        </a:lnSpc>
+                      </a:pPr>
+                      <a:r>
+                        <a:rPr lang="en-US" altLang="ko-KR" sz="700" b="0" dirty="0">
+                          <a:solidFill>
+                            <a:schemeClr val="tx1">
+                              <a:lumMod val="50000"/>
+                              <a:lumOff val="50000"/>
+                            </a:schemeClr>
+                          </a:solidFill>
+                          <a:latin typeface="나눔고딕" panose="020D0604000000000000" pitchFamily="50" charset="-127"/>
+                          <a:ea typeface="나눔고딕" panose="020D0604000000000000" pitchFamily="50" charset="-127"/>
+                        </a:rPr>
+                        <a:t>1</a:t>
+                      </a:r>
+                      <a:endParaRPr lang="ko-KR" altLang="en-US" sz="700" b="0" dirty="0">
+                        <a:solidFill>
+                          <a:schemeClr val="tx1">
+                            <a:lumMod val="50000"/>
+                            <a:lumOff val="50000"/>
+                          </a:schemeClr>
+                        </a:solidFill>
+                        <a:latin typeface="나눔고딕" panose="020D0604000000000000" pitchFamily="50" charset="-127"/>
+                        <a:ea typeface="나눔고딕" panose="020D0604000000000000" pitchFamily="50" charset="-127"/>
+                      </a:endParaRPr>
+                    </a:p>
+                  </a:txBody>
+                  <a:tcPr anchor="ctr">
+                    <a:lnL w="3175" cap="flat" cmpd="sng" algn="ctr">
+                      <a:noFill/>
+                      <a:prstDash val="solid"/>
+                      <a:round/>
+                      <a:headEnd type="none" w="med" len="med"/>
+                      <a:tailEnd type="none" w="med" len="med"/>
+                    </a:lnL>
+                    <a:lnR w="3175" cap="flat" cmpd="sng" algn="ctr">
+                      <a:solidFill>
+                        <a:schemeClr val="bg1">
+                          <a:lumMod val="75000"/>
+                        </a:schemeClr>
+                      </a:solidFill>
+                      <a:prstDash val="solid"/>
+                      <a:round/>
+                      <a:headEnd type="none" w="med" len="med"/>
+                      <a:tailEnd type="none" w="med" len="med"/>
+                    </a:lnR>
+                    <a:lnT w="3175" cap="flat" cmpd="sng" algn="ctr">
+                      <a:solidFill>
+                        <a:schemeClr val="bg1">
+                          <a:lumMod val="75000"/>
+                        </a:schemeClr>
+                      </a:solidFill>
+                      <a:prstDash val="solid"/>
+                      <a:round/>
+                      <a:headEnd type="none" w="med" len="med"/>
+                      <a:tailEnd type="none" w="med" len="med"/>
+                    </a:lnT>
+                    <a:lnB w="3175" cap="flat" cmpd="sng" algn="ctr">
+                      <a:solidFill>
+                        <a:schemeClr val="bg1">
+                          <a:lumMod val="75000"/>
+                        </a:schemeClr>
+                      </a:solidFill>
+                      <a:prstDash val="solid"/>
+                      <a:round/>
+                      <a:headEnd type="none" w="med" len="med"/>
+                      <a:tailEnd type="none" w="med" len="med"/>
+                    </a:lnB>
+                    <a:lnTlToBr w="12700" cmpd="sng">
+                      <a:noFill/>
+                      <a:prstDash val="solid"/>
+                    </a:lnTlToBr>
+                    <a:lnBlToTr w="12700" cmpd="sng">
+                      <a:noFill/>
+                      <a:prstDash val="solid"/>
+                    </a:lnBlToTr>
+                    <a:noFill/>
+                  </a:tcPr>
+                </a:tc>
+                <a:tc>
+                  <a:txBody>
+                    <a:bodyPr/>
+                    <a:lstStyle/>
+                    <a:p>
+                      <a:pPr marL="0" indent="0">
+                        <a:lnSpc>
+                          <a:spcPct val="150000"/>
+                        </a:lnSpc>
+                        <a:buClr>
+                          <a:srgbClr val="FF0000"/>
+                        </a:buClr>
+                        <a:buFont typeface="+mj-ea"/>
+                        <a:buNone/>
+                      </a:pPr>
+                      <a:r>
+                        <a:rPr lang="ko-KR" altLang="en-US" sz="700" dirty="0" err="1">
+                          <a:solidFill>
+                            <a:schemeClr val="tx1">
+                              <a:lumMod val="50000"/>
+                              <a:lumOff val="50000"/>
+                            </a:schemeClr>
+                          </a:solidFill>
+                          <a:latin typeface="나눔고딕" panose="020D0604000000000000" pitchFamily="50" charset="-127"/>
+                          <a:ea typeface="나눔고딕" panose="020D0604000000000000" pitchFamily="50" charset="-127"/>
+                          <a:sym typeface="Wingdings" panose="05000000000000000000" pitchFamily="2" charset="2"/>
+                        </a:rPr>
+                        <a:t>모바일</a:t>
+                      </a:r>
+                      <a:r>
+                        <a:rPr lang="ko-KR" altLang="en-US" sz="700" dirty="0">
+                          <a:solidFill>
+                            <a:schemeClr val="tx1">
+                              <a:lumMod val="50000"/>
+                              <a:lumOff val="50000"/>
+                            </a:schemeClr>
+                          </a:solidFill>
+                          <a:latin typeface="나눔고딕" panose="020D0604000000000000" pitchFamily="50" charset="-127"/>
+                          <a:ea typeface="나눔고딕" panose="020D0604000000000000" pitchFamily="50" charset="-127"/>
+                          <a:sym typeface="Wingdings" panose="05000000000000000000" pitchFamily="2" charset="2"/>
+                        </a:rPr>
+                        <a:t> 웹 랜딩 페이지</a:t>
+                      </a:r>
+                      <a:endParaRPr lang="en-US" altLang="ko-KR" sz="700" dirty="0">
+                        <a:solidFill>
+                          <a:schemeClr val="tx1">
+                            <a:lumMod val="50000"/>
+                            <a:lumOff val="50000"/>
+                          </a:schemeClr>
+                        </a:solidFill>
+                        <a:latin typeface="나눔고딕" panose="020D0604000000000000" pitchFamily="50" charset="-127"/>
+                        <a:ea typeface="나눔고딕" panose="020D0604000000000000" pitchFamily="50" charset="-127"/>
+                        <a:sym typeface="Wingdings" panose="05000000000000000000" pitchFamily="2" charset="2"/>
+                      </a:endParaRPr>
+                    </a:p>
+                    <a:p>
+                      <a:pPr marL="0" indent="0">
+                        <a:lnSpc>
+                          <a:spcPct val="150000"/>
+                        </a:lnSpc>
+                        <a:buClr>
+                          <a:srgbClr val="FF0000"/>
+                        </a:buClr>
+                        <a:buFont typeface="+mj-ea"/>
+                        <a:buNone/>
+                      </a:pPr>
+                      <a:r>
+                        <a:rPr lang="ko-KR" altLang="en-US" sz="700" dirty="0">
+                          <a:solidFill>
+                            <a:schemeClr val="tx1">
+                              <a:lumMod val="50000"/>
+                              <a:lumOff val="50000"/>
+                            </a:schemeClr>
+                          </a:solidFill>
+                          <a:latin typeface="나눔고딕" panose="020D0604000000000000" pitchFamily="50" charset="-127"/>
+                          <a:ea typeface="나눔고딕" panose="020D0604000000000000" pitchFamily="50" charset="-127"/>
+                          <a:sym typeface="Wingdings" panose="05000000000000000000" pitchFamily="2" charset="2"/>
+                        </a:rPr>
+                        <a:t>최초접속 또는 비 로그인 상태에서 </a:t>
+                      </a:r>
+                      <a:r>
+                        <a:rPr lang="en-US" altLang="ko-KR" sz="700" baseline="0" dirty="0">
+                          <a:solidFill>
+                            <a:schemeClr val="tx1">
+                              <a:lumMod val="50000"/>
+                              <a:lumOff val="50000"/>
+                            </a:schemeClr>
+                          </a:solidFill>
+                          <a:latin typeface="나눔고딕" panose="020D0604000000000000" pitchFamily="50" charset="-127"/>
+                          <a:ea typeface="나눔고딕" panose="020D0604000000000000" pitchFamily="50" charset="-127"/>
+                          <a:sym typeface="Wingdings" panose="05000000000000000000" pitchFamily="2" charset="2"/>
+                        </a:rPr>
+                        <a:t> </a:t>
+                      </a:r>
+                      <a:r>
+                        <a:rPr lang="en-US" altLang="ko-KR" sz="700" dirty="0">
+                          <a:solidFill>
+                            <a:schemeClr val="tx1">
+                              <a:lumMod val="50000"/>
+                              <a:lumOff val="50000"/>
+                            </a:schemeClr>
+                          </a:solidFill>
+                          <a:latin typeface="나눔고딕" panose="020D0604000000000000" pitchFamily="50" charset="-127"/>
+                          <a:ea typeface="나눔고딕" panose="020D0604000000000000" pitchFamily="50" charset="-127"/>
+                          <a:sym typeface="Wingdings" panose="05000000000000000000" pitchFamily="2" charset="2"/>
+                        </a:rPr>
+                        <a:t>m.freemoa.net </a:t>
+                      </a:r>
+                      <a:r>
+                        <a:rPr lang="ko-KR" altLang="en-US" sz="700" dirty="0">
+                          <a:solidFill>
+                            <a:schemeClr val="tx1">
+                              <a:lumMod val="50000"/>
+                              <a:lumOff val="50000"/>
+                            </a:schemeClr>
+                          </a:solidFill>
+                          <a:latin typeface="나눔고딕" panose="020D0604000000000000" pitchFamily="50" charset="-127"/>
+                          <a:ea typeface="나눔고딕" panose="020D0604000000000000" pitchFamily="50" charset="-127"/>
+                          <a:sym typeface="Wingdings" panose="05000000000000000000" pitchFamily="2" charset="2"/>
+                        </a:rPr>
+                        <a:t>접속 시 페이지 노출</a:t>
+                      </a:r>
+                      <a:endParaRPr lang="en-US" altLang="ko-KR" sz="700" dirty="0">
+                        <a:solidFill>
+                          <a:schemeClr val="tx1">
+                            <a:lumMod val="50000"/>
+                            <a:lumOff val="50000"/>
+                          </a:schemeClr>
+                        </a:solidFill>
+                        <a:latin typeface="나눔고딕" panose="020D0604000000000000" pitchFamily="50" charset="-127"/>
+                        <a:ea typeface="나눔고딕" panose="020D0604000000000000" pitchFamily="50" charset="-127"/>
+                        <a:sym typeface="Wingdings" panose="05000000000000000000" pitchFamily="2" charset="2"/>
+                      </a:endParaRPr>
+                    </a:p>
+                  </a:txBody>
+                  <a:tcPr anchor="ctr">
+                    <a:lnL w="3175" cap="flat" cmpd="sng" algn="ctr">
+                      <a:solidFill>
+                        <a:schemeClr val="bg1">
+                          <a:lumMod val="75000"/>
+                        </a:schemeClr>
+                      </a:solidFill>
+                      <a:prstDash val="solid"/>
+                      <a:round/>
+                      <a:headEnd type="none" w="med" len="med"/>
+                      <a:tailEnd type="none" w="med" len="med"/>
+                    </a:lnL>
+                    <a:lnR w="3175" cap="flat" cmpd="sng" algn="ctr">
+                      <a:noFill/>
+                      <a:prstDash val="solid"/>
+                      <a:round/>
+                      <a:headEnd type="none" w="med" len="med"/>
+                      <a:tailEnd type="none" w="med" len="med"/>
+                    </a:lnR>
+                    <a:lnT w="3175" cap="flat" cmpd="sng" algn="ctr">
+                      <a:solidFill>
+                        <a:schemeClr val="bg1">
+                          <a:lumMod val="75000"/>
+                        </a:schemeClr>
+                      </a:solidFill>
+                      <a:prstDash val="solid"/>
+                      <a:round/>
+                      <a:headEnd type="none" w="med" len="med"/>
+                      <a:tailEnd type="none" w="med" len="med"/>
+                    </a:lnT>
+                    <a:lnB w="3175" cap="flat" cmpd="sng" algn="ctr">
+                      <a:solidFill>
+                        <a:schemeClr val="bg1">
+                          <a:lumMod val="75000"/>
+                        </a:schemeClr>
+                      </a:solidFill>
+                      <a:prstDash val="solid"/>
+                      <a:round/>
+                      <a:headEnd type="none" w="med" len="med"/>
+                      <a:tailEnd type="none" w="med" len="med"/>
+                    </a:lnB>
+                    <a:lnTlToBr w="12700" cmpd="sng">
+                      <a:noFill/>
+                      <a:prstDash val="solid"/>
+                    </a:lnTlToBr>
+                    <a:lnBlToTr w="12700" cmpd="sng">
+                      <a:noFill/>
+                      <a:prstDash val="solid"/>
+                    </a:lnBlToTr>
+                    <a:noFill/>
+                  </a:tcPr>
+                </a:tc>
+                <a:extLst>
+                  <a:ext uri="{0D108BD9-81ED-4DB2-BD59-A6C34878D82A}">
+                    <a16:rowId xmlns:a16="http://schemas.microsoft.com/office/drawing/2014/main" val="10001"/>
+                  </a:ext>
+                </a:extLst>
+              </a:tr>
+              <a:tr h="391795">
+                <a:tc>
+                  <a:txBody>
+                    <a:bodyPr/>
+                    <a:lstStyle/>
+                    <a:p>
+                      <a:pPr algn="ctr" latinLnBrk="1">
+                        <a:lnSpc>
+                          <a:spcPct val="150000"/>
+                        </a:lnSpc>
+                      </a:pPr>
+                      <a:r>
+                        <a:rPr lang="en-US" altLang="ko-KR" sz="700" b="0" dirty="0">
+                          <a:solidFill>
+                            <a:schemeClr val="tx1">
+                              <a:lumMod val="50000"/>
+                              <a:lumOff val="50000"/>
+                            </a:schemeClr>
+                          </a:solidFill>
+                          <a:latin typeface="나눔고딕" panose="020D0604000000000000" pitchFamily="50" charset="-127"/>
+                          <a:ea typeface="나눔고딕" panose="020D0604000000000000" pitchFamily="50" charset="-127"/>
+                        </a:rPr>
+                        <a:t>2</a:t>
+                      </a:r>
+                      <a:endParaRPr lang="ko-KR" altLang="en-US" sz="700" b="0" dirty="0">
+                        <a:solidFill>
+                          <a:schemeClr val="tx1">
+                            <a:lumMod val="50000"/>
+                            <a:lumOff val="50000"/>
+                          </a:schemeClr>
+                        </a:solidFill>
+                        <a:latin typeface="나눔고딕" panose="020D0604000000000000" pitchFamily="50" charset="-127"/>
+                        <a:ea typeface="나눔고딕" panose="020D0604000000000000" pitchFamily="50" charset="-127"/>
+                      </a:endParaRPr>
+                    </a:p>
+                  </a:txBody>
+                  <a:tcPr anchor="ctr">
+                    <a:lnL w="3175" cap="flat" cmpd="sng" algn="ctr">
+                      <a:noFill/>
+                      <a:prstDash val="solid"/>
+                      <a:round/>
+                      <a:headEnd type="none" w="med" len="med"/>
+                      <a:tailEnd type="none" w="med" len="med"/>
+                    </a:lnL>
+                    <a:lnR w="3175" cap="flat" cmpd="sng" algn="ctr">
+                      <a:solidFill>
+                        <a:schemeClr val="bg1">
+                          <a:lumMod val="75000"/>
+                        </a:schemeClr>
+                      </a:solidFill>
+                      <a:prstDash val="solid"/>
+                      <a:round/>
+                      <a:headEnd type="none" w="med" len="med"/>
+                      <a:tailEnd type="none" w="med" len="med"/>
+                    </a:lnR>
+                    <a:lnT w="3175" cap="flat" cmpd="sng" algn="ctr">
+                      <a:solidFill>
+                        <a:schemeClr val="bg1">
+                          <a:lumMod val="75000"/>
+                        </a:schemeClr>
+                      </a:solidFill>
+                      <a:prstDash val="solid"/>
+                      <a:round/>
+                      <a:headEnd type="none" w="med" len="med"/>
+                      <a:tailEnd type="none" w="med" len="med"/>
+                    </a:lnT>
+                    <a:lnB w="3175" cap="flat" cmpd="sng" algn="ctr">
+                      <a:solidFill>
+                        <a:schemeClr val="bg1">
+                          <a:lumMod val="75000"/>
+                        </a:schemeClr>
+                      </a:solidFill>
+                      <a:prstDash val="solid"/>
+                      <a:round/>
+                      <a:headEnd type="none" w="med" len="med"/>
+                      <a:tailEnd type="none" w="med" len="med"/>
+                    </a:lnB>
+                    <a:lnTlToBr w="12700" cmpd="sng">
+                      <a:noFill/>
+                      <a:prstDash val="solid"/>
+                    </a:lnTlToBr>
+                    <a:lnBlToTr w="12700" cmpd="sng">
+                      <a:noFill/>
+                      <a:prstDash val="solid"/>
+                    </a:lnBlToTr>
+                    <a:noFill/>
+                  </a:tcPr>
+                </a:tc>
+                <a:tc>
+                  <a:txBody>
+                    <a:bodyPr/>
+                    <a:lstStyle/>
+                    <a:p>
+                      <a:pPr latinLnBrk="1">
+                        <a:lnSpc>
+                          <a:spcPct val="150000"/>
+                        </a:lnSpc>
+                      </a:pPr>
+                      <a:r>
+                        <a:rPr lang="ko-KR" altLang="en-US" sz="700" dirty="0">
+                          <a:solidFill>
+                            <a:schemeClr val="tx1">
+                              <a:lumMod val="50000"/>
+                              <a:lumOff val="50000"/>
+                            </a:schemeClr>
+                          </a:solidFill>
+                          <a:latin typeface="나눔고딕" panose="020D0604000000000000" pitchFamily="50" charset="-127"/>
+                          <a:ea typeface="나눔고딕" panose="020D0604000000000000" pitchFamily="50" charset="-127"/>
+                        </a:rPr>
+                        <a:t>클라이언트 페이지 이동 버튼</a:t>
+                      </a:r>
+                      <a:r>
+                        <a:rPr lang="en-US" altLang="ko-KR" sz="700" dirty="0">
+                          <a:solidFill>
+                            <a:schemeClr val="tx1">
+                              <a:lumMod val="50000"/>
+                              <a:lumOff val="50000"/>
+                            </a:schemeClr>
+                          </a:solidFill>
+                          <a:latin typeface="나눔고딕" panose="020D0604000000000000" pitchFamily="50" charset="-127"/>
+                          <a:ea typeface="나눔고딕" panose="020D0604000000000000" pitchFamily="50" charset="-127"/>
+                        </a:rPr>
+                        <a:t>(</a:t>
+                      </a:r>
+                      <a:r>
+                        <a:rPr lang="ko-KR" altLang="en-US" sz="700" dirty="0">
+                          <a:solidFill>
+                            <a:schemeClr val="tx1">
+                              <a:lumMod val="50000"/>
+                              <a:lumOff val="50000"/>
+                            </a:schemeClr>
+                          </a:solidFill>
+                          <a:latin typeface="나눔고딕" panose="020D0604000000000000" pitchFamily="50" charset="-127"/>
+                          <a:ea typeface="나눔고딕" panose="020D0604000000000000" pitchFamily="50" charset="-127"/>
+                        </a:rPr>
+                        <a:t>전체영역</a:t>
+                      </a:r>
+                      <a:r>
+                        <a:rPr lang="en-US" altLang="ko-KR" sz="700" dirty="0">
+                          <a:solidFill>
+                            <a:schemeClr val="tx1">
+                              <a:lumMod val="50000"/>
+                              <a:lumOff val="50000"/>
+                            </a:schemeClr>
+                          </a:solidFill>
+                          <a:latin typeface="나눔고딕" panose="020D0604000000000000" pitchFamily="50" charset="-127"/>
+                          <a:ea typeface="나눔고딕" panose="020D0604000000000000" pitchFamily="50" charset="-127"/>
+                        </a:rPr>
+                        <a:t>)</a:t>
+                      </a:r>
+                    </a:p>
+                    <a:p>
+                      <a:pPr latinLnBrk="1">
+                        <a:lnSpc>
+                          <a:spcPct val="150000"/>
+                        </a:lnSpc>
+                      </a:pPr>
+                      <a:r>
+                        <a:rPr lang="en-US" altLang="ko-KR" sz="700" dirty="0">
+                          <a:solidFill>
+                            <a:schemeClr val="tx1">
+                              <a:lumMod val="50000"/>
+                              <a:lumOff val="50000"/>
+                            </a:schemeClr>
+                          </a:solidFill>
+                          <a:latin typeface="나눔고딕" panose="020D0604000000000000" pitchFamily="50" charset="-127"/>
+                          <a:ea typeface="나눔고딕" panose="020D0604000000000000" pitchFamily="50" charset="-127"/>
+                        </a:rPr>
+                        <a:t>m.freemoa.net/</a:t>
+                      </a:r>
+                      <a:r>
+                        <a:rPr lang="en-US" altLang="ko-KR" sz="700" dirty="0" err="1">
+                          <a:solidFill>
+                            <a:schemeClr val="tx1">
+                              <a:lumMod val="50000"/>
+                              <a:lumOff val="50000"/>
+                            </a:schemeClr>
+                          </a:solidFill>
+                          <a:latin typeface="나눔고딕" panose="020D0604000000000000" pitchFamily="50" charset="-127"/>
+                          <a:ea typeface="나눔고딕" panose="020D0604000000000000" pitchFamily="50" charset="-127"/>
+                        </a:rPr>
+                        <a:t>cmain</a:t>
+                      </a:r>
+                      <a:endParaRPr lang="ko-KR" altLang="en-US" sz="700" dirty="0">
+                        <a:solidFill>
+                          <a:schemeClr val="tx1">
+                            <a:lumMod val="50000"/>
+                            <a:lumOff val="50000"/>
+                          </a:schemeClr>
+                        </a:solidFill>
+                        <a:latin typeface="나눔고딕" panose="020D0604000000000000" pitchFamily="50" charset="-127"/>
+                        <a:ea typeface="나눔고딕" panose="020D0604000000000000" pitchFamily="50" charset="-127"/>
+                      </a:endParaRPr>
+                    </a:p>
+                  </a:txBody>
+                  <a:tcPr anchor="ctr">
+                    <a:lnL w="3175" cap="flat" cmpd="sng" algn="ctr">
+                      <a:solidFill>
+                        <a:schemeClr val="bg1">
+                          <a:lumMod val="75000"/>
+                        </a:schemeClr>
+                      </a:solidFill>
+                      <a:prstDash val="solid"/>
+                      <a:round/>
+                      <a:headEnd type="none" w="med" len="med"/>
+                      <a:tailEnd type="none" w="med" len="med"/>
+                    </a:lnL>
+                    <a:lnR w="3175" cap="flat" cmpd="sng" algn="ctr">
+                      <a:noFill/>
+                      <a:prstDash val="solid"/>
+                      <a:round/>
+                      <a:headEnd type="none" w="med" len="med"/>
+                      <a:tailEnd type="none" w="med" len="med"/>
+                    </a:lnR>
+                    <a:lnT w="3175" cap="flat" cmpd="sng" algn="ctr">
+                      <a:solidFill>
+                        <a:schemeClr val="bg1">
+                          <a:lumMod val="75000"/>
+                        </a:schemeClr>
+                      </a:solidFill>
+                      <a:prstDash val="solid"/>
+                      <a:round/>
+                      <a:headEnd type="none" w="med" len="med"/>
+                      <a:tailEnd type="none" w="med" len="med"/>
+                    </a:lnT>
+                    <a:lnB w="3175" cap="flat" cmpd="sng" algn="ctr">
+                      <a:solidFill>
+                        <a:schemeClr val="bg1">
+                          <a:lumMod val="75000"/>
+                        </a:schemeClr>
+                      </a:solidFill>
+                      <a:prstDash val="solid"/>
+                      <a:round/>
+                      <a:headEnd type="none" w="med" len="med"/>
+                      <a:tailEnd type="none" w="med" len="med"/>
+                    </a:lnB>
+                    <a:lnTlToBr w="12700" cmpd="sng">
+                      <a:noFill/>
+                      <a:prstDash val="solid"/>
+                    </a:lnTlToBr>
+                    <a:lnBlToTr w="12700" cmpd="sng">
+                      <a:noFill/>
+                      <a:prstDash val="solid"/>
+                    </a:lnBlToTr>
+                    <a:noFill/>
+                  </a:tcPr>
+                </a:tc>
+                <a:extLst>
+                  <a:ext uri="{0D108BD9-81ED-4DB2-BD59-A6C34878D82A}">
+                    <a16:rowId xmlns:a16="http://schemas.microsoft.com/office/drawing/2014/main" val="10002"/>
+                  </a:ext>
+                </a:extLst>
+              </a:tr>
+              <a:tr h="391795">
+                <a:tc>
+                  <a:txBody>
+                    <a:bodyPr/>
+                    <a:lstStyle/>
+                    <a:p>
+                      <a:pPr algn="ctr" latinLnBrk="1">
+                        <a:lnSpc>
+                          <a:spcPct val="150000"/>
+                        </a:lnSpc>
+                      </a:pPr>
+                      <a:r>
+                        <a:rPr lang="en-US" altLang="ko-KR" sz="700" b="0" dirty="0">
+                          <a:solidFill>
+                            <a:schemeClr val="tx1">
+                              <a:lumMod val="50000"/>
+                              <a:lumOff val="50000"/>
+                            </a:schemeClr>
+                          </a:solidFill>
+                          <a:latin typeface="나눔고딕" panose="020D0604000000000000" pitchFamily="50" charset="-127"/>
+                          <a:ea typeface="나눔고딕" panose="020D0604000000000000" pitchFamily="50" charset="-127"/>
+                        </a:rPr>
+                        <a:t>3</a:t>
+                      </a:r>
+                      <a:endParaRPr lang="ko-KR" altLang="en-US" sz="700" b="0" dirty="0">
+                        <a:solidFill>
+                          <a:schemeClr val="tx1">
+                            <a:lumMod val="50000"/>
+                            <a:lumOff val="50000"/>
+                          </a:schemeClr>
+                        </a:solidFill>
+                        <a:latin typeface="나눔고딕" panose="020D0604000000000000" pitchFamily="50" charset="-127"/>
+                        <a:ea typeface="나눔고딕" panose="020D0604000000000000" pitchFamily="50" charset="-127"/>
+                      </a:endParaRPr>
+                    </a:p>
+                  </a:txBody>
+                  <a:tcPr anchor="ctr">
+                    <a:lnL w="3175" cap="flat" cmpd="sng" algn="ctr">
+                      <a:noFill/>
+                      <a:prstDash val="solid"/>
+                      <a:round/>
+                      <a:headEnd type="none" w="med" len="med"/>
+                      <a:tailEnd type="none" w="med" len="med"/>
+                    </a:lnL>
+                    <a:lnR w="3175" cap="flat" cmpd="sng" algn="ctr">
+                      <a:solidFill>
+                        <a:schemeClr val="bg1">
+                          <a:lumMod val="75000"/>
+                        </a:schemeClr>
+                      </a:solidFill>
+                      <a:prstDash val="solid"/>
+                      <a:round/>
+                      <a:headEnd type="none" w="med" len="med"/>
+                      <a:tailEnd type="none" w="med" len="med"/>
+                    </a:lnR>
+                    <a:lnT w="3175" cap="flat" cmpd="sng" algn="ctr">
+                      <a:solidFill>
+                        <a:schemeClr val="bg1">
+                          <a:lumMod val="75000"/>
+                        </a:schemeClr>
+                      </a:solidFill>
+                      <a:prstDash val="solid"/>
+                      <a:round/>
+                      <a:headEnd type="none" w="med" len="med"/>
+                      <a:tailEnd type="none" w="med" len="med"/>
+                    </a:lnT>
+                    <a:lnB w="3175" cap="flat" cmpd="sng" algn="ctr">
+                      <a:solidFill>
+                        <a:schemeClr val="bg1">
+                          <a:lumMod val="75000"/>
+                        </a:schemeClr>
+                      </a:solidFill>
+                      <a:prstDash val="solid"/>
+                      <a:round/>
+                      <a:headEnd type="none" w="med" len="med"/>
+                      <a:tailEnd type="none" w="med" len="med"/>
+                    </a:lnB>
+                    <a:lnTlToBr w="12700" cmpd="sng">
+                      <a:noFill/>
+                      <a:prstDash val="solid"/>
+                    </a:lnTlToBr>
+                    <a:lnBlToTr w="12700" cmpd="sng">
+                      <a:noFill/>
+                      <a:prstDash val="solid"/>
+                    </a:lnBlToTr>
+                    <a:noFill/>
+                  </a:tcPr>
+                </a:tc>
+                <a:tc>
+                  <a:txBody>
+                    <a:bodyPr/>
+                    <a:lstStyle/>
+                    <a:p>
+                      <a:pPr latinLnBrk="1">
+                        <a:lnSpc>
+                          <a:spcPct val="150000"/>
+                        </a:lnSpc>
+                      </a:pPr>
+                      <a:r>
+                        <a:rPr lang="ko-KR" altLang="en-US" sz="700" dirty="0">
+                          <a:solidFill>
+                            <a:schemeClr val="tx1">
+                              <a:lumMod val="50000"/>
+                              <a:lumOff val="50000"/>
+                            </a:schemeClr>
+                          </a:solidFill>
+                          <a:latin typeface="나눔고딕" panose="020D0604000000000000" pitchFamily="50" charset="-127"/>
+                          <a:ea typeface="나눔고딕" panose="020D0604000000000000" pitchFamily="50" charset="-127"/>
+                        </a:rPr>
+                        <a:t>프리랜서 페이지 이동 버튼</a:t>
+                      </a:r>
+                      <a:r>
+                        <a:rPr lang="en-US" altLang="ko-KR" sz="700" dirty="0">
+                          <a:solidFill>
+                            <a:schemeClr val="tx1">
+                              <a:lumMod val="50000"/>
+                              <a:lumOff val="50000"/>
+                            </a:schemeClr>
+                          </a:solidFill>
+                          <a:latin typeface="나눔고딕" panose="020D0604000000000000" pitchFamily="50" charset="-127"/>
+                          <a:ea typeface="나눔고딕" panose="020D0604000000000000" pitchFamily="50" charset="-127"/>
+                        </a:rPr>
+                        <a:t>(</a:t>
+                      </a:r>
+                      <a:r>
+                        <a:rPr lang="ko-KR" altLang="en-US" sz="700" dirty="0">
+                          <a:solidFill>
+                            <a:schemeClr val="tx1">
+                              <a:lumMod val="50000"/>
+                              <a:lumOff val="50000"/>
+                            </a:schemeClr>
+                          </a:solidFill>
+                          <a:latin typeface="나눔고딕" panose="020D0604000000000000" pitchFamily="50" charset="-127"/>
+                          <a:ea typeface="나눔고딕" panose="020D0604000000000000" pitchFamily="50" charset="-127"/>
+                        </a:rPr>
+                        <a:t>전체영역</a:t>
+                      </a:r>
+                      <a:r>
+                        <a:rPr lang="en-US" altLang="ko-KR" sz="700" dirty="0">
+                          <a:solidFill>
+                            <a:schemeClr val="tx1">
+                              <a:lumMod val="50000"/>
+                              <a:lumOff val="50000"/>
+                            </a:schemeClr>
+                          </a:solidFill>
+                          <a:latin typeface="나눔고딕" panose="020D0604000000000000" pitchFamily="50" charset="-127"/>
+                          <a:ea typeface="나눔고딕" panose="020D0604000000000000" pitchFamily="50" charset="-127"/>
+                        </a:rPr>
+                        <a:t>)</a:t>
+                      </a:r>
+                    </a:p>
+                    <a:p>
+                      <a:pPr latinLnBrk="1">
+                        <a:lnSpc>
+                          <a:spcPct val="150000"/>
+                        </a:lnSpc>
+                      </a:pPr>
+                      <a:r>
+                        <a:rPr lang="en-US" altLang="ko-KR" sz="700" dirty="0">
+                          <a:solidFill>
+                            <a:schemeClr val="tx1">
+                              <a:lumMod val="50000"/>
+                              <a:lumOff val="50000"/>
+                            </a:schemeClr>
+                          </a:solidFill>
+                          <a:latin typeface="나눔고딕" panose="020D0604000000000000" pitchFamily="50" charset="-127"/>
+                          <a:ea typeface="나눔고딕" panose="020D0604000000000000" pitchFamily="50" charset="-127"/>
+                        </a:rPr>
+                        <a:t>m.freemoa.net/</a:t>
+                      </a:r>
+                      <a:r>
+                        <a:rPr lang="en-US" altLang="ko-KR" sz="700" dirty="0" err="1">
+                          <a:solidFill>
+                            <a:schemeClr val="tx1">
+                              <a:lumMod val="50000"/>
+                              <a:lumOff val="50000"/>
+                            </a:schemeClr>
+                          </a:solidFill>
+                          <a:latin typeface="나눔고딕" panose="020D0604000000000000" pitchFamily="50" charset="-127"/>
+                          <a:ea typeface="나눔고딕" panose="020D0604000000000000" pitchFamily="50" charset="-127"/>
+                        </a:rPr>
+                        <a:t>fmain</a:t>
+                      </a:r>
+                      <a:endParaRPr lang="ko-KR" altLang="en-US" sz="700" dirty="0">
+                        <a:solidFill>
+                          <a:schemeClr val="tx1">
+                            <a:lumMod val="50000"/>
+                            <a:lumOff val="50000"/>
+                          </a:schemeClr>
+                        </a:solidFill>
+                        <a:latin typeface="나눔고딕" panose="020D0604000000000000" pitchFamily="50" charset="-127"/>
+                        <a:ea typeface="나눔고딕" panose="020D0604000000000000" pitchFamily="50" charset="-127"/>
+                      </a:endParaRPr>
+                    </a:p>
+                  </a:txBody>
+                  <a:tcPr anchor="ctr">
+                    <a:lnL w="3175" cap="flat" cmpd="sng" algn="ctr">
+                      <a:solidFill>
+                        <a:schemeClr val="bg1">
+                          <a:lumMod val="75000"/>
+                        </a:schemeClr>
+                      </a:solidFill>
+                      <a:prstDash val="solid"/>
+                      <a:round/>
+                      <a:headEnd type="none" w="med" len="med"/>
+                      <a:tailEnd type="none" w="med" len="med"/>
+                    </a:lnL>
+                    <a:lnR w="3175" cap="flat" cmpd="sng" algn="ctr">
+                      <a:noFill/>
+                      <a:prstDash val="solid"/>
+                      <a:round/>
+                      <a:headEnd type="none" w="med" len="med"/>
+                      <a:tailEnd type="none" w="med" len="med"/>
+                    </a:lnR>
+                    <a:lnT w="3175" cap="flat" cmpd="sng" algn="ctr">
+                      <a:solidFill>
+                        <a:schemeClr val="bg1">
+                          <a:lumMod val="75000"/>
+                        </a:schemeClr>
+                      </a:solidFill>
+                      <a:prstDash val="solid"/>
+                      <a:round/>
+                      <a:headEnd type="none" w="med" len="med"/>
+                      <a:tailEnd type="none" w="med" len="med"/>
+                    </a:lnT>
+                    <a:lnB w="3175" cap="flat" cmpd="sng" algn="ctr">
+                      <a:solidFill>
+                        <a:schemeClr val="bg1">
+                          <a:lumMod val="75000"/>
+                        </a:schemeClr>
+                      </a:solidFill>
+                      <a:prstDash val="solid"/>
+                      <a:round/>
+                      <a:headEnd type="none" w="med" len="med"/>
+                      <a:tailEnd type="none" w="med" len="med"/>
+                    </a:lnB>
+                    <a:lnTlToBr w="12700" cmpd="sng">
+                      <a:noFill/>
+                      <a:prstDash val="solid"/>
+                    </a:lnTlToBr>
+                    <a:lnBlToTr w="12700" cmpd="sng">
+                      <a:noFill/>
+                      <a:prstDash val="solid"/>
+                    </a:lnBlToTr>
+                    <a:noFill/>
+                  </a:tcPr>
+                </a:tc>
+                <a:extLst>
+                  <a:ext uri="{0D108BD9-81ED-4DB2-BD59-A6C34878D82A}">
+                    <a16:rowId xmlns:a16="http://schemas.microsoft.com/office/drawing/2014/main" val="10003"/>
+                  </a:ext>
+                </a:extLst>
+              </a:tr>
+              <a:tr h="391795">
+                <a:tc>
+                  <a:txBody>
+                    <a:bodyPr/>
+                    <a:lstStyle/>
+                    <a:p>
+                      <a:pPr algn="ctr" latinLnBrk="1">
+                        <a:lnSpc>
+                          <a:spcPct val="150000"/>
+                        </a:lnSpc>
+                      </a:pPr>
+                      <a:r>
+                        <a:rPr lang="en-US" altLang="ko-KR" sz="700" b="0" dirty="0">
+                          <a:solidFill>
+                            <a:schemeClr val="tx1">
+                              <a:lumMod val="50000"/>
+                              <a:lumOff val="50000"/>
+                            </a:schemeClr>
+                          </a:solidFill>
+                          <a:latin typeface="나눔고딕" panose="020D0604000000000000" pitchFamily="50" charset="-127"/>
+                          <a:ea typeface="나눔고딕" panose="020D0604000000000000" pitchFamily="50" charset="-127"/>
+                        </a:rPr>
+                        <a:t>4</a:t>
+                      </a:r>
+                      <a:endParaRPr lang="ko-KR" altLang="en-US" sz="700" b="0" dirty="0">
+                        <a:solidFill>
+                          <a:schemeClr val="tx1">
+                            <a:lumMod val="50000"/>
+                            <a:lumOff val="50000"/>
+                          </a:schemeClr>
+                        </a:solidFill>
+                        <a:latin typeface="나눔고딕" panose="020D0604000000000000" pitchFamily="50" charset="-127"/>
+                        <a:ea typeface="나눔고딕" panose="020D0604000000000000" pitchFamily="50" charset="-127"/>
+                      </a:endParaRPr>
+                    </a:p>
+                  </a:txBody>
+                  <a:tcPr anchor="ctr">
+                    <a:lnL w="3175" cap="flat" cmpd="sng" algn="ctr">
+                      <a:noFill/>
+                      <a:prstDash val="solid"/>
+                      <a:round/>
+                      <a:headEnd type="none" w="med" len="med"/>
+                      <a:tailEnd type="none" w="med" len="med"/>
+                    </a:lnL>
+                    <a:lnR w="3175" cap="flat" cmpd="sng" algn="ctr">
+                      <a:solidFill>
+                        <a:schemeClr val="bg1">
+                          <a:lumMod val="75000"/>
+                        </a:schemeClr>
+                      </a:solidFill>
+                      <a:prstDash val="solid"/>
+                      <a:round/>
+                      <a:headEnd type="none" w="med" len="med"/>
+                      <a:tailEnd type="none" w="med" len="med"/>
+                    </a:lnR>
+                    <a:lnT w="3175" cap="flat" cmpd="sng" algn="ctr">
+                      <a:solidFill>
+                        <a:schemeClr val="bg1">
+                          <a:lumMod val="75000"/>
+                        </a:schemeClr>
+                      </a:solidFill>
+                      <a:prstDash val="solid"/>
+                      <a:round/>
+                      <a:headEnd type="none" w="med" len="med"/>
+                      <a:tailEnd type="none" w="med" len="med"/>
+                    </a:lnT>
+                    <a:lnB w="3175" cap="flat" cmpd="sng" algn="ctr">
+                      <a:solidFill>
+                        <a:schemeClr val="bg1">
+                          <a:lumMod val="75000"/>
+                        </a:schemeClr>
+                      </a:solidFill>
+                      <a:prstDash val="solid"/>
+                      <a:round/>
+                      <a:headEnd type="none" w="med" len="med"/>
+                      <a:tailEnd type="none" w="med" len="med"/>
+                    </a:lnB>
+                    <a:lnTlToBr w="12700" cmpd="sng">
+                      <a:noFill/>
+                      <a:prstDash val="solid"/>
+                    </a:lnTlToBr>
+                    <a:lnBlToTr w="12700" cmpd="sng">
+                      <a:noFill/>
+                      <a:prstDash val="solid"/>
+                    </a:lnBlToTr>
+                    <a:noFill/>
+                  </a:tcPr>
+                </a:tc>
+                <a:tc>
+                  <a:txBody>
+                    <a:bodyPr/>
+                    <a:lstStyle/>
+                    <a:p>
+                      <a:pPr marL="0" marR="0" indent="0" algn="l" defTabSz="914400" rtl="0" eaLnBrk="1" fontAlgn="auto" latinLnBrk="1" hangingPunct="1">
+                        <a:lnSpc>
+                          <a:spcPct val="150000"/>
+                        </a:lnSpc>
+                        <a:spcBef>
+                          <a:spcPts val="0"/>
+                        </a:spcBef>
+                        <a:spcAft>
+                          <a:spcPts val="0"/>
+                        </a:spcAft>
+                        <a:buClrTx/>
+                        <a:buSzTx/>
+                        <a:buFontTx/>
+                        <a:buNone/>
+                        <a:tabLst/>
+                        <a:defRPr/>
+                      </a:pPr>
+                      <a:endParaRPr lang="en-US" altLang="ko-KR" sz="700" dirty="0">
+                        <a:solidFill>
+                          <a:schemeClr val="tx1">
+                            <a:lumMod val="50000"/>
+                            <a:lumOff val="50000"/>
+                          </a:schemeClr>
+                        </a:solidFill>
+                        <a:latin typeface="나눔고딕" panose="020D0604000000000000" pitchFamily="50" charset="-127"/>
+                        <a:ea typeface="나눔고딕" panose="020D0604000000000000" pitchFamily="50" charset="-127"/>
+                        <a:sym typeface="Wingdings" panose="05000000000000000000" pitchFamily="2" charset="2"/>
+                      </a:endParaRPr>
+                    </a:p>
+                  </a:txBody>
+                  <a:tcPr anchor="ctr">
+                    <a:lnL w="3175" cap="flat" cmpd="sng" algn="ctr">
+                      <a:solidFill>
+                        <a:schemeClr val="bg1">
+                          <a:lumMod val="75000"/>
+                        </a:schemeClr>
+                      </a:solidFill>
+                      <a:prstDash val="solid"/>
+                      <a:round/>
+                      <a:headEnd type="none" w="med" len="med"/>
+                      <a:tailEnd type="none" w="med" len="med"/>
+                    </a:lnL>
+                    <a:lnR w="3175" cap="flat" cmpd="sng" algn="ctr">
+                      <a:noFill/>
+                      <a:prstDash val="solid"/>
+                      <a:round/>
+                      <a:headEnd type="none" w="med" len="med"/>
+                      <a:tailEnd type="none" w="med" len="med"/>
+                    </a:lnR>
+                    <a:lnT w="3175" cap="flat" cmpd="sng" algn="ctr">
+                      <a:solidFill>
+                        <a:schemeClr val="bg1">
+                          <a:lumMod val="75000"/>
+                        </a:schemeClr>
+                      </a:solidFill>
+                      <a:prstDash val="solid"/>
+                      <a:round/>
+                      <a:headEnd type="none" w="med" len="med"/>
+                      <a:tailEnd type="none" w="med" len="med"/>
+                    </a:lnT>
+                    <a:lnB w="3175" cap="flat" cmpd="sng" algn="ctr">
+                      <a:solidFill>
+                        <a:schemeClr val="bg1">
+                          <a:lumMod val="75000"/>
+                        </a:schemeClr>
+                      </a:solidFill>
+                      <a:prstDash val="solid"/>
+                      <a:round/>
+                      <a:headEnd type="none" w="med" len="med"/>
+                      <a:tailEnd type="none" w="med" len="med"/>
+                    </a:lnB>
+                    <a:lnTlToBr w="12700" cmpd="sng">
+                      <a:noFill/>
+                      <a:prstDash val="solid"/>
+                    </a:lnTlToBr>
+                    <a:lnBlToTr w="12700" cmpd="sng">
+                      <a:noFill/>
+                      <a:prstDash val="solid"/>
+                    </a:lnBlToTr>
+                    <a:noFill/>
+                  </a:tcPr>
+                </a:tc>
+                <a:extLst>
+                  <a:ext uri="{0D108BD9-81ED-4DB2-BD59-A6C34878D82A}">
+                    <a16:rowId xmlns:a16="http://schemas.microsoft.com/office/drawing/2014/main" val="10004"/>
+                  </a:ext>
+                </a:extLst>
+              </a:tr>
+              <a:tr h="391795">
+                <a:tc>
+                  <a:txBody>
+                    <a:bodyPr/>
+                    <a:lstStyle/>
+                    <a:p>
+                      <a:pPr algn="ctr" latinLnBrk="1">
+                        <a:lnSpc>
+                          <a:spcPct val="150000"/>
+                        </a:lnSpc>
+                      </a:pPr>
+                      <a:r>
+                        <a:rPr lang="en-US" altLang="ko-KR" sz="700" b="0" dirty="0">
+                          <a:solidFill>
+                            <a:schemeClr val="tx1">
+                              <a:lumMod val="50000"/>
+                              <a:lumOff val="50000"/>
+                            </a:schemeClr>
+                          </a:solidFill>
+                          <a:latin typeface="나눔고딕" panose="020D0604000000000000" pitchFamily="50" charset="-127"/>
+                          <a:ea typeface="나눔고딕" panose="020D0604000000000000" pitchFamily="50" charset="-127"/>
+                        </a:rPr>
+                        <a:t>5</a:t>
+                      </a:r>
+                      <a:endParaRPr lang="ko-KR" altLang="en-US" sz="700" b="0" dirty="0">
+                        <a:solidFill>
+                          <a:schemeClr val="tx1">
+                            <a:lumMod val="50000"/>
+                            <a:lumOff val="50000"/>
+                          </a:schemeClr>
+                        </a:solidFill>
+                        <a:latin typeface="나눔고딕" panose="020D0604000000000000" pitchFamily="50" charset="-127"/>
+                        <a:ea typeface="나눔고딕" panose="020D0604000000000000" pitchFamily="50" charset="-127"/>
+                      </a:endParaRPr>
+                    </a:p>
+                  </a:txBody>
+                  <a:tcPr anchor="ctr">
+                    <a:lnL w="3175" cap="flat" cmpd="sng" algn="ctr">
+                      <a:noFill/>
+                      <a:prstDash val="solid"/>
+                      <a:round/>
+                      <a:headEnd type="none" w="med" len="med"/>
+                      <a:tailEnd type="none" w="med" len="med"/>
+                    </a:lnL>
+                    <a:lnR w="3175" cap="flat" cmpd="sng" algn="ctr">
+                      <a:solidFill>
+                        <a:schemeClr val="bg1">
+                          <a:lumMod val="75000"/>
+                        </a:schemeClr>
+                      </a:solidFill>
+                      <a:prstDash val="solid"/>
+                      <a:round/>
+                      <a:headEnd type="none" w="med" len="med"/>
+                      <a:tailEnd type="none" w="med" len="med"/>
+                    </a:lnR>
+                    <a:lnT w="3175" cap="flat" cmpd="sng" algn="ctr">
+                      <a:solidFill>
+                        <a:schemeClr val="bg1">
+                          <a:lumMod val="75000"/>
+                        </a:schemeClr>
+                      </a:solidFill>
+                      <a:prstDash val="solid"/>
+                      <a:round/>
+                      <a:headEnd type="none" w="med" len="med"/>
+                      <a:tailEnd type="none" w="med" len="med"/>
+                    </a:lnT>
+                    <a:lnB w="3175" cap="flat" cmpd="sng" algn="ctr">
+                      <a:solidFill>
+                        <a:schemeClr val="bg1">
+                          <a:lumMod val="75000"/>
+                        </a:schemeClr>
+                      </a:solidFill>
+                      <a:prstDash val="solid"/>
+                      <a:round/>
+                      <a:headEnd type="none" w="med" len="med"/>
+                      <a:tailEnd type="none" w="med" len="med"/>
+                    </a:lnB>
+                    <a:lnTlToBr w="12700" cmpd="sng">
+                      <a:noFill/>
+                      <a:prstDash val="solid"/>
+                    </a:lnTlToBr>
+                    <a:lnBlToTr w="12700" cmpd="sng">
+                      <a:noFill/>
+                      <a:prstDash val="solid"/>
+                    </a:lnBlToTr>
+                    <a:noFill/>
+                  </a:tcPr>
+                </a:tc>
+                <a:tc>
+                  <a:txBody>
+                    <a:bodyPr/>
+                    <a:lstStyle/>
+                    <a:p>
+                      <a:pPr marL="0" marR="0" indent="0" algn="l" defTabSz="914400" rtl="0" eaLnBrk="1" fontAlgn="auto" latinLnBrk="1" hangingPunct="1">
+                        <a:lnSpc>
+                          <a:spcPct val="150000"/>
+                        </a:lnSpc>
+                        <a:spcBef>
+                          <a:spcPts val="0"/>
+                        </a:spcBef>
+                        <a:spcAft>
+                          <a:spcPts val="0"/>
+                        </a:spcAft>
+                        <a:buClrTx/>
+                        <a:buSzTx/>
+                        <a:buFontTx/>
+                        <a:buNone/>
+                        <a:tabLst/>
+                        <a:defRPr/>
+                      </a:pPr>
+                      <a:endParaRPr lang="en-US" altLang="ko-KR" sz="700" dirty="0">
+                        <a:solidFill>
+                          <a:schemeClr val="tx1">
+                            <a:lumMod val="50000"/>
+                            <a:lumOff val="50000"/>
+                          </a:schemeClr>
+                        </a:solidFill>
+                        <a:latin typeface="나눔고딕" panose="020D0604000000000000" pitchFamily="50" charset="-127"/>
+                        <a:ea typeface="나눔고딕" panose="020D0604000000000000" pitchFamily="50" charset="-127"/>
+                        <a:sym typeface="Wingdings" panose="05000000000000000000" pitchFamily="2" charset="2"/>
+                      </a:endParaRPr>
+                    </a:p>
+                  </a:txBody>
+                  <a:tcPr anchor="ctr">
+                    <a:lnL w="3175" cap="flat" cmpd="sng" algn="ctr">
+                      <a:solidFill>
+                        <a:schemeClr val="bg1">
+                          <a:lumMod val="75000"/>
+                        </a:schemeClr>
+                      </a:solidFill>
+                      <a:prstDash val="solid"/>
+                      <a:round/>
+                      <a:headEnd type="none" w="med" len="med"/>
+                      <a:tailEnd type="none" w="med" len="med"/>
+                    </a:lnL>
+                    <a:lnR w="3175" cap="flat" cmpd="sng" algn="ctr">
+                      <a:noFill/>
+                      <a:prstDash val="solid"/>
+                      <a:round/>
+                      <a:headEnd type="none" w="med" len="med"/>
+                      <a:tailEnd type="none" w="med" len="med"/>
+                    </a:lnR>
+                    <a:lnT w="3175" cap="flat" cmpd="sng" algn="ctr">
+                      <a:solidFill>
+                        <a:schemeClr val="bg1">
+                          <a:lumMod val="75000"/>
+                        </a:schemeClr>
+                      </a:solidFill>
+                      <a:prstDash val="solid"/>
+                      <a:round/>
+                      <a:headEnd type="none" w="med" len="med"/>
+                      <a:tailEnd type="none" w="med" len="med"/>
+                    </a:lnT>
+                    <a:lnB w="3175" cap="flat" cmpd="sng" algn="ctr">
+                      <a:solidFill>
+                        <a:schemeClr val="bg1">
+                          <a:lumMod val="75000"/>
+                        </a:schemeClr>
+                      </a:solidFill>
+                      <a:prstDash val="solid"/>
+                      <a:round/>
+                      <a:headEnd type="none" w="med" len="med"/>
+                      <a:tailEnd type="none" w="med" len="med"/>
+                    </a:lnB>
+                    <a:lnTlToBr w="12700" cmpd="sng">
+                      <a:noFill/>
+                      <a:prstDash val="solid"/>
+                    </a:lnTlToBr>
+                    <a:lnBlToTr w="12700" cmpd="sng">
+                      <a:noFill/>
+                      <a:prstDash val="solid"/>
+                    </a:lnBlToTr>
+                    <a:noFill/>
+                  </a:tcPr>
+                </a:tc>
+                <a:extLst>
+                  <a:ext uri="{0D108BD9-81ED-4DB2-BD59-A6C34878D82A}">
+                    <a16:rowId xmlns:a16="http://schemas.microsoft.com/office/drawing/2014/main" val="10005"/>
+                  </a:ext>
+                </a:extLst>
+              </a:tr>
+              <a:tr h="391795">
+                <a:tc>
+                  <a:txBody>
+                    <a:bodyPr/>
+                    <a:lstStyle/>
+                    <a:p>
+                      <a:pPr algn="ctr" latinLnBrk="1">
+                        <a:lnSpc>
+                          <a:spcPct val="150000"/>
+                        </a:lnSpc>
+                      </a:pPr>
+                      <a:r>
+                        <a:rPr lang="en-US" altLang="ko-KR" sz="700" b="0" dirty="0">
+                          <a:solidFill>
+                            <a:schemeClr val="tx1">
+                              <a:lumMod val="50000"/>
+                              <a:lumOff val="50000"/>
+                            </a:schemeClr>
+                          </a:solidFill>
+                          <a:latin typeface="나눔고딕" panose="020D0604000000000000" pitchFamily="50" charset="-127"/>
+                          <a:ea typeface="나눔고딕" panose="020D0604000000000000" pitchFamily="50" charset="-127"/>
+                        </a:rPr>
+                        <a:t>6</a:t>
+                      </a:r>
+                      <a:endParaRPr lang="ko-KR" altLang="en-US" sz="700" b="0" dirty="0">
+                        <a:solidFill>
+                          <a:schemeClr val="tx1">
+                            <a:lumMod val="50000"/>
+                            <a:lumOff val="50000"/>
+                          </a:schemeClr>
+                        </a:solidFill>
+                        <a:latin typeface="나눔고딕" panose="020D0604000000000000" pitchFamily="50" charset="-127"/>
+                        <a:ea typeface="나눔고딕" panose="020D0604000000000000" pitchFamily="50" charset="-127"/>
+                      </a:endParaRPr>
+                    </a:p>
+                  </a:txBody>
+                  <a:tcPr anchor="ctr">
+                    <a:lnL w="3175" cap="flat" cmpd="sng" algn="ctr">
+                      <a:noFill/>
+                      <a:prstDash val="solid"/>
+                      <a:round/>
+                      <a:headEnd type="none" w="med" len="med"/>
+                      <a:tailEnd type="none" w="med" len="med"/>
+                    </a:lnL>
+                    <a:lnR w="3175" cap="flat" cmpd="sng" algn="ctr">
+                      <a:solidFill>
+                        <a:schemeClr val="bg1">
+                          <a:lumMod val="75000"/>
+                        </a:schemeClr>
+                      </a:solidFill>
+                      <a:prstDash val="solid"/>
+                      <a:round/>
+                      <a:headEnd type="none" w="med" len="med"/>
+                      <a:tailEnd type="none" w="med" len="med"/>
+                    </a:lnR>
+                    <a:lnT w="3175" cap="flat" cmpd="sng" algn="ctr">
+                      <a:solidFill>
+                        <a:schemeClr val="bg1">
+                          <a:lumMod val="75000"/>
+                        </a:schemeClr>
+                      </a:solidFill>
+                      <a:prstDash val="solid"/>
+                      <a:round/>
+                      <a:headEnd type="none" w="med" len="med"/>
+                      <a:tailEnd type="none" w="med" len="med"/>
+                    </a:lnT>
+                    <a:lnB w="3175" cap="flat" cmpd="sng" algn="ctr">
+                      <a:noFill/>
+                      <a:prstDash val="solid"/>
+                      <a:round/>
+                      <a:headEnd type="none" w="med" len="med"/>
+                      <a:tailEnd type="none" w="med" len="med"/>
+                    </a:lnB>
+                    <a:lnTlToBr w="12700" cmpd="sng">
+                      <a:noFill/>
+                      <a:prstDash val="solid"/>
+                    </a:lnTlToBr>
+                    <a:lnBlToTr w="12700" cmpd="sng">
+                      <a:noFill/>
+                      <a:prstDash val="solid"/>
+                    </a:lnBlToTr>
+                    <a:noFill/>
+                  </a:tcPr>
+                </a:tc>
+                <a:tc>
+                  <a:txBody>
+                    <a:bodyPr/>
+                    <a:lstStyle/>
+                    <a:p>
+                      <a:pPr marL="0" marR="0" indent="0" algn="l" defTabSz="914400" rtl="0" eaLnBrk="1" fontAlgn="auto" latinLnBrk="1" hangingPunct="1">
+                        <a:lnSpc>
+                          <a:spcPct val="150000"/>
+                        </a:lnSpc>
+                        <a:spcBef>
+                          <a:spcPts val="0"/>
+                        </a:spcBef>
+                        <a:spcAft>
+                          <a:spcPts val="0"/>
+                        </a:spcAft>
+                        <a:buClrTx/>
+                        <a:buSzTx/>
+                        <a:buFontTx/>
+                        <a:buNone/>
+                        <a:tabLst/>
+                        <a:defRPr/>
+                      </a:pPr>
+                      <a:endParaRPr lang="en-US" altLang="ko-KR" sz="700" dirty="0">
+                        <a:solidFill>
+                          <a:schemeClr val="tx1">
+                            <a:lumMod val="50000"/>
+                            <a:lumOff val="50000"/>
+                          </a:schemeClr>
+                        </a:solidFill>
+                        <a:latin typeface="나눔고딕" panose="020D0604000000000000" pitchFamily="50" charset="-127"/>
+                        <a:ea typeface="나눔고딕" panose="020D0604000000000000" pitchFamily="50" charset="-127"/>
+                        <a:sym typeface="Wingdings" panose="05000000000000000000" pitchFamily="2" charset="2"/>
+                      </a:endParaRPr>
+                    </a:p>
+                  </a:txBody>
+                  <a:tcPr anchor="ctr">
+                    <a:lnL w="3175" cap="flat" cmpd="sng" algn="ctr">
+                      <a:solidFill>
+                        <a:schemeClr val="bg1">
+                          <a:lumMod val="75000"/>
+                        </a:schemeClr>
+                      </a:solidFill>
+                      <a:prstDash val="solid"/>
+                      <a:round/>
+                      <a:headEnd type="none" w="med" len="med"/>
+                      <a:tailEnd type="none" w="med" len="med"/>
+                    </a:lnL>
+                    <a:lnR w="3175" cap="flat" cmpd="sng" algn="ctr">
+                      <a:noFill/>
+                      <a:prstDash val="solid"/>
+                      <a:round/>
+                      <a:headEnd type="none" w="med" len="med"/>
+                      <a:tailEnd type="none" w="med" len="med"/>
+                    </a:lnR>
+                    <a:lnT w="3175" cap="flat" cmpd="sng" algn="ctr">
+                      <a:solidFill>
+                        <a:schemeClr val="bg1">
+                          <a:lumMod val="75000"/>
+                        </a:schemeClr>
+                      </a:solidFill>
+                      <a:prstDash val="solid"/>
+                      <a:round/>
+                      <a:headEnd type="none" w="med" len="med"/>
+                      <a:tailEnd type="none" w="med" len="med"/>
+                    </a:lnT>
+                    <a:lnB w="3175" cap="flat" cmpd="sng" algn="ctr">
+                      <a:noFill/>
+                      <a:prstDash val="solid"/>
+                      <a:round/>
+                      <a:headEnd type="none" w="med" len="med"/>
+                      <a:tailEnd type="none" w="med" len="med"/>
+                    </a:lnB>
+                    <a:lnTlToBr w="12700" cmpd="sng">
+                      <a:noFill/>
+                      <a:prstDash val="solid"/>
+                    </a:lnTlToBr>
+                    <a:lnBlToTr w="12700" cmpd="sng">
+                      <a:noFill/>
+                      <a:prstDash val="solid"/>
+                    </a:lnBlToTr>
+                    <a:noFill/>
+                  </a:tcPr>
+                </a:tc>
+                <a:extLst>
+                  <a:ext uri="{0D108BD9-81ED-4DB2-BD59-A6C34878D82A}">
+                    <a16:rowId xmlns:a16="http://schemas.microsoft.com/office/drawing/2014/main" val="10006"/>
+                  </a:ext>
+                </a:extLst>
+              </a:tr>
+            </a:tbl>
+          </a:graphicData>
+        </a:graphic>
+      </p:graphicFrame>
+      <p:graphicFrame>
+        <p:nvGraphicFramePr>
+          <p:cNvPr id="60" name="표 59"/>
+          <p:cNvGraphicFramePr>
+            <a:graphicFrameLocks noGrp="1"/>
+          </p:cNvGraphicFramePr>
+          <p:nvPr/>
+        </p:nvGraphicFramePr>
+        <p:xfrm>
+          <a:off x="6979021" y="2857500"/>
+          <a:ext cx="2164979" cy="2707200"/>
+        </p:xfrm>
+        <a:graphic>
+          <a:graphicData uri="http://schemas.openxmlformats.org/drawingml/2006/table">
+            <a:tbl>
+              <a:tblPr firstRow="1" bandRow="1">
+                <a:tableStyleId>{5C22544A-7EE6-4342-B048-85BDC9FD1C3A}</a:tableStyleId>
+              </a:tblPr>
+              <a:tblGrid>
+                <a:gridCol w="241973">
+                  <a:extLst>
+                    <a:ext uri="{9D8B030D-6E8A-4147-A177-3AD203B41FA5}">
+                      <a16:colId xmlns:a16="http://schemas.microsoft.com/office/drawing/2014/main" val="20000"/>
+                    </a:ext>
+                  </a:extLst>
+                </a:gridCol>
+                <a:gridCol w="1923006">
+                  <a:extLst>
+                    <a:ext uri="{9D8B030D-6E8A-4147-A177-3AD203B41FA5}">
+                      <a16:colId xmlns:a16="http://schemas.microsoft.com/office/drawing/2014/main" val="20001"/>
+                    </a:ext>
+                  </a:extLst>
+                </a:gridCol>
+              </a:tblGrid>
+              <a:tr h="223854">
+                <a:tc gridSpan="2">
+                  <a:txBody>
+                    <a:bodyPr/>
+                    <a:lstStyle/>
+                    <a:p>
+                      <a:pPr algn="ctr" latinLnBrk="1">
+                        <a:lnSpc>
+                          <a:spcPct val="150000"/>
+                        </a:lnSpc>
+                      </a:pPr>
+                      <a:r>
+                        <a:rPr lang="en-US" altLang="ko-KR" sz="600" b="0" dirty="0">
+                          <a:solidFill>
+                            <a:schemeClr val="tx1">
+                              <a:lumMod val="50000"/>
+                              <a:lumOff val="50000"/>
+                            </a:schemeClr>
+                          </a:solidFill>
+                          <a:latin typeface="나눔고딕" panose="020D0604000000000000" pitchFamily="50" charset="-127"/>
+                          <a:ea typeface="나눔고딕" panose="020D0604000000000000" pitchFamily="50" charset="-127"/>
+                        </a:rPr>
+                        <a:t>DESIGN</a:t>
+                      </a:r>
+                      <a:r>
+                        <a:rPr lang="en-US" altLang="ko-KR" sz="600" b="0" baseline="0" dirty="0">
+                          <a:solidFill>
+                            <a:schemeClr val="tx1">
+                              <a:lumMod val="50000"/>
+                              <a:lumOff val="50000"/>
+                            </a:schemeClr>
+                          </a:solidFill>
+                          <a:latin typeface="나눔고딕" panose="020D0604000000000000" pitchFamily="50" charset="-127"/>
+                          <a:ea typeface="나눔고딕" panose="020D0604000000000000" pitchFamily="50" charset="-127"/>
+                        </a:rPr>
+                        <a:t> Description</a:t>
+                      </a:r>
+                      <a:endParaRPr lang="ko-KR" altLang="en-US" sz="600" b="0" dirty="0">
+                        <a:solidFill>
+                          <a:schemeClr val="tx1">
+                            <a:lumMod val="50000"/>
+                            <a:lumOff val="50000"/>
+                          </a:schemeClr>
+                        </a:solidFill>
+                        <a:latin typeface="나눔고딕" panose="020D0604000000000000" pitchFamily="50" charset="-127"/>
+                        <a:ea typeface="나눔고딕" panose="020D0604000000000000" pitchFamily="50" charset="-127"/>
+                      </a:endParaRPr>
+                    </a:p>
+                  </a:txBody>
+                  <a:tcPr marT="0" marB="0" anchor="ctr">
+                    <a:lnL w="3175" cap="flat" cmpd="sng" algn="ctr">
+                      <a:noFill/>
+                      <a:prstDash val="solid"/>
+                      <a:round/>
+                      <a:headEnd type="none" w="med" len="med"/>
+                      <a:tailEnd type="none" w="med" len="med"/>
+                    </a:lnL>
+                    <a:lnR w="3175" cap="flat" cmpd="sng" algn="ctr">
+                      <a:noFill/>
+                      <a:prstDash val="solid"/>
+                      <a:round/>
+                      <a:headEnd type="none" w="med" len="med"/>
+                      <a:tailEnd type="none" w="med" len="med"/>
+                    </a:lnR>
+                    <a:lnT w="3175" cap="flat" cmpd="sng" algn="ctr">
+                      <a:noFill/>
+                      <a:prstDash val="solid"/>
+                      <a:round/>
+                      <a:headEnd type="none" w="med" len="med"/>
+                      <a:tailEnd type="none" w="med" len="med"/>
+                    </a:lnT>
+                    <a:lnB w="3175" cap="flat" cmpd="sng" algn="ctr">
+                      <a:solidFill>
+                        <a:schemeClr val="bg1">
+                          <a:lumMod val="75000"/>
+                        </a:schemeClr>
+                      </a:solidFill>
+                      <a:prstDash val="solid"/>
+                      <a:round/>
+                      <a:headEnd type="none" w="med" len="med"/>
+                      <a:tailEnd type="none" w="med" len="med"/>
+                    </a:lnB>
+                    <a:lnTlToBr w="12700" cmpd="sng">
+                      <a:noFill/>
+                      <a:prstDash val="solid"/>
+                    </a:lnTlToBr>
+                    <a:lnBlToTr w="12700" cmpd="sng">
+                      <a:noFill/>
+                      <a:prstDash val="solid"/>
+                    </a:lnBlToTr>
+                    <a:solidFill>
+                      <a:srgbClr val="FFFF93"/>
+                    </a:solidFill>
+                  </a:tcPr>
+                </a:tc>
+                <a:tc hMerge="1">
+                  <a:txBody>
+                    <a:bodyPr/>
+                    <a:lstStyle/>
+                    <a:p>
+                      <a:pPr latinLnBrk="1">
+                        <a:lnSpc>
+                          <a:spcPct val="150000"/>
+                        </a:lnSpc>
+                      </a:pPr>
+                      <a:endParaRPr lang="ko-KR" altLang="en-US" sz="700" b="0" dirty="0">
+                        <a:solidFill>
+                          <a:schemeClr val="tx1">
+                            <a:lumMod val="50000"/>
+                            <a:lumOff val="50000"/>
+                          </a:schemeClr>
+                        </a:solidFill>
+                        <a:latin typeface="나눔고딕" panose="020D0604000000000000" pitchFamily="50" charset="-127"/>
+                        <a:ea typeface="나눔고딕" panose="020D0604000000000000" pitchFamily="50" charset="-127"/>
+                      </a:endParaRPr>
+                    </a:p>
+                  </a:txBody>
+                  <a:tcPr anchor="ctr">
+                    <a:lnL w="3175" cap="flat" cmpd="sng" algn="ctr">
+                      <a:solidFill>
+                        <a:schemeClr val="bg1">
+                          <a:lumMod val="50000"/>
+                        </a:schemeClr>
+                      </a:solidFill>
+                      <a:prstDash val="solid"/>
+                      <a:round/>
+                      <a:headEnd type="none" w="med" len="med"/>
+                      <a:tailEnd type="none" w="med" len="med"/>
+                    </a:lnL>
+                    <a:lnR w="3175" cap="flat" cmpd="sng" algn="ctr">
+                      <a:solidFill>
+                        <a:schemeClr val="bg1">
+                          <a:lumMod val="50000"/>
+                        </a:schemeClr>
+                      </a:solidFill>
+                      <a:prstDash val="solid"/>
+                      <a:round/>
+                      <a:headEnd type="none" w="med" len="med"/>
+                      <a:tailEnd type="none" w="med" len="med"/>
+                    </a:lnR>
+                    <a:lnT w="3175" cap="flat" cmpd="sng" algn="ctr">
+                      <a:solidFill>
+                        <a:schemeClr val="bg1">
+                          <a:lumMod val="50000"/>
+                        </a:schemeClr>
+                      </a:solidFill>
+                      <a:prstDash val="solid"/>
+                      <a:round/>
+                      <a:headEnd type="none" w="med" len="med"/>
+                      <a:tailEnd type="none" w="med" len="med"/>
+                    </a:lnT>
+                    <a:lnB w="3175" cap="flat" cmpd="sng" algn="ctr">
+                      <a:solidFill>
+                        <a:schemeClr val="bg1">
+                          <a:lumMod val="50000"/>
+                        </a:schemeClr>
+                      </a:solidFill>
+                      <a:prstDash val="solid"/>
+                      <a:round/>
+                      <a:headEnd type="none" w="med" len="med"/>
+                      <a:tailEnd type="none" w="med" len="med"/>
+                    </a:lnB>
+                    <a:lnTlToBr w="12700" cmpd="sng">
+                      <a:noFill/>
+                      <a:prstDash val="solid"/>
+                    </a:lnTlToBr>
+                    <a:lnBlToTr w="12700" cmpd="sng">
+                      <a:noFill/>
+                      <a:prstDash val="solid"/>
+                    </a:lnBlToTr>
+                    <a:solidFill>
+                      <a:srgbClr val="C7A1E3"/>
+                    </a:solidFill>
+                  </a:tcPr>
+                </a:tc>
+                <a:extLst>
+                  <a:ext uri="{0D108BD9-81ED-4DB2-BD59-A6C34878D82A}">
+                    <a16:rowId xmlns:a16="http://schemas.microsoft.com/office/drawing/2014/main" val="10000"/>
+                  </a:ext>
+                </a:extLst>
+              </a:tr>
+              <a:tr h="768786">
+                <a:tc>
+                  <a:txBody>
+                    <a:bodyPr/>
+                    <a:lstStyle/>
+                    <a:p>
+                      <a:pPr algn="ctr" latinLnBrk="1">
+                        <a:lnSpc>
+                          <a:spcPct val="150000"/>
+                        </a:lnSpc>
+                      </a:pPr>
+                      <a:r>
+                        <a:rPr lang="en-US" altLang="ko-KR" sz="700" b="0" dirty="0">
+                          <a:solidFill>
+                            <a:schemeClr val="tx1">
+                              <a:lumMod val="50000"/>
+                              <a:lumOff val="50000"/>
+                            </a:schemeClr>
+                          </a:solidFill>
+                          <a:latin typeface="나눔고딕" panose="020D0604000000000000" pitchFamily="50" charset="-127"/>
+                          <a:ea typeface="나눔고딕" panose="020D0604000000000000" pitchFamily="50" charset="-127"/>
+                        </a:rPr>
+                        <a:t>1</a:t>
+                      </a:r>
+                      <a:endParaRPr lang="ko-KR" altLang="en-US" sz="700" b="0" dirty="0">
+                        <a:solidFill>
+                          <a:schemeClr val="tx1">
+                            <a:lumMod val="50000"/>
+                            <a:lumOff val="50000"/>
+                          </a:schemeClr>
+                        </a:solidFill>
+                        <a:latin typeface="나눔고딕" panose="020D0604000000000000" pitchFamily="50" charset="-127"/>
+                        <a:ea typeface="나눔고딕" panose="020D0604000000000000" pitchFamily="50" charset="-127"/>
+                      </a:endParaRPr>
+                    </a:p>
+                  </a:txBody>
+                  <a:tcPr anchor="ctr">
+                    <a:lnL w="3175" cap="flat" cmpd="sng" algn="ctr">
+                      <a:noFill/>
+                      <a:prstDash val="solid"/>
+                      <a:round/>
+                      <a:headEnd type="none" w="med" len="med"/>
+                      <a:tailEnd type="none" w="med" len="med"/>
+                    </a:lnL>
+                    <a:lnR w="3175" cap="flat" cmpd="sng" algn="ctr">
+                      <a:solidFill>
+                        <a:schemeClr val="bg1">
+                          <a:lumMod val="75000"/>
+                        </a:schemeClr>
+                      </a:solidFill>
+                      <a:prstDash val="solid"/>
+                      <a:round/>
+                      <a:headEnd type="none" w="med" len="med"/>
+                      <a:tailEnd type="none" w="med" len="med"/>
+                    </a:lnR>
+                    <a:lnT w="3175" cap="flat" cmpd="sng" algn="ctr">
+                      <a:solidFill>
+                        <a:schemeClr val="bg1">
+                          <a:lumMod val="75000"/>
+                        </a:schemeClr>
+                      </a:solidFill>
+                      <a:prstDash val="solid"/>
+                      <a:round/>
+                      <a:headEnd type="none" w="med" len="med"/>
+                      <a:tailEnd type="none" w="med" len="med"/>
+                    </a:lnT>
+                    <a:lnB w="3175" cap="flat" cmpd="sng" algn="ctr">
+                      <a:solidFill>
+                        <a:schemeClr val="bg1">
+                          <a:lumMod val="75000"/>
+                        </a:schemeClr>
+                      </a:solidFill>
+                      <a:prstDash val="solid"/>
+                      <a:round/>
+                      <a:headEnd type="none" w="med" len="med"/>
+                      <a:tailEnd type="none" w="med" len="med"/>
+                    </a:lnB>
+                    <a:lnTlToBr w="12700" cmpd="sng">
+                      <a:noFill/>
+                      <a:prstDash val="solid"/>
+                    </a:lnTlToBr>
+                    <a:lnBlToTr w="12700" cmpd="sng">
+                      <a:noFill/>
+                      <a:prstDash val="solid"/>
+                    </a:lnBlToTr>
+                    <a:noFill/>
+                  </a:tcPr>
+                </a:tc>
+                <a:tc>
+                  <a:txBody>
+                    <a:bodyPr/>
+                    <a:lstStyle/>
+                    <a:p>
+                      <a:pPr marL="0" marR="0" indent="0" algn="l" defTabSz="914400" rtl="0" eaLnBrk="1" fontAlgn="auto" latinLnBrk="1" hangingPunct="1">
+                        <a:lnSpc>
+                          <a:spcPct val="150000"/>
+                        </a:lnSpc>
+                        <a:spcBef>
+                          <a:spcPts val="0"/>
+                        </a:spcBef>
+                        <a:spcAft>
+                          <a:spcPts val="0"/>
+                        </a:spcAft>
+                        <a:buClr>
+                          <a:srgbClr val="FF0000"/>
+                        </a:buClr>
+                        <a:buSzTx/>
+                        <a:buFont typeface="+mj-ea"/>
+                        <a:buNone/>
+                        <a:tabLst/>
+                        <a:defRPr/>
+                      </a:pPr>
+                      <a:r>
+                        <a:rPr lang="ko-KR" altLang="en-US" sz="700" dirty="0" err="1">
+                          <a:solidFill>
+                            <a:schemeClr val="tx1">
+                              <a:lumMod val="50000"/>
+                              <a:lumOff val="50000"/>
+                            </a:schemeClr>
+                          </a:solidFill>
+                          <a:latin typeface="나눔고딕" panose="020D0604000000000000" pitchFamily="50" charset="-127"/>
+                          <a:ea typeface="나눔고딕" panose="020D0604000000000000" pitchFamily="50" charset="-127"/>
+                          <a:sym typeface="Wingdings" panose="05000000000000000000" pitchFamily="2" charset="2"/>
+                        </a:rPr>
+                        <a:t>프리모아</a:t>
+                      </a:r>
+                      <a:r>
+                        <a:rPr lang="ko-KR" altLang="en-US" sz="700" dirty="0">
+                          <a:solidFill>
+                            <a:schemeClr val="tx1">
+                              <a:lumMod val="50000"/>
+                              <a:lumOff val="50000"/>
+                            </a:schemeClr>
+                          </a:solidFill>
+                          <a:latin typeface="나눔고딕" panose="020D0604000000000000" pitchFamily="50" charset="-127"/>
+                          <a:ea typeface="나눔고딕" panose="020D0604000000000000" pitchFamily="50" charset="-127"/>
+                          <a:sym typeface="Wingdings" panose="05000000000000000000" pitchFamily="2" charset="2"/>
+                        </a:rPr>
+                        <a:t> 로고 포함 디자인</a:t>
+                      </a:r>
+                      <a:r>
+                        <a:rPr lang="en-US" altLang="ko-KR" sz="700" dirty="0">
+                          <a:solidFill>
+                            <a:schemeClr val="tx1">
+                              <a:lumMod val="50000"/>
+                              <a:lumOff val="50000"/>
+                            </a:schemeClr>
+                          </a:solidFill>
+                          <a:latin typeface="나눔고딕" panose="020D0604000000000000" pitchFamily="50" charset="-127"/>
+                          <a:ea typeface="나눔고딕" panose="020D0604000000000000" pitchFamily="50" charset="-127"/>
+                          <a:sym typeface="Wingdings" panose="05000000000000000000" pitchFamily="2" charset="2"/>
+                        </a:rPr>
+                        <a:t>.</a:t>
+                      </a:r>
+                    </a:p>
+                    <a:p>
+                      <a:pPr marL="0" marR="0" indent="0" algn="l" defTabSz="914400" rtl="0" eaLnBrk="1" fontAlgn="auto" latinLnBrk="1" hangingPunct="1">
+                        <a:lnSpc>
+                          <a:spcPct val="150000"/>
+                        </a:lnSpc>
+                        <a:spcBef>
+                          <a:spcPts val="0"/>
+                        </a:spcBef>
+                        <a:spcAft>
+                          <a:spcPts val="0"/>
+                        </a:spcAft>
+                        <a:buClr>
+                          <a:srgbClr val="FF0000"/>
+                        </a:buClr>
+                        <a:buSzTx/>
+                        <a:buFont typeface="+mj-ea"/>
+                        <a:buNone/>
+                        <a:tabLst/>
+                        <a:defRPr/>
+                      </a:pPr>
+                      <a:r>
+                        <a:rPr lang="ko-KR" altLang="en-US" sz="700" dirty="0">
+                          <a:solidFill>
+                            <a:schemeClr val="tx1">
+                              <a:lumMod val="50000"/>
+                              <a:lumOff val="50000"/>
+                            </a:schemeClr>
+                          </a:solidFill>
+                          <a:latin typeface="나눔고딕" panose="020D0604000000000000" pitchFamily="50" charset="-127"/>
+                          <a:ea typeface="나눔고딕" panose="020D0604000000000000" pitchFamily="50" charset="-127"/>
+                          <a:sym typeface="Wingdings" panose="05000000000000000000" pitchFamily="2" charset="2"/>
+                        </a:rPr>
+                        <a:t>메인 랜딩이기 때문에 간결하고 컬러는 로고 내 컬러와 통일감을 주되 신뢰감 있는 컬러 위주로 사용</a:t>
+                      </a:r>
+                      <a:r>
+                        <a:rPr lang="en-US" altLang="ko-KR" sz="700" dirty="0">
+                          <a:solidFill>
+                            <a:schemeClr val="tx1">
+                              <a:lumMod val="50000"/>
+                              <a:lumOff val="50000"/>
+                            </a:schemeClr>
+                          </a:solidFill>
+                          <a:latin typeface="나눔고딕" panose="020D0604000000000000" pitchFamily="50" charset="-127"/>
+                          <a:ea typeface="나눔고딕" panose="020D0604000000000000" pitchFamily="50" charset="-127"/>
+                          <a:sym typeface="Wingdings" panose="05000000000000000000" pitchFamily="2" charset="2"/>
+                        </a:rPr>
+                        <a:t>, </a:t>
+                      </a:r>
+                      <a:r>
+                        <a:rPr lang="ko-KR" altLang="en-US" sz="700" dirty="0" err="1">
+                          <a:solidFill>
+                            <a:schemeClr val="tx1">
+                              <a:lumMod val="50000"/>
+                              <a:lumOff val="50000"/>
+                            </a:schemeClr>
+                          </a:solidFill>
+                          <a:latin typeface="나눔고딕" panose="020D0604000000000000" pitchFamily="50" charset="-127"/>
+                          <a:ea typeface="나눔고딕" panose="020D0604000000000000" pitchFamily="50" charset="-127"/>
+                          <a:sym typeface="Wingdings" panose="05000000000000000000" pitchFamily="2" charset="2"/>
+                        </a:rPr>
+                        <a:t>가독성</a:t>
+                      </a:r>
+                      <a:r>
+                        <a:rPr lang="ko-KR" altLang="en-US" sz="700" dirty="0">
+                          <a:solidFill>
+                            <a:schemeClr val="tx1">
+                              <a:lumMod val="50000"/>
+                              <a:lumOff val="50000"/>
+                            </a:schemeClr>
+                          </a:solidFill>
+                          <a:latin typeface="나눔고딕" panose="020D0604000000000000" pitchFamily="50" charset="-127"/>
+                          <a:ea typeface="나눔고딕" panose="020D0604000000000000" pitchFamily="50" charset="-127"/>
+                          <a:sym typeface="Wingdings" panose="05000000000000000000" pitchFamily="2" charset="2"/>
+                        </a:rPr>
+                        <a:t> 중요</a:t>
+                      </a:r>
+                      <a:r>
+                        <a:rPr lang="en-US" altLang="ko-KR" sz="700" dirty="0">
+                          <a:solidFill>
+                            <a:schemeClr val="tx1">
+                              <a:lumMod val="50000"/>
+                              <a:lumOff val="50000"/>
+                            </a:schemeClr>
+                          </a:solidFill>
+                          <a:latin typeface="나눔고딕" panose="020D0604000000000000" pitchFamily="50" charset="-127"/>
+                          <a:ea typeface="나눔고딕" panose="020D0604000000000000" pitchFamily="50" charset="-127"/>
+                          <a:sym typeface="Wingdings" panose="05000000000000000000" pitchFamily="2" charset="2"/>
+                        </a:rPr>
+                        <a:t>.</a:t>
+                      </a:r>
+                    </a:p>
+                  </a:txBody>
+                  <a:tcPr anchor="ctr">
+                    <a:lnL w="3175" cap="flat" cmpd="sng" algn="ctr">
+                      <a:solidFill>
+                        <a:schemeClr val="bg1">
+                          <a:lumMod val="75000"/>
+                        </a:schemeClr>
+                      </a:solidFill>
+                      <a:prstDash val="solid"/>
+                      <a:round/>
+                      <a:headEnd type="none" w="med" len="med"/>
+                      <a:tailEnd type="none" w="med" len="med"/>
+                    </a:lnL>
+                    <a:lnR w="3175" cap="flat" cmpd="sng" algn="ctr">
+                      <a:noFill/>
+                      <a:prstDash val="solid"/>
+                      <a:round/>
+                      <a:headEnd type="none" w="med" len="med"/>
+                      <a:tailEnd type="none" w="med" len="med"/>
+                    </a:lnR>
+                    <a:lnT w="3175" cap="flat" cmpd="sng" algn="ctr">
+                      <a:solidFill>
+                        <a:schemeClr val="bg1">
+                          <a:lumMod val="75000"/>
+                        </a:schemeClr>
+                      </a:solidFill>
+                      <a:prstDash val="solid"/>
+                      <a:round/>
+                      <a:headEnd type="none" w="med" len="med"/>
+                      <a:tailEnd type="none" w="med" len="med"/>
+                    </a:lnT>
+                    <a:lnB w="3175" cap="flat" cmpd="sng" algn="ctr">
+                      <a:solidFill>
+                        <a:schemeClr val="bg1">
+                          <a:lumMod val="75000"/>
+                        </a:schemeClr>
+                      </a:solidFill>
+                      <a:prstDash val="solid"/>
+                      <a:round/>
+                      <a:headEnd type="none" w="med" len="med"/>
+                      <a:tailEnd type="none" w="med" len="med"/>
+                    </a:lnB>
+                    <a:lnTlToBr w="12700" cmpd="sng">
+                      <a:noFill/>
+                      <a:prstDash val="solid"/>
+                    </a:lnTlToBr>
+                    <a:lnBlToTr w="12700" cmpd="sng">
+                      <a:noFill/>
+                      <a:prstDash val="solid"/>
+                    </a:lnBlToTr>
+                    <a:noFill/>
+                  </a:tcPr>
+                </a:tc>
+                <a:extLst>
+                  <a:ext uri="{0D108BD9-81ED-4DB2-BD59-A6C34878D82A}">
+                    <a16:rowId xmlns:a16="http://schemas.microsoft.com/office/drawing/2014/main" val="10001"/>
+                  </a:ext>
+                </a:extLst>
+              </a:tr>
+              <a:tr h="428640">
+                <a:tc>
+                  <a:txBody>
+                    <a:bodyPr/>
+                    <a:lstStyle/>
+                    <a:p>
+                      <a:pPr algn="ctr" latinLnBrk="1">
+                        <a:lnSpc>
+                          <a:spcPct val="150000"/>
+                        </a:lnSpc>
+                      </a:pPr>
+                      <a:r>
+                        <a:rPr lang="en-US" altLang="ko-KR" sz="700" b="0" dirty="0">
+                          <a:solidFill>
+                            <a:schemeClr val="tx1">
+                              <a:lumMod val="50000"/>
+                              <a:lumOff val="50000"/>
+                            </a:schemeClr>
+                          </a:solidFill>
+                          <a:latin typeface="나눔고딕" panose="020D0604000000000000" pitchFamily="50" charset="-127"/>
+                          <a:ea typeface="나눔고딕" panose="020D0604000000000000" pitchFamily="50" charset="-127"/>
+                        </a:rPr>
+                        <a:t>2, 3</a:t>
+                      </a:r>
+                      <a:endParaRPr lang="ko-KR" altLang="en-US" sz="700" b="0" dirty="0">
+                        <a:solidFill>
+                          <a:schemeClr val="tx1">
+                            <a:lumMod val="50000"/>
+                            <a:lumOff val="50000"/>
+                          </a:schemeClr>
+                        </a:solidFill>
+                        <a:latin typeface="나눔고딕" panose="020D0604000000000000" pitchFamily="50" charset="-127"/>
+                        <a:ea typeface="나눔고딕" panose="020D0604000000000000" pitchFamily="50" charset="-127"/>
+                      </a:endParaRPr>
+                    </a:p>
+                  </a:txBody>
+                  <a:tcPr anchor="ctr">
+                    <a:lnL w="3175" cap="flat" cmpd="sng" algn="ctr">
+                      <a:noFill/>
+                      <a:prstDash val="solid"/>
+                      <a:round/>
+                      <a:headEnd type="none" w="med" len="med"/>
+                      <a:tailEnd type="none" w="med" len="med"/>
+                    </a:lnL>
+                    <a:lnR w="3175" cap="flat" cmpd="sng" algn="ctr">
+                      <a:solidFill>
+                        <a:schemeClr val="bg1">
+                          <a:lumMod val="75000"/>
+                        </a:schemeClr>
+                      </a:solidFill>
+                      <a:prstDash val="solid"/>
+                      <a:round/>
+                      <a:headEnd type="none" w="med" len="med"/>
+                      <a:tailEnd type="none" w="med" len="med"/>
+                    </a:lnR>
+                    <a:lnT w="3175" cap="flat" cmpd="sng" algn="ctr">
+                      <a:solidFill>
+                        <a:schemeClr val="bg1">
+                          <a:lumMod val="75000"/>
+                        </a:schemeClr>
+                      </a:solidFill>
+                      <a:prstDash val="solid"/>
+                      <a:round/>
+                      <a:headEnd type="none" w="med" len="med"/>
+                      <a:tailEnd type="none" w="med" len="med"/>
+                    </a:lnT>
+                    <a:lnB w="3175" cap="flat" cmpd="sng" algn="ctr">
+                      <a:solidFill>
+                        <a:schemeClr val="bg1">
+                          <a:lumMod val="75000"/>
+                        </a:schemeClr>
+                      </a:solidFill>
+                      <a:prstDash val="solid"/>
+                      <a:round/>
+                      <a:headEnd type="none" w="med" len="med"/>
+                      <a:tailEnd type="none" w="med" len="med"/>
+                    </a:lnB>
+                    <a:lnTlToBr w="12700" cmpd="sng">
+                      <a:noFill/>
+                      <a:prstDash val="solid"/>
+                    </a:lnTlToBr>
+                    <a:lnBlToTr w="12700" cmpd="sng">
+                      <a:noFill/>
+                      <a:prstDash val="solid"/>
+                    </a:lnBlToTr>
+                    <a:noFill/>
+                  </a:tcPr>
+                </a:tc>
+                <a:tc>
+                  <a:txBody>
+                    <a:bodyPr/>
+                    <a:lstStyle/>
+                    <a:p>
+                      <a:pPr marL="0" indent="0">
+                        <a:lnSpc>
+                          <a:spcPct val="150000"/>
+                        </a:lnSpc>
+                        <a:buClr>
+                          <a:srgbClr val="FF0000"/>
+                        </a:buClr>
+                        <a:buFont typeface="+mj-ea"/>
+                        <a:buNone/>
+                      </a:pPr>
+                      <a:r>
+                        <a:rPr lang="ko-KR" altLang="en-US" sz="700" dirty="0">
+                          <a:solidFill>
+                            <a:schemeClr val="tx1">
+                              <a:lumMod val="50000"/>
+                              <a:lumOff val="50000"/>
+                            </a:schemeClr>
+                          </a:solidFill>
+                          <a:latin typeface="나눔고딕" panose="020D0604000000000000" pitchFamily="50" charset="-127"/>
+                          <a:ea typeface="나눔고딕" panose="020D0604000000000000" pitchFamily="50" charset="-127"/>
+                          <a:sym typeface="Wingdings" panose="05000000000000000000" pitchFamily="2" charset="2"/>
+                        </a:rPr>
+                        <a:t>명확히 구분되는 버튼 컬러 사용</a:t>
+                      </a:r>
+                      <a:endParaRPr lang="en-US" altLang="ko-KR" sz="700" dirty="0">
+                        <a:solidFill>
+                          <a:schemeClr val="tx1">
+                            <a:lumMod val="50000"/>
+                            <a:lumOff val="50000"/>
+                          </a:schemeClr>
+                        </a:solidFill>
+                        <a:latin typeface="나눔고딕" panose="020D0604000000000000" pitchFamily="50" charset="-127"/>
+                        <a:ea typeface="나눔고딕" panose="020D0604000000000000" pitchFamily="50" charset="-127"/>
+                        <a:sym typeface="Wingdings" panose="05000000000000000000" pitchFamily="2" charset="2"/>
+                      </a:endParaRPr>
+                    </a:p>
+                  </a:txBody>
+                  <a:tcPr anchor="ctr">
+                    <a:lnL w="3175" cap="flat" cmpd="sng" algn="ctr">
+                      <a:solidFill>
+                        <a:schemeClr val="bg1">
+                          <a:lumMod val="75000"/>
+                        </a:schemeClr>
+                      </a:solidFill>
+                      <a:prstDash val="solid"/>
+                      <a:round/>
+                      <a:headEnd type="none" w="med" len="med"/>
+                      <a:tailEnd type="none" w="med" len="med"/>
+                    </a:lnL>
+                    <a:lnR w="3175" cap="flat" cmpd="sng" algn="ctr">
+                      <a:noFill/>
+                      <a:prstDash val="solid"/>
+                      <a:round/>
+                      <a:headEnd type="none" w="med" len="med"/>
+                      <a:tailEnd type="none" w="med" len="med"/>
+                    </a:lnR>
+                    <a:lnT w="3175" cap="flat" cmpd="sng" algn="ctr">
+                      <a:solidFill>
+                        <a:schemeClr val="bg1">
+                          <a:lumMod val="75000"/>
+                        </a:schemeClr>
+                      </a:solidFill>
+                      <a:prstDash val="solid"/>
+                      <a:round/>
+                      <a:headEnd type="none" w="med" len="med"/>
+                      <a:tailEnd type="none" w="med" len="med"/>
+                    </a:lnT>
+                    <a:lnB w="3175" cap="flat" cmpd="sng" algn="ctr">
+                      <a:solidFill>
+                        <a:schemeClr val="bg1">
+                          <a:lumMod val="75000"/>
+                        </a:schemeClr>
+                      </a:solidFill>
+                      <a:prstDash val="solid"/>
+                      <a:round/>
+                      <a:headEnd type="none" w="med" len="med"/>
+                      <a:tailEnd type="none" w="med" len="med"/>
+                    </a:lnB>
+                    <a:lnTlToBr w="12700" cmpd="sng">
+                      <a:noFill/>
+                      <a:prstDash val="solid"/>
+                    </a:lnTlToBr>
+                    <a:lnBlToTr w="12700" cmpd="sng">
+                      <a:noFill/>
+                      <a:prstDash val="solid"/>
+                    </a:lnBlToTr>
+                    <a:noFill/>
+                  </a:tcPr>
+                </a:tc>
+                <a:extLst>
+                  <a:ext uri="{0D108BD9-81ED-4DB2-BD59-A6C34878D82A}">
+                    <a16:rowId xmlns:a16="http://schemas.microsoft.com/office/drawing/2014/main" val="10002"/>
+                  </a:ext>
+                </a:extLst>
+              </a:tr>
+              <a:tr h="428640">
+                <a:tc>
+                  <a:txBody>
+                    <a:bodyPr/>
+                    <a:lstStyle/>
+                    <a:p>
+                      <a:pPr algn="ctr" latinLnBrk="1">
+                        <a:lnSpc>
+                          <a:spcPct val="150000"/>
+                        </a:lnSpc>
+                      </a:pPr>
+                      <a:r>
+                        <a:rPr lang="en-US" altLang="ko-KR" sz="700" b="0" dirty="0">
+                          <a:solidFill>
+                            <a:schemeClr val="tx1">
+                              <a:lumMod val="50000"/>
+                              <a:lumOff val="50000"/>
+                            </a:schemeClr>
+                          </a:solidFill>
+                          <a:latin typeface="나눔고딕" panose="020D0604000000000000" pitchFamily="50" charset="-127"/>
+                          <a:ea typeface="나눔고딕" panose="020D0604000000000000" pitchFamily="50" charset="-127"/>
+                        </a:rPr>
+                        <a:t>4</a:t>
+                      </a:r>
+                      <a:endParaRPr lang="ko-KR" altLang="en-US" sz="700" b="0" dirty="0">
+                        <a:solidFill>
+                          <a:schemeClr val="tx1">
+                            <a:lumMod val="50000"/>
+                            <a:lumOff val="50000"/>
+                          </a:schemeClr>
+                        </a:solidFill>
+                        <a:latin typeface="나눔고딕" panose="020D0604000000000000" pitchFamily="50" charset="-127"/>
+                        <a:ea typeface="나눔고딕" panose="020D0604000000000000" pitchFamily="50" charset="-127"/>
+                      </a:endParaRPr>
+                    </a:p>
+                  </a:txBody>
+                  <a:tcPr anchor="ctr">
+                    <a:lnL w="3175" cap="flat" cmpd="sng" algn="ctr">
+                      <a:noFill/>
+                      <a:prstDash val="solid"/>
+                      <a:round/>
+                      <a:headEnd type="none" w="med" len="med"/>
+                      <a:tailEnd type="none" w="med" len="med"/>
+                    </a:lnL>
+                    <a:lnR w="3175" cap="flat" cmpd="sng" algn="ctr">
+                      <a:solidFill>
+                        <a:schemeClr val="bg1">
+                          <a:lumMod val="75000"/>
+                        </a:schemeClr>
+                      </a:solidFill>
+                      <a:prstDash val="solid"/>
+                      <a:round/>
+                      <a:headEnd type="none" w="med" len="med"/>
+                      <a:tailEnd type="none" w="med" len="med"/>
+                    </a:lnR>
+                    <a:lnT w="3175" cap="flat" cmpd="sng" algn="ctr">
+                      <a:solidFill>
+                        <a:schemeClr val="bg1">
+                          <a:lumMod val="75000"/>
+                        </a:schemeClr>
+                      </a:solidFill>
+                      <a:prstDash val="solid"/>
+                      <a:round/>
+                      <a:headEnd type="none" w="med" len="med"/>
+                      <a:tailEnd type="none" w="med" len="med"/>
+                    </a:lnT>
+                    <a:lnB w="3175" cap="flat" cmpd="sng" algn="ctr">
+                      <a:solidFill>
+                        <a:schemeClr val="bg1">
+                          <a:lumMod val="75000"/>
+                        </a:schemeClr>
+                      </a:solidFill>
+                      <a:prstDash val="solid"/>
+                      <a:round/>
+                      <a:headEnd type="none" w="med" len="med"/>
+                      <a:tailEnd type="none" w="med" len="med"/>
+                    </a:lnB>
+                    <a:lnTlToBr w="12700" cmpd="sng">
+                      <a:noFill/>
+                      <a:prstDash val="solid"/>
+                    </a:lnTlToBr>
+                    <a:lnBlToTr w="12700" cmpd="sng">
+                      <a:noFill/>
+                      <a:prstDash val="solid"/>
+                    </a:lnBlToTr>
+                    <a:noFill/>
+                  </a:tcPr>
+                </a:tc>
+                <a:tc>
+                  <a:txBody>
+                    <a:bodyPr/>
+                    <a:lstStyle/>
+                    <a:p>
+                      <a:pPr marL="0" marR="0" indent="0" algn="l" defTabSz="914400" rtl="0" eaLnBrk="1" fontAlgn="auto" latinLnBrk="1" hangingPunct="1">
+                        <a:lnSpc>
+                          <a:spcPct val="150000"/>
+                        </a:lnSpc>
+                        <a:spcBef>
+                          <a:spcPts val="0"/>
+                        </a:spcBef>
+                        <a:spcAft>
+                          <a:spcPts val="0"/>
+                        </a:spcAft>
+                        <a:buClrTx/>
+                        <a:buSzTx/>
+                        <a:buFontTx/>
+                        <a:buNone/>
+                        <a:tabLst/>
+                        <a:defRPr/>
+                      </a:pPr>
+                      <a:r>
+                        <a:rPr lang="ko-KR" altLang="en-US" sz="700" dirty="0">
+                          <a:solidFill>
+                            <a:schemeClr val="tx1">
+                              <a:lumMod val="50000"/>
+                              <a:lumOff val="50000"/>
+                            </a:schemeClr>
+                          </a:solidFill>
+                          <a:latin typeface="나눔고딕" panose="020D0604000000000000" pitchFamily="50" charset="-127"/>
+                          <a:ea typeface="나눔고딕" panose="020D0604000000000000" pitchFamily="50" charset="-127"/>
+                          <a:sym typeface="Wingdings" panose="05000000000000000000" pitchFamily="2" charset="2"/>
+                        </a:rPr>
+                        <a:t>일러스트로 이미지 삽입</a:t>
+                      </a:r>
+                      <a:endParaRPr lang="en-US" altLang="ko-KR" sz="700" dirty="0">
+                        <a:solidFill>
+                          <a:schemeClr val="tx1">
+                            <a:lumMod val="50000"/>
+                            <a:lumOff val="50000"/>
+                          </a:schemeClr>
+                        </a:solidFill>
+                        <a:latin typeface="나눔고딕" panose="020D0604000000000000" pitchFamily="50" charset="-127"/>
+                        <a:ea typeface="나눔고딕" panose="020D0604000000000000" pitchFamily="50" charset="-127"/>
+                        <a:sym typeface="Wingdings" panose="05000000000000000000" pitchFamily="2" charset="2"/>
+                      </a:endParaRPr>
+                    </a:p>
+                  </a:txBody>
+                  <a:tcPr anchor="ctr">
+                    <a:lnL w="3175" cap="flat" cmpd="sng" algn="ctr">
+                      <a:solidFill>
+                        <a:schemeClr val="bg1">
+                          <a:lumMod val="75000"/>
+                        </a:schemeClr>
+                      </a:solidFill>
+                      <a:prstDash val="solid"/>
+                      <a:round/>
+                      <a:headEnd type="none" w="med" len="med"/>
+                      <a:tailEnd type="none" w="med" len="med"/>
+                    </a:lnL>
+                    <a:lnR w="3175" cap="flat" cmpd="sng" algn="ctr">
+                      <a:noFill/>
+                      <a:prstDash val="solid"/>
+                      <a:round/>
+                      <a:headEnd type="none" w="med" len="med"/>
+                      <a:tailEnd type="none" w="med" len="med"/>
+                    </a:lnR>
+                    <a:lnT w="3175" cap="flat" cmpd="sng" algn="ctr">
+                      <a:solidFill>
+                        <a:schemeClr val="bg1">
+                          <a:lumMod val="75000"/>
+                        </a:schemeClr>
+                      </a:solidFill>
+                      <a:prstDash val="solid"/>
+                      <a:round/>
+                      <a:headEnd type="none" w="med" len="med"/>
+                      <a:tailEnd type="none" w="med" len="med"/>
+                    </a:lnT>
+                    <a:lnB w="3175" cap="flat" cmpd="sng" algn="ctr">
+                      <a:solidFill>
+                        <a:schemeClr val="bg1">
+                          <a:lumMod val="75000"/>
+                        </a:schemeClr>
+                      </a:solidFill>
+                      <a:prstDash val="solid"/>
+                      <a:round/>
+                      <a:headEnd type="none" w="med" len="med"/>
+                      <a:tailEnd type="none" w="med" len="med"/>
+                    </a:lnB>
+                    <a:lnTlToBr w="12700" cmpd="sng">
+                      <a:noFill/>
+                      <a:prstDash val="solid"/>
+                    </a:lnTlToBr>
+                    <a:lnBlToTr w="12700" cmpd="sng">
+                      <a:noFill/>
+                      <a:prstDash val="solid"/>
+                    </a:lnBlToTr>
+                    <a:noFill/>
+                  </a:tcPr>
+                </a:tc>
+                <a:extLst>
+                  <a:ext uri="{0D108BD9-81ED-4DB2-BD59-A6C34878D82A}">
+                    <a16:rowId xmlns:a16="http://schemas.microsoft.com/office/drawing/2014/main" val="10003"/>
+                  </a:ext>
+                </a:extLst>
+              </a:tr>
+              <a:tr h="428640">
+                <a:tc>
+                  <a:txBody>
+                    <a:bodyPr/>
+                    <a:lstStyle/>
+                    <a:p>
+                      <a:pPr algn="ctr" latinLnBrk="1">
+                        <a:lnSpc>
+                          <a:spcPct val="150000"/>
+                        </a:lnSpc>
+                      </a:pPr>
+                      <a:r>
+                        <a:rPr lang="en-US" altLang="ko-KR" sz="700" b="0" dirty="0">
+                          <a:solidFill>
+                            <a:schemeClr val="tx1">
+                              <a:lumMod val="50000"/>
+                              <a:lumOff val="50000"/>
+                            </a:schemeClr>
+                          </a:solidFill>
+                          <a:latin typeface="나눔고딕" panose="020D0604000000000000" pitchFamily="50" charset="-127"/>
+                          <a:ea typeface="나눔고딕" panose="020D0604000000000000" pitchFamily="50" charset="-127"/>
+                        </a:rPr>
+                        <a:t>5</a:t>
+                      </a:r>
+                      <a:endParaRPr lang="ko-KR" altLang="en-US" sz="700" b="0" dirty="0">
+                        <a:solidFill>
+                          <a:schemeClr val="tx1">
+                            <a:lumMod val="50000"/>
+                            <a:lumOff val="50000"/>
+                          </a:schemeClr>
+                        </a:solidFill>
+                        <a:latin typeface="나눔고딕" panose="020D0604000000000000" pitchFamily="50" charset="-127"/>
+                        <a:ea typeface="나눔고딕" panose="020D0604000000000000" pitchFamily="50" charset="-127"/>
+                      </a:endParaRPr>
+                    </a:p>
+                  </a:txBody>
+                  <a:tcPr anchor="ctr">
+                    <a:lnL w="3175" cap="flat" cmpd="sng" algn="ctr">
+                      <a:noFill/>
+                      <a:prstDash val="solid"/>
+                      <a:round/>
+                      <a:headEnd type="none" w="med" len="med"/>
+                      <a:tailEnd type="none" w="med" len="med"/>
+                    </a:lnL>
+                    <a:lnR w="3175" cap="flat" cmpd="sng" algn="ctr">
+                      <a:solidFill>
+                        <a:schemeClr val="bg1">
+                          <a:lumMod val="75000"/>
+                        </a:schemeClr>
+                      </a:solidFill>
+                      <a:prstDash val="solid"/>
+                      <a:round/>
+                      <a:headEnd type="none" w="med" len="med"/>
+                      <a:tailEnd type="none" w="med" len="med"/>
+                    </a:lnR>
+                    <a:lnT w="3175" cap="flat" cmpd="sng" algn="ctr">
+                      <a:solidFill>
+                        <a:schemeClr val="bg1">
+                          <a:lumMod val="75000"/>
+                        </a:schemeClr>
+                      </a:solidFill>
+                      <a:prstDash val="solid"/>
+                      <a:round/>
+                      <a:headEnd type="none" w="med" len="med"/>
+                      <a:tailEnd type="none" w="med" len="med"/>
+                    </a:lnT>
+                    <a:lnB w="3175" cap="flat" cmpd="sng" algn="ctr">
+                      <a:solidFill>
+                        <a:schemeClr val="bg1">
+                          <a:lumMod val="75000"/>
+                        </a:schemeClr>
+                      </a:solidFill>
+                      <a:prstDash val="solid"/>
+                      <a:round/>
+                      <a:headEnd type="none" w="med" len="med"/>
+                      <a:tailEnd type="none" w="med" len="med"/>
+                    </a:lnB>
+                    <a:lnTlToBr w="12700" cmpd="sng">
+                      <a:noFill/>
+                      <a:prstDash val="solid"/>
+                    </a:lnTlToBr>
+                    <a:lnBlToTr w="12700" cmpd="sng">
+                      <a:noFill/>
+                      <a:prstDash val="solid"/>
+                    </a:lnBlToTr>
+                    <a:noFill/>
+                  </a:tcPr>
+                </a:tc>
+                <a:tc>
+                  <a:txBody>
+                    <a:bodyPr/>
+                    <a:lstStyle/>
+                    <a:p>
+                      <a:pPr marL="0" marR="0" indent="0" algn="l" defTabSz="914400" rtl="0" eaLnBrk="1" fontAlgn="auto" latinLnBrk="1" hangingPunct="1">
+                        <a:lnSpc>
+                          <a:spcPct val="150000"/>
+                        </a:lnSpc>
+                        <a:spcBef>
+                          <a:spcPts val="0"/>
+                        </a:spcBef>
+                        <a:spcAft>
+                          <a:spcPts val="0"/>
+                        </a:spcAft>
+                        <a:buClrTx/>
+                        <a:buSzTx/>
+                        <a:buFontTx/>
+                        <a:buNone/>
+                        <a:tabLst/>
+                        <a:defRPr/>
+                      </a:pPr>
+                      <a:endParaRPr lang="en-US" altLang="ko-KR" sz="700" dirty="0">
+                        <a:solidFill>
+                          <a:schemeClr val="tx1">
+                            <a:lumMod val="50000"/>
+                            <a:lumOff val="50000"/>
+                          </a:schemeClr>
+                        </a:solidFill>
+                        <a:latin typeface="나눔고딕" panose="020D0604000000000000" pitchFamily="50" charset="-127"/>
+                        <a:ea typeface="나눔고딕" panose="020D0604000000000000" pitchFamily="50" charset="-127"/>
+                        <a:sym typeface="Wingdings" panose="05000000000000000000" pitchFamily="2" charset="2"/>
+                      </a:endParaRPr>
+                    </a:p>
+                  </a:txBody>
+                  <a:tcPr anchor="ctr">
+                    <a:lnL w="3175" cap="flat" cmpd="sng" algn="ctr">
+                      <a:solidFill>
+                        <a:schemeClr val="bg1">
+                          <a:lumMod val="75000"/>
+                        </a:schemeClr>
+                      </a:solidFill>
+                      <a:prstDash val="solid"/>
+                      <a:round/>
+                      <a:headEnd type="none" w="med" len="med"/>
+                      <a:tailEnd type="none" w="med" len="med"/>
+                    </a:lnL>
+                    <a:lnR w="3175" cap="flat" cmpd="sng" algn="ctr">
+                      <a:noFill/>
+                      <a:prstDash val="solid"/>
+                      <a:round/>
+                      <a:headEnd type="none" w="med" len="med"/>
+                      <a:tailEnd type="none" w="med" len="med"/>
+                    </a:lnR>
+                    <a:lnT w="3175" cap="flat" cmpd="sng" algn="ctr">
+                      <a:solidFill>
+                        <a:schemeClr val="bg1">
+                          <a:lumMod val="75000"/>
+                        </a:schemeClr>
+                      </a:solidFill>
+                      <a:prstDash val="solid"/>
+                      <a:round/>
+                      <a:headEnd type="none" w="med" len="med"/>
+                      <a:tailEnd type="none" w="med" len="med"/>
+                    </a:lnT>
+                    <a:lnB w="3175" cap="flat" cmpd="sng" algn="ctr">
+                      <a:solidFill>
+                        <a:schemeClr val="bg1">
+                          <a:lumMod val="75000"/>
+                        </a:schemeClr>
+                      </a:solidFill>
+                      <a:prstDash val="solid"/>
+                      <a:round/>
+                      <a:headEnd type="none" w="med" len="med"/>
+                      <a:tailEnd type="none" w="med" len="med"/>
+                    </a:lnB>
+                    <a:lnTlToBr w="12700" cmpd="sng">
+                      <a:noFill/>
+                      <a:prstDash val="solid"/>
+                    </a:lnTlToBr>
+                    <a:lnBlToTr w="12700" cmpd="sng">
+                      <a:noFill/>
+                      <a:prstDash val="solid"/>
+                    </a:lnBlToTr>
+                    <a:noFill/>
+                  </a:tcPr>
+                </a:tc>
+                <a:extLst>
+                  <a:ext uri="{0D108BD9-81ED-4DB2-BD59-A6C34878D82A}">
+                    <a16:rowId xmlns:a16="http://schemas.microsoft.com/office/drawing/2014/main" val="10004"/>
+                  </a:ext>
+                </a:extLst>
+              </a:tr>
+              <a:tr h="428640">
+                <a:tc>
+                  <a:txBody>
+                    <a:bodyPr/>
+                    <a:lstStyle/>
+                    <a:p>
+                      <a:pPr algn="ctr" latinLnBrk="1">
+                        <a:lnSpc>
+                          <a:spcPct val="150000"/>
+                        </a:lnSpc>
+                      </a:pPr>
+                      <a:r>
+                        <a:rPr lang="en-US" altLang="ko-KR" sz="700" b="0" dirty="0">
+                          <a:solidFill>
+                            <a:schemeClr val="tx1">
+                              <a:lumMod val="50000"/>
+                              <a:lumOff val="50000"/>
+                            </a:schemeClr>
+                          </a:solidFill>
+                          <a:latin typeface="나눔고딕" panose="020D0604000000000000" pitchFamily="50" charset="-127"/>
+                          <a:ea typeface="나눔고딕" panose="020D0604000000000000" pitchFamily="50" charset="-127"/>
+                        </a:rPr>
+                        <a:t>6</a:t>
+                      </a:r>
+                      <a:endParaRPr lang="ko-KR" altLang="en-US" sz="700" b="0" dirty="0">
+                        <a:solidFill>
+                          <a:schemeClr val="tx1">
+                            <a:lumMod val="50000"/>
+                            <a:lumOff val="50000"/>
+                          </a:schemeClr>
+                        </a:solidFill>
+                        <a:latin typeface="나눔고딕" panose="020D0604000000000000" pitchFamily="50" charset="-127"/>
+                        <a:ea typeface="나눔고딕" panose="020D0604000000000000" pitchFamily="50" charset="-127"/>
+                      </a:endParaRPr>
+                    </a:p>
+                  </a:txBody>
+                  <a:tcPr anchor="ctr">
+                    <a:lnL w="3175" cap="flat" cmpd="sng" algn="ctr">
+                      <a:noFill/>
+                      <a:prstDash val="solid"/>
+                      <a:round/>
+                      <a:headEnd type="none" w="med" len="med"/>
+                      <a:tailEnd type="none" w="med" len="med"/>
+                    </a:lnL>
+                    <a:lnR w="3175" cap="flat" cmpd="sng" algn="ctr">
+                      <a:solidFill>
+                        <a:schemeClr val="bg1">
+                          <a:lumMod val="75000"/>
+                        </a:schemeClr>
+                      </a:solidFill>
+                      <a:prstDash val="solid"/>
+                      <a:round/>
+                      <a:headEnd type="none" w="med" len="med"/>
+                      <a:tailEnd type="none" w="med" len="med"/>
+                    </a:lnR>
+                    <a:lnT w="3175" cap="flat" cmpd="sng" algn="ctr">
+                      <a:solidFill>
+                        <a:schemeClr val="bg1">
+                          <a:lumMod val="75000"/>
+                        </a:schemeClr>
+                      </a:solidFill>
+                      <a:prstDash val="solid"/>
+                      <a:round/>
+                      <a:headEnd type="none" w="med" len="med"/>
+                      <a:tailEnd type="none" w="med" len="med"/>
+                    </a:lnT>
+                    <a:lnB w="3175" cap="flat" cmpd="sng" algn="ctr">
+                      <a:noFill/>
+                      <a:prstDash val="solid"/>
+                      <a:round/>
+                      <a:headEnd type="none" w="med" len="med"/>
+                      <a:tailEnd type="none" w="med" len="med"/>
+                    </a:lnB>
+                    <a:lnTlToBr w="12700" cmpd="sng">
+                      <a:noFill/>
+                      <a:prstDash val="solid"/>
+                    </a:lnTlToBr>
+                    <a:lnBlToTr w="12700" cmpd="sng">
+                      <a:noFill/>
+                      <a:prstDash val="solid"/>
+                    </a:lnBlToTr>
+                    <a:noFill/>
+                  </a:tcPr>
+                </a:tc>
+                <a:tc>
+                  <a:txBody>
+                    <a:bodyPr/>
+                    <a:lstStyle/>
+                    <a:p>
+                      <a:pPr marL="0" marR="0" indent="0" algn="l" defTabSz="914400" rtl="0" eaLnBrk="1" fontAlgn="auto" latinLnBrk="1" hangingPunct="1">
+                        <a:lnSpc>
+                          <a:spcPct val="150000"/>
+                        </a:lnSpc>
+                        <a:spcBef>
+                          <a:spcPts val="0"/>
+                        </a:spcBef>
+                        <a:spcAft>
+                          <a:spcPts val="0"/>
+                        </a:spcAft>
+                        <a:buClrTx/>
+                        <a:buSzTx/>
+                        <a:buFontTx/>
+                        <a:buNone/>
+                        <a:tabLst/>
+                        <a:defRPr/>
+                      </a:pPr>
+                      <a:endParaRPr lang="en-US" altLang="ko-KR" sz="700" dirty="0">
+                        <a:solidFill>
+                          <a:schemeClr val="tx1">
+                            <a:lumMod val="50000"/>
+                            <a:lumOff val="50000"/>
+                          </a:schemeClr>
+                        </a:solidFill>
+                        <a:latin typeface="나눔고딕" panose="020D0604000000000000" pitchFamily="50" charset="-127"/>
+                        <a:ea typeface="나눔고딕" panose="020D0604000000000000" pitchFamily="50" charset="-127"/>
+                        <a:sym typeface="Wingdings" panose="05000000000000000000" pitchFamily="2" charset="2"/>
+                      </a:endParaRPr>
+                    </a:p>
+                  </a:txBody>
+                  <a:tcPr anchor="ctr">
+                    <a:lnL w="3175" cap="flat" cmpd="sng" algn="ctr">
+                      <a:solidFill>
+                        <a:schemeClr val="bg1">
+                          <a:lumMod val="75000"/>
+                        </a:schemeClr>
+                      </a:solidFill>
+                      <a:prstDash val="solid"/>
+                      <a:round/>
+                      <a:headEnd type="none" w="med" len="med"/>
+                      <a:tailEnd type="none" w="med" len="med"/>
+                    </a:lnL>
+                    <a:lnR w="3175" cap="flat" cmpd="sng" algn="ctr">
+                      <a:noFill/>
+                      <a:prstDash val="solid"/>
+                      <a:round/>
+                      <a:headEnd type="none" w="med" len="med"/>
+                      <a:tailEnd type="none" w="med" len="med"/>
+                    </a:lnR>
+                    <a:lnT w="3175" cap="flat" cmpd="sng" algn="ctr">
+                      <a:solidFill>
+                        <a:schemeClr val="bg1">
+                          <a:lumMod val="75000"/>
+                        </a:schemeClr>
+                      </a:solidFill>
+                      <a:prstDash val="solid"/>
+                      <a:round/>
+                      <a:headEnd type="none" w="med" len="med"/>
+                      <a:tailEnd type="none" w="med" len="med"/>
+                    </a:lnT>
+                    <a:lnB w="3175" cap="flat" cmpd="sng" algn="ctr">
+                      <a:noFill/>
+                      <a:prstDash val="solid"/>
+                      <a:round/>
+                      <a:headEnd type="none" w="med" len="med"/>
+                      <a:tailEnd type="none" w="med" len="med"/>
+                    </a:lnB>
+                    <a:lnTlToBr w="12700" cmpd="sng">
+                      <a:noFill/>
+                      <a:prstDash val="solid"/>
+                    </a:lnTlToBr>
+                    <a:lnBlToTr w="12700" cmpd="sng">
+                      <a:noFill/>
+                      <a:prstDash val="solid"/>
+                    </a:lnBlToTr>
+                    <a:noFill/>
+                  </a:tcPr>
+                </a:tc>
+                <a:extLst>
+                  <a:ext uri="{0D108BD9-81ED-4DB2-BD59-A6C34878D82A}">
+                    <a16:rowId xmlns:a16="http://schemas.microsoft.com/office/drawing/2014/main" val="10005"/>
+                  </a:ext>
+                </a:extLst>
+              </a:tr>
+            </a:tbl>
+          </a:graphicData>
+        </a:graphic>
+      </p:graphicFrame>
+      <p:sp>
+        <p:nvSpPr>
+          <p:cNvPr id="107" name="TextBox 106">
+            <a:extLst>
+              <a:ext uri="{FF2B5EF4-FFF2-40B4-BE49-F238E27FC236}">
+                <a16:creationId xmlns:a16="http://schemas.microsoft.com/office/drawing/2014/main" id="{1771AE34-32B3-4928-81B3-B37FCA5AC037}"/>
+              </a:ext>
+            </a:extLst>
+          </p:cNvPr>
+          <p:cNvSpPr txBox="1"/>
+          <p:nvPr/>
+        </p:nvSpPr>
+        <p:spPr>
+          <a:xfrm>
+            <a:off x="264479" y="4548857"/>
+            <a:ext cx="1526578" cy="307777"/>
+          </a:xfrm>
+          <a:prstGeom prst="rect">
+            <a:avLst/>
+          </a:prstGeom>
+          <a:noFill/>
+        </p:spPr>
+        <p:txBody>
+          <a:bodyPr wrap="square" rtlCol="0">
+            <a:spAutoFit/>
+          </a:bodyPr>
+          <a:lstStyle/>
+          <a:p>
+            <a:r>
+              <a:rPr lang="ko-KR" altLang="en-US" sz="1400" dirty="0">
+                <a:solidFill>
+                  <a:schemeClr val="bg1"/>
+                </a:solidFill>
+                <a:latin typeface="나눔고딕" panose="020D0604000000000000" pitchFamily="50" charset="-127"/>
+                <a:ea typeface="나눔고딕" panose="020D0604000000000000" pitchFamily="50" charset="-127"/>
+              </a:rPr>
+              <a:t>스토리보드</a:t>
+            </a:r>
+            <a:endParaRPr lang="en-US" altLang="ko-KR" sz="1400" dirty="0">
+              <a:solidFill>
+                <a:schemeClr val="bg1"/>
+              </a:solidFill>
+              <a:latin typeface="나눔고딕" panose="020D0604000000000000" pitchFamily="50" charset="-127"/>
+              <a:ea typeface="나눔고딕" panose="020D0604000000000000" pitchFamily="50" charset="-127"/>
+            </a:endParaRPr>
+          </a:p>
+        </p:txBody>
+      </p:sp>
+      <p:sp>
+        <p:nvSpPr>
+          <p:cNvPr id="108" name="직사각형 107">
+            <a:extLst>
+              <a:ext uri="{FF2B5EF4-FFF2-40B4-BE49-F238E27FC236}">
+                <a16:creationId xmlns:a16="http://schemas.microsoft.com/office/drawing/2014/main" id="{8FE455D5-A6E9-4A02-A74E-9AC5F2F4A5EF}"/>
+              </a:ext>
+            </a:extLst>
+          </p:cNvPr>
+          <p:cNvSpPr/>
+          <p:nvPr/>
+        </p:nvSpPr>
+        <p:spPr>
+          <a:xfrm>
+            <a:off x="1605666" y="4563218"/>
+            <a:ext cx="6834472" cy="255455"/>
+          </a:xfrm>
+          <a:prstGeom prst="rect">
+            <a:avLst/>
+          </a:prstGeom>
+        </p:spPr>
+        <p:txBody>
+          <a:bodyPr wrap="square">
+            <a:spAutoFit/>
+          </a:bodyPr>
+          <a:lstStyle/>
+          <a:p>
+            <a:pPr>
+              <a:lnSpc>
+                <a:spcPct val="150000"/>
+              </a:lnSpc>
+            </a:pPr>
+            <a:r>
+              <a:rPr lang="en-US" altLang="ko-KR" sz="800" b="1" dirty="0">
+                <a:solidFill>
+                  <a:schemeClr val="bg1"/>
+                </a:solidFill>
+                <a:latin typeface="나눔고딕" panose="020D0604000000000000" pitchFamily="50" charset="-127"/>
+                <a:ea typeface="나눔고딕" panose="020D0604000000000000" pitchFamily="50" charset="-127"/>
+              </a:rPr>
+              <a:t>-  </a:t>
+            </a:r>
+            <a:r>
+              <a:rPr lang="ko-KR" altLang="en-US" sz="800" dirty="0" err="1">
+                <a:solidFill>
+                  <a:schemeClr val="bg1"/>
+                </a:solidFill>
+                <a:latin typeface="나눔고딕" panose="020D0604000000000000" pitchFamily="50" charset="-127"/>
+                <a:ea typeface="나눔고딕" panose="020D0604000000000000" pitchFamily="50" charset="-127"/>
+              </a:rPr>
+              <a:t>모바일웹</a:t>
+            </a:r>
+            <a:r>
+              <a:rPr lang="en-US" altLang="ko-KR" sz="800" dirty="0">
+                <a:solidFill>
+                  <a:schemeClr val="bg1"/>
+                </a:solidFill>
+                <a:latin typeface="나눔고딕" panose="020D0604000000000000" pitchFamily="50" charset="-127"/>
+                <a:ea typeface="나눔고딕" panose="020D0604000000000000" pitchFamily="50" charset="-127"/>
+              </a:rPr>
+              <a:t>/</a:t>
+            </a:r>
+            <a:r>
+              <a:rPr lang="ko-KR" altLang="en-US" sz="800" dirty="0">
+                <a:solidFill>
+                  <a:schemeClr val="bg1"/>
+                </a:solidFill>
+                <a:latin typeface="나눔고딕" panose="020D0604000000000000" pitchFamily="50" charset="-127"/>
+                <a:ea typeface="나눔고딕" panose="020D0604000000000000" pitchFamily="50" charset="-127"/>
+              </a:rPr>
+              <a:t>앱 기획</a:t>
+            </a:r>
+            <a:r>
+              <a:rPr lang="en-US" altLang="ko-KR" sz="800" dirty="0">
+                <a:solidFill>
+                  <a:schemeClr val="bg1"/>
+                </a:solidFill>
+                <a:latin typeface="나눔고딕" panose="020D0604000000000000" pitchFamily="50" charset="-127"/>
+                <a:ea typeface="나눔고딕" panose="020D0604000000000000" pitchFamily="50" charset="-127"/>
+              </a:rPr>
+              <a:t>   |   </a:t>
+            </a:r>
+            <a:r>
+              <a:rPr lang="ko-KR" altLang="en-US" sz="800" b="1" dirty="0">
+                <a:solidFill>
+                  <a:schemeClr val="bg1"/>
+                </a:solidFill>
+                <a:latin typeface="나눔고딕" panose="020D0604000000000000" pitchFamily="50" charset="-127"/>
+                <a:ea typeface="나눔고딕" panose="020D0604000000000000" pitchFamily="50" charset="-127"/>
+              </a:rPr>
+              <a:t>스토리보드는 </a:t>
+            </a:r>
+            <a:r>
+              <a:rPr lang="en-US" altLang="ko-KR" sz="800" b="1" dirty="0">
+                <a:solidFill>
+                  <a:schemeClr val="bg1"/>
+                </a:solidFill>
+                <a:latin typeface="나눔고딕" panose="020D0604000000000000" pitchFamily="50" charset="-127"/>
+                <a:ea typeface="나눔고딕" panose="020D0604000000000000" pitchFamily="50" charset="-127"/>
+              </a:rPr>
+              <a:t>UI(User Interface)</a:t>
+            </a:r>
+            <a:r>
+              <a:rPr lang="ko-KR" altLang="en-US" sz="800" b="1" dirty="0">
+                <a:solidFill>
+                  <a:schemeClr val="bg1"/>
+                </a:solidFill>
+                <a:latin typeface="나눔고딕" panose="020D0604000000000000" pitchFamily="50" charset="-127"/>
+                <a:ea typeface="나눔고딕" panose="020D0604000000000000" pitchFamily="50" charset="-127"/>
+              </a:rPr>
+              <a:t>라고 불리우는 서비스의 화면을 설계하고 실제 작업자에게 작업할 사항을 전달하는 문서입니다</a:t>
+            </a:r>
+            <a:r>
+              <a:rPr lang="en-US" altLang="ko-KR" sz="800" b="1" dirty="0">
+                <a:solidFill>
+                  <a:schemeClr val="bg1"/>
+                </a:solidFill>
+                <a:latin typeface="나눔고딕" panose="020D0604000000000000" pitchFamily="50" charset="-127"/>
+                <a:ea typeface="나눔고딕" panose="020D0604000000000000" pitchFamily="50" charset="-127"/>
+              </a:rPr>
+              <a:t>.</a:t>
+            </a:r>
+          </a:p>
+        </p:txBody>
+      </p:sp>
+      <p:sp>
+        <p:nvSpPr>
+          <p:cNvPr id="109" name="직사각형 108">
+            <a:extLst>
+              <a:ext uri="{FF2B5EF4-FFF2-40B4-BE49-F238E27FC236}">
+                <a16:creationId xmlns:a16="http://schemas.microsoft.com/office/drawing/2014/main" id="{4731DA8E-52C6-46CD-A0AC-54D60BC5B572}"/>
+              </a:ext>
+            </a:extLst>
+          </p:cNvPr>
+          <p:cNvSpPr/>
+          <p:nvPr/>
+        </p:nvSpPr>
+        <p:spPr>
+          <a:xfrm>
+            <a:off x="257370" y="4867392"/>
+            <a:ext cx="8563102" cy="558230"/>
+          </a:xfrm>
+          <a:prstGeom prst="rect">
+            <a:avLst/>
+          </a:prstGeom>
+        </p:spPr>
+        <p:txBody>
+          <a:bodyPr wrap="square">
+            <a:spAutoFit/>
+          </a:bodyPr>
+          <a:lstStyle/>
+          <a:p>
+            <a:pPr>
+              <a:lnSpc>
+                <a:spcPct val="150000"/>
+              </a:lnSpc>
+            </a:pPr>
+            <a:r>
+              <a:rPr lang="ko-KR" altLang="en-US" sz="700" dirty="0">
+                <a:solidFill>
+                  <a:schemeClr val="bg1"/>
+                </a:solidFill>
+                <a:latin typeface="나눔고딕" panose="020D0604000000000000" pitchFamily="50" charset="-127"/>
+                <a:ea typeface="나눔고딕" panose="020D0604000000000000" pitchFamily="50" charset="-127"/>
+              </a:rPr>
+              <a:t>이 또한 지정된 양식은 없으나</a:t>
+            </a:r>
+            <a:r>
+              <a:rPr lang="en-US" altLang="ko-KR" sz="700" dirty="0">
+                <a:solidFill>
+                  <a:schemeClr val="bg1"/>
+                </a:solidFill>
+                <a:latin typeface="나눔고딕" panose="020D0604000000000000" pitchFamily="50" charset="-127"/>
+                <a:ea typeface="나눔고딕" panose="020D0604000000000000" pitchFamily="50" charset="-127"/>
+              </a:rPr>
+              <a:t>, </a:t>
+            </a:r>
+            <a:r>
+              <a:rPr lang="ko-KR" altLang="en-US" sz="700" dirty="0">
+                <a:solidFill>
+                  <a:schemeClr val="bg1"/>
+                </a:solidFill>
+                <a:latin typeface="나눔고딕" panose="020D0604000000000000" pitchFamily="50" charset="-127"/>
+                <a:ea typeface="나눔고딕" panose="020D0604000000000000" pitchFamily="50" charset="-127"/>
+              </a:rPr>
+              <a:t>화면을 설계하고 각 요소에 번호</a:t>
+            </a:r>
+            <a:r>
+              <a:rPr lang="en-US" altLang="ko-KR" sz="700" dirty="0">
+                <a:solidFill>
+                  <a:schemeClr val="bg1"/>
+                </a:solidFill>
+                <a:latin typeface="나눔고딕" panose="020D0604000000000000" pitchFamily="50" charset="-127"/>
+                <a:ea typeface="나눔고딕" panose="020D0604000000000000" pitchFamily="50" charset="-127"/>
+              </a:rPr>
+              <a:t>(1, 2, 3)</a:t>
+            </a:r>
+            <a:r>
+              <a:rPr lang="ko-KR" altLang="en-US" sz="700" dirty="0">
+                <a:solidFill>
+                  <a:schemeClr val="bg1"/>
+                </a:solidFill>
+                <a:latin typeface="나눔고딕" panose="020D0604000000000000" pitchFamily="50" charset="-127"/>
+                <a:ea typeface="나눔고딕" panose="020D0604000000000000" pitchFamily="50" charset="-127"/>
+              </a:rPr>
+              <a:t>로 표기 후 우측의 </a:t>
+            </a:r>
+            <a:r>
+              <a:rPr lang="en-US" altLang="ko-KR" sz="700" dirty="0">
+                <a:solidFill>
+                  <a:schemeClr val="bg1"/>
+                </a:solidFill>
+                <a:latin typeface="나눔고딕" panose="020D0604000000000000" pitchFamily="50" charset="-127"/>
+                <a:ea typeface="나눔고딕" panose="020D0604000000000000" pitchFamily="50" charset="-127"/>
+              </a:rPr>
+              <a:t>Description</a:t>
+            </a:r>
+            <a:r>
+              <a:rPr lang="ko-KR" altLang="en-US" sz="700" dirty="0">
+                <a:solidFill>
+                  <a:schemeClr val="bg1"/>
+                </a:solidFill>
+                <a:latin typeface="나눔고딕" panose="020D0604000000000000" pitchFamily="50" charset="-127"/>
+                <a:ea typeface="나눔고딕" panose="020D0604000000000000" pitchFamily="50" charset="-127"/>
+              </a:rPr>
+              <a:t>영역에 내용을 작성합니다</a:t>
+            </a:r>
+            <a:r>
+              <a:rPr lang="en-US" altLang="ko-KR" sz="700" dirty="0">
+                <a:solidFill>
+                  <a:schemeClr val="bg1"/>
+                </a:solidFill>
+                <a:latin typeface="나눔고딕" panose="020D0604000000000000" pitchFamily="50" charset="-127"/>
+                <a:ea typeface="나눔고딕" panose="020D0604000000000000" pitchFamily="50" charset="-127"/>
+              </a:rPr>
+              <a:t>. </a:t>
+            </a:r>
+          </a:p>
+          <a:p>
+            <a:pPr>
+              <a:lnSpc>
+                <a:spcPct val="150000"/>
+              </a:lnSpc>
+            </a:pPr>
+            <a:r>
+              <a:rPr lang="ko-KR" altLang="en-US" sz="700" dirty="0">
+                <a:solidFill>
+                  <a:schemeClr val="bg1"/>
+                </a:solidFill>
+                <a:latin typeface="나눔고딕" panose="020D0604000000000000" pitchFamily="50" charset="-127"/>
+                <a:ea typeface="나눔고딕" panose="020D0604000000000000" pitchFamily="50" charset="-127"/>
+              </a:rPr>
+              <a:t>설명을 상세히 작성하되</a:t>
+            </a:r>
+            <a:r>
+              <a:rPr lang="en-US" altLang="ko-KR" sz="700" dirty="0">
+                <a:solidFill>
+                  <a:schemeClr val="bg1"/>
+                </a:solidFill>
+                <a:latin typeface="나눔고딕" panose="020D0604000000000000" pitchFamily="50" charset="-127"/>
+                <a:ea typeface="나눔고딕" panose="020D0604000000000000" pitchFamily="50" charset="-127"/>
+              </a:rPr>
+              <a:t>, </a:t>
+            </a:r>
+            <a:r>
+              <a:rPr lang="ko-KR" altLang="en-US" sz="700" dirty="0">
+                <a:solidFill>
+                  <a:schemeClr val="bg1"/>
+                </a:solidFill>
+                <a:latin typeface="나눔고딕" panose="020D0604000000000000" pitchFamily="50" charset="-127"/>
+                <a:ea typeface="나눔고딕" panose="020D0604000000000000" pitchFamily="50" charset="-127"/>
+              </a:rPr>
+              <a:t>디자인 보다는 구성요소와 기능에 집중하여 작성합니다</a:t>
+            </a:r>
+            <a:r>
+              <a:rPr lang="en-US" altLang="ko-KR" sz="700" dirty="0">
+                <a:solidFill>
+                  <a:schemeClr val="bg1"/>
+                </a:solidFill>
+                <a:latin typeface="나눔고딕" panose="020D0604000000000000" pitchFamily="50" charset="-127"/>
+                <a:ea typeface="나눔고딕" panose="020D0604000000000000" pitchFamily="50" charset="-127"/>
+              </a:rPr>
+              <a:t>. Description</a:t>
+            </a:r>
+            <a:r>
+              <a:rPr lang="ko-KR" altLang="en-US" sz="700" dirty="0">
+                <a:solidFill>
+                  <a:schemeClr val="bg1"/>
+                </a:solidFill>
+                <a:latin typeface="나눔고딕" panose="020D0604000000000000" pitchFamily="50" charset="-127"/>
+                <a:ea typeface="나눔고딕" panose="020D0604000000000000" pitchFamily="50" charset="-127"/>
+              </a:rPr>
+              <a:t>영역은 개발</a:t>
+            </a:r>
+            <a:r>
+              <a:rPr lang="en-US" altLang="ko-KR" sz="700" dirty="0">
+                <a:solidFill>
+                  <a:schemeClr val="bg1"/>
+                </a:solidFill>
+                <a:latin typeface="나눔고딕" panose="020D0604000000000000" pitchFamily="50" charset="-127"/>
+                <a:ea typeface="나눔고딕" panose="020D0604000000000000" pitchFamily="50" charset="-127"/>
+              </a:rPr>
+              <a:t>, </a:t>
+            </a:r>
+            <a:r>
+              <a:rPr lang="ko-KR" altLang="en-US" sz="700" dirty="0">
+                <a:solidFill>
+                  <a:schemeClr val="bg1"/>
+                </a:solidFill>
+                <a:latin typeface="나눔고딕" panose="020D0604000000000000" pitchFamily="50" charset="-127"/>
+                <a:ea typeface="나눔고딕" panose="020D0604000000000000" pitchFamily="50" charset="-127"/>
+              </a:rPr>
+              <a:t>디자인을 구분 할 수 있고</a:t>
+            </a:r>
+            <a:r>
+              <a:rPr lang="en-US" altLang="ko-KR" sz="700" dirty="0">
+                <a:solidFill>
+                  <a:schemeClr val="bg1"/>
+                </a:solidFill>
+                <a:latin typeface="나눔고딕" panose="020D0604000000000000" pitchFamily="50" charset="-127"/>
+                <a:ea typeface="나눔고딕" panose="020D0604000000000000" pitchFamily="50" charset="-127"/>
+              </a:rPr>
+              <a:t>, </a:t>
+            </a:r>
+            <a:r>
+              <a:rPr lang="ko-KR" altLang="en-US" sz="700" dirty="0">
+                <a:solidFill>
+                  <a:schemeClr val="bg1"/>
+                </a:solidFill>
+                <a:latin typeface="나눔고딕" panose="020D0604000000000000" pitchFamily="50" charset="-127"/>
+                <a:ea typeface="나눔고딕" panose="020D0604000000000000" pitchFamily="50" charset="-127"/>
+              </a:rPr>
+              <a:t>구분 없이 하나로 작성하기도 합니다</a:t>
+            </a:r>
+            <a:r>
+              <a:rPr lang="en-US" altLang="ko-KR" sz="700" dirty="0">
+                <a:solidFill>
+                  <a:schemeClr val="bg1"/>
+                </a:solidFill>
+                <a:latin typeface="나눔고딕" panose="020D0604000000000000" pitchFamily="50" charset="-127"/>
+                <a:ea typeface="나눔고딕" panose="020D0604000000000000" pitchFamily="50" charset="-127"/>
+              </a:rPr>
+              <a:t>.</a:t>
+            </a:r>
+          </a:p>
+          <a:p>
+            <a:pPr>
+              <a:lnSpc>
+                <a:spcPct val="150000"/>
+              </a:lnSpc>
+            </a:pPr>
+            <a:r>
+              <a:rPr lang="ko-KR" altLang="en-US" sz="700" b="1" dirty="0">
+                <a:solidFill>
+                  <a:schemeClr val="bg1"/>
+                </a:solidFill>
+                <a:latin typeface="나눔고딕" panose="020D0604000000000000" pitchFamily="50" charset="-127"/>
+                <a:ea typeface="나눔고딕" panose="020D0604000000000000" pitchFamily="50" charset="-127"/>
+              </a:rPr>
+              <a:t>예시는 스토리보드와 스토리보드를 토대로 실제 디자인 개발된 </a:t>
+            </a:r>
+            <a:r>
+              <a:rPr lang="ko-KR" altLang="en-US" sz="700" b="1" dirty="0" err="1">
+                <a:solidFill>
+                  <a:schemeClr val="bg1"/>
+                </a:solidFill>
+                <a:latin typeface="나눔고딕" panose="020D0604000000000000" pitchFamily="50" charset="-127"/>
+                <a:ea typeface="나눔고딕" panose="020D0604000000000000" pitchFamily="50" charset="-127"/>
+              </a:rPr>
+              <a:t>프리모아</a:t>
+            </a:r>
+            <a:r>
+              <a:rPr lang="ko-KR" altLang="en-US" sz="700" b="1" dirty="0">
+                <a:solidFill>
+                  <a:schemeClr val="bg1"/>
+                </a:solidFill>
+                <a:latin typeface="나눔고딕" panose="020D0604000000000000" pitchFamily="50" charset="-127"/>
+                <a:ea typeface="나눔고딕" panose="020D0604000000000000" pitchFamily="50" charset="-127"/>
+              </a:rPr>
+              <a:t> 모바일 웹 페이지입니다</a:t>
+            </a:r>
+            <a:r>
+              <a:rPr lang="en-US" altLang="ko-KR" sz="700" b="1" dirty="0">
+                <a:solidFill>
+                  <a:schemeClr val="bg1"/>
+                </a:solidFill>
+                <a:latin typeface="나눔고딕" panose="020D0604000000000000" pitchFamily="50" charset="-127"/>
+                <a:ea typeface="나눔고딕" panose="020D0604000000000000" pitchFamily="50" charset="-127"/>
+              </a:rPr>
+              <a:t>.</a:t>
+            </a:r>
+            <a:r>
+              <a:rPr lang="ko-KR" altLang="en-US" sz="700" b="1" dirty="0">
+                <a:solidFill>
+                  <a:schemeClr val="bg1"/>
+                </a:solidFill>
+                <a:latin typeface="나눔고딕" panose="020D0604000000000000" pitchFamily="50" charset="-127"/>
+                <a:ea typeface="나눔고딕" panose="020D0604000000000000" pitchFamily="50" charset="-127"/>
+              </a:rPr>
+              <a:t> </a:t>
+            </a:r>
+            <a:endParaRPr lang="en-US" altLang="ko-KR" sz="700" b="1" dirty="0">
+              <a:solidFill>
+                <a:schemeClr val="bg1"/>
+              </a:solidFill>
+              <a:latin typeface="나눔고딕" panose="020D0604000000000000" pitchFamily="50" charset="-127"/>
+              <a:ea typeface="나눔고딕" panose="020D0604000000000000" pitchFamily="50" charset="-127"/>
+            </a:endParaRPr>
+          </a:p>
+        </p:txBody>
+      </p:sp>
+    </p:spTree>
+    <p:extLst>
+      <p:ext uri="{BB962C8B-B14F-4D97-AF65-F5344CB8AC3E}">
+        <p14:creationId xmlns:p14="http://schemas.microsoft.com/office/powerpoint/2010/main" val="3982589045"/>
+      </p:ext>
+    </p:extLst>
+  </p:cSld>
+  <p:clrMapOvr>
+    <a:masterClrMapping/>
+  </p:clrMapOvr>
+</p:sld>
+</file>
+
+<file path=ppt/slides/slide7.xml><?xml version="1.0" encoding="utf-8"?>
+<p:sld xmlns:a="http://schemas.openxmlformats.org/drawingml/2006/main" xmlns:r="http://schemas.openxmlformats.org/officeDocument/2006/relationships" xmlns:p="http://schemas.openxmlformats.org/presentationml/2006/main">
+  <p:cSld>
+    <p:spTree>
+      <p:nvGrpSpPr>
+        <p:cNvPr id="1" name=""/>
+        <p:cNvGrpSpPr/>
+        <p:nvPr/>
+      </p:nvGrpSpPr>
+      <p:grpSpPr>
+        <a:xfrm>
+          <a:off x="0" y="0"/>
+          <a:ext cx="0" cy="0"/>
+          <a:chOff x="0" y="0"/>
+          <a:chExt cx="0" cy="0"/>
+        </a:xfrm>
+      </p:grpSpPr>
+      <p:graphicFrame>
+        <p:nvGraphicFramePr>
           <p:cNvPr id="27" name="표 26"/>
           <p:cNvGraphicFramePr>
             <a:graphicFrameLocks noGrp="1"/>
